--- a/decks/02_2限_法令.pptx
+++ b/decks/02_2限_法令.pptx
@@ -12,9 +12,11 @@
     <p:sldId id="260" r:id="rId6"/>
     <p:sldId id="261" r:id="rId7"/>
     <p:sldId id="262" r:id="rId8"/>
+    <p:sldId id="263" r:id="rId9"/>
+    <p:sldId id="264" r:id="rId10"/>
   </p:sldIdLst>
   <p:notesMasterIdLst>
-    <p:notesMasterId r:id="rId9"/>
+    <p:notesMasterId r:id="rId11"/>
   </p:notesMasterIdLst>
   <p:sldSz cx="12192000" cy="6858000"/>
   <p:notesSz cx="6858000" cy="12192000"/>
@@ -1060,6 +1062,182 @@
             <a:fld id="{F7021451-1387-4CA6-816F-3879F97B5CBC}" type="slidenum">
               <a:rPr lang="en-US"/>
               <a:t>7</a:t>
+            </a:fld>
+            <a:endParaRPr lang="en-US"/>
+          </a:p>
+        </p:txBody>
+      </p:sp>
+    </p:spTree>
+    <p:extLst>
+      <p:ext uri="{BB962C8B-B14F-4D97-AF65-F5344CB8AC3E}">
+        <p14:creationId xmlns:p14="http://schemas.microsoft.com/office/powerpoint/2010/main" val="1024086991"/>
+      </p:ext>
+    </p:extLst>
+  </p:cSld>
+  <p:clrMapOvr>
+    <a:masterClrMapping/>
+  </p:clrMapOvr>
+</p:notes>
+</file>
+
+<file path=ppt/notesSlides/notesSlide8.xml><?xml version="1.0" encoding="utf-8"?>
+<p:notes xmlns:a="http://schemas.openxmlformats.org/drawingml/2006/main" xmlns:r="http://schemas.openxmlformats.org/officeDocument/2006/relationships" xmlns:p="http://schemas.openxmlformats.org/presentationml/2006/main">
+  <p:cSld>
+    <p:spTree>
+      <p:nvGrpSpPr>
+        <p:cNvPr id="1" name=""/>
+        <p:cNvGrpSpPr/>
+        <p:nvPr/>
+      </p:nvGrpSpPr>
+      <p:grpSpPr>
+        <a:xfrm>
+          <a:off x="0" y="0"/>
+          <a:ext cx="0" cy="0"/>
+          <a:chOff x="0" y="0"/>
+          <a:chExt cx="0" cy="0"/>
+        </a:xfrm>
+      </p:grpSpPr>
+      <p:sp>
+        <p:nvSpPr>
+          <p:cNvPr id="2" name="Slide Image Placeholder 1"/>
+          <p:cNvSpPr>
+            <a:spLocks noGrp="1" noRot="1" noChangeAspect="1"/>
+          </p:cNvSpPr>
+          <p:nvPr>
+            <p:ph type="sldImg"/>
+          </p:nvPr>
+        </p:nvSpPr>
+        <p:spPr/>
+      </p:sp>
+      <p:sp>
+        <p:nvSpPr>
+          <p:cNvPr id="3" name="Notes Placeholder 2"/>
+          <p:cNvSpPr>
+            <a:spLocks noGrp="1"/>
+          </p:cNvSpPr>
+          <p:nvPr>
+            <p:ph type="body" idx="1"/>
+          </p:nvPr>
+        </p:nvSpPr>
+        <p:spPr/>
+        <p:txBody>
+          <a:bodyPr/>
+          <a:lstStyle/>
+          <a:p>
+            <a:r>
+              <a:rPr lang="en-US" dirty="0"/>
+              <a:t/>
+            </a:r>
+            <a:endParaRPr lang="en-US" dirty="0"/>
+          </a:p>
+        </p:txBody>
+      </p:sp>
+      <p:sp>
+        <p:nvSpPr>
+          <p:cNvPr id="4" name="Slide Number Placeholder 3"/>
+          <p:cNvSpPr>
+            <a:spLocks noGrp="1"/>
+          </p:cNvSpPr>
+          <p:nvPr>
+            <p:ph type="sldNum" sz="quarter" idx="10"/>
+          </p:nvPr>
+        </p:nvSpPr>
+        <p:spPr/>
+        <p:txBody>
+          <a:bodyPr/>
+          <a:lstStyle/>
+          <a:p>
+            <a:fld id="{F7021451-1387-4CA6-816F-3879F97B5CBC}" type="slidenum">
+              <a:rPr lang="en-US"/>
+              <a:t>8</a:t>
+            </a:fld>
+            <a:endParaRPr lang="en-US"/>
+          </a:p>
+        </p:txBody>
+      </p:sp>
+    </p:spTree>
+    <p:extLst>
+      <p:ext uri="{BB962C8B-B14F-4D97-AF65-F5344CB8AC3E}">
+        <p14:creationId xmlns:p14="http://schemas.microsoft.com/office/powerpoint/2010/main" val="1024086991"/>
+      </p:ext>
+    </p:extLst>
+  </p:cSld>
+  <p:clrMapOvr>
+    <a:masterClrMapping/>
+  </p:clrMapOvr>
+</p:notes>
+</file>
+
+<file path=ppt/notesSlides/notesSlide9.xml><?xml version="1.0" encoding="utf-8"?>
+<p:notes xmlns:a="http://schemas.openxmlformats.org/drawingml/2006/main" xmlns:r="http://schemas.openxmlformats.org/officeDocument/2006/relationships" xmlns:p="http://schemas.openxmlformats.org/presentationml/2006/main">
+  <p:cSld>
+    <p:spTree>
+      <p:nvGrpSpPr>
+        <p:cNvPr id="1" name=""/>
+        <p:cNvGrpSpPr/>
+        <p:nvPr/>
+      </p:nvGrpSpPr>
+      <p:grpSpPr>
+        <a:xfrm>
+          <a:off x="0" y="0"/>
+          <a:ext cx="0" cy="0"/>
+          <a:chOff x="0" y="0"/>
+          <a:chExt cx="0" cy="0"/>
+        </a:xfrm>
+      </p:grpSpPr>
+      <p:sp>
+        <p:nvSpPr>
+          <p:cNvPr id="2" name="Slide Image Placeholder 1"/>
+          <p:cNvSpPr>
+            <a:spLocks noGrp="1" noRot="1" noChangeAspect="1"/>
+          </p:cNvSpPr>
+          <p:nvPr>
+            <p:ph type="sldImg"/>
+          </p:nvPr>
+        </p:nvSpPr>
+        <p:spPr/>
+      </p:sp>
+      <p:sp>
+        <p:nvSpPr>
+          <p:cNvPr id="3" name="Notes Placeholder 2"/>
+          <p:cNvSpPr>
+            <a:spLocks noGrp="1"/>
+          </p:cNvSpPr>
+          <p:nvPr>
+            <p:ph type="body" idx="1"/>
+          </p:nvPr>
+        </p:nvSpPr>
+        <p:spPr/>
+        <p:txBody>
+          <a:bodyPr/>
+          <a:lstStyle/>
+          <a:p>
+            <a:r>
+              <a:rPr lang="en-US" dirty="0"/>
+              <a:t/>
+            </a:r>
+            <a:endParaRPr lang="en-US" dirty="0"/>
+          </a:p>
+        </p:txBody>
+      </p:sp>
+      <p:sp>
+        <p:nvSpPr>
+          <p:cNvPr id="4" name="Slide Number Placeholder 3"/>
+          <p:cNvSpPr>
+            <a:spLocks noGrp="1"/>
+          </p:cNvSpPr>
+          <p:nvPr>
+            <p:ph type="sldNum" sz="quarter" idx="10"/>
+          </p:nvPr>
+        </p:nvSpPr>
+        <p:spPr/>
+        <p:txBody>
+          <a:bodyPr/>
+          <a:lstStyle/>
+          <a:p>
+            <a:fld id="{F7021451-1387-4CA6-816F-3879F97B5CBC}" type="slidenum">
+              <a:rPr lang="en-US"/>
+              <a:t>9</a:t>
             </a:fld>
             <a:endParaRPr lang="en-US"/>
           </a:p>
@@ -3606,7 +3784,7 @@
                 <a:ea typeface="Calibri" pitchFamily="34" charset="-122"/>
                 <a:cs typeface="Calibri" pitchFamily="34" charset="-120"/>
               </a:rPr>
-              <a:t>　CCP Art. 213. Any person may arrest a flagrant offender without a warrant</a:t>
+              <a:t>  CCP Art. 213. Any person may arrest a flagrant offender without a warrant</a:t>
             </a:r>
             <a:endParaRPr lang="en-US" sz="950" dirty="0"/>
           </a:p>
@@ -3652,7 +3830,7 @@
                 <a:ea typeface="Calibri" pitchFamily="34" charset="-122"/>
                 <a:cs typeface="Calibri" pitchFamily="34" charset="-120"/>
               </a:rPr>
-              <a:t>　The offence must be obvious. Suspicion is not enough</a:t>
+              <a:t>  The offence must be obvious. Suspicion is not enough</a:t>
             </a:r>
             <a:endParaRPr lang="en-US" sz="950" dirty="0"/>
           </a:p>
@@ -3698,7 +3876,7 @@
                 <a:ea typeface="Calibri" pitchFamily="34" charset="-122"/>
                 <a:cs typeface="Calibri" pitchFamily="34" charset="-120"/>
               </a:rPr>
-              <a:t>　The offender must be obvious. You carry the risk of misidentification</a:t>
+              <a:t>  The offender must be obvious. You carry the risk of misidentification</a:t>
             </a:r>
             <a:endParaRPr lang="en-US" sz="950" dirty="0"/>
           </a:p>
@@ -3744,7 +3922,7 @@
                 <a:ea typeface="Calibri" pitchFamily="34" charset="-122"/>
                 <a:cs typeface="Calibri" pitchFamily="34" charset="-120"/>
               </a:rPr>
-              <a:t>　It must be immediate. Once time has passed it no longer applies</a:t>
+              <a:t>  It must be immediate. Once time has passed it no longer applies</a:t>
             </a:r>
             <a:endParaRPr lang="en-US" sz="950" dirty="0"/>
           </a:p>
@@ -3955,7 +4133,7 @@
                 <a:ea typeface="Calibri" pitchFamily="34" charset="-122"/>
                 <a:cs typeface="Calibri" pitchFamily="34" charset="-120"/>
               </a:rPr>
-              <a:t>　CCP Art. 212(2). A person clearly recognised as being just after the act</a:t>
+              <a:t>  CCP Art. 212(2). A person clearly recognised as being just after the act</a:t>
             </a:r>
             <a:endParaRPr lang="en-US" sz="950" dirty="0"/>
           </a:p>
@@ -4001,7 +4179,7 @@
                 <a:ea typeface="Calibri" pitchFamily="34" charset="-122"/>
                 <a:cs typeface="Calibri" pitchFamily="34" charset="-120"/>
               </a:rPr>
-              <a:t>　Tests include possession of stolen goods or a weapon, or traces on body or clothing</a:t>
+              <a:t>  Tests include possession of stolen goods or a weapon, or traces on body or clothing</a:t>
             </a:r>
             <a:endParaRPr lang="en-US" sz="950" dirty="0"/>
           </a:p>
@@ -4047,7 +4225,7 @@
                 <a:ea typeface="Calibri" pitchFamily="34" charset="-122"/>
                 <a:cs typeface="Calibri" pitchFamily="34" charset="-120"/>
               </a:rPr>
-              <a:t>　Chasing "the person who left earlier" does not qualify</a:t>
+              <a:t>  Chasing "the person who left earlier" does not qualify</a:t>
             </a:r>
             <a:endParaRPr lang="en-US" sz="950" dirty="0"/>
           </a:p>
@@ -4093,7 +4271,7 @@
                 <a:ea typeface="Calibri" pitchFamily="34" charset="-122"/>
                 <a:cs typeface="Calibri" pitchFamily="34" charset="-120"/>
               </a:rPr>
-              <a:t>　If you are unsure, do not arrest. Do not pursue either</a:t>
+              <a:t>  If you are unsure, do not arrest. Do not pursue either</a:t>
             </a:r>
             <a:endParaRPr lang="en-US" sz="950" dirty="0"/>
           </a:p>
@@ -4304,7 +4482,7 @@
                 <a:ea typeface="Calibri" pitchFamily="34" charset="-122"/>
                 <a:cs typeface="Calibri" pitchFamily="34" charset="-120"/>
               </a:rPr>
-              <a:t>　CCP Art. 214. Hand the person to a prosecutor or judicial police official without delay</a:t>
+              <a:t>  CCP Art. 214. Hand the person to a prosecutor or judicial police official without delay</a:t>
             </a:r>
             <a:endParaRPr lang="en-US" sz="950" dirty="0"/>
           </a:p>
@@ -4350,7 +4528,7 @@
                 <a:ea typeface="Calibri" pitchFamily="34" charset="-122"/>
                 <a:cs typeface="Calibri" pitchFamily="34" charset="-120"/>
               </a:rPr>
-              <a:t>　Secure the safety of both parties. Keep third parties away</a:t>
+              <a:t>  Secure the safety of both parties. Keep third parties away</a:t>
             </a:r>
             <a:endParaRPr lang="en-US" sz="950" dirty="0"/>
           </a:p>
@@ -4396,7 +4574,7 @@
                 <a:ea typeface="Calibri" pitchFamily="34" charset="-122"/>
                 <a:cs typeface="Calibri" pitchFamily="34" charset="-120"/>
               </a:rPr>
-              <a:t>　Record the sequence: time, place, actions, and what was said</a:t>
+              <a:t>  Record the sequence: time, place, actions, and what was said</a:t>
             </a:r>
             <a:endParaRPr lang="en-US" sz="950" dirty="0"/>
           </a:p>
@@ -4442,7 +4620,7 @@
                 <a:ea typeface="Calibri" pitchFamily="34" charset="-122"/>
                 <a:cs typeface="Calibri" pitchFamily="34" charset="-120"/>
               </a:rPr>
-              <a:t>　Report to your supervisor immediately. You do not need a conclusion first</a:t>
+              <a:t>  Report to your supervisor immediately. You do not need a conclusion first</a:t>
             </a:r>
             <a:endParaRPr lang="en-US" sz="950" dirty="0"/>
           </a:p>
@@ -4653,7 +4831,7 @@
                 <a:ea typeface="Calibri" pitchFamily="34" charset="-122"/>
                 <a:cs typeface="Calibri" pitchFamily="34" charset="-120"/>
               </a:rPr>
-              <a:t>　Holding the person to question them. You have no power to interrogate</a:t>
+              <a:t>  Holding the person to question them. You have no power to interrogate</a:t>
             </a:r>
             <a:endParaRPr lang="en-US" sz="950" dirty="0"/>
           </a:p>
@@ -4699,7 +4877,7 @@
                 <a:ea typeface="Calibri" pitchFamily="34" charset="-122"/>
                 <a:cs typeface="Calibri" pitchFamily="34" charset="-120"/>
               </a:rPr>
-              <a:t>　Asking them to sign a statement. This can amount to coercion</a:t>
+              <a:t>  Asking them to sign a statement. This can amount to coercion</a:t>
             </a:r>
             <a:endParaRPr lang="en-US" sz="950" dirty="0"/>
           </a:p>
@@ -4745,7 +4923,7 @@
                 <a:ea typeface="Calibri" pitchFamily="34" charset="-122"/>
                 <a:cs typeface="Calibri" pitchFamily="34" charset="-120"/>
               </a:rPr>
-              <a:t>　Examining their belongings without consent</a:t>
+              <a:t>  Examining their belongings without consent</a:t>
             </a:r>
             <a:endParaRPr lang="en-US" sz="950" dirty="0"/>
           </a:p>
@@ -4791,7 +4969,7 @@
                 <a:ea typeface="Calibri" pitchFamily="34" charset="-122"/>
                 <a:cs typeface="Calibri" pitchFamily="34" charset="-120"/>
               </a:rPr>
-              <a:t>　Photographing them, or posting anything</a:t>
+              <a:t>  Photographing them, or posting anything</a:t>
             </a:r>
             <a:endParaRPr lang="en-US" sz="950" dirty="0"/>
           </a:p>
@@ -5523,7 +5701,7 @@
                 <a:ea typeface="Calibri" pitchFamily="34" charset="-122"/>
                 <a:cs typeface="Calibri" pitchFamily="34" charset="-120"/>
               </a:rPr>
-              <a:t>　An unavoidable act against an imminent and unlawful attack</a:t>
+              <a:t>  An unavoidable act against an imminent and unlawful attack</a:t>
             </a:r>
             <a:endParaRPr lang="en-US" sz="950" dirty="0"/>
           </a:p>
@@ -5569,7 +5747,7 @@
                 <a:ea typeface="Calibri" pitchFamily="34" charset="-122"/>
                 <a:cs typeface="Calibri" pitchFamily="34" charset="-120"/>
               </a:rPr>
-              <a:t>　The right ends with the attack. Do not keep holding someone already down</a:t>
+              <a:t>  The right ends with the attack. Do not keep holding someone already down</a:t>
             </a:r>
             <a:endParaRPr lang="en-US" sz="950" dirty="0"/>
           </a:p>
@@ -5615,7 +5793,7 @@
                 <a:ea typeface="Calibri" pitchFamily="34" charset="-122"/>
                 <a:cs typeface="Calibri" pitchFamily="34" charset="-120"/>
               </a:rPr>
-              <a:t>　Withdrawing when you can is the correct choice</a:t>
+              <a:t>  Withdrawing when you can is the correct choice</a:t>
             </a:r>
             <a:endParaRPr lang="en-US" sz="950" dirty="0"/>
           </a:p>
@@ -5661,7 +5839,7 @@
                 <a:ea typeface="Calibri" pitchFamily="34" charset="-122"/>
                 <a:cs typeface="Calibri" pitchFamily="34" charset="-120"/>
               </a:rPr>
-              <a:t>　Beyond that it is excessive defence</a:t>
+              <a:t>  Beyond that it is excessive defence</a:t>
             </a:r>
             <a:endParaRPr lang="en-US" sz="950" dirty="0"/>
           </a:p>
@@ -5872,7 +6050,7 @@
                 <a:ea typeface="Calibri" pitchFamily="34" charset="-122"/>
                 <a:cs typeface="Calibri" pitchFamily="34" charset="-120"/>
               </a:rPr>
-              <a:t>　An unavoidable act to escape a present danger</a:t>
+              <a:t>  An unavoidable act to escape a present danger</a:t>
             </a:r>
             <a:endParaRPr lang="en-US" sz="950" dirty="0"/>
           </a:p>
@@ -5918,7 +6096,7 @@
                 <a:ea typeface="Calibri" pitchFamily="34" charset="-122"/>
                 <a:cs typeface="Calibri" pitchFamily="34" charset="-120"/>
               </a:rPr>
-              <a:t>　The harm caused must not exceed the harm avoided</a:t>
+              <a:t>  The harm caused must not exceed the harm avoided</a:t>
             </a:r>
             <a:endParaRPr lang="en-US" sz="950" dirty="0"/>
           </a:p>
@@ -5964,7 +6142,7 @@
                 <a:ea typeface="Calibri" pitchFamily="34" charset="-122"/>
                 <a:cs typeface="Calibri" pitchFamily="34" charset="-120"/>
               </a:rPr>
-              <a:t>　If you break property to escape, weigh the balance first</a:t>
+              <a:t>  If you break property to escape, weigh the balance first</a:t>
             </a:r>
             <a:endParaRPr lang="en-US" sz="950" dirty="0"/>
           </a:p>
@@ -6010,7 +6188,7 @@
                 <a:ea typeface="Calibri" pitchFamily="34" charset="-122"/>
                 <a:cs typeface="Calibri" pitchFamily="34" charset="-120"/>
               </a:rPr>
-              <a:t>　Beyond that it is excessive necessity</a:t>
+              <a:t>  Beyond that it is excessive necessity</a:t>
             </a:r>
             <a:endParaRPr lang="en-US" sz="950" dirty="0"/>
           </a:p>
@@ -6221,7 +6399,7 @@
                 <a:ea typeface="Calibri" pitchFamily="34" charset="-122"/>
                 <a:cs typeface="Calibri" pitchFamily="34" charset="-120"/>
               </a:rPr>
-              <a:t>　There is no statutory basis, and it is not permitted as a rule</a:t>
+              <a:t>  There is no statutory basis, and it is not permitted as a rule</a:t>
             </a:r>
             <a:endParaRPr lang="en-US" sz="950" dirty="0"/>
           </a:p>
@@ -6267,7 +6445,7 @@
                 <a:ea typeface="Calibri" pitchFamily="34" charset="-122"/>
                 <a:cs typeface="Calibri" pitchFamily="34" charset="-120"/>
               </a:rPr>
-              <a:t>　Do not recover stolen property by force</a:t>
+              <a:t>  Do not recover stolen property by force</a:t>
             </a:r>
             <a:endParaRPr lang="en-US" sz="950" dirty="0"/>
           </a:p>
@@ -6313,7 +6491,7 @@
                 <a:ea typeface="Calibri" pitchFamily="34" charset="-122"/>
                 <a:cs typeface="Calibri" pitchFamily="34" charset="-120"/>
               </a:rPr>
-              <a:t>　Do not take someone's possessions to inspect them</a:t>
+              <a:t>  Do not take someone's possessions to inspect them</a:t>
             </a:r>
             <a:endParaRPr lang="en-US" sz="950" dirty="0"/>
           </a:p>
@@ -6359,7 +6537,7 @@
                 <a:ea typeface="Calibri" pitchFamily="34" charset="-122"/>
                 <a:cs typeface="Calibri" pitchFamily="34" charset="-120"/>
               </a:rPr>
-              <a:t>　Do not recover it. Record it and hand the matter to the police</a:t>
+              <a:t>  Do not recover it. Record it and hand the matter to the police</a:t>
             </a:r>
             <a:endParaRPr lang="en-US" sz="950" dirty="0"/>
           </a:p>
@@ -6570,7 +6748,7 @@
                 <a:ea typeface="Calibri" pitchFamily="34" charset="-122"/>
                 <a:cs typeface="Calibri" pitchFamily="34" charset="-120"/>
               </a:rPr>
-              <a:t>　Speaking to someone. Not force</a:t>
+              <a:t>  Speaking to someone. Not force</a:t>
             </a:r>
             <a:endParaRPr lang="en-US" sz="950" dirty="0"/>
           </a:p>
@@ -6616,7 +6794,7 @@
                 <a:ea typeface="Calibri" pitchFamily="34" charset="-122"/>
                 <a:cs typeface="Calibri" pitchFamily="34" charset="-120"/>
               </a:rPr>
-              <a:t>　Positioning yourself. Still not force</a:t>
+              <a:t>  Positioning yourself. Still not force</a:t>
             </a:r>
             <a:endParaRPr lang="en-US" sz="950" dirty="0"/>
           </a:p>
@@ -6662,7 +6840,7 @@
                 <a:ea typeface="Calibri" pitchFamily="34" charset="-122"/>
                 <a:cs typeface="Calibri" pitchFamily="34" charset="-120"/>
               </a:rPr>
-              <a:t>　Blocking the path. This is the boundary. Can you justify it?</a:t>
+              <a:t>  Blocking the path. This is the boundary. Can you justify it?</a:t>
             </a:r>
             <a:endParaRPr lang="en-US" sz="950" dirty="0"/>
           </a:p>
@@ -6708,7 +6886,7 @@
                 <a:ea typeface="Calibri" pitchFamily="34" charset="-122"/>
                 <a:cs typeface="Calibri" pitchFamily="34" charset="-120"/>
               </a:rPr>
-              <a:t>　Touching or seizing. Only incidental to self-defence or a lawful arrest</a:t>
+              <a:t>  Touching or seizing. Only incidental to self-defence or a lawful arrest</a:t>
             </a:r>
             <a:endParaRPr lang="en-US" sz="950" dirty="0"/>
           </a:p>
@@ -7440,7 +7618,7 @@
                 <a:ea typeface="Calibri" pitchFamily="34" charset="-122"/>
                 <a:cs typeface="Calibri" pitchFamily="34" charset="-120"/>
               </a:rPr>
-              <a:t>　If a person can be identified, it can be personal data</a:t>
+              <a:t>  If a person can be identified, it can be personal data</a:t>
             </a:r>
             <a:endParaRPr lang="en-US" sz="950" dirty="0"/>
           </a:p>
@@ -7486,7 +7664,7 @@
                 <a:ea typeface="Calibri" pitchFamily="34" charset="-122"/>
                 <a:cs typeface="Calibri" pitchFamily="34" charset="-120"/>
               </a:rPr>
-              <a:t>　Do not view outside the purpose. Curiosity is not a reason</a:t>
+              <a:t>  Do not view outside the purpose. Curiosity is not a reason</a:t>
             </a:r>
             <a:endParaRPr lang="en-US" sz="950" dirty="0"/>
           </a:p>
@@ -7532,7 +7710,7 @@
                 <a:ea typeface="Calibri" pitchFamily="34" charset="-122"/>
                 <a:cs typeface="Calibri" pitchFamily="34" charset="-120"/>
               </a:rPr>
-              <a:t>　Do not remove, photograph, or post it</a:t>
+              <a:t>  Do not remove, photograph, or post it</a:t>
             </a:r>
             <a:endParaRPr lang="en-US" sz="950" dirty="0"/>
           </a:p>
@@ -7578,7 +7756,7 @@
                 <a:ea typeface="Calibri" pitchFamily="34" charset="-122"/>
                 <a:cs typeface="Calibri" pitchFamily="34" charset="-120"/>
               </a:rPr>
-              <a:t>　Record the fact that a viewing took place</a:t>
+              <a:t>  Record the fact that a viewing took place</a:t>
             </a:r>
             <a:endParaRPr lang="en-US" sz="950" dirty="0"/>
           </a:p>
@@ -7789,7 +7967,7 @@
                 <a:ea typeface="Calibri" pitchFamily="34" charset="-122"/>
                 <a:cs typeface="Calibri" pitchFamily="34" charset="-120"/>
               </a:rPr>
-              <a:t>　A guard is not in a position to decide on disclosure</a:t>
+              <a:t>  A guard is not in a position to decide on disclosure</a:t>
             </a:r>
             <a:endParaRPr lang="en-US" sz="950" dirty="0"/>
           </a:p>
@@ -7835,7 +8013,7 @@
                 <a:ea typeface="Calibri" pitchFamily="34" charset="-122"/>
                 <a:cs typeface="Calibri" pitchFamily="34" charset="-120"/>
               </a:rPr>
-              <a:t>　Do not show it on the spot, even to an employee</a:t>
+              <a:t>  Do not show it on the spot, even to an employee</a:t>
             </a:r>
             <a:endParaRPr lang="en-US" sz="950" dirty="0"/>
           </a:p>
@@ -7881,7 +8059,7 @@
                 <a:ea typeface="Calibri" pitchFamily="34" charset="-122"/>
                 <a:cs typeface="Calibri" pitchFamily="34" charset="-120"/>
               </a:rPr>
-              <a:t>　Even for a police officer, refer first to your supervisor and the client</a:t>
+              <a:t>  Even for a police officer, refer first to your supervisor and the client</a:t>
             </a:r>
             <a:endParaRPr lang="en-US" sz="950" dirty="0"/>
           </a:p>
@@ -7927,7 +8105,7 @@
                 <a:ea typeface="Calibri" pitchFamily="34" charset="-122"/>
                 <a:cs typeface="Calibri" pitchFamily="34" charset="-120"/>
               </a:rPr>
-              <a:t>　Asking to see identification is not rude</a:t>
+              <a:t>  Asking to see identification is not rude</a:t>
             </a:r>
             <a:endParaRPr lang="en-US" sz="950" dirty="0"/>
           </a:p>
@@ -8138,7 +8316,7 @@
                 <a:ea typeface="Calibri" pitchFamily="34" charset="-122"/>
                 <a:cs typeface="Calibri" pitchFamily="34" charset="-120"/>
               </a:rPr>
-              <a:t>　A trade secret is judged by three tests: managed as secret, useful, and not publicly known</a:t>
+              <a:t>  A trade secret is judged by three tests: managed as secret, useful, and not publicly known</a:t>
             </a:r>
             <a:endParaRPr lang="en-US" sz="950" dirty="0"/>
           </a:p>
@@ -8184,7 +8362,7 @@
                 <a:ea typeface="Calibri" pitchFamily="34" charset="-122"/>
                 <a:cs typeface="Calibri" pitchFamily="34" charset="-120"/>
               </a:rPr>
-              <a:t>　Infringement can carry criminal penalties</a:t>
+              <a:t>  Infringement can carry criminal penalties</a:t>
             </a:r>
             <a:endParaRPr lang="en-US" sz="950" dirty="0"/>
           </a:p>
@@ -8230,7 +8408,7 @@
                 <a:ea typeface="Calibri" pitchFamily="34" charset="-122"/>
                 <a:cs typeface="Calibri" pitchFamily="34" charset="-120"/>
               </a:rPr>
-              <a:t>　Documents, devices and conversations a guard encounters can fall within it</a:t>
+              <a:t>  Documents, devices and conversations a guard encounters can fall within it</a:t>
             </a:r>
             <a:endParaRPr lang="en-US" sz="950" dirty="0"/>
           </a:p>
@@ -8276,7 +8454,7 @@
                 <a:ea typeface="Calibri" pitchFamily="34" charset="-122"/>
                 <a:cs typeface="Calibri" pitchFamily="34" charset="-120"/>
               </a:rPr>
-              <a:t>　Even if you only looked, carrying it out is a problem</a:t>
+              <a:t>  Even if you only looked, carrying it out is a problem</a:t>
             </a:r>
             <a:endParaRPr lang="en-US" sz="950" dirty="0"/>
           </a:p>
@@ -8487,7 +8665,7 @@
                 <a:ea typeface="Calibri" pitchFamily="34" charset="-122"/>
                 <a:cs typeface="Calibri" pitchFamily="34" charset="-120"/>
               </a:rPr>
-              <a:t>　Internal rules cannot override the law</a:t>
+              <a:t>  Internal rules cannot override the law</a:t>
             </a:r>
             <a:endParaRPr lang="en-US" sz="950" dirty="0"/>
           </a:p>
@@ -8533,7 +8711,7 @@
                 <a:ea typeface="Calibri" pitchFamily="34" charset="-122"/>
                 <a:cs typeface="Calibri" pitchFamily="34" charset="-120"/>
               </a:rPr>
-              <a:t>　A rule cannot create new legal authority for a guard</a:t>
+              <a:t>  A rule cannot create new legal authority for a guard</a:t>
             </a:r>
             <a:endParaRPr lang="en-US" sz="950" dirty="0"/>
           </a:p>
@@ -8579,7 +8757,7 @@
                 <a:ea typeface="Calibri" pitchFamily="34" charset="-122"/>
                 <a:cs typeface="Calibri" pitchFamily="34" charset="-120"/>
               </a:rPr>
-              <a:t>　Where they conflict, the law prevails</a:t>
+              <a:t>  Where they conflict, the law prevails</a:t>
             </a:r>
             <a:endParaRPr lang="en-US" sz="950" dirty="0"/>
           </a:p>
@@ -8625,7 +8803,7 @@
                 <a:ea typeface="Calibri" pitchFamily="34" charset="-122"/>
                 <a:cs typeface="Calibri" pitchFamily="34" charset="-120"/>
               </a:rPr>
-              <a:t>　If you notice a conflict, report it rather than acting on it</a:t>
+              <a:t>  If you notice a conflict, report it rather than acting on it</a:t>
             </a:r>
             <a:endParaRPr lang="en-US" sz="950" dirty="0"/>
           </a:p>
@@ -10223,7 +10401,7 @@
                 <a:ea typeface="Yu Gothic" pitchFamily="34" charset="-122"/>
                 <a:cs typeface="Yu Gothic" pitchFamily="34" charset="-120"/>
               </a:rPr>
-              <a:t>TTX 2-B　警察官を名乗る人物が来訪者情報を求める</a:t>
+              <a:t>TTX 2-A 講評 ― 模範解答</a:t>
             </a:r>
             <a:endParaRPr lang="en-US" sz="2300" dirty="0"/>
           </a:p>
@@ -10243,7 +10421,7 @@
                 <a:ea typeface="Calibri" pitchFamily="34" charset="-122"/>
                 <a:cs typeface="Calibri" pitchFamily="34" charset="-120"/>
               </a:rPr>
-              <a:t>TTX 2-B — A Person Claiming to Be Police Asks for Visitor Records</a:t>
+              <a:t>TTX 2-A Debrief — Model Answer</a:t>
             </a:r>
             <a:endParaRPr lang="en-US" sz="2300" dirty="0"/>
           </a:p>
@@ -10304,6 +10482,1213 @@
                 <a:ea typeface="Calibri" pitchFamily="34" charset="-122"/>
                 <a:cs typeface="Calibri" pitchFamily="34" charset="-120"/>
               </a:rPr>
+              <a:t>DEBRIEF</a:t>
+            </a:r>
+            <a:endParaRPr lang="en-US" sz="1100" dirty="0"/>
+          </a:p>
+        </p:txBody>
+      </p:sp>
+      <p:sp>
+        <p:nvSpPr>
+          <p:cNvPr id="6" name="Text 3"/>
+          <p:cNvSpPr/>
+          <p:nvPr/>
+        </p:nvSpPr>
+        <p:spPr>
+          <a:xfrm>
+            <a:off x="640080" y="1188720"/>
+            <a:ext cx="10911535" cy="530352"/>
+          </a:xfrm>
+          <a:prstGeom prst="rect">
+            <a:avLst/>
+          </a:prstGeom>
+          <a:noFill/>
+          <a:ln/>
+        </p:spPr>
+        <p:txBody>
+          <a:bodyPr wrap="square" lIns="0" tIns="0" rIns="0" bIns="0" rtlCol="0" anchor="t"/>
+          <a:lstStyle/>
+          <a:p>
+            <a:pPr indent="0" marL="0">
+              <a:lnSpc>
+                <a:spcPct val="90000"/>
+              </a:lnSpc>
+              <a:buNone/>
+            </a:pPr>
+            <a:r>
+              <a:rPr lang="en-US" sz="1000" b="1" dirty="0">
+                <a:solidFill>
+                  <a:srgbClr val="0D8A76"/>
+                </a:solidFill>
+                <a:latin typeface="Yu Gothic" pitchFamily="34" charset="0"/>
+                <a:ea typeface="Yu Gothic" pitchFamily="34" charset="-122"/>
+                <a:cs typeface="Yu Gothic" pitchFamily="34" charset="-120"/>
+              </a:rPr>
+              <a:t>狙い　</a:t>
+            </a:r>
+            <a:pPr indent="0" marL="0">
+              <a:lnSpc>
+                <a:spcPct val="90000"/>
+              </a:lnSpc>
+              <a:buNone/>
+            </a:pPr>
+            <a:r>
+              <a:rPr lang="en-US" sz="1150" b="1" dirty="0">
+                <a:solidFill>
+                  <a:srgbClr val="093259"/>
+                </a:solidFill>
+                <a:latin typeface="Yu Gothic" pitchFamily="34" charset="0"/>
+                <a:ea typeface="Yu Gothic" pitchFamily="34" charset="-122"/>
+                <a:cs typeface="Yu Gothic" pitchFamily="34" charset="-120"/>
+              </a:rPr>
+              <a:t>上位者の指示でも、警備員の権限は増えない。断り方までが答え。</a:t>
+            </a:r>
+            <a:endParaRPr lang="en-US" sz="1000" dirty="0"/>
+          </a:p>
+          <a:p>
+            <a:pPr indent="0" marL="0">
+              <a:lnSpc>
+                <a:spcPct val="90000"/>
+              </a:lnSpc>
+              <a:buNone/>
+            </a:pPr>
+            <a:r>
+              <a:rPr lang="en-US" sz="850" i="1" dirty="0">
+                <a:solidFill>
+                  <a:srgbClr val="5F7183"/>
+                </a:solidFill>
+                <a:latin typeface="Calibri" pitchFamily="34" charset="0"/>
+                <a:ea typeface="Calibri" pitchFamily="34" charset="-122"/>
+                <a:cs typeface="Calibri" pitchFamily="34" charset="-120"/>
+              </a:rPr>
+              <a:t>An order from above does not expand your powers. How you decline is part of the answer.</a:t>
+            </a:r>
+            <a:endParaRPr lang="en-US" sz="1000" dirty="0"/>
+          </a:p>
+        </p:txBody>
+      </p:sp>
+      <p:sp>
+        <p:nvSpPr>
+          <p:cNvPr id="7" name="Shape 4"/>
+          <p:cNvSpPr/>
+          <p:nvPr/>
+        </p:nvSpPr>
+        <p:spPr>
+          <a:xfrm>
+            <a:off x="640080" y="1773936"/>
+            <a:ext cx="5327752" cy="1091184"/>
+          </a:xfrm>
+          <a:prstGeom prst="roundRect">
+            <a:avLst>
+              <a:gd name="adj" fmla="val 3352"/>
+            </a:avLst>
+          </a:prstGeom>
+          <a:solidFill>
+            <a:srgbClr val="EFF4F8"/>
+          </a:solidFill>
+          <a:ln/>
+        </p:spPr>
+      </p:sp>
+      <p:sp>
+        <p:nvSpPr>
+          <p:cNvPr id="8" name="Text 5"/>
+          <p:cNvSpPr/>
+          <p:nvPr/>
+        </p:nvSpPr>
+        <p:spPr>
+          <a:xfrm>
+            <a:off x="877824" y="1865376"/>
+            <a:ext cx="4852264" cy="908304"/>
+          </a:xfrm>
+          <a:prstGeom prst="rect">
+            <a:avLst/>
+          </a:prstGeom>
+          <a:noFill/>
+          <a:ln/>
+        </p:spPr>
+        <p:txBody>
+          <a:bodyPr wrap="square" lIns="0" tIns="0" rIns="0" bIns="0" rtlCol="0" anchor="t"/>
+          <a:lstStyle/>
+          <a:p>
+            <a:pPr indent="0" marL="0">
+              <a:lnSpc>
+                <a:spcPct val="90000"/>
+              </a:lnSpc>
+              <a:buNone/>
+            </a:pPr>
+            <a:r>
+              <a:rPr lang="en-US" sz="1050" b="1" dirty="0">
+                <a:solidFill>
+                  <a:srgbClr val="093259"/>
+                </a:solidFill>
+                <a:latin typeface="Yu Gothic" pitchFamily="34" charset="0"/>
+                <a:ea typeface="Yu Gothic" pitchFamily="34" charset="-122"/>
+                <a:cs typeface="Yu Gothic" pitchFamily="34" charset="-120"/>
+              </a:rPr>
+              <a:t>犯罪か</a:t>
+            </a:r>
+            <a:endParaRPr lang="en-US" sz="1050" dirty="0"/>
+          </a:p>
+          <a:p>
+            <a:pPr indent="0" marL="0">
+              <a:lnSpc>
+                <a:spcPct val="90000"/>
+              </a:lnSpc>
+              <a:buNone/>
+            </a:pPr>
+            <a:r>
+              <a:rPr lang="en-US" sz="1050" b="1" dirty="0">
+                <a:solidFill>
+                  <a:srgbClr val="1B2733"/>
+                </a:solidFill>
+                <a:latin typeface="Yu Gothic" pitchFamily="34" charset="0"/>
+                <a:ea typeface="Yu Gothic" pitchFamily="34" charset="-122"/>
+                <a:cs typeface="Yu Gothic" pitchFamily="34" charset="-120"/>
+              </a:rPr>
+              <a:t>社員が会社備品を持つこと自体は犯罪ではない。明白性は満たしにくい。</a:t>
+            </a:r>
+            <a:endParaRPr lang="en-US" sz="1050" dirty="0"/>
+          </a:p>
+          <a:p>
+            <a:pPr indent="0" marL="0">
+              <a:lnSpc>
+                <a:spcPct val="90000"/>
+              </a:lnSpc>
+              <a:buNone/>
+            </a:pPr>
+            <a:r>
+              <a:rPr lang="en-US" sz="800" i="1" dirty="0">
+                <a:solidFill>
+                  <a:srgbClr val="5F7183"/>
+                </a:solidFill>
+                <a:latin typeface="Calibri" pitchFamily="34" charset="0"/>
+                <a:ea typeface="Calibri" pitchFamily="34" charset="-122"/>
+                <a:cs typeface="Calibri" pitchFamily="34" charset="-120"/>
+              </a:rPr>
+              <a:t>An employee holding company property is not itself a crime. The obviousness test is rarely met.</a:t>
+            </a:r>
+            <a:endParaRPr lang="en-US" sz="1050" dirty="0"/>
+          </a:p>
+        </p:txBody>
+      </p:sp>
+      <p:sp>
+        <p:nvSpPr>
+          <p:cNvPr id="9" name="Shape 6"/>
+          <p:cNvSpPr/>
+          <p:nvPr/>
+        </p:nvSpPr>
+        <p:spPr>
+          <a:xfrm>
+            <a:off x="6223864" y="1773936"/>
+            <a:ext cx="5327752" cy="1091184"/>
+          </a:xfrm>
+          <a:prstGeom prst="roundRect">
+            <a:avLst>
+              <a:gd name="adj" fmla="val 3352"/>
+            </a:avLst>
+          </a:prstGeom>
+          <a:solidFill>
+            <a:srgbClr val="EFF4F8"/>
+          </a:solidFill>
+          <a:ln/>
+        </p:spPr>
+      </p:sp>
+      <p:sp>
+        <p:nvSpPr>
+          <p:cNvPr id="10" name="Text 7"/>
+          <p:cNvSpPr/>
+          <p:nvPr/>
+        </p:nvSpPr>
+        <p:spPr>
+          <a:xfrm>
+            <a:off x="6461608" y="1865376"/>
+            <a:ext cx="4852264" cy="908304"/>
+          </a:xfrm>
+          <a:prstGeom prst="rect">
+            <a:avLst/>
+          </a:prstGeom>
+          <a:noFill/>
+          <a:ln/>
+        </p:spPr>
+        <p:txBody>
+          <a:bodyPr wrap="square" lIns="0" tIns="0" rIns="0" bIns="0" rtlCol="0" anchor="t"/>
+          <a:lstStyle/>
+          <a:p>
+            <a:pPr indent="0" marL="0">
+              <a:lnSpc>
+                <a:spcPct val="90000"/>
+              </a:lnSpc>
+              <a:buNone/>
+            </a:pPr>
+            <a:r>
+              <a:rPr lang="en-US" sz="1050" b="1" dirty="0">
+                <a:solidFill>
+                  <a:srgbClr val="093259"/>
+                </a:solidFill>
+                <a:latin typeface="Yu Gothic" pitchFamily="34" charset="0"/>
+                <a:ea typeface="Yu Gothic" pitchFamily="34" charset="-122"/>
+                <a:cs typeface="Yu Gothic" pitchFamily="34" charset="-120"/>
+              </a:rPr>
+              <a:t>情報の欠落</a:t>
+            </a:r>
+            <a:endParaRPr lang="en-US" sz="1050" dirty="0"/>
+          </a:p>
+          <a:p>
+            <a:pPr indent="0" marL="0">
+              <a:lnSpc>
+                <a:spcPct val="90000"/>
+              </a:lnSpc>
+              <a:buNone/>
+            </a:pPr>
+            <a:r>
+              <a:rPr lang="en-US" sz="1050" b="1" dirty="0">
+                <a:solidFill>
+                  <a:srgbClr val="1B2733"/>
+                </a:solidFill>
+                <a:latin typeface="Yu Gothic" pitchFamily="34" charset="0"/>
+                <a:ea typeface="Yu Gothic" pitchFamily="34" charset="-122"/>
+                <a:cs typeface="Yu Gothic" pitchFamily="34" charset="-120"/>
+              </a:rPr>
+              <a:t>様式を知らないことを判断の根拠にしない。確認できる者に確認する。</a:t>
+            </a:r>
+            <a:endParaRPr lang="en-US" sz="1050" dirty="0"/>
+          </a:p>
+          <a:p>
+            <a:pPr indent="0" marL="0">
+              <a:lnSpc>
+                <a:spcPct val="90000"/>
+              </a:lnSpc>
+              <a:buNone/>
+            </a:pPr>
+            <a:r>
+              <a:rPr lang="en-US" sz="800" i="1" dirty="0">
+                <a:solidFill>
+                  <a:srgbClr val="5F7183"/>
+                </a:solidFill>
+                <a:latin typeface="Calibri" pitchFamily="34" charset="0"/>
+                <a:ea typeface="Calibri" pitchFamily="34" charset="-122"/>
+                <a:cs typeface="Calibri" pitchFamily="34" charset="-120"/>
+              </a:rPr>
+              <a:t>Not knowing the form is not a basis for a decision. Ask someone who can confirm.</a:t>
+            </a:r>
+            <a:endParaRPr lang="en-US" sz="1050" dirty="0"/>
+          </a:p>
+        </p:txBody>
+      </p:sp>
+      <p:sp>
+        <p:nvSpPr>
+          <p:cNvPr id="11" name="Shape 8"/>
+          <p:cNvSpPr/>
+          <p:nvPr/>
+        </p:nvSpPr>
+        <p:spPr>
+          <a:xfrm>
+            <a:off x="640080" y="2993136"/>
+            <a:ext cx="5327752" cy="1091184"/>
+          </a:xfrm>
+          <a:prstGeom prst="roundRect">
+            <a:avLst>
+              <a:gd name="adj" fmla="val 3352"/>
+            </a:avLst>
+          </a:prstGeom>
+          <a:solidFill>
+            <a:srgbClr val="EFF4F8"/>
+          </a:solidFill>
+          <a:ln/>
+        </p:spPr>
+      </p:sp>
+      <p:sp>
+        <p:nvSpPr>
+          <p:cNvPr id="12" name="Text 9"/>
+          <p:cNvSpPr/>
+          <p:nvPr/>
+        </p:nvSpPr>
+        <p:spPr>
+          <a:xfrm>
+            <a:off x="877824" y="3084576"/>
+            <a:ext cx="4852264" cy="908304"/>
+          </a:xfrm>
+          <a:prstGeom prst="rect">
+            <a:avLst/>
+          </a:prstGeom>
+          <a:noFill/>
+          <a:ln/>
+        </p:spPr>
+        <p:txBody>
+          <a:bodyPr wrap="square" lIns="0" tIns="0" rIns="0" bIns="0" rtlCol="0" anchor="t"/>
+          <a:lstStyle/>
+          <a:p>
+            <a:pPr indent="0" marL="0">
+              <a:lnSpc>
+                <a:spcPct val="90000"/>
+              </a:lnSpc>
+              <a:buNone/>
+            </a:pPr>
+            <a:r>
+              <a:rPr lang="en-US" sz="1050" b="1" dirty="0">
+                <a:solidFill>
+                  <a:srgbClr val="093259"/>
+                </a:solidFill>
+                <a:latin typeface="Yu Gothic" pitchFamily="34" charset="0"/>
+                <a:ea typeface="Yu Gothic" pitchFamily="34" charset="-122"/>
+                <a:cs typeface="Yu Gothic" pitchFamily="34" charset="-120"/>
+              </a:rPr>
+              <a:t>できること</a:t>
+            </a:r>
+            <a:endParaRPr lang="en-US" sz="1050" dirty="0"/>
+          </a:p>
+          <a:p>
+            <a:pPr indent="0" marL="0">
+              <a:lnSpc>
+                <a:spcPct val="90000"/>
+              </a:lnSpc>
+              <a:buNone/>
+            </a:pPr>
+            <a:r>
+              <a:rPr lang="en-US" sz="1050" b="1" dirty="0">
+                <a:solidFill>
+                  <a:srgbClr val="1B2733"/>
+                </a:solidFill>
+                <a:latin typeface="Yu Gothic" pitchFamily="34" charset="0"/>
+                <a:ea typeface="Yu Gothic" pitchFamily="34" charset="-122"/>
+                <a:cs typeface="Yu Gothic" pitchFamily="34" charset="-120"/>
+              </a:rPr>
+              <a:t>確認の依頼、記録、報告。強制はできない。</a:t>
+            </a:r>
+            <a:endParaRPr lang="en-US" sz="1050" dirty="0"/>
+          </a:p>
+          <a:p>
+            <a:pPr indent="0" marL="0">
+              <a:lnSpc>
+                <a:spcPct val="90000"/>
+              </a:lnSpc>
+              <a:buNone/>
+            </a:pPr>
+            <a:r>
+              <a:rPr lang="en-US" sz="800" i="1" dirty="0">
+                <a:solidFill>
+                  <a:srgbClr val="5F7183"/>
+                </a:solidFill>
+                <a:latin typeface="Calibri" pitchFamily="34" charset="0"/>
+                <a:ea typeface="Calibri" pitchFamily="34" charset="-122"/>
+                <a:cs typeface="Calibri" pitchFamily="34" charset="-120"/>
+              </a:rPr>
+              <a:t>Request, record, report. You cannot compel.</a:t>
+            </a:r>
+            <a:endParaRPr lang="en-US" sz="1050" dirty="0"/>
+          </a:p>
+        </p:txBody>
+      </p:sp>
+      <p:sp>
+        <p:nvSpPr>
+          <p:cNvPr id="13" name="Shape 10"/>
+          <p:cNvSpPr/>
+          <p:nvPr/>
+        </p:nvSpPr>
+        <p:spPr>
+          <a:xfrm>
+            <a:off x="6223864" y="2993136"/>
+            <a:ext cx="5327752" cy="1091184"/>
+          </a:xfrm>
+          <a:prstGeom prst="roundRect">
+            <a:avLst>
+              <a:gd name="adj" fmla="val 3352"/>
+            </a:avLst>
+          </a:prstGeom>
+          <a:solidFill>
+            <a:srgbClr val="EFF4F8"/>
+          </a:solidFill>
+          <a:ln/>
+        </p:spPr>
+      </p:sp>
+      <p:sp>
+        <p:nvSpPr>
+          <p:cNvPr id="14" name="Text 11"/>
+          <p:cNvSpPr/>
+          <p:nvPr/>
+        </p:nvSpPr>
+        <p:spPr>
+          <a:xfrm>
+            <a:off x="6461608" y="3084576"/>
+            <a:ext cx="4852264" cy="908304"/>
+          </a:xfrm>
+          <a:prstGeom prst="rect">
+            <a:avLst/>
+          </a:prstGeom>
+          <a:noFill/>
+          <a:ln/>
+        </p:spPr>
+        <p:txBody>
+          <a:bodyPr wrap="square" lIns="0" tIns="0" rIns="0" bIns="0" rtlCol="0" anchor="t"/>
+          <a:lstStyle/>
+          <a:p>
+            <a:pPr indent="0" marL="0">
+              <a:lnSpc>
+                <a:spcPct val="90000"/>
+              </a:lnSpc>
+              <a:buNone/>
+            </a:pPr>
+            <a:r>
+              <a:rPr lang="en-US" sz="1050" b="1" dirty="0">
+                <a:solidFill>
+                  <a:srgbClr val="093259"/>
+                </a:solidFill>
+                <a:latin typeface="Yu Gothic" pitchFamily="34" charset="0"/>
+                <a:ea typeface="Yu Gothic" pitchFamily="34" charset="-122"/>
+                <a:cs typeface="Yu Gothic" pitchFamily="34" charset="-120"/>
+              </a:rPr>
+              <a:t>追うか</a:t>
+            </a:r>
+            <a:endParaRPr lang="en-US" sz="1050" dirty="0"/>
+          </a:p>
+          <a:p>
+            <a:pPr indent="0" marL="0">
+              <a:lnSpc>
+                <a:spcPct val="90000"/>
+              </a:lnSpc>
+              <a:buNone/>
+            </a:pPr>
+            <a:r>
+              <a:rPr lang="en-US" sz="1050" b="1" dirty="0">
+                <a:solidFill>
+                  <a:srgbClr val="1B2733"/>
+                </a:solidFill>
+                <a:latin typeface="Yu Gothic" pitchFamily="34" charset="0"/>
+                <a:ea typeface="Yu Gothic" pitchFamily="34" charset="-122"/>
+                <a:cs typeface="Yu Gothic" pitchFamily="34" charset="-120"/>
+              </a:rPr>
+              <a:t>追わない判断も成り立つ。有形力への発展と信用への影響を考える。</a:t>
+            </a:r>
+            <a:endParaRPr lang="en-US" sz="1050" dirty="0"/>
+          </a:p>
+          <a:p>
+            <a:pPr indent="0" marL="0">
+              <a:lnSpc>
+                <a:spcPct val="90000"/>
+              </a:lnSpc>
+              <a:buNone/>
+            </a:pPr>
+            <a:r>
+              <a:rPr lang="en-US" sz="800" i="1" dirty="0">
+                <a:solidFill>
+                  <a:srgbClr val="5F7183"/>
+                </a:solidFill>
+                <a:latin typeface="Calibri" pitchFamily="34" charset="0"/>
+                <a:ea typeface="Calibri" pitchFamily="34" charset="-122"/>
+                <a:cs typeface="Calibri" pitchFamily="34" charset="-120"/>
+              </a:rPr>
+              <a:t>Not following is defensible. Weigh escalation to force, and the effect on reputation.</a:t>
+            </a:r>
+            <a:endParaRPr lang="en-US" sz="1050" dirty="0"/>
+          </a:p>
+        </p:txBody>
+      </p:sp>
+      <p:sp>
+        <p:nvSpPr>
+          <p:cNvPr id="15" name="Shape 12"/>
+          <p:cNvSpPr/>
+          <p:nvPr/>
+        </p:nvSpPr>
+        <p:spPr>
+          <a:xfrm>
+            <a:off x="640080" y="4212336"/>
+            <a:ext cx="5327752" cy="1091184"/>
+          </a:xfrm>
+          <a:prstGeom prst="roundRect">
+            <a:avLst>
+              <a:gd name="adj" fmla="val 3352"/>
+            </a:avLst>
+          </a:prstGeom>
+          <a:solidFill>
+            <a:srgbClr val="E4F4F0"/>
+          </a:solidFill>
+          <a:ln/>
+        </p:spPr>
+      </p:sp>
+      <p:sp>
+        <p:nvSpPr>
+          <p:cNvPr id="16" name="Text 13"/>
+          <p:cNvSpPr/>
+          <p:nvPr/>
+        </p:nvSpPr>
+        <p:spPr>
+          <a:xfrm>
+            <a:off x="877824" y="4303776"/>
+            <a:ext cx="4852264" cy="908304"/>
+          </a:xfrm>
+          <a:prstGeom prst="rect">
+            <a:avLst/>
+          </a:prstGeom>
+          <a:noFill/>
+          <a:ln/>
+        </p:spPr>
+        <p:txBody>
+          <a:bodyPr wrap="square" lIns="0" tIns="0" rIns="0" bIns="0" rtlCol="0" anchor="t"/>
+          <a:lstStyle/>
+          <a:p>
+            <a:pPr indent="0" marL="0">
+              <a:lnSpc>
+                <a:spcPct val="90000"/>
+              </a:lnSpc>
+              <a:buNone/>
+            </a:pPr>
+            <a:r>
+              <a:rPr lang="en-US" sz="1050" b="1" dirty="0">
+                <a:solidFill>
+                  <a:srgbClr val="0D8A76"/>
+                </a:solidFill>
+                <a:latin typeface="Yu Gothic" pitchFamily="34" charset="0"/>
+                <a:ea typeface="Yu Gothic" pitchFamily="34" charset="-122"/>
+                <a:cs typeface="Yu Gothic" pitchFamily="34" charset="-120"/>
+              </a:rPr>
+              <a:t>「出口で止めろ」</a:t>
+            </a:r>
+            <a:endParaRPr lang="en-US" sz="1050" dirty="0"/>
+          </a:p>
+          <a:p>
+            <a:pPr indent="0" marL="0">
+              <a:lnSpc>
+                <a:spcPct val="90000"/>
+              </a:lnSpc>
+              <a:buNone/>
+            </a:pPr>
+            <a:r>
+              <a:rPr lang="en-US" sz="1050" b="1" dirty="0">
+                <a:solidFill>
+                  <a:srgbClr val="1B2733"/>
+                </a:solidFill>
+                <a:latin typeface="Yu Gothic" pitchFamily="34" charset="0"/>
+                <a:ea typeface="Yu Gothic" pitchFamily="34" charset="-122"/>
+                <a:cs typeface="Yu Gothic" pitchFamily="34" charset="-120"/>
+              </a:rPr>
+              <a:t>実力での制止はできない。指示に従っても権限は生じない。</a:t>
+            </a:r>
+            <a:endParaRPr lang="en-US" sz="1050" dirty="0"/>
+          </a:p>
+          <a:p>
+            <a:pPr indent="0" marL="0">
+              <a:lnSpc>
+                <a:spcPct val="90000"/>
+              </a:lnSpc>
+              <a:buNone/>
+            </a:pPr>
+            <a:r>
+              <a:rPr lang="en-US" sz="800" i="1" dirty="0">
+                <a:solidFill>
+                  <a:srgbClr val="5F7183"/>
+                </a:solidFill>
+                <a:latin typeface="Calibri" pitchFamily="34" charset="0"/>
+                <a:ea typeface="Calibri" pitchFamily="34" charset="-122"/>
+                <a:cs typeface="Calibri" pitchFamily="34" charset="-120"/>
+              </a:rPr>
+              <a:t>You cannot physically stop them. Obeying the order does not create authority.</a:t>
+            </a:r>
+            <a:endParaRPr lang="en-US" sz="1050" dirty="0"/>
+          </a:p>
+        </p:txBody>
+      </p:sp>
+      <p:sp>
+        <p:nvSpPr>
+          <p:cNvPr id="17" name="Shape 14"/>
+          <p:cNvSpPr/>
+          <p:nvPr/>
+        </p:nvSpPr>
+        <p:spPr>
+          <a:xfrm>
+            <a:off x="6223864" y="4212336"/>
+            <a:ext cx="5327752" cy="1091184"/>
+          </a:xfrm>
+          <a:prstGeom prst="roundRect">
+            <a:avLst>
+              <a:gd name="adj" fmla="val 3352"/>
+            </a:avLst>
+          </a:prstGeom>
+          <a:solidFill>
+            <a:srgbClr val="E4F4F0"/>
+          </a:solidFill>
+          <a:ln/>
+        </p:spPr>
+      </p:sp>
+      <p:sp>
+        <p:nvSpPr>
+          <p:cNvPr id="18" name="Text 15"/>
+          <p:cNvSpPr/>
+          <p:nvPr/>
+        </p:nvSpPr>
+        <p:spPr>
+          <a:xfrm>
+            <a:off x="6461608" y="4303776"/>
+            <a:ext cx="4852264" cy="908304"/>
+          </a:xfrm>
+          <a:prstGeom prst="rect">
+            <a:avLst/>
+          </a:prstGeom>
+          <a:noFill/>
+          <a:ln/>
+        </p:spPr>
+        <p:txBody>
+          <a:bodyPr wrap="square" lIns="0" tIns="0" rIns="0" bIns="0" rtlCol="0" anchor="t"/>
+          <a:lstStyle/>
+          <a:p>
+            <a:pPr indent="0" marL="0">
+              <a:lnSpc>
+                <a:spcPct val="90000"/>
+              </a:lnSpc>
+              <a:buNone/>
+            </a:pPr>
+            <a:r>
+              <a:rPr lang="en-US" sz="1050" b="1" dirty="0">
+                <a:solidFill>
+                  <a:srgbClr val="0D8A76"/>
+                </a:solidFill>
+                <a:latin typeface="Yu Gothic" pitchFamily="34" charset="0"/>
+                <a:ea typeface="Yu Gothic" pitchFamily="34" charset="-122"/>
+                <a:cs typeface="Yu Gothic" pitchFamily="34" charset="-120"/>
+              </a:rPr>
+              <a:t>断り方</a:t>
+            </a:r>
+            <a:endParaRPr lang="en-US" sz="1050" dirty="0"/>
+          </a:p>
+          <a:p>
+            <a:pPr indent="0" marL="0">
+              <a:lnSpc>
+                <a:spcPct val="90000"/>
+              </a:lnSpc>
+              <a:buNone/>
+            </a:pPr>
+            <a:r>
+              <a:rPr lang="en-US" sz="1050" b="1" dirty="0">
+                <a:solidFill>
+                  <a:srgbClr val="1B2733"/>
+                </a:solidFill>
+                <a:latin typeface="Yu Gothic" pitchFamily="34" charset="0"/>
+                <a:ea typeface="Yu Gothic" pitchFamily="34" charset="-122"/>
+                <a:cs typeface="Yu Gothic" pitchFamily="34" charset="-120"/>
+              </a:rPr>
+              <a:t>「実力での制止はできません。記録と報告を行います」と代替案を返す。</a:t>
+            </a:r>
+            <a:endParaRPr lang="en-US" sz="1050" dirty="0"/>
+          </a:p>
+          <a:p>
+            <a:pPr indent="0" marL="0">
+              <a:lnSpc>
+                <a:spcPct val="90000"/>
+              </a:lnSpc>
+              <a:buNone/>
+            </a:pPr>
+            <a:r>
+              <a:rPr lang="en-US" sz="800" i="1" dirty="0">
+                <a:solidFill>
+                  <a:srgbClr val="5F7183"/>
+                </a:solidFill>
+                <a:latin typeface="Calibri" pitchFamily="34" charset="0"/>
+                <a:ea typeface="Calibri" pitchFamily="34" charset="-122"/>
+                <a:cs typeface="Calibri" pitchFamily="34" charset="-120"/>
+              </a:rPr>
+              <a:t>"I cannot physically stop them. I will record and report." Offer the alternative.</a:t>
+            </a:r>
+            <a:endParaRPr lang="en-US" sz="1050" dirty="0"/>
+          </a:p>
+        </p:txBody>
+      </p:sp>
+      <p:sp>
+        <p:nvSpPr>
+          <p:cNvPr id="19" name="Shape 16"/>
+          <p:cNvSpPr/>
+          <p:nvPr/>
+        </p:nvSpPr>
+        <p:spPr>
+          <a:xfrm>
+            <a:off x="640080" y="5358384"/>
+            <a:ext cx="10911535" cy="493776"/>
+          </a:xfrm>
+          <a:prstGeom prst="roundRect">
+            <a:avLst>
+              <a:gd name="adj" fmla="val 7407"/>
+            </a:avLst>
+          </a:prstGeom>
+          <a:solidFill>
+            <a:srgbClr val="093259"/>
+          </a:solidFill>
+          <a:ln/>
+        </p:spPr>
+      </p:sp>
+      <p:sp>
+        <p:nvSpPr>
+          <p:cNvPr id="20" name="Text 17"/>
+          <p:cNvSpPr/>
+          <p:nvPr/>
+        </p:nvSpPr>
+        <p:spPr>
+          <a:xfrm>
+            <a:off x="877824" y="5404104"/>
+            <a:ext cx="10436047" cy="402336"/>
+          </a:xfrm>
+          <a:prstGeom prst="rect">
+            <a:avLst/>
+          </a:prstGeom>
+          <a:noFill/>
+          <a:ln/>
+        </p:spPr>
+        <p:txBody>
+          <a:bodyPr wrap="square" lIns="0" tIns="0" rIns="0" bIns="0" rtlCol="0" anchor="ctr"/>
+          <a:lstStyle/>
+          <a:p>
+            <a:pPr indent="0" marL="0">
+              <a:lnSpc>
+                <a:spcPct val="86000"/>
+              </a:lnSpc>
+              <a:buNone/>
+            </a:pPr>
+            <a:r>
+              <a:rPr lang="en-US" sz="950" b="1" dirty="0">
+                <a:solidFill>
+                  <a:srgbClr val="12B198"/>
+                </a:solidFill>
+                <a:latin typeface="Yu Gothic" pitchFamily="34" charset="0"/>
+                <a:ea typeface="Yu Gothic" pitchFamily="34" charset="-122"/>
+                <a:cs typeface="Yu Gothic" pitchFamily="34" charset="-120"/>
+              </a:rPr>
+              <a:t>割れる論点　</a:t>
+            </a:r>
+            <a:pPr indent="0" marL="0">
+              <a:lnSpc>
+                <a:spcPct val="86000"/>
+              </a:lnSpc>
+              <a:buNone/>
+            </a:pPr>
+            <a:r>
+              <a:rPr lang="en-US" sz="1100" b="1" dirty="0">
+                <a:solidFill>
+                  <a:srgbClr val="FFFFFF"/>
+                </a:solidFill>
+                <a:latin typeface="Yu Gothic" pitchFamily="34" charset="0"/>
+                <a:ea typeface="Yu Gothic" pitchFamily="34" charset="-122"/>
+                <a:cs typeface="Yu Gothic" pitchFamily="34" charset="-120"/>
+              </a:rPr>
+              <a:t>指示に従うか。従うと答えた班には「何をもって止めるのか」を問う。無言で従わないのが最も悪い。</a:t>
+            </a:r>
+            <a:endParaRPr lang="en-US" sz="950" dirty="0"/>
+          </a:p>
+          <a:p>
+            <a:pPr indent="0" marL="0">
+              <a:lnSpc>
+                <a:spcPct val="86000"/>
+              </a:lnSpc>
+              <a:buNone/>
+            </a:pPr>
+            <a:r>
+              <a:rPr lang="en-US" sz="800" i="1" dirty="0">
+                <a:solidFill>
+                  <a:srgbClr val="9FD8CD"/>
+                </a:solidFill>
+                <a:latin typeface="Calibri" pitchFamily="34" charset="0"/>
+                <a:ea typeface="Calibri" pitchFamily="34" charset="-122"/>
+                <a:cs typeface="Calibri" pitchFamily="34" charset="-120"/>
+              </a:rPr>
+              <a:t>Do you obey? Ask those who say yes: by what means would you stop them? Silent non-compliance is the worst outcome.</a:t>
+            </a:r>
+            <a:endParaRPr lang="en-US" sz="950" dirty="0"/>
+          </a:p>
+        </p:txBody>
+      </p:sp>
+      <p:sp>
+        <p:nvSpPr>
+          <p:cNvPr id="21" name="Text 18"/>
+          <p:cNvSpPr/>
+          <p:nvPr/>
+        </p:nvSpPr>
+        <p:spPr>
+          <a:xfrm>
+            <a:off x="640080" y="5907024"/>
+            <a:ext cx="10911535" cy="310896"/>
+          </a:xfrm>
+          <a:prstGeom prst="rect">
+            <a:avLst/>
+          </a:prstGeom>
+          <a:noFill/>
+          <a:ln/>
+        </p:spPr>
+        <p:txBody>
+          <a:bodyPr wrap="square" lIns="0" tIns="0" rIns="0" bIns="0" rtlCol="0" anchor="t"/>
+          <a:lstStyle/>
+          <a:p>
+            <a:pPr indent="0" marL="0">
+              <a:lnSpc>
+                <a:spcPct val="88000"/>
+              </a:lnSpc>
+              <a:buNone/>
+            </a:pPr>
+            <a:r>
+              <a:rPr lang="en-US" sz="900" b="1" dirty="0">
+                <a:solidFill>
+                  <a:srgbClr val="0D8A76"/>
+                </a:solidFill>
+                <a:latin typeface="Yu Gothic" pitchFamily="34" charset="0"/>
+                <a:ea typeface="Yu Gothic" pitchFamily="34" charset="-122"/>
+                <a:cs typeface="Yu Gothic" pitchFamily="34" charset="-120"/>
+              </a:rPr>
+              <a:t>Site SOP優先　</a:t>
+            </a:r>
+            <a:pPr indent="0" marL="0">
+              <a:lnSpc>
+                <a:spcPct val="88000"/>
+              </a:lnSpc>
+              <a:buNone/>
+            </a:pPr>
+            <a:r>
+              <a:rPr lang="en-US" sz="900" dirty="0">
+                <a:solidFill>
+                  <a:srgbClr val="1B2733"/>
+                </a:solidFill>
+                <a:latin typeface="Yu Gothic" pitchFamily="34" charset="0"/>
+                <a:ea typeface="Yu Gothic" pitchFamily="34" charset="-122"/>
+                <a:cs typeface="Yu Gothic" pitchFamily="34" charset="-120"/>
+              </a:rPr>
+              <a:t>模範解答は判断の型を示すものです。実際の手順は各現場のSite SOPと警備指令書が優先します。</a:t>
+            </a:r>
+            <a:endParaRPr lang="en-US" sz="900" dirty="0"/>
+          </a:p>
+          <a:p>
+            <a:pPr indent="0" marL="0">
+              <a:lnSpc>
+                <a:spcPct val="88000"/>
+              </a:lnSpc>
+              <a:buNone/>
+            </a:pPr>
+            <a:r>
+              <a:rPr lang="en-US" sz="750" i="1" dirty="0">
+                <a:solidFill>
+                  <a:srgbClr val="5F7183"/>
+                </a:solidFill>
+                <a:latin typeface="Calibri" pitchFamily="34" charset="0"/>
+                <a:ea typeface="Calibri" pitchFamily="34" charset="-122"/>
+                <a:cs typeface="Calibri" pitchFamily="34" charset="-120"/>
+              </a:rPr>
+              <a:t>These answers show a pattern of reasoning. The Site SOP and post orders always take precedence.</a:t>
+            </a:r>
+            <a:endParaRPr lang="en-US" sz="900" dirty="0"/>
+          </a:p>
+        </p:txBody>
+      </p:sp>
+      <p:sp>
+        <p:nvSpPr>
+          <p:cNvPr id="22" name="Text 19"/>
+          <p:cNvSpPr/>
+          <p:nvPr/>
+        </p:nvSpPr>
+        <p:spPr>
+          <a:xfrm>
+            <a:off x="640080" y="6272784"/>
+            <a:ext cx="9905695" cy="237744"/>
+          </a:xfrm>
+          <a:prstGeom prst="rect">
+            <a:avLst/>
+          </a:prstGeom>
+          <a:noFill/>
+          <a:ln/>
+        </p:spPr>
+        <p:txBody>
+          <a:bodyPr wrap="square" lIns="0" tIns="0" rIns="0" bIns="0" rtlCol="0" anchor="t"/>
+          <a:lstStyle/>
+          <a:p>
+            <a:pPr indent="0" marL="0">
+              <a:buNone/>
+            </a:pPr>
+            <a:r>
+              <a:rPr lang="en-US" sz="750" b="1" dirty="0">
+                <a:solidFill>
+                  <a:srgbClr val="D6E0E9"/>
+                </a:solidFill>
+                <a:latin typeface="Yu Gothic" pitchFamily="34" charset="0"/>
+                <a:ea typeface="Yu Gothic" pitchFamily="34" charset="-122"/>
+                <a:cs typeface="Yu Gothic" pitchFamily="34" charset="-120"/>
+              </a:rPr>
+              <a:t>ソース　</a:t>
+            </a:r>
+            <a:pPr indent="0" marL="0">
+              <a:buNone/>
+            </a:pPr>
+            <a:r>
+              <a:rPr lang="en-US" sz="750" dirty="0">
+                <a:solidFill>
+                  <a:srgbClr val="5F7183"/>
+                </a:solidFill>
+                <a:latin typeface="Yu Gothic" pitchFamily="34" charset="0"/>
+                <a:ea typeface="Yu Gothic" pitchFamily="34" charset="-122"/>
+                <a:cs typeface="Yu Gothic" pitchFamily="34" charset="-120"/>
+              </a:rPr>
+              <a:t>警備業法、刑法、刑事訴訟法</a:t>
+            </a:r>
+            <a:endParaRPr lang="en-US" sz="750" dirty="0"/>
+          </a:p>
+        </p:txBody>
+      </p:sp>
+      <p:sp>
+        <p:nvSpPr>
+          <p:cNvPr id="23" name="Text 20"/>
+          <p:cNvSpPr/>
+          <p:nvPr/>
+        </p:nvSpPr>
+        <p:spPr>
+          <a:xfrm>
+            <a:off x="640080" y="6382512"/>
+            <a:ext cx="8778240" cy="292608"/>
+          </a:xfrm>
+          <a:prstGeom prst="rect">
+            <a:avLst/>
+          </a:prstGeom>
+          <a:noFill/>
+          <a:ln/>
+        </p:spPr>
+        <p:txBody>
+          <a:bodyPr wrap="square" lIns="0" tIns="0" rIns="0" bIns="0" rtlCol="0" anchor="ctr"/>
+          <a:lstStyle/>
+          <a:p>
+            <a:pPr indent="0" marL="0">
+              <a:buNone/>
+            </a:pPr>
+            <a:r>
+              <a:rPr lang="en-US" sz="900" dirty="0">
+                <a:solidFill>
+                  <a:srgbClr val="5F7183"/>
+                </a:solidFill>
+                <a:latin typeface="Yu Gothic" pitchFamily="34" charset="0"/>
+                <a:ea typeface="Yu Gothic" pitchFamily="34" charset="-122"/>
+                <a:cs typeface="Yu Gothic" pitchFamily="34" charset="-120"/>
+              </a:rPr>
+              <a:t>第2時限｜基本教育2 警備業法その他警備業務の適正な実施に必要な法令  </a:t>
+            </a:r>
+            <a:pPr indent="0" marL="0">
+              <a:buNone/>
+            </a:pPr>
+            <a:r>
+              <a:rPr lang="en-US" sz="850" i="1" dirty="0">
+                <a:solidFill>
+                  <a:srgbClr val="D6E0E9"/>
+                </a:solidFill>
+                <a:latin typeface="Calibri" pitchFamily="34" charset="0"/>
+                <a:ea typeface="Calibri" pitchFamily="34" charset="-122"/>
+                <a:cs typeface="Calibri" pitchFamily="34" charset="-120"/>
+              </a:rPr>
+              <a:t>Period 2 | Basic Training 2 — Applicable Law</a:t>
+            </a:r>
+            <a:endParaRPr lang="en-US" sz="900" dirty="0"/>
+          </a:p>
+        </p:txBody>
+      </p:sp>
+      <p:sp>
+        <p:nvSpPr>
+          <p:cNvPr id="24" name="Text 21"/>
+          <p:cNvSpPr/>
+          <p:nvPr/>
+        </p:nvSpPr>
+        <p:spPr>
+          <a:xfrm>
+            <a:off x="10637215" y="6382512"/>
+            <a:ext cx="914400" cy="292608"/>
+          </a:xfrm>
+          <a:prstGeom prst="rect">
+            <a:avLst/>
+          </a:prstGeom>
+          <a:noFill/>
+          <a:ln/>
+        </p:spPr>
+        <p:txBody>
+          <a:bodyPr wrap="square" lIns="0" tIns="0" rIns="0" bIns="0" rtlCol="0" anchor="ctr"/>
+          <a:lstStyle/>
+          <a:p>
+            <a:pPr algn="r" indent="0" marL="0">
+              <a:buNone/>
+            </a:pPr>
+            <a:r>
+              <a:rPr lang="en-US" sz="1000" dirty="0">
+                <a:solidFill>
+                  <a:srgbClr val="5F7183"/>
+                </a:solidFill>
+                <a:latin typeface="Calibri" pitchFamily="34" charset="0"/>
+                <a:ea typeface="Calibri" pitchFamily="34" charset="-122"/>
+                <a:cs typeface="Calibri" pitchFamily="34" charset="-120"/>
+              </a:rPr>
+              <a:t>7</a:t>
+            </a:r>
+            <a:endParaRPr lang="en-US" sz="1000" dirty="0"/>
+          </a:p>
+        </p:txBody>
+      </p:sp>
+    </p:spTree>
+  </p:cSld>
+  <p:clrMapOvr>
+    <a:masterClrMapping/>
+  </p:clrMapOvr>
+</p:sld>
+</file>
+
+<file path=ppt/slides/slide8.xml><?xml version="1.0" encoding="utf-8"?>
+<p:sld xmlns:a="http://schemas.openxmlformats.org/drawingml/2006/main" xmlns:r="http://schemas.openxmlformats.org/officeDocument/2006/relationships" xmlns:p="http://schemas.openxmlformats.org/presentationml/2006/main">
+  <p:cSld name="Slide 8">
+    <p:bg>
+      <p:bgPr>
+        <a:solidFill>
+          <a:srgbClr val="FFFFFF"/>
+        </a:solidFill>
+      </p:bgPr>
+    </p:bg>
+    <p:spTree>
+      <p:nvGrpSpPr>
+        <p:cNvPr id="1" name=""/>
+        <p:cNvGrpSpPr/>
+        <p:nvPr/>
+      </p:nvGrpSpPr>
+      <p:grpSpPr>
+        <a:xfrm>
+          <a:off x="0" y="0"/>
+          <a:ext cx="0" cy="0"/>
+          <a:chOff x="0" y="0"/>
+          <a:chExt cx="0" cy="0"/>
+        </a:xfrm>
+      </p:grpSpPr>
+      <p:pic>
+        <p:nvPicPr>
+          <p:cNvPr id="2" name="Image 0" descr="/home/user/Training-/assets/logo.png">    </p:cNvPr>
+          <p:cNvPicPr>
+            <a:picLocks noChangeAspect="1"/>
+          </p:cNvPicPr>
+          <p:nvPr/>
+        </p:nvPicPr>
+        <p:blipFill>
+          <a:blip r:embed="rId1"/>
+          <a:stretch>
+            <a:fillRect/>
+          </a:stretch>
+        </p:blipFill>
+        <p:spPr>
+          <a:xfrm>
+            <a:off x="10765231" y="332912"/>
+            <a:ext cx="786384" cy="742353"/>
+          </a:xfrm>
+          <a:prstGeom prst="rect">
+            <a:avLst/>
+          </a:prstGeom>
+        </p:spPr>
+      </p:pic>
+      <p:sp>
+        <p:nvSpPr>
+          <p:cNvPr id="3" name="Text 0"/>
+          <p:cNvSpPr/>
+          <p:nvPr/>
+        </p:nvSpPr>
+        <p:spPr>
+          <a:xfrm>
+            <a:off x="640080" y="384048"/>
+            <a:ext cx="8982151" cy="768096"/>
+          </a:xfrm>
+          <a:prstGeom prst="rect">
+            <a:avLst/>
+          </a:prstGeom>
+          <a:noFill/>
+          <a:ln/>
+        </p:spPr>
+        <p:txBody>
+          <a:bodyPr wrap="square" lIns="0" tIns="0" rIns="0" bIns="0" rtlCol="0" anchor="t"/>
+          <a:lstStyle/>
+          <a:p>
+            <a:pPr indent="0" marL="0">
+              <a:lnSpc>
+                <a:spcPct val="94000"/>
+              </a:lnSpc>
+              <a:buNone/>
+            </a:pPr>
+            <a:r>
+              <a:rPr lang="en-US" sz="2300" b="1" dirty="0">
+                <a:solidFill>
+                  <a:srgbClr val="093259"/>
+                </a:solidFill>
+                <a:latin typeface="Yu Gothic" pitchFamily="34" charset="0"/>
+                <a:ea typeface="Yu Gothic" pitchFamily="34" charset="-122"/>
+                <a:cs typeface="Yu Gothic" pitchFamily="34" charset="-120"/>
+              </a:rPr>
+              <a:t>TTX 2-B　警察官を名乗る人物が来訪者情報を求める</a:t>
+            </a:r>
+            <a:endParaRPr lang="en-US" sz="2300" dirty="0"/>
+          </a:p>
+          <a:p>
+            <a:pPr indent="0" marL="0">
+              <a:lnSpc>
+                <a:spcPct val="94000"/>
+              </a:lnSpc>
+              <a:buNone/>
+            </a:pPr>
+            <a:r>
+              <a:rPr lang="en-US" sz="1100" i="1" dirty="0">
+                <a:solidFill>
+                  <a:srgbClr val="12B198"/>
+                </a:solidFill>
+                <a:latin typeface="Calibri" pitchFamily="34" charset="0"/>
+                <a:ea typeface="Calibri" pitchFamily="34" charset="-122"/>
+                <a:cs typeface="Calibri" pitchFamily="34" charset="-120"/>
+              </a:rPr>
+              <a:t>TTX 2-B — A Person Claiming to Be Police Asks for Visitor Records</a:t>
+            </a:r>
+            <a:endParaRPr lang="en-US" sz="2300" dirty="0"/>
+          </a:p>
+        </p:txBody>
+      </p:sp>
+      <p:sp>
+        <p:nvSpPr>
+          <p:cNvPr id="4" name="Shape 1"/>
+          <p:cNvSpPr/>
+          <p:nvPr/>
+        </p:nvSpPr>
+        <p:spPr>
+          <a:xfrm>
+            <a:off x="9686239" y="438912"/>
+            <a:ext cx="932688" cy="310896"/>
+          </a:xfrm>
+          <a:prstGeom prst="roundRect">
+            <a:avLst>
+              <a:gd name="adj" fmla="val 14706"/>
+            </a:avLst>
+          </a:prstGeom>
+          <a:solidFill>
+            <a:srgbClr val="093259"/>
+          </a:solidFill>
+          <a:ln/>
+        </p:spPr>
+      </p:sp>
+      <p:sp>
+        <p:nvSpPr>
+          <p:cNvPr id="5" name="Text 2"/>
+          <p:cNvSpPr/>
+          <p:nvPr/>
+        </p:nvSpPr>
+        <p:spPr>
+          <a:xfrm>
+            <a:off x="9686239" y="438912"/>
+            <a:ext cx="932688" cy="310896"/>
+          </a:xfrm>
+          <a:prstGeom prst="rect">
+            <a:avLst/>
+          </a:prstGeom>
+          <a:noFill/>
+          <a:ln/>
+        </p:spPr>
+        <p:txBody>
+          <a:bodyPr wrap="square" lIns="0" tIns="0" rIns="0" bIns="0" rtlCol="0" anchor="ctr"/>
+          <a:lstStyle/>
+          <a:p>
+            <a:pPr algn="ctr" indent="0" marL="0">
+              <a:buNone/>
+            </a:pPr>
+            <a:r>
+              <a:rPr lang="en-US" sz="1100" b="1" dirty="0">
+                <a:solidFill>
+                  <a:srgbClr val="FFFFFF"/>
+                </a:solidFill>
+                <a:latin typeface="Calibri" pitchFamily="34" charset="0"/>
+                <a:ea typeface="Calibri" pitchFamily="34" charset="-122"/>
+                <a:cs typeface="Calibri" pitchFamily="34" charset="-120"/>
+              </a:rPr>
               <a:t>CASE 2-B</a:t>
             </a:r>
             <a:endParaRPr lang="en-US" sz="1100" dirty="0"/>
@@ -11401,7 +12786,1113 @@
                 <a:ea typeface="Calibri" pitchFamily="34" charset="-122"/>
                 <a:cs typeface="Calibri" pitchFamily="34" charset="-120"/>
               </a:rPr>
-              <a:t>7</a:t>
+              <a:t>8</a:t>
+            </a:r>
+            <a:endParaRPr lang="en-US" sz="1000" dirty="0"/>
+          </a:p>
+        </p:txBody>
+      </p:sp>
+    </p:spTree>
+  </p:cSld>
+  <p:clrMapOvr>
+    <a:masterClrMapping/>
+  </p:clrMapOvr>
+</p:sld>
+</file>
+
+<file path=ppt/slides/slide9.xml><?xml version="1.0" encoding="utf-8"?>
+<p:sld xmlns:a="http://schemas.openxmlformats.org/drawingml/2006/main" xmlns:r="http://schemas.openxmlformats.org/officeDocument/2006/relationships" xmlns:p="http://schemas.openxmlformats.org/presentationml/2006/main">
+  <p:cSld name="Slide 9">
+    <p:bg>
+      <p:bgPr>
+        <a:solidFill>
+          <a:srgbClr val="FFFFFF"/>
+        </a:solidFill>
+      </p:bgPr>
+    </p:bg>
+    <p:spTree>
+      <p:nvGrpSpPr>
+        <p:cNvPr id="1" name=""/>
+        <p:cNvGrpSpPr/>
+        <p:nvPr/>
+      </p:nvGrpSpPr>
+      <p:grpSpPr>
+        <a:xfrm>
+          <a:off x="0" y="0"/>
+          <a:ext cx="0" cy="0"/>
+          <a:chOff x="0" y="0"/>
+          <a:chExt cx="0" cy="0"/>
+        </a:xfrm>
+      </p:grpSpPr>
+      <p:pic>
+        <p:nvPicPr>
+          <p:cNvPr id="2" name="Image 0" descr="/home/user/Training-/assets/logo.png">    </p:cNvPr>
+          <p:cNvPicPr>
+            <a:picLocks noChangeAspect="1"/>
+          </p:cNvPicPr>
+          <p:nvPr/>
+        </p:nvPicPr>
+        <p:blipFill>
+          <a:blip r:embed="rId1"/>
+          <a:stretch>
+            <a:fillRect/>
+          </a:stretch>
+        </p:blipFill>
+        <p:spPr>
+          <a:xfrm>
+            <a:off x="10765231" y="332912"/>
+            <a:ext cx="786384" cy="742353"/>
+          </a:xfrm>
+          <a:prstGeom prst="rect">
+            <a:avLst/>
+          </a:prstGeom>
+        </p:spPr>
+      </p:pic>
+      <p:sp>
+        <p:nvSpPr>
+          <p:cNvPr id="3" name="Text 0"/>
+          <p:cNvSpPr/>
+          <p:nvPr/>
+        </p:nvSpPr>
+        <p:spPr>
+          <a:xfrm>
+            <a:off x="640080" y="384048"/>
+            <a:ext cx="8982151" cy="768096"/>
+          </a:xfrm>
+          <a:prstGeom prst="rect">
+            <a:avLst/>
+          </a:prstGeom>
+          <a:noFill/>
+          <a:ln/>
+        </p:spPr>
+        <p:txBody>
+          <a:bodyPr wrap="square" lIns="0" tIns="0" rIns="0" bIns="0" rtlCol="0" anchor="t"/>
+          <a:lstStyle/>
+          <a:p>
+            <a:pPr indent="0" marL="0">
+              <a:lnSpc>
+                <a:spcPct val="94000"/>
+              </a:lnSpc>
+              <a:buNone/>
+            </a:pPr>
+            <a:r>
+              <a:rPr lang="en-US" sz="2300" b="1" dirty="0">
+                <a:solidFill>
+                  <a:srgbClr val="093259"/>
+                </a:solidFill>
+                <a:latin typeface="Yu Gothic" pitchFamily="34" charset="0"/>
+                <a:ea typeface="Yu Gothic" pitchFamily="34" charset="-122"/>
+                <a:cs typeface="Yu Gothic" pitchFamily="34" charset="-120"/>
+              </a:rPr>
+              <a:t>TTX 2-B 講評 ― 模範解答</a:t>
+            </a:r>
+            <a:endParaRPr lang="en-US" sz="2300" dirty="0"/>
+          </a:p>
+          <a:p>
+            <a:pPr indent="0" marL="0">
+              <a:lnSpc>
+                <a:spcPct val="94000"/>
+              </a:lnSpc>
+              <a:buNone/>
+            </a:pPr>
+            <a:r>
+              <a:rPr lang="en-US" sz="1100" i="1" dirty="0">
+                <a:solidFill>
+                  <a:srgbClr val="12B198"/>
+                </a:solidFill>
+                <a:latin typeface="Calibri" pitchFamily="34" charset="0"/>
+                <a:ea typeface="Calibri" pitchFamily="34" charset="-122"/>
+                <a:cs typeface="Calibri" pitchFamily="34" charset="-120"/>
+              </a:rPr>
+              <a:t>TTX 2-B Debrief — Model Answer</a:t>
+            </a:r>
+            <a:endParaRPr lang="en-US" sz="2300" dirty="0"/>
+          </a:p>
+        </p:txBody>
+      </p:sp>
+      <p:sp>
+        <p:nvSpPr>
+          <p:cNvPr id="4" name="Shape 1"/>
+          <p:cNvSpPr/>
+          <p:nvPr/>
+        </p:nvSpPr>
+        <p:spPr>
+          <a:xfrm>
+            <a:off x="9686239" y="438912"/>
+            <a:ext cx="932688" cy="310896"/>
+          </a:xfrm>
+          <a:prstGeom prst="roundRect">
+            <a:avLst>
+              <a:gd name="adj" fmla="val 14706"/>
+            </a:avLst>
+          </a:prstGeom>
+          <a:solidFill>
+            <a:srgbClr val="093259"/>
+          </a:solidFill>
+          <a:ln/>
+        </p:spPr>
+      </p:sp>
+      <p:sp>
+        <p:nvSpPr>
+          <p:cNvPr id="5" name="Text 2"/>
+          <p:cNvSpPr/>
+          <p:nvPr/>
+        </p:nvSpPr>
+        <p:spPr>
+          <a:xfrm>
+            <a:off x="9686239" y="438912"/>
+            <a:ext cx="932688" cy="310896"/>
+          </a:xfrm>
+          <a:prstGeom prst="rect">
+            <a:avLst/>
+          </a:prstGeom>
+          <a:noFill/>
+          <a:ln/>
+        </p:spPr>
+        <p:txBody>
+          <a:bodyPr wrap="square" lIns="0" tIns="0" rIns="0" bIns="0" rtlCol="0" anchor="ctr"/>
+          <a:lstStyle/>
+          <a:p>
+            <a:pPr algn="ctr" indent="0" marL="0">
+              <a:buNone/>
+            </a:pPr>
+            <a:r>
+              <a:rPr lang="en-US" sz="1100" b="1" dirty="0">
+                <a:solidFill>
+                  <a:srgbClr val="FFFFFF"/>
+                </a:solidFill>
+                <a:latin typeface="Calibri" pitchFamily="34" charset="0"/>
+                <a:ea typeface="Calibri" pitchFamily="34" charset="-122"/>
+                <a:cs typeface="Calibri" pitchFamily="34" charset="-120"/>
+              </a:rPr>
+              <a:t>DEBRIEF</a:t>
+            </a:r>
+            <a:endParaRPr lang="en-US" sz="1100" dirty="0"/>
+          </a:p>
+        </p:txBody>
+      </p:sp>
+      <p:sp>
+        <p:nvSpPr>
+          <p:cNvPr id="6" name="Text 3"/>
+          <p:cNvSpPr/>
+          <p:nvPr/>
+        </p:nvSpPr>
+        <p:spPr>
+          <a:xfrm>
+            <a:off x="640080" y="1188720"/>
+            <a:ext cx="10911535" cy="530352"/>
+          </a:xfrm>
+          <a:prstGeom prst="rect">
+            <a:avLst/>
+          </a:prstGeom>
+          <a:noFill/>
+          <a:ln/>
+        </p:spPr>
+        <p:txBody>
+          <a:bodyPr wrap="square" lIns="0" tIns="0" rIns="0" bIns="0" rtlCol="0" anchor="t"/>
+          <a:lstStyle/>
+          <a:p>
+            <a:pPr indent="0" marL="0">
+              <a:lnSpc>
+                <a:spcPct val="90000"/>
+              </a:lnSpc>
+              <a:buNone/>
+            </a:pPr>
+            <a:r>
+              <a:rPr lang="en-US" sz="1000" b="1" dirty="0">
+                <a:solidFill>
+                  <a:srgbClr val="0D8A76"/>
+                </a:solidFill>
+                <a:latin typeface="Yu Gothic" pitchFamily="34" charset="0"/>
+                <a:ea typeface="Yu Gothic" pitchFamily="34" charset="-122"/>
+                <a:cs typeface="Yu Gothic" pitchFamily="34" charset="-120"/>
+              </a:rPr>
+              <a:t>狙い　</a:t>
+            </a:r>
+            <a:pPr indent="0" marL="0">
+              <a:lnSpc>
+                <a:spcPct val="90000"/>
+              </a:lnSpc>
+              <a:buNone/>
+            </a:pPr>
+            <a:r>
+              <a:rPr lang="en-US" sz="1150" b="1" dirty="0">
+                <a:solidFill>
+                  <a:srgbClr val="093259"/>
+                </a:solidFill>
+                <a:latin typeface="Yu Gothic" pitchFamily="34" charset="0"/>
+                <a:ea typeface="Yu Gothic" pitchFamily="34" charset="-122"/>
+                <a:cs typeface="Yu Gothic" pitchFamily="34" charset="-120"/>
+              </a:rPr>
+              <a:t>「警察には協力すべき」という感覚と、情報の管理権が衝突する。</a:t>
+            </a:r>
+            <a:endParaRPr lang="en-US" sz="1000" dirty="0"/>
+          </a:p>
+          <a:p>
+            <a:pPr indent="0" marL="0">
+              <a:lnSpc>
+                <a:spcPct val="90000"/>
+              </a:lnSpc>
+              <a:buNone/>
+            </a:pPr>
+            <a:r>
+              <a:rPr lang="en-US" sz="850" i="1" dirty="0">
+                <a:solidFill>
+                  <a:srgbClr val="5F7183"/>
+                </a:solidFill>
+                <a:latin typeface="Calibri" pitchFamily="34" charset="0"/>
+                <a:ea typeface="Calibri" pitchFamily="34" charset="-122"/>
+                <a:cs typeface="Calibri" pitchFamily="34" charset="-120"/>
+              </a:rPr>
+              <a:t>The instinct to help the police collides with who actually controls the information.</a:t>
+            </a:r>
+            <a:endParaRPr lang="en-US" sz="1000" dirty="0"/>
+          </a:p>
+        </p:txBody>
+      </p:sp>
+      <p:sp>
+        <p:nvSpPr>
+          <p:cNvPr id="7" name="Shape 4"/>
+          <p:cNvSpPr/>
+          <p:nvPr/>
+        </p:nvSpPr>
+        <p:spPr>
+          <a:xfrm>
+            <a:off x="640080" y="1773936"/>
+            <a:ext cx="5327752" cy="1274064"/>
+          </a:xfrm>
+          <a:prstGeom prst="roundRect">
+            <a:avLst>
+              <a:gd name="adj" fmla="val 2871"/>
+            </a:avLst>
+          </a:prstGeom>
+          <a:solidFill>
+            <a:srgbClr val="E4F4F0"/>
+          </a:solidFill>
+          <a:ln/>
+        </p:spPr>
+      </p:sp>
+      <p:sp>
+        <p:nvSpPr>
+          <p:cNvPr id="8" name="Text 5"/>
+          <p:cNvSpPr/>
+          <p:nvPr/>
+        </p:nvSpPr>
+        <p:spPr>
+          <a:xfrm>
+            <a:off x="877824" y="1865376"/>
+            <a:ext cx="4852264" cy="1091184"/>
+          </a:xfrm>
+          <a:prstGeom prst="rect">
+            <a:avLst/>
+          </a:prstGeom>
+          <a:noFill/>
+          <a:ln/>
+        </p:spPr>
+        <p:txBody>
+          <a:bodyPr wrap="square" lIns="0" tIns="0" rIns="0" bIns="0" rtlCol="0" anchor="t"/>
+          <a:lstStyle/>
+          <a:p>
+            <a:pPr indent="0" marL="0">
+              <a:lnSpc>
+                <a:spcPct val="90000"/>
+              </a:lnSpc>
+              <a:buNone/>
+            </a:pPr>
+            <a:r>
+              <a:rPr lang="en-US" sz="1050" b="1" dirty="0">
+                <a:solidFill>
+                  <a:srgbClr val="0D8A76"/>
+                </a:solidFill>
+                <a:latin typeface="Yu Gothic" pitchFamily="34" charset="0"/>
+                <a:ea typeface="Yu Gothic" pitchFamily="34" charset="-122"/>
+                <a:cs typeface="Yu Gothic" pitchFamily="34" charset="-120"/>
+              </a:rPr>
+              <a:t>警察官であること</a:t>
+            </a:r>
+            <a:endParaRPr lang="en-US" sz="1050" dirty="0"/>
+          </a:p>
+          <a:p>
+            <a:pPr indent="0" marL="0">
+              <a:lnSpc>
+                <a:spcPct val="90000"/>
+              </a:lnSpc>
+              <a:buNone/>
+            </a:pPr>
+            <a:r>
+              <a:rPr lang="en-US" sz="1050" b="1" dirty="0">
+                <a:solidFill>
+                  <a:srgbClr val="1B2733"/>
+                </a:solidFill>
+                <a:latin typeface="Yu Gothic" pitchFamily="34" charset="0"/>
+                <a:ea typeface="Yu Gothic" pitchFamily="34" charset="-122"/>
+                <a:cs typeface="Yu Gothic" pitchFamily="34" charset="-120"/>
+              </a:rPr>
+              <a:t>開示の根拠にならない。情報の管理権はクライアントにある。</a:t>
+            </a:r>
+            <a:endParaRPr lang="en-US" sz="1050" dirty="0"/>
+          </a:p>
+          <a:p>
+            <a:pPr indent="0" marL="0">
+              <a:lnSpc>
+                <a:spcPct val="90000"/>
+              </a:lnSpc>
+              <a:buNone/>
+            </a:pPr>
+            <a:r>
+              <a:rPr lang="en-US" sz="800" i="1" dirty="0">
+                <a:solidFill>
+                  <a:srgbClr val="5F7183"/>
+                </a:solidFill>
+                <a:latin typeface="Calibri" pitchFamily="34" charset="0"/>
+                <a:ea typeface="Calibri" pitchFamily="34" charset="-122"/>
+                <a:cs typeface="Calibri" pitchFamily="34" charset="-120"/>
+              </a:rPr>
+              <a:t>Not a basis for disclosure. The client controls the information.</a:t>
+            </a:r>
+            <a:endParaRPr lang="en-US" sz="1050" dirty="0"/>
+          </a:p>
+        </p:txBody>
+      </p:sp>
+      <p:sp>
+        <p:nvSpPr>
+          <p:cNvPr id="9" name="Shape 6"/>
+          <p:cNvSpPr/>
+          <p:nvPr/>
+        </p:nvSpPr>
+        <p:spPr>
+          <a:xfrm>
+            <a:off x="6223864" y="1773936"/>
+            <a:ext cx="5327752" cy="1274064"/>
+          </a:xfrm>
+          <a:prstGeom prst="roundRect">
+            <a:avLst>
+              <a:gd name="adj" fmla="val 2871"/>
+            </a:avLst>
+          </a:prstGeom>
+          <a:solidFill>
+            <a:srgbClr val="EFF4F8"/>
+          </a:solidFill>
+          <a:ln/>
+        </p:spPr>
+      </p:sp>
+      <p:sp>
+        <p:nvSpPr>
+          <p:cNvPr id="10" name="Text 7"/>
+          <p:cNvSpPr/>
+          <p:nvPr/>
+        </p:nvSpPr>
+        <p:spPr>
+          <a:xfrm>
+            <a:off x="6461608" y="1865376"/>
+            <a:ext cx="4852264" cy="1091184"/>
+          </a:xfrm>
+          <a:prstGeom prst="rect">
+            <a:avLst/>
+          </a:prstGeom>
+          <a:noFill/>
+          <a:ln/>
+        </p:spPr>
+        <p:txBody>
+          <a:bodyPr wrap="square" lIns="0" tIns="0" rIns="0" bIns="0" rtlCol="0" anchor="t"/>
+          <a:lstStyle/>
+          <a:p>
+            <a:pPr indent="0" marL="0">
+              <a:lnSpc>
+                <a:spcPct val="90000"/>
+              </a:lnSpc>
+              <a:buNone/>
+            </a:pPr>
+            <a:r>
+              <a:rPr lang="en-US" sz="1050" b="1" dirty="0">
+                <a:solidFill>
+                  <a:srgbClr val="093259"/>
+                </a:solidFill>
+                <a:latin typeface="Yu Gothic" pitchFamily="34" charset="0"/>
+                <a:ea typeface="Yu Gothic" pitchFamily="34" charset="-122"/>
+                <a:cs typeface="Yu Gothic" pitchFamily="34" charset="-120"/>
+              </a:rPr>
+              <a:t>警備員の権限</a:t>
+            </a:r>
+            <a:endParaRPr lang="en-US" sz="1050" dirty="0"/>
+          </a:p>
+          <a:p>
+            <a:pPr indent="0" marL="0">
+              <a:lnSpc>
+                <a:spcPct val="90000"/>
+              </a:lnSpc>
+              <a:buNone/>
+            </a:pPr>
+            <a:r>
+              <a:rPr lang="en-US" sz="1050" b="1" dirty="0">
+                <a:solidFill>
+                  <a:srgbClr val="1B2733"/>
+                </a:solidFill>
+                <a:latin typeface="Yu Gothic" pitchFamily="34" charset="0"/>
+                <a:ea typeface="Yu Gothic" pitchFamily="34" charset="-122"/>
+                <a:cs typeface="Yu Gothic" pitchFamily="34" charset="-120"/>
+              </a:rPr>
+              <a:t>開示の可否を判断する立場にない。取り次ぐところまで。</a:t>
+            </a:r>
+            <a:endParaRPr lang="en-US" sz="1050" dirty="0"/>
+          </a:p>
+          <a:p>
+            <a:pPr indent="0" marL="0">
+              <a:lnSpc>
+                <a:spcPct val="90000"/>
+              </a:lnSpc>
+              <a:buNone/>
+            </a:pPr>
+            <a:r>
+              <a:rPr lang="en-US" sz="800" i="1" dirty="0">
+                <a:solidFill>
+                  <a:srgbClr val="5F7183"/>
+                </a:solidFill>
+                <a:latin typeface="Calibri" pitchFamily="34" charset="0"/>
+                <a:ea typeface="Calibri" pitchFamily="34" charset="-122"/>
+                <a:cs typeface="Calibri" pitchFamily="34" charset="-120"/>
+              </a:rPr>
+              <a:t>You are not in a position to decide. Your role ends at referral.</a:t>
+            </a:r>
+            <a:endParaRPr lang="en-US" sz="1050" dirty="0"/>
+          </a:p>
+        </p:txBody>
+      </p:sp>
+      <p:sp>
+        <p:nvSpPr>
+          <p:cNvPr id="11" name="Shape 8"/>
+          <p:cNvSpPr/>
+          <p:nvPr/>
+        </p:nvSpPr>
+        <p:spPr>
+          <a:xfrm>
+            <a:off x="640080" y="3176016"/>
+            <a:ext cx="5327752" cy="1274064"/>
+          </a:xfrm>
+          <a:prstGeom prst="roundRect">
+            <a:avLst>
+              <a:gd name="adj" fmla="val 2871"/>
+            </a:avLst>
+          </a:prstGeom>
+          <a:solidFill>
+            <a:srgbClr val="EFF4F8"/>
+          </a:solidFill>
+          <a:ln/>
+        </p:spPr>
+      </p:sp>
+      <p:sp>
+        <p:nvSpPr>
+          <p:cNvPr id="12" name="Text 9"/>
+          <p:cNvSpPr/>
+          <p:nvPr/>
+        </p:nvSpPr>
+        <p:spPr>
+          <a:xfrm>
+            <a:off x="877824" y="3267456"/>
+            <a:ext cx="4852264" cy="1091184"/>
+          </a:xfrm>
+          <a:prstGeom prst="rect">
+            <a:avLst/>
+          </a:prstGeom>
+          <a:noFill/>
+          <a:ln/>
+        </p:spPr>
+        <p:txBody>
+          <a:bodyPr wrap="square" lIns="0" tIns="0" rIns="0" bIns="0" rtlCol="0" anchor="t"/>
+          <a:lstStyle/>
+          <a:p>
+            <a:pPr indent="0" marL="0">
+              <a:lnSpc>
+                <a:spcPct val="90000"/>
+              </a:lnSpc>
+              <a:buNone/>
+            </a:pPr>
+            <a:r>
+              <a:rPr lang="en-US" sz="1050" b="1" dirty="0">
+                <a:solidFill>
+                  <a:srgbClr val="093259"/>
+                </a:solidFill>
+                <a:latin typeface="Yu Gothic" pitchFamily="34" charset="0"/>
+                <a:ea typeface="Yu Gothic" pitchFamily="34" charset="-122"/>
+                <a:cs typeface="Yu Gothic" pitchFamily="34" charset="-120"/>
+              </a:rPr>
+              <a:t>身分確認</a:t>
+            </a:r>
+            <a:endParaRPr lang="en-US" sz="1050" dirty="0"/>
+          </a:p>
+          <a:p>
+            <a:pPr indent="0" marL="0">
+              <a:lnSpc>
+                <a:spcPct val="90000"/>
+              </a:lnSpc>
+              <a:buNone/>
+            </a:pPr>
+            <a:r>
+              <a:rPr lang="en-US" sz="1050" b="1" dirty="0">
+                <a:solidFill>
+                  <a:srgbClr val="1B2733"/>
+                </a:solidFill>
+                <a:latin typeface="Yu Gothic" pitchFamily="34" charset="0"/>
+                <a:ea typeface="Yu Gothic" pitchFamily="34" charset="-122"/>
+                <a:cs typeface="Yu Gothic" pitchFamily="34" charset="-120"/>
+              </a:rPr>
+              <a:t>求めてよい。所属、階級、氏名、連絡先を控える。失礼ではない。</a:t>
+            </a:r>
+            <a:endParaRPr lang="en-US" sz="1050" dirty="0"/>
+          </a:p>
+          <a:p>
+            <a:pPr indent="0" marL="0">
+              <a:lnSpc>
+                <a:spcPct val="90000"/>
+              </a:lnSpc>
+              <a:buNone/>
+            </a:pPr>
+            <a:r>
+              <a:rPr lang="en-US" sz="800" i="1" dirty="0">
+                <a:solidFill>
+                  <a:srgbClr val="5F7183"/>
+                </a:solidFill>
+                <a:latin typeface="Calibri" pitchFamily="34" charset="0"/>
+                <a:ea typeface="Calibri" pitchFamily="34" charset="-122"/>
+                <a:cs typeface="Calibri" pitchFamily="34" charset="-120"/>
+              </a:rPr>
+              <a:t>Ask. Note the unit, rank, name and contact. It is not rude.</a:t>
+            </a:r>
+            <a:endParaRPr lang="en-US" sz="1050" dirty="0"/>
+          </a:p>
+        </p:txBody>
+      </p:sp>
+      <p:sp>
+        <p:nvSpPr>
+          <p:cNvPr id="13" name="Shape 10"/>
+          <p:cNvSpPr/>
+          <p:nvPr/>
+        </p:nvSpPr>
+        <p:spPr>
+          <a:xfrm>
+            <a:off x="6223864" y="3176016"/>
+            <a:ext cx="5327752" cy="1274064"/>
+          </a:xfrm>
+          <a:prstGeom prst="roundRect">
+            <a:avLst>
+              <a:gd name="adj" fmla="val 2871"/>
+            </a:avLst>
+          </a:prstGeom>
+          <a:solidFill>
+            <a:srgbClr val="EFF4F8"/>
+          </a:solidFill>
+          <a:ln/>
+        </p:spPr>
+      </p:sp>
+      <p:sp>
+        <p:nvSpPr>
+          <p:cNvPr id="14" name="Text 11"/>
+          <p:cNvSpPr/>
+          <p:nvPr/>
+        </p:nvSpPr>
+        <p:spPr>
+          <a:xfrm>
+            <a:off x="6461608" y="3267456"/>
+            <a:ext cx="4852264" cy="1091184"/>
+          </a:xfrm>
+          <a:prstGeom prst="rect">
+            <a:avLst/>
+          </a:prstGeom>
+          <a:noFill/>
+          <a:ln/>
+        </p:spPr>
+        <p:txBody>
+          <a:bodyPr wrap="square" lIns="0" tIns="0" rIns="0" bIns="0" rtlCol="0" anchor="t"/>
+          <a:lstStyle/>
+          <a:p>
+            <a:pPr indent="0" marL="0">
+              <a:lnSpc>
+                <a:spcPct val="90000"/>
+              </a:lnSpc>
+              <a:buNone/>
+            </a:pPr>
+            <a:r>
+              <a:rPr lang="en-US" sz="1050" b="1" dirty="0">
+                <a:solidFill>
+                  <a:srgbClr val="093259"/>
+                </a:solidFill>
+                <a:latin typeface="Yu Gothic" pitchFamily="34" charset="0"/>
+                <a:ea typeface="Yu Gothic" pitchFamily="34" charset="-122"/>
+                <a:cs typeface="Yu Gothic" pitchFamily="34" charset="-120"/>
+              </a:rPr>
+              <a:t>上長不在</a:t>
+            </a:r>
+            <a:endParaRPr lang="en-US" sz="1050" dirty="0"/>
+          </a:p>
+          <a:p>
+            <a:pPr indent="0" marL="0">
+              <a:lnSpc>
+                <a:spcPct val="90000"/>
+              </a:lnSpc>
+              <a:buNone/>
+            </a:pPr>
+            <a:r>
+              <a:rPr lang="en-US" sz="1050" b="1" dirty="0">
+                <a:solidFill>
+                  <a:srgbClr val="1B2733"/>
+                </a:solidFill>
+                <a:latin typeface="Yu Gothic" pitchFamily="34" charset="0"/>
+                <a:ea typeface="Yu Gothic" pitchFamily="34" charset="-122"/>
+                <a:cs typeface="Yu Gothic" pitchFamily="34" charset="-120"/>
+              </a:rPr>
+              <a:t>緊急連絡体制の次順位者へ。不在を理由に自分で判断しない。</a:t>
+            </a:r>
+            <a:endParaRPr lang="en-US" sz="1050" dirty="0"/>
+          </a:p>
+          <a:p>
+            <a:pPr indent="0" marL="0">
+              <a:lnSpc>
+                <a:spcPct val="90000"/>
+              </a:lnSpc>
+              <a:buNone/>
+            </a:pPr>
+            <a:r>
+              <a:rPr lang="en-US" sz="800" i="1" dirty="0">
+                <a:solidFill>
+                  <a:srgbClr val="5F7183"/>
+                </a:solidFill>
+                <a:latin typeface="Calibri" pitchFamily="34" charset="0"/>
+                <a:ea typeface="Calibri" pitchFamily="34" charset="-122"/>
+                <a:cs typeface="Calibri" pitchFamily="34" charset="-120"/>
+              </a:rPr>
+              <a:t>Go to the next person on the call-out list. Absence is not authority to decide.</a:t>
+            </a:r>
+            <a:endParaRPr lang="en-US" sz="1050" dirty="0"/>
+          </a:p>
+        </p:txBody>
+      </p:sp>
+      <p:sp>
+        <p:nvSpPr>
+          <p:cNvPr id="15" name="Shape 12"/>
+          <p:cNvSpPr/>
+          <p:nvPr/>
+        </p:nvSpPr>
+        <p:spPr>
+          <a:xfrm>
+            <a:off x="640080" y="4578096"/>
+            <a:ext cx="5327752" cy="1274064"/>
+          </a:xfrm>
+          <a:prstGeom prst="roundRect">
+            <a:avLst>
+              <a:gd name="adj" fmla="val 2871"/>
+            </a:avLst>
+          </a:prstGeom>
+          <a:solidFill>
+            <a:srgbClr val="EFF4F8"/>
+          </a:solidFill>
+          <a:ln/>
+        </p:spPr>
+      </p:sp>
+      <p:sp>
+        <p:nvSpPr>
+          <p:cNvPr id="16" name="Text 13"/>
+          <p:cNvSpPr/>
+          <p:nvPr/>
+        </p:nvSpPr>
+        <p:spPr>
+          <a:xfrm>
+            <a:off x="877824" y="4669536"/>
+            <a:ext cx="4852264" cy="1091184"/>
+          </a:xfrm>
+          <a:prstGeom prst="rect">
+            <a:avLst/>
+          </a:prstGeom>
+          <a:noFill/>
+          <a:ln/>
+        </p:spPr>
+        <p:txBody>
+          <a:bodyPr wrap="square" lIns="0" tIns="0" rIns="0" bIns="0" rtlCol="0" anchor="t"/>
+          <a:lstStyle/>
+          <a:p>
+            <a:pPr indent="0" marL="0">
+              <a:lnSpc>
+                <a:spcPct val="90000"/>
+              </a:lnSpc>
+              <a:buNone/>
+            </a:pPr>
+            <a:r>
+              <a:rPr lang="en-US" sz="1050" b="1" dirty="0">
+                <a:solidFill>
+                  <a:srgbClr val="093259"/>
+                </a:solidFill>
+                <a:latin typeface="Yu Gothic" pitchFamily="34" charset="0"/>
+                <a:ea typeface="Yu Gothic" pitchFamily="34" charset="-122"/>
+                <a:cs typeface="Yu Gothic" pitchFamily="34" charset="-120"/>
+              </a:rPr>
+              <a:t>「任意で協力を」</a:t>
+            </a:r>
+            <a:endParaRPr lang="en-US" sz="1050" dirty="0"/>
+          </a:p>
+          <a:p>
+            <a:pPr indent="0" marL="0">
+              <a:lnSpc>
+                <a:spcPct val="90000"/>
+              </a:lnSpc>
+              <a:buNone/>
+            </a:pPr>
+            <a:r>
+              <a:rPr lang="en-US" sz="1050" b="1" dirty="0">
+                <a:solidFill>
+                  <a:srgbClr val="1B2733"/>
+                </a:solidFill>
+                <a:latin typeface="Yu Gothic" pitchFamily="34" charset="0"/>
+                <a:ea typeface="Yu Gothic" pitchFamily="34" charset="-122"/>
+                <a:cs typeface="Yu Gothic" pitchFamily="34" charset="-120"/>
+              </a:rPr>
+              <a:t>任意であるからこそ、応じるか否かはクライアントが決める。</a:t>
+            </a:r>
+            <a:endParaRPr lang="en-US" sz="1050" dirty="0"/>
+          </a:p>
+          <a:p>
+            <a:pPr indent="0" marL="0">
+              <a:lnSpc>
+                <a:spcPct val="90000"/>
+              </a:lnSpc>
+              <a:buNone/>
+            </a:pPr>
+            <a:r>
+              <a:rPr lang="en-US" sz="800" i="1" dirty="0">
+                <a:solidFill>
+                  <a:srgbClr val="5F7183"/>
+                </a:solidFill>
+                <a:latin typeface="Calibri" pitchFamily="34" charset="0"/>
+                <a:ea typeface="Calibri" pitchFamily="34" charset="-122"/>
+                <a:cs typeface="Calibri" pitchFamily="34" charset="-120"/>
+              </a:rPr>
+              <a:t>Precisely because it is voluntary, the client decides whether to comply.</a:t>
+            </a:r>
+            <a:endParaRPr lang="en-US" sz="1050" dirty="0"/>
+          </a:p>
+        </p:txBody>
+      </p:sp>
+      <p:sp>
+        <p:nvSpPr>
+          <p:cNvPr id="17" name="Shape 14"/>
+          <p:cNvSpPr/>
+          <p:nvPr/>
+        </p:nvSpPr>
+        <p:spPr>
+          <a:xfrm>
+            <a:off x="6223864" y="4578096"/>
+            <a:ext cx="5327752" cy="1274064"/>
+          </a:xfrm>
+          <a:prstGeom prst="roundRect">
+            <a:avLst>
+              <a:gd name="adj" fmla="val 2871"/>
+            </a:avLst>
+          </a:prstGeom>
+          <a:solidFill>
+            <a:srgbClr val="E4F4F0"/>
+          </a:solidFill>
+          <a:ln/>
+        </p:spPr>
+      </p:sp>
+      <p:sp>
+        <p:nvSpPr>
+          <p:cNvPr id="18" name="Text 15"/>
+          <p:cNvSpPr/>
+          <p:nvPr/>
+        </p:nvSpPr>
+        <p:spPr>
+          <a:xfrm>
+            <a:off x="6461608" y="4669536"/>
+            <a:ext cx="4852264" cy="1091184"/>
+          </a:xfrm>
+          <a:prstGeom prst="rect">
+            <a:avLst/>
+          </a:prstGeom>
+          <a:noFill/>
+          <a:ln/>
+        </p:spPr>
+        <p:txBody>
+          <a:bodyPr wrap="square" lIns="0" tIns="0" rIns="0" bIns="0" rtlCol="0" anchor="t"/>
+          <a:lstStyle/>
+          <a:p>
+            <a:pPr indent="0" marL="0">
+              <a:lnSpc>
+                <a:spcPct val="90000"/>
+              </a:lnSpc>
+              <a:buNone/>
+            </a:pPr>
+            <a:r>
+              <a:rPr lang="en-US" sz="1050" b="1" dirty="0">
+                <a:solidFill>
+                  <a:srgbClr val="0D8A76"/>
+                </a:solidFill>
+                <a:latin typeface="Yu Gothic" pitchFamily="34" charset="0"/>
+                <a:ea typeface="Yu Gothic" pitchFamily="34" charset="-122"/>
+                <a:cs typeface="Yu Gothic" pitchFamily="34" charset="-120"/>
+              </a:rPr>
+              <a:t>有無だけ教えて</a:t>
+            </a:r>
+            <a:endParaRPr lang="en-US" sz="1050" dirty="0"/>
+          </a:p>
+          <a:p>
+            <a:pPr indent="0" marL="0">
+              <a:lnSpc>
+                <a:spcPct val="90000"/>
+              </a:lnSpc>
+              <a:buNone/>
+            </a:pPr>
+            <a:r>
+              <a:rPr lang="en-US" sz="1050" b="1" dirty="0">
+                <a:solidFill>
+                  <a:srgbClr val="1B2733"/>
+                </a:solidFill>
+                <a:latin typeface="Yu Gothic" pitchFamily="34" charset="0"/>
+                <a:ea typeface="Yu Gothic" pitchFamily="34" charset="-122"/>
+                <a:cs typeface="Yu Gothic" pitchFamily="34" charset="-120"/>
+              </a:rPr>
+              <a:t>有無を答えるのも開示。第10時限10-Bと同じ構造。</a:t>
+            </a:r>
+            <a:endParaRPr lang="en-US" sz="1050" dirty="0"/>
+          </a:p>
+          <a:p>
+            <a:pPr indent="0" marL="0">
+              <a:lnSpc>
+                <a:spcPct val="90000"/>
+              </a:lnSpc>
+              <a:buNone/>
+            </a:pPr>
+            <a:r>
+              <a:rPr lang="en-US" sz="800" i="1" dirty="0">
+                <a:solidFill>
+                  <a:srgbClr val="5F7183"/>
+                </a:solidFill>
+                <a:latin typeface="Calibri" pitchFamily="34" charset="0"/>
+                <a:ea typeface="Calibri" pitchFamily="34" charset="-122"/>
+                <a:cs typeface="Calibri" pitchFamily="34" charset="-120"/>
+              </a:rPr>
+              <a:t>Confirming yes or no is still disclosure. Same structure as case 10-B.</a:t>
+            </a:r>
+            <a:endParaRPr lang="en-US" sz="1050" dirty="0"/>
+          </a:p>
+        </p:txBody>
+      </p:sp>
+      <p:sp>
+        <p:nvSpPr>
+          <p:cNvPr id="19" name="Text 16"/>
+          <p:cNvSpPr/>
+          <p:nvPr/>
+        </p:nvSpPr>
+        <p:spPr>
+          <a:xfrm>
+            <a:off x="640080" y="5907024"/>
+            <a:ext cx="10911535" cy="310896"/>
+          </a:xfrm>
+          <a:prstGeom prst="rect">
+            <a:avLst/>
+          </a:prstGeom>
+          <a:noFill/>
+          <a:ln/>
+        </p:spPr>
+        <p:txBody>
+          <a:bodyPr wrap="square" lIns="0" tIns="0" rIns="0" bIns="0" rtlCol="0" anchor="t"/>
+          <a:lstStyle/>
+          <a:p>
+            <a:pPr indent="0" marL="0">
+              <a:lnSpc>
+                <a:spcPct val="88000"/>
+              </a:lnSpc>
+              <a:buNone/>
+            </a:pPr>
+            <a:r>
+              <a:rPr lang="en-US" sz="900" b="1" dirty="0">
+                <a:solidFill>
+                  <a:srgbClr val="0D8A76"/>
+                </a:solidFill>
+                <a:latin typeface="Yu Gothic" pitchFamily="34" charset="0"/>
+                <a:ea typeface="Yu Gothic" pitchFamily="34" charset="-122"/>
+                <a:cs typeface="Yu Gothic" pitchFamily="34" charset="-120"/>
+              </a:rPr>
+              <a:t>Site SOP優先　</a:t>
+            </a:r>
+            <a:pPr indent="0" marL="0">
+              <a:lnSpc>
+                <a:spcPct val="88000"/>
+              </a:lnSpc>
+              <a:buNone/>
+            </a:pPr>
+            <a:r>
+              <a:rPr lang="en-US" sz="900" dirty="0">
+                <a:solidFill>
+                  <a:srgbClr val="1B2733"/>
+                </a:solidFill>
+                <a:latin typeface="Yu Gothic" pitchFamily="34" charset="0"/>
+                <a:ea typeface="Yu Gothic" pitchFamily="34" charset="-122"/>
+                <a:cs typeface="Yu Gothic" pitchFamily="34" charset="-120"/>
+              </a:rPr>
+              <a:t>模範解答は判断の型を示すものです。実際の手順は各現場のSite SOPと警備指令書が優先します。</a:t>
+            </a:r>
+            <a:endParaRPr lang="en-US" sz="900" dirty="0"/>
+          </a:p>
+          <a:p>
+            <a:pPr indent="0" marL="0">
+              <a:lnSpc>
+                <a:spcPct val="88000"/>
+              </a:lnSpc>
+              <a:buNone/>
+            </a:pPr>
+            <a:r>
+              <a:rPr lang="en-US" sz="750" i="1" dirty="0">
+                <a:solidFill>
+                  <a:srgbClr val="5F7183"/>
+                </a:solidFill>
+                <a:latin typeface="Calibri" pitchFamily="34" charset="0"/>
+                <a:ea typeface="Calibri" pitchFamily="34" charset="-122"/>
+                <a:cs typeface="Calibri" pitchFamily="34" charset="-120"/>
+              </a:rPr>
+              <a:t>These answers show a pattern of reasoning. The Site SOP and post orders always take precedence.</a:t>
+            </a:r>
+            <a:endParaRPr lang="en-US" sz="900" dirty="0"/>
+          </a:p>
+        </p:txBody>
+      </p:sp>
+      <p:sp>
+        <p:nvSpPr>
+          <p:cNvPr id="20" name="Text 17"/>
+          <p:cNvSpPr/>
+          <p:nvPr/>
+        </p:nvSpPr>
+        <p:spPr>
+          <a:xfrm>
+            <a:off x="640080" y="6272784"/>
+            <a:ext cx="9905695" cy="237744"/>
+          </a:xfrm>
+          <a:prstGeom prst="rect">
+            <a:avLst/>
+          </a:prstGeom>
+          <a:noFill/>
+          <a:ln/>
+        </p:spPr>
+        <p:txBody>
+          <a:bodyPr wrap="square" lIns="0" tIns="0" rIns="0" bIns="0" rtlCol="0" anchor="t"/>
+          <a:lstStyle/>
+          <a:p>
+            <a:pPr indent="0" marL="0">
+              <a:buNone/>
+            </a:pPr>
+            <a:r>
+              <a:rPr lang="en-US" sz="750" b="1" dirty="0">
+                <a:solidFill>
+                  <a:srgbClr val="D6E0E9"/>
+                </a:solidFill>
+                <a:latin typeface="Yu Gothic" pitchFamily="34" charset="0"/>
+                <a:ea typeface="Yu Gothic" pitchFamily="34" charset="-122"/>
+                <a:cs typeface="Yu Gothic" pitchFamily="34" charset="-120"/>
+              </a:rPr>
+              <a:t>ソース　</a:t>
+            </a:r>
+            <a:pPr indent="0" marL="0">
+              <a:buNone/>
+            </a:pPr>
+            <a:r>
+              <a:rPr lang="en-US" sz="750" dirty="0">
+                <a:solidFill>
+                  <a:srgbClr val="5F7183"/>
+                </a:solidFill>
+                <a:latin typeface="Yu Gothic" pitchFamily="34" charset="0"/>
+                <a:ea typeface="Yu Gothic" pitchFamily="34" charset="-122"/>
+                <a:cs typeface="Yu Gothic" pitchFamily="34" charset="-120"/>
+              </a:rPr>
+              <a:t>個人情報保護法、刑事訴訟法、警察官職務執行法</a:t>
+            </a:r>
+            <a:endParaRPr lang="en-US" sz="750" dirty="0"/>
+          </a:p>
+        </p:txBody>
+      </p:sp>
+      <p:sp>
+        <p:nvSpPr>
+          <p:cNvPr id="21" name="Text 18"/>
+          <p:cNvSpPr/>
+          <p:nvPr/>
+        </p:nvSpPr>
+        <p:spPr>
+          <a:xfrm>
+            <a:off x="640080" y="6382512"/>
+            <a:ext cx="8778240" cy="292608"/>
+          </a:xfrm>
+          <a:prstGeom prst="rect">
+            <a:avLst/>
+          </a:prstGeom>
+          <a:noFill/>
+          <a:ln/>
+        </p:spPr>
+        <p:txBody>
+          <a:bodyPr wrap="square" lIns="0" tIns="0" rIns="0" bIns="0" rtlCol="0" anchor="ctr"/>
+          <a:lstStyle/>
+          <a:p>
+            <a:pPr indent="0" marL="0">
+              <a:buNone/>
+            </a:pPr>
+            <a:r>
+              <a:rPr lang="en-US" sz="900" dirty="0">
+                <a:solidFill>
+                  <a:srgbClr val="5F7183"/>
+                </a:solidFill>
+                <a:latin typeface="Yu Gothic" pitchFamily="34" charset="0"/>
+                <a:ea typeface="Yu Gothic" pitchFamily="34" charset="-122"/>
+                <a:cs typeface="Yu Gothic" pitchFamily="34" charset="-120"/>
+              </a:rPr>
+              <a:t>第2時限｜基本教育2 警備業法その他警備業務の適正な実施に必要な法令  </a:t>
+            </a:r>
+            <a:pPr indent="0" marL="0">
+              <a:buNone/>
+            </a:pPr>
+            <a:r>
+              <a:rPr lang="en-US" sz="850" i="1" dirty="0">
+                <a:solidFill>
+                  <a:srgbClr val="D6E0E9"/>
+                </a:solidFill>
+                <a:latin typeface="Calibri" pitchFamily="34" charset="0"/>
+                <a:ea typeface="Calibri" pitchFamily="34" charset="-122"/>
+                <a:cs typeface="Calibri" pitchFamily="34" charset="-120"/>
+              </a:rPr>
+              <a:t>Period 2 | Basic Training 2 — Applicable Law</a:t>
+            </a:r>
+            <a:endParaRPr lang="en-US" sz="900" dirty="0"/>
+          </a:p>
+        </p:txBody>
+      </p:sp>
+      <p:sp>
+        <p:nvSpPr>
+          <p:cNvPr id="22" name="Text 19"/>
+          <p:cNvSpPr/>
+          <p:nvPr/>
+        </p:nvSpPr>
+        <p:spPr>
+          <a:xfrm>
+            <a:off x="10637215" y="6382512"/>
+            <a:ext cx="914400" cy="292608"/>
+          </a:xfrm>
+          <a:prstGeom prst="rect">
+            <a:avLst/>
+          </a:prstGeom>
+          <a:noFill/>
+          <a:ln/>
+        </p:spPr>
+        <p:txBody>
+          <a:bodyPr wrap="square" lIns="0" tIns="0" rIns="0" bIns="0" rtlCol="0" anchor="ctr"/>
+          <a:lstStyle/>
+          <a:p>
+            <a:pPr algn="r" indent="0" marL="0">
+              <a:buNone/>
+            </a:pPr>
+            <a:r>
+              <a:rPr lang="en-US" sz="1000" dirty="0">
+                <a:solidFill>
+                  <a:srgbClr val="5F7183"/>
+                </a:solidFill>
+                <a:latin typeface="Calibri" pitchFamily="34" charset="0"/>
+                <a:ea typeface="Calibri" pitchFamily="34" charset="-122"/>
+                <a:cs typeface="Calibri" pitchFamily="34" charset="-120"/>
+              </a:rPr>
+              <a:t>9</a:t>
             </a:r>
             <a:endParaRPr lang="en-US" sz="1000" dirty="0"/>
           </a:p>

--- a/decks/02_2限_法令.pptx
+++ b/decks/02_2限_法令.pptx
@@ -10401,7 +10401,7 @@
                 <a:ea typeface="Yu Gothic" pitchFamily="34" charset="-122"/>
                 <a:cs typeface="Yu Gothic" pitchFamily="34" charset="-120"/>
               </a:rPr>
-              <a:t>TTX 2-A 講評 ― 模範解答</a:t>
+              <a:t>TTX 2-A 模範解答</a:t>
             </a:r>
             <a:endParaRPr lang="en-US" sz="2300" dirty="0"/>
           </a:p>
@@ -10421,7 +10421,7 @@
                 <a:ea typeface="Calibri" pitchFamily="34" charset="-122"/>
                 <a:cs typeface="Calibri" pitchFamily="34" charset="-120"/>
               </a:rPr>
-              <a:t>TTX 2-A Debrief — Model Answer</a:t>
+              <a:t>TTX 2-A — Model Answers</a:t>
             </a:r>
             <a:endParaRPr lang="en-US" sz="2300" dirty="0"/>
           </a:p>
@@ -10490,97 +10490,18 @@
       </p:sp>
       <p:sp>
         <p:nvSpPr>
-          <p:cNvPr id="6" name="Text 3"/>
+          <p:cNvPr id="6" name="Shape 3"/>
           <p:cNvSpPr/>
           <p:nvPr/>
         </p:nvSpPr>
         <p:spPr>
           <a:xfrm>
             <a:off x="640080" y="1188720"/>
-            <a:ext cx="10911535" cy="530352"/>
-          </a:xfrm>
-          <a:prstGeom prst="rect">
-            <a:avLst/>
-          </a:prstGeom>
-          <a:noFill/>
-          <a:ln/>
-        </p:spPr>
-        <p:txBody>
-          <a:bodyPr wrap="square" lIns="0" tIns="0" rIns="0" bIns="0" rtlCol="0" anchor="t"/>
-          <a:lstStyle/>
-          <a:p>
-            <a:pPr indent="0" marL="0">
-              <a:lnSpc>
-                <a:spcPct val="90000"/>
-              </a:lnSpc>
-              <a:buNone/>
-            </a:pPr>
-            <a:r>
-              <a:rPr lang="en-US" sz="1000" b="1" dirty="0">
-                <a:solidFill>
-                  <a:srgbClr val="0D8A76"/>
-                </a:solidFill>
-                <a:latin typeface="Yu Gothic" pitchFamily="34" charset="0"/>
-                <a:ea typeface="Yu Gothic" pitchFamily="34" charset="-122"/>
-                <a:cs typeface="Yu Gothic" pitchFamily="34" charset="-120"/>
-              </a:rPr>
-              <a:t>狙い　</a:t>
-            </a:r>
-            <a:pPr indent="0" marL="0">
-              <a:lnSpc>
-                <a:spcPct val="90000"/>
-              </a:lnSpc>
-              <a:buNone/>
-            </a:pPr>
-            <a:r>
-              <a:rPr lang="en-US" sz="1150" b="1" dirty="0">
-                <a:solidFill>
-                  <a:srgbClr val="093259"/>
-                </a:solidFill>
-                <a:latin typeface="Yu Gothic" pitchFamily="34" charset="0"/>
-                <a:ea typeface="Yu Gothic" pitchFamily="34" charset="-122"/>
-                <a:cs typeface="Yu Gothic" pitchFamily="34" charset="-120"/>
-              </a:rPr>
-              <a:t>上位者の指示でも、警備員の権限は増えない。断り方までが答え。</a:t>
-            </a:r>
-            <a:endParaRPr lang="en-US" sz="1000" dirty="0"/>
-          </a:p>
-          <a:p>
-            <a:pPr indent="0" marL="0">
-              <a:lnSpc>
-                <a:spcPct val="90000"/>
-              </a:lnSpc>
-              <a:buNone/>
-            </a:pPr>
-            <a:r>
-              <a:rPr lang="en-US" sz="850" i="1" dirty="0">
-                <a:solidFill>
-                  <a:srgbClr val="5F7183"/>
-                </a:solidFill>
-                <a:latin typeface="Calibri" pitchFamily="34" charset="0"/>
-                <a:ea typeface="Calibri" pitchFamily="34" charset="-122"/>
-                <a:cs typeface="Calibri" pitchFamily="34" charset="-120"/>
-              </a:rPr>
-              <a:t>An order from above does not expand your powers. How you decline is part of the answer.</a:t>
-            </a:r>
-            <a:endParaRPr lang="en-US" sz="1000" dirty="0"/>
-          </a:p>
-        </p:txBody>
-      </p:sp>
-      <p:sp>
-        <p:nvSpPr>
-          <p:cNvPr id="7" name="Shape 4"/>
-          <p:cNvSpPr/>
-          <p:nvPr/>
-        </p:nvSpPr>
-        <p:spPr>
-          <a:xfrm>
-            <a:off x="640080" y="1773936"/>
-            <a:ext cx="5327752" cy="1091184"/>
+            <a:ext cx="10911535" cy="683514"/>
           </a:xfrm>
           <a:prstGeom prst="roundRect">
             <a:avLst>
-              <a:gd name="adj" fmla="val 3352"/>
+              <a:gd name="adj" fmla="val 5351"/>
             </a:avLst>
           </a:prstGeom>
           <a:solidFill>
@@ -10591,53 +10512,112 @@
       </p:sp>
       <p:sp>
         <p:nvSpPr>
+          <p:cNvPr id="7" name="Shape 4"/>
+          <p:cNvSpPr/>
+          <p:nvPr/>
+        </p:nvSpPr>
+        <p:spPr>
+          <a:xfrm>
+            <a:off x="841248" y="1356741"/>
+            <a:ext cx="347472" cy="347472"/>
+          </a:xfrm>
+          <a:prstGeom prst="ellipse">
+            <a:avLst/>
+          </a:prstGeom>
+          <a:solidFill>
+            <a:srgbClr val="12B198"/>
+          </a:solidFill>
+          <a:ln/>
+        </p:spPr>
+      </p:sp>
+      <p:sp>
+        <p:nvSpPr>
           <p:cNvPr id="8" name="Text 5"/>
           <p:cNvSpPr/>
           <p:nvPr/>
         </p:nvSpPr>
         <p:spPr>
           <a:xfrm>
-            <a:off x="877824" y="1865376"/>
-            <a:ext cx="4852264" cy="908304"/>
-          </a:xfrm>
-          <a:prstGeom prst="rect">
-            <a:avLst/>
-          </a:prstGeom>
-          <a:noFill/>
-          <a:ln/>
-        </p:spPr>
-        <p:txBody>
-          <a:bodyPr wrap="square" lIns="0" tIns="0" rIns="0" bIns="0" rtlCol="0" anchor="t"/>
-          <a:lstStyle/>
-          <a:p>
-            <a:pPr indent="0" marL="0">
-              <a:lnSpc>
-                <a:spcPct val="90000"/>
-              </a:lnSpc>
-              <a:buNone/>
-            </a:pPr>
-            <a:r>
-              <a:rPr lang="en-US" sz="1050" b="1" dirty="0">
-                <a:solidFill>
-                  <a:srgbClr val="093259"/>
-                </a:solidFill>
-                <a:latin typeface="Yu Gothic" pitchFamily="34" charset="0"/>
-                <a:ea typeface="Yu Gothic" pitchFamily="34" charset="-122"/>
-                <a:cs typeface="Yu Gothic" pitchFamily="34" charset="-120"/>
-              </a:rPr>
-              <a:t>犯罪か</a:t>
-            </a:r>
-            <a:endParaRPr lang="en-US" sz="1050" dirty="0"/>
-          </a:p>
-          <a:p>
-            <a:pPr indent="0" marL="0">
-              <a:lnSpc>
-                <a:spcPct val="90000"/>
-              </a:lnSpc>
-              <a:buNone/>
-            </a:pPr>
-            <a:r>
-              <a:rPr lang="en-US" sz="1050" b="1" dirty="0">
+            <a:off x="841248" y="1356741"/>
+            <a:ext cx="347472" cy="347472"/>
+          </a:xfrm>
+          <a:prstGeom prst="rect">
+            <a:avLst/>
+          </a:prstGeom>
+          <a:noFill/>
+          <a:ln/>
+        </p:spPr>
+        <p:txBody>
+          <a:bodyPr wrap="square" lIns="0" tIns="0" rIns="0" bIns="0" rtlCol="0" anchor="ctr"/>
+          <a:lstStyle/>
+          <a:p>
+            <a:pPr algn="ctr" indent="0" marL="0">
+              <a:buNone/>
+            </a:pPr>
+            <a:r>
+              <a:rPr lang="en-US" sz="1100" b="1" dirty="0">
+                <a:solidFill>
+                  <a:srgbClr val="FFFFFF"/>
+                </a:solidFill>
+                <a:latin typeface="Calibri" pitchFamily="34" charset="0"/>
+                <a:ea typeface="Calibri" pitchFamily="34" charset="-122"/>
+                <a:cs typeface="Calibri" pitchFamily="34" charset="-120"/>
+              </a:rPr>
+              <a:t>1</a:t>
+            </a:r>
+            <a:endParaRPr lang="en-US" sz="1100" dirty="0"/>
+          </a:p>
+        </p:txBody>
+      </p:sp>
+      <p:sp>
+        <p:nvSpPr>
+          <p:cNvPr id="9" name="Text 6"/>
+          <p:cNvSpPr/>
+          <p:nvPr/>
+        </p:nvSpPr>
+        <p:spPr>
+          <a:xfrm>
+            <a:off x="1280160" y="1252728"/>
+            <a:ext cx="10033711" cy="555498"/>
+          </a:xfrm>
+          <a:prstGeom prst="rect">
+            <a:avLst/>
+          </a:prstGeom>
+          <a:noFill/>
+          <a:ln/>
+        </p:spPr>
+        <p:txBody>
+          <a:bodyPr wrap="square" lIns="0" tIns="0" rIns="0" bIns="0" rtlCol="0" anchor="ctr"/>
+          <a:lstStyle/>
+          <a:p>
+            <a:pPr indent="0" marL="0">
+              <a:lnSpc>
+                <a:spcPct val="88000"/>
+              </a:lnSpc>
+              <a:buNone/>
+            </a:pPr>
+            <a:r>
+              <a:rPr lang="en-US" sz="900" dirty="0">
+                <a:solidFill>
+                  <a:srgbClr val="5F7183"/>
+                </a:solidFill>
+                <a:latin typeface="Yu Gothic" pitchFamily="34" charset="0"/>
+                <a:ea typeface="Yu Gothic" pitchFamily="34" charset="-122"/>
+                <a:cs typeface="Yu Gothic" pitchFamily="34" charset="-120"/>
+              </a:rPr>
+              <a:t>問1　犯罪か、確認事項か</a:t>
+            </a:r>
+            <a:endParaRPr lang="en-US" sz="900" dirty="0"/>
+          </a:p>
+          <a:p>
+            <a:pPr indent="0" marL="0">
+              <a:lnSpc>
+                <a:spcPct val="88000"/>
+              </a:lnSpc>
+              <a:buNone/>
+            </a:pPr>
+            <a:r>
+              <a:rPr lang="en-US" sz="1200" b="1" dirty="0">
                 <a:solidFill>
                   <a:srgbClr val="1B2733"/>
                 </a:solidFill>
@@ -10645,14 +10625,14 @@
                 <a:ea typeface="Yu Gothic" pitchFamily="34" charset="-122"/>
                 <a:cs typeface="Yu Gothic" pitchFamily="34" charset="-120"/>
               </a:rPr>
-              <a:t>社員が会社備品を持つこと自体は犯罪ではない。明白性は満たしにくい。</a:t>
-            </a:r>
-            <a:endParaRPr lang="en-US" sz="1050" dirty="0"/>
-          </a:p>
-          <a:p>
-            <a:pPr indent="0" marL="0">
-              <a:lnSpc>
-                <a:spcPct val="90000"/>
+              <a:t>確認が必要な事象。社員が会社備品を持つこと自体は犯罪ではなく、明白性を満たさない。</a:t>
+            </a:r>
+            <a:endParaRPr lang="en-US" sz="900" dirty="0"/>
+          </a:p>
+          <a:p>
+            <a:pPr indent="0" marL="0">
+              <a:lnSpc>
+                <a:spcPct val="88000"/>
               </a:lnSpc>
               <a:buNone/>
             </a:pPr>
@@ -10665,26 +10645,26 @@
                 <a:ea typeface="Calibri" pitchFamily="34" charset="-122"/>
                 <a:cs typeface="Calibri" pitchFamily="34" charset="-120"/>
               </a:rPr>
-              <a:t>An employee holding company property is not itself a crime. The obviousness test is rarely met.</a:t>
-            </a:r>
-            <a:endParaRPr lang="en-US" sz="1050" dirty="0"/>
-          </a:p>
-        </p:txBody>
-      </p:sp>
-      <p:sp>
-        <p:nvSpPr>
-          <p:cNvPr id="9" name="Shape 6"/>
-          <p:cNvSpPr/>
-          <p:nvPr/>
-        </p:nvSpPr>
-        <p:spPr>
-          <a:xfrm>
-            <a:off x="6223864" y="1773936"/>
-            <a:ext cx="5327752" cy="1091184"/>
+              <a:t>A matter to verify. An employee holding company property is not itself a crime, and the obviousness test is not met.</a:t>
+            </a:r>
+            <a:endParaRPr lang="en-US" sz="900" dirty="0"/>
+          </a:p>
+        </p:txBody>
+      </p:sp>
+      <p:sp>
+        <p:nvSpPr>
+          <p:cNvPr id="10" name="Shape 7"/>
+          <p:cNvSpPr/>
+          <p:nvPr/>
+        </p:nvSpPr>
+        <p:spPr>
+          <a:xfrm>
+            <a:off x="640080" y="1972818"/>
+            <a:ext cx="10911535" cy="683514"/>
           </a:xfrm>
           <a:prstGeom prst="roundRect">
             <a:avLst>
-              <a:gd name="adj" fmla="val 3352"/>
+              <a:gd name="adj" fmla="val 5351"/>
             </a:avLst>
           </a:prstGeom>
           <a:solidFill>
@@ -10695,53 +10675,112 @@
       </p:sp>
       <p:sp>
         <p:nvSpPr>
-          <p:cNvPr id="10" name="Text 7"/>
-          <p:cNvSpPr/>
-          <p:nvPr/>
-        </p:nvSpPr>
-        <p:spPr>
-          <a:xfrm>
-            <a:off x="6461608" y="1865376"/>
-            <a:ext cx="4852264" cy="908304"/>
-          </a:xfrm>
-          <a:prstGeom prst="rect">
-            <a:avLst/>
-          </a:prstGeom>
-          <a:noFill/>
-          <a:ln/>
-        </p:spPr>
-        <p:txBody>
-          <a:bodyPr wrap="square" lIns="0" tIns="0" rIns="0" bIns="0" rtlCol="0" anchor="t"/>
-          <a:lstStyle/>
-          <a:p>
-            <a:pPr indent="0" marL="0">
-              <a:lnSpc>
-                <a:spcPct val="90000"/>
-              </a:lnSpc>
-              <a:buNone/>
-            </a:pPr>
-            <a:r>
-              <a:rPr lang="en-US" sz="1050" b="1" dirty="0">
-                <a:solidFill>
-                  <a:srgbClr val="093259"/>
-                </a:solidFill>
-                <a:latin typeface="Yu Gothic" pitchFamily="34" charset="0"/>
-                <a:ea typeface="Yu Gothic" pitchFamily="34" charset="-122"/>
-                <a:cs typeface="Yu Gothic" pitchFamily="34" charset="-120"/>
-              </a:rPr>
-              <a:t>情報の欠落</a:t>
-            </a:r>
-            <a:endParaRPr lang="en-US" sz="1050" dirty="0"/>
-          </a:p>
-          <a:p>
-            <a:pPr indent="0" marL="0">
-              <a:lnSpc>
-                <a:spcPct val="90000"/>
-              </a:lnSpc>
-              <a:buNone/>
-            </a:pPr>
-            <a:r>
-              <a:rPr lang="en-US" sz="1050" b="1" dirty="0">
+          <p:cNvPr id="11" name="Shape 8"/>
+          <p:cNvSpPr/>
+          <p:nvPr/>
+        </p:nvSpPr>
+        <p:spPr>
+          <a:xfrm>
+            <a:off x="841248" y="2140839"/>
+            <a:ext cx="347472" cy="347472"/>
+          </a:xfrm>
+          <a:prstGeom prst="ellipse">
+            <a:avLst/>
+          </a:prstGeom>
+          <a:solidFill>
+            <a:srgbClr val="12B198"/>
+          </a:solidFill>
+          <a:ln/>
+        </p:spPr>
+      </p:sp>
+      <p:sp>
+        <p:nvSpPr>
+          <p:cNvPr id="12" name="Text 9"/>
+          <p:cNvSpPr/>
+          <p:nvPr/>
+        </p:nvSpPr>
+        <p:spPr>
+          <a:xfrm>
+            <a:off x="841248" y="2140839"/>
+            <a:ext cx="347472" cy="347472"/>
+          </a:xfrm>
+          <a:prstGeom prst="rect">
+            <a:avLst/>
+          </a:prstGeom>
+          <a:noFill/>
+          <a:ln/>
+        </p:spPr>
+        <p:txBody>
+          <a:bodyPr wrap="square" lIns="0" tIns="0" rIns="0" bIns="0" rtlCol="0" anchor="ctr"/>
+          <a:lstStyle/>
+          <a:p>
+            <a:pPr algn="ctr" indent="0" marL="0">
+              <a:buNone/>
+            </a:pPr>
+            <a:r>
+              <a:rPr lang="en-US" sz="1100" b="1" dirty="0">
+                <a:solidFill>
+                  <a:srgbClr val="FFFFFF"/>
+                </a:solidFill>
+                <a:latin typeface="Calibri" pitchFamily="34" charset="0"/>
+                <a:ea typeface="Calibri" pitchFamily="34" charset="-122"/>
+                <a:cs typeface="Calibri" pitchFamily="34" charset="-120"/>
+              </a:rPr>
+              <a:t>2</a:t>
+            </a:r>
+            <a:endParaRPr lang="en-US" sz="1100" dirty="0"/>
+          </a:p>
+        </p:txBody>
+      </p:sp>
+      <p:sp>
+        <p:nvSpPr>
+          <p:cNvPr id="13" name="Text 10"/>
+          <p:cNvSpPr/>
+          <p:nvPr/>
+        </p:nvSpPr>
+        <p:spPr>
+          <a:xfrm>
+            <a:off x="1280160" y="2036826"/>
+            <a:ext cx="10033711" cy="555498"/>
+          </a:xfrm>
+          <a:prstGeom prst="rect">
+            <a:avLst/>
+          </a:prstGeom>
+          <a:noFill/>
+          <a:ln/>
+        </p:spPr>
+        <p:txBody>
+          <a:bodyPr wrap="square" lIns="0" tIns="0" rIns="0" bIns="0" rtlCol="0" anchor="ctr"/>
+          <a:lstStyle/>
+          <a:p>
+            <a:pPr indent="0" marL="0">
+              <a:lnSpc>
+                <a:spcPct val="88000"/>
+              </a:lnSpc>
+              <a:buNone/>
+            </a:pPr>
+            <a:r>
+              <a:rPr lang="en-US" sz="900" dirty="0">
+                <a:solidFill>
+                  <a:srgbClr val="5F7183"/>
+                </a:solidFill>
+                <a:latin typeface="Yu Gothic" pitchFamily="34" charset="0"/>
+                <a:ea typeface="Yu Gothic" pitchFamily="34" charset="-122"/>
+                <a:cs typeface="Yu Gothic" pitchFamily="34" charset="-120"/>
+              </a:rPr>
+              <a:t>問2　様式を知らないことの影響</a:t>
+            </a:r>
+            <a:endParaRPr lang="en-US" sz="900" dirty="0"/>
+          </a:p>
+          <a:p>
+            <a:pPr indent="0" marL="0">
+              <a:lnSpc>
+                <a:spcPct val="88000"/>
+              </a:lnSpc>
+              <a:buNone/>
+            </a:pPr>
+            <a:r>
+              <a:rPr lang="en-US" sz="1200" b="1" dirty="0">
                 <a:solidFill>
                   <a:srgbClr val="1B2733"/>
                 </a:solidFill>
@@ -10749,14 +10788,14 @@
                 <a:ea typeface="Yu Gothic" pitchFamily="34" charset="-122"/>
                 <a:cs typeface="Yu Gothic" pitchFamily="34" charset="-120"/>
               </a:rPr>
-              <a:t>様式を知らないことを判断の根拠にしない。確認できる者に確認する。</a:t>
-            </a:r>
-            <a:endParaRPr lang="en-US" sz="1050" dirty="0"/>
-          </a:p>
-          <a:p>
-            <a:pPr indent="0" marL="0">
-              <a:lnSpc>
-                <a:spcPct val="90000"/>
+              <a:t>判断の根拠にしない。知らないなら確認できる者に確認する。</a:t>
+            </a:r>
+            <a:endParaRPr lang="en-US" sz="900" dirty="0"/>
+          </a:p>
+          <a:p>
+            <a:pPr indent="0" marL="0">
+              <a:lnSpc>
+                <a:spcPct val="88000"/>
               </a:lnSpc>
               <a:buNone/>
             </a:pPr>
@@ -10769,26 +10808,189 @@
                 <a:ea typeface="Calibri" pitchFamily="34" charset="-122"/>
                 <a:cs typeface="Calibri" pitchFamily="34" charset="-120"/>
               </a:rPr>
-              <a:t>Not knowing the form is not a basis for a decision. Ask someone who can confirm.</a:t>
-            </a:r>
-            <a:endParaRPr lang="en-US" sz="1050" dirty="0"/>
-          </a:p>
-        </p:txBody>
-      </p:sp>
-      <p:sp>
-        <p:nvSpPr>
-          <p:cNvPr id="11" name="Shape 8"/>
-          <p:cNvSpPr/>
-          <p:nvPr/>
-        </p:nvSpPr>
-        <p:spPr>
-          <a:xfrm>
-            <a:off x="640080" y="2993136"/>
-            <a:ext cx="5327752" cy="1091184"/>
+              <a:t>It is not a basis for a decision. If you do not know, ask someone who can confirm.</a:t>
+            </a:r>
+            <a:endParaRPr lang="en-US" sz="900" dirty="0"/>
+          </a:p>
+        </p:txBody>
+      </p:sp>
+      <p:sp>
+        <p:nvSpPr>
+          <p:cNvPr id="14" name="Shape 11"/>
+          <p:cNvSpPr/>
+          <p:nvPr/>
+        </p:nvSpPr>
+        <p:spPr>
+          <a:xfrm>
+            <a:off x="640080" y="2756916"/>
+            <a:ext cx="10911535" cy="683514"/>
           </a:xfrm>
           <a:prstGeom prst="roundRect">
             <a:avLst>
-              <a:gd name="adj" fmla="val 3352"/>
+              <a:gd name="adj" fmla="val 5351"/>
+            </a:avLst>
+          </a:prstGeom>
+          <a:solidFill>
+            <a:srgbClr val="E4F4F0"/>
+          </a:solidFill>
+          <a:ln/>
+        </p:spPr>
+      </p:sp>
+      <p:sp>
+        <p:nvSpPr>
+          <p:cNvPr id="15" name="Shape 12"/>
+          <p:cNvSpPr/>
+          <p:nvPr/>
+        </p:nvSpPr>
+        <p:spPr>
+          <a:xfrm>
+            <a:off x="841248" y="2924937"/>
+            <a:ext cx="347472" cy="347472"/>
+          </a:xfrm>
+          <a:prstGeom prst="ellipse">
+            <a:avLst/>
+          </a:prstGeom>
+          <a:solidFill>
+            <a:srgbClr val="12B198"/>
+          </a:solidFill>
+          <a:ln/>
+        </p:spPr>
+      </p:sp>
+      <p:sp>
+        <p:nvSpPr>
+          <p:cNvPr id="16" name="Text 13"/>
+          <p:cNvSpPr/>
+          <p:nvPr/>
+        </p:nvSpPr>
+        <p:spPr>
+          <a:xfrm>
+            <a:off x="841248" y="2924937"/>
+            <a:ext cx="347472" cy="347472"/>
+          </a:xfrm>
+          <a:prstGeom prst="rect">
+            <a:avLst/>
+          </a:prstGeom>
+          <a:noFill/>
+          <a:ln/>
+        </p:spPr>
+        <p:txBody>
+          <a:bodyPr wrap="square" lIns="0" tIns="0" rIns="0" bIns="0" rtlCol="0" anchor="ctr"/>
+          <a:lstStyle/>
+          <a:p>
+            <a:pPr algn="ctr" indent="0" marL="0">
+              <a:buNone/>
+            </a:pPr>
+            <a:r>
+              <a:rPr lang="en-US" sz="1100" b="1" dirty="0">
+                <a:solidFill>
+                  <a:srgbClr val="FFFFFF"/>
+                </a:solidFill>
+                <a:latin typeface="Calibri" pitchFamily="34" charset="0"/>
+                <a:ea typeface="Calibri" pitchFamily="34" charset="-122"/>
+                <a:cs typeface="Calibri" pitchFamily="34" charset="-120"/>
+              </a:rPr>
+              <a:t>3</a:t>
+            </a:r>
+            <a:endParaRPr lang="en-US" sz="1100" dirty="0"/>
+          </a:p>
+        </p:txBody>
+      </p:sp>
+      <p:sp>
+        <p:nvSpPr>
+          <p:cNvPr id="17" name="Text 14"/>
+          <p:cNvSpPr/>
+          <p:nvPr/>
+        </p:nvSpPr>
+        <p:spPr>
+          <a:xfrm>
+            <a:off x="1280160" y="2820924"/>
+            <a:ext cx="10033711" cy="555498"/>
+          </a:xfrm>
+          <a:prstGeom prst="rect">
+            <a:avLst/>
+          </a:prstGeom>
+          <a:noFill/>
+          <a:ln/>
+        </p:spPr>
+        <p:txBody>
+          <a:bodyPr wrap="square" lIns="0" tIns="0" rIns="0" bIns="0" rtlCol="0" anchor="ctr"/>
+          <a:lstStyle/>
+          <a:p>
+            <a:pPr indent="0" marL="0">
+              <a:lnSpc>
+                <a:spcPct val="88000"/>
+              </a:lnSpc>
+              <a:buNone/>
+            </a:pPr>
+            <a:r>
+              <a:rPr lang="en-US" sz="900" dirty="0">
+                <a:solidFill>
+                  <a:srgbClr val="5F7183"/>
+                </a:solidFill>
+                <a:latin typeface="Yu Gothic" pitchFamily="34" charset="0"/>
+                <a:ea typeface="Yu Gothic" pitchFamily="34" charset="-122"/>
+                <a:cs typeface="Yu Gothic" pitchFamily="34" charset="-120"/>
+              </a:rPr>
+              <a:t>問3　できること／できないこと</a:t>
+            </a:r>
+            <a:endParaRPr lang="en-US" sz="900" dirty="0"/>
+          </a:p>
+          <a:p>
+            <a:pPr indent="0" marL="0">
+              <a:lnSpc>
+                <a:spcPct val="88000"/>
+              </a:lnSpc>
+              <a:buNone/>
+            </a:pPr>
+            <a:r>
+              <a:rPr lang="en-US" sz="1200" b="1" dirty="0">
+                <a:solidFill>
+                  <a:srgbClr val="1B2733"/>
+                </a:solidFill>
+                <a:latin typeface="Yu Gothic" pitchFamily="34" charset="0"/>
+                <a:ea typeface="Yu Gothic" pitchFamily="34" charset="-122"/>
+                <a:cs typeface="Yu Gothic" pitchFamily="34" charset="-120"/>
+              </a:rPr>
+              <a:t>できるのは確認の依頼、記録、報告。強制、取り上げ、進路をふさぐことはできない。</a:t>
+            </a:r>
+            <a:endParaRPr lang="en-US" sz="900" dirty="0"/>
+          </a:p>
+          <a:p>
+            <a:pPr indent="0" marL="0">
+              <a:lnSpc>
+                <a:spcPct val="88000"/>
+              </a:lnSpc>
+              <a:buNone/>
+            </a:pPr>
+            <a:r>
+              <a:rPr lang="en-US" sz="800" i="1" dirty="0">
+                <a:solidFill>
+                  <a:srgbClr val="5F7183"/>
+                </a:solidFill>
+                <a:latin typeface="Calibri" pitchFamily="34" charset="0"/>
+                <a:ea typeface="Calibri" pitchFamily="34" charset="-122"/>
+                <a:cs typeface="Calibri" pitchFamily="34" charset="-120"/>
+              </a:rPr>
+              <a:t>You may request, record and report. You may not compel, seize, or block their path.</a:t>
+            </a:r>
+            <a:endParaRPr lang="en-US" sz="900" dirty="0"/>
+          </a:p>
+        </p:txBody>
+      </p:sp>
+      <p:sp>
+        <p:nvSpPr>
+          <p:cNvPr id="18" name="Shape 15"/>
+          <p:cNvSpPr/>
+          <p:nvPr/>
+        </p:nvSpPr>
+        <p:spPr>
+          <a:xfrm>
+            <a:off x="640080" y="3541014"/>
+            <a:ext cx="10911535" cy="683514"/>
+          </a:xfrm>
+          <a:prstGeom prst="roundRect">
+            <a:avLst>
+              <a:gd name="adj" fmla="val 5351"/>
             </a:avLst>
           </a:prstGeom>
           <a:solidFill>
@@ -10799,53 +11001,112 @@
       </p:sp>
       <p:sp>
         <p:nvSpPr>
-          <p:cNvPr id="12" name="Text 9"/>
-          <p:cNvSpPr/>
-          <p:nvPr/>
-        </p:nvSpPr>
-        <p:spPr>
-          <a:xfrm>
-            <a:off x="877824" y="3084576"/>
-            <a:ext cx="4852264" cy="908304"/>
-          </a:xfrm>
-          <a:prstGeom prst="rect">
-            <a:avLst/>
-          </a:prstGeom>
-          <a:noFill/>
-          <a:ln/>
-        </p:spPr>
-        <p:txBody>
-          <a:bodyPr wrap="square" lIns="0" tIns="0" rIns="0" bIns="0" rtlCol="0" anchor="t"/>
-          <a:lstStyle/>
-          <a:p>
-            <a:pPr indent="0" marL="0">
-              <a:lnSpc>
-                <a:spcPct val="90000"/>
-              </a:lnSpc>
-              <a:buNone/>
-            </a:pPr>
-            <a:r>
-              <a:rPr lang="en-US" sz="1050" b="1" dirty="0">
-                <a:solidFill>
-                  <a:srgbClr val="093259"/>
-                </a:solidFill>
-                <a:latin typeface="Yu Gothic" pitchFamily="34" charset="0"/>
-                <a:ea typeface="Yu Gothic" pitchFamily="34" charset="-122"/>
-                <a:cs typeface="Yu Gothic" pitchFamily="34" charset="-120"/>
-              </a:rPr>
-              <a:t>できること</a:t>
-            </a:r>
-            <a:endParaRPr lang="en-US" sz="1050" dirty="0"/>
-          </a:p>
-          <a:p>
-            <a:pPr indent="0" marL="0">
-              <a:lnSpc>
-                <a:spcPct val="90000"/>
-              </a:lnSpc>
-              <a:buNone/>
-            </a:pPr>
-            <a:r>
-              <a:rPr lang="en-US" sz="1050" b="1" dirty="0">
+          <p:cNvPr id="19" name="Shape 16"/>
+          <p:cNvSpPr/>
+          <p:nvPr/>
+        </p:nvSpPr>
+        <p:spPr>
+          <a:xfrm>
+            <a:off x="841248" y="3709035"/>
+            <a:ext cx="347472" cy="347472"/>
+          </a:xfrm>
+          <a:prstGeom prst="ellipse">
+            <a:avLst/>
+          </a:prstGeom>
+          <a:solidFill>
+            <a:srgbClr val="12B198"/>
+          </a:solidFill>
+          <a:ln/>
+        </p:spPr>
+      </p:sp>
+      <p:sp>
+        <p:nvSpPr>
+          <p:cNvPr id="20" name="Text 17"/>
+          <p:cNvSpPr/>
+          <p:nvPr/>
+        </p:nvSpPr>
+        <p:spPr>
+          <a:xfrm>
+            <a:off x="841248" y="3709035"/>
+            <a:ext cx="347472" cy="347472"/>
+          </a:xfrm>
+          <a:prstGeom prst="rect">
+            <a:avLst/>
+          </a:prstGeom>
+          <a:noFill/>
+          <a:ln/>
+        </p:spPr>
+        <p:txBody>
+          <a:bodyPr wrap="square" lIns="0" tIns="0" rIns="0" bIns="0" rtlCol="0" anchor="ctr"/>
+          <a:lstStyle/>
+          <a:p>
+            <a:pPr algn="ctr" indent="0" marL="0">
+              <a:buNone/>
+            </a:pPr>
+            <a:r>
+              <a:rPr lang="en-US" sz="1100" b="1" dirty="0">
+                <a:solidFill>
+                  <a:srgbClr val="FFFFFF"/>
+                </a:solidFill>
+                <a:latin typeface="Calibri" pitchFamily="34" charset="0"/>
+                <a:ea typeface="Calibri" pitchFamily="34" charset="-122"/>
+                <a:cs typeface="Calibri" pitchFamily="34" charset="-120"/>
+              </a:rPr>
+              <a:t>4</a:t>
+            </a:r>
+            <a:endParaRPr lang="en-US" sz="1100" dirty="0"/>
+          </a:p>
+        </p:txBody>
+      </p:sp>
+      <p:sp>
+        <p:nvSpPr>
+          <p:cNvPr id="21" name="Text 18"/>
+          <p:cNvSpPr/>
+          <p:nvPr/>
+        </p:nvSpPr>
+        <p:spPr>
+          <a:xfrm>
+            <a:off x="1280160" y="3605022"/>
+            <a:ext cx="10033711" cy="555498"/>
+          </a:xfrm>
+          <a:prstGeom prst="rect">
+            <a:avLst/>
+          </a:prstGeom>
+          <a:noFill/>
+          <a:ln/>
+        </p:spPr>
+        <p:txBody>
+          <a:bodyPr wrap="square" lIns="0" tIns="0" rIns="0" bIns="0" rtlCol="0" anchor="ctr"/>
+          <a:lstStyle/>
+          <a:p>
+            <a:pPr indent="0" marL="0">
+              <a:lnSpc>
+                <a:spcPct val="88000"/>
+              </a:lnSpc>
+              <a:buNone/>
+            </a:pPr>
+            <a:r>
+              <a:rPr lang="en-US" sz="900" dirty="0">
+                <a:solidFill>
+                  <a:srgbClr val="5F7183"/>
+                </a:solidFill>
+                <a:latin typeface="Yu Gothic" pitchFamily="34" charset="0"/>
+                <a:ea typeface="Yu Gothic" pitchFamily="34" charset="-122"/>
+                <a:cs typeface="Yu Gothic" pitchFamily="34" charset="-120"/>
+              </a:rPr>
+              <a:t>問4　誰に何分以内に報告するか</a:t>
+            </a:r>
+            <a:endParaRPr lang="en-US" sz="900" dirty="0"/>
+          </a:p>
+          <a:p>
+            <a:pPr indent="0" marL="0">
+              <a:lnSpc>
+                <a:spcPct val="88000"/>
+              </a:lnSpc>
+              <a:buNone/>
+            </a:pPr>
+            <a:r>
+              <a:rPr lang="en-US" sz="1200" b="1" dirty="0">
                 <a:solidFill>
                   <a:srgbClr val="1B2733"/>
                 </a:solidFill>
@@ -10853,14 +11114,14 @@
                 <a:ea typeface="Yu Gothic" pitchFamily="34" charset="-122"/>
                 <a:cs typeface="Yu Gothic" pitchFamily="34" charset="-120"/>
               </a:rPr>
-              <a:t>確認の依頼、記録、報告。強制はできない。</a:t>
-            </a:r>
-            <a:endParaRPr lang="en-US" sz="1050" dirty="0"/>
-          </a:p>
-          <a:p>
-            <a:pPr indent="0" marL="0">
-              <a:lnSpc>
-                <a:spcPct val="90000"/>
+              <a:t>警備責任者へ即時。品目、型番、時刻、会話をそのまま伝える。</a:t>
+            </a:r>
+            <a:endParaRPr lang="en-US" sz="900" dirty="0"/>
+          </a:p>
+          <a:p>
+            <a:pPr indent="0" marL="0">
+              <a:lnSpc>
+                <a:spcPct val="88000"/>
               </a:lnSpc>
               <a:buNone/>
             </a:pPr>
@@ -10873,83 +11134,97 @@
                 <a:ea typeface="Calibri" pitchFamily="34" charset="-122"/>
                 <a:cs typeface="Calibri" pitchFamily="34" charset="-120"/>
               </a:rPr>
-              <a:t>Request, record, report. You cannot compel.</a:t>
-            </a:r>
-            <a:endParaRPr lang="en-US" sz="1050" dirty="0"/>
-          </a:p>
-        </p:txBody>
-      </p:sp>
-      <p:sp>
-        <p:nvSpPr>
-          <p:cNvPr id="13" name="Shape 10"/>
-          <p:cNvSpPr/>
-          <p:nvPr/>
-        </p:nvSpPr>
-        <p:spPr>
-          <a:xfrm>
-            <a:off x="6223864" y="2993136"/>
-            <a:ext cx="5327752" cy="1091184"/>
+              <a:t>The security supervisor, immediately: item, model, time, and what was said.</a:t>
+            </a:r>
+            <a:endParaRPr lang="en-US" sz="900" dirty="0"/>
+          </a:p>
+        </p:txBody>
+      </p:sp>
+      <p:sp>
+        <p:nvSpPr>
+          <p:cNvPr id="22" name="Shape 19"/>
+          <p:cNvSpPr/>
+          <p:nvPr/>
+        </p:nvSpPr>
+        <p:spPr>
+          <a:xfrm>
+            <a:off x="640080" y="4334256"/>
+            <a:ext cx="10911535" cy="420624"/>
           </a:xfrm>
           <a:prstGeom prst="roundRect">
             <a:avLst>
-              <a:gd name="adj" fmla="val 3352"/>
+              <a:gd name="adj" fmla="val 8696"/>
             </a:avLst>
           </a:prstGeom>
           <a:solidFill>
-            <a:srgbClr val="EFF4F8"/>
+            <a:srgbClr val="EEF6FA"/>
           </a:solidFill>
           <a:ln/>
         </p:spPr>
       </p:sp>
       <p:sp>
         <p:nvSpPr>
-          <p:cNvPr id="14" name="Text 11"/>
-          <p:cNvSpPr/>
-          <p:nvPr/>
-        </p:nvSpPr>
-        <p:spPr>
-          <a:xfrm>
-            <a:off x="6461608" y="3084576"/>
-            <a:ext cx="4852264" cy="908304"/>
-          </a:xfrm>
-          <a:prstGeom prst="rect">
-            <a:avLst/>
-          </a:prstGeom>
-          <a:noFill/>
-          <a:ln/>
-        </p:spPr>
-        <p:txBody>
-          <a:bodyPr wrap="square" lIns="0" tIns="0" rIns="0" bIns="0" rtlCol="0" anchor="t"/>
-          <a:lstStyle/>
-          <a:p>
-            <a:pPr indent="0" marL="0">
-              <a:lnSpc>
-                <a:spcPct val="90000"/>
-              </a:lnSpc>
-              <a:buNone/>
-            </a:pPr>
-            <a:r>
-              <a:rPr lang="en-US" sz="1050" b="1" dirty="0">
-                <a:solidFill>
-                  <a:srgbClr val="093259"/>
-                </a:solidFill>
-                <a:latin typeface="Yu Gothic" pitchFamily="34" charset="0"/>
-                <a:ea typeface="Yu Gothic" pitchFamily="34" charset="-122"/>
-                <a:cs typeface="Yu Gothic" pitchFamily="34" charset="-120"/>
-              </a:rPr>
-              <a:t>追うか</a:t>
-            </a:r>
-            <a:endParaRPr lang="en-US" sz="1050" dirty="0"/>
-          </a:p>
-          <a:p>
-            <a:pPr indent="0" marL="0">
-              <a:lnSpc>
-                <a:spcPct val="90000"/>
-              </a:lnSpc>
-              <a:buNone/>
-            </a:pPr>
-            <a:r>
-              <a:rPr lang="en-US" sz="1050" b="1" dirty="0">
+          <p:cNvPr id="23" name="Text 20"/>
+          <p:cNvSpPr/>
+          <p:nvPr/>
+        </p:nvSpPr>
+        <p:spPr>
+          <a:xfrm>
+            <a:off x="859536" y="4361688"/>
+            <a:ext cx="10472623" cy="365760"/>
+          </a:xfrm>
+          <a:prstGeom prst="rect">
+            <a:avLst/>
+          </a:prstGeom>
+          <a:noFill/>
+          <a:ln/>
+        </p:spPr>
+        <p:txBody>
+          <a:bodyPr wrap="square" lIns="0" tIns="0" rIns="0" bIns="0" rtlCol="0" anchor="ctr"/>
+          <a:lstStyle/>
+          <a:p>
+            <a:pPr indent="0" marL="0">
+              <a:lnSpc>
+                <a:spcPct val="86000"/>
+              </a:lnSpc>
+              <a:buNone/>
+            </a:pPr>
+            <a:r>
+              <a:rPr lang="en-US" sz="850" b="1" dirty="0">
+                <a:solidFill>
+                  <a:srgbClr val="0D8A76"/>
+                </a:solidFill>
+                <a:latin typeface="Yu Gothic" pitchFamily="34" charset="0"/>
+                <a:ea typeface="Yu Gothic" pitchFamily="34" charset="-122"/>
+                <a:cs typeface="Yu Gothic" pitchFamily="34" charset="-120"/>
+              </a:rPr>
+              <a:t>追加付与①　</a:t>
+            </a:r>
+            <a:pPr indent="0" marL="0">
+              <a:lnSpc>
+                <a:spcPct val="86000"/>
+              </a:lnSpc>
+              <a:buNone/>
+            </a:pPr>
+            <a:r>
+              <a:rPr lang="en-US" sz="850" dirty="0">
+                <a:solidFill>
+                  <a:srgbClr val="5F7183"/>
+                </a:solidFill>
+                <a:latin typeface="Yu Gothic" pitchFamily="34" charset="0"/>
+                <a:ea typeface="Yu Gothic" pitchFamily="34" charset="-122"/>
+                <a:cs typeface="Yu Gothic" pitchFamily="34" charset="-120"/>
+              </a:rPr>
+              <a:t>無線「出口で止めろ」　→　</a:t>
+            </a:r>
+            <a:pPr indent="0" marL="0">
+              <a:lnSpc>
+                <a:spcPct val="86000"/>
+              </a:lnSpc>
+              <a:buNone/>
+            </a:pPr>
+            <a:r>
+              <a:rPr lang="en-US" sz="1100" b="1" dirty="0">
                 <a:solidFill>
                   <a:srgbClr val="1B2733"/>
                 </a:solidFill>
@@ -10957,19 +11232,19 @@
                 <a:ea typeface="Yu Gothic" pitchFamily="34" charset="-122"/>
                 <a:cs typeface="Yu Gothic" pitchFamily="34" charset="-120"/>
               </a:rPr>
-              <a:t>追わない判断も成り立つ。有形力への発展と信用への影響を考える。</a:t>
-            </a:r>
-            <a:endParaRPr lang="en-US" sz="1050" dirty="0"/>
-          </a:p>
-          <a:p>
-            <a:pPr indent="0" marL="0">
-              <a:lnSpc>
-                <a:spcPct val="90000"/>
-              </a:lnSpc>
-              <a:buNone/>
-            </a:pPr>
-            <a:r>
-              <a:rPr lang="en-US" sz="800" i="1" dirty="0">
+              <a:t>上位者の指示でも権限は増えない。「実力での制止はできません。記録と報告を行います」と代替案を返す。</a:t>
+            </a:r>
+            <a:endParaRPr lang="en-US" sz="850" dirty="0"/>
+          </a:p>
+          <a:p>
+            <a:pPr indent="0" marL="0">
+              <a:lnSpc>
+                <a:spcPct val="86000"/>
+              </a:lnSpc>
+              <a:buNone/>
+            </a:pPr>
+            <a:r>
+              <a:rPr lang="en-US" sz="750" i="1" dirty="0">
                 <a:solidFill>
                   <a:srgbClr val="5F7183"/>
                 </a:solidFill>
@@ -10977,63 +11252,63 @@
                 <a:ea typeface="Calibri" pitchFamily="34" charset="-122"/>
                 <a:cs typeface="Calibri" pitchFamily="34" charset="-120"/>
               </a:rPr>
-              <a:t>Not following is defensible. Weigh escalation to force, and the effect on reputation.</a:t>
-            </a:r>
-            <a:endParaRPr lang="en-US" sz="1050" dirty="0"/>
-          </a:p>
-        </p:txBody>
-      </p:sp>
-      <p:sp>
-        <p:nvSpPr>
-          <p:cNvPr id="15" name="Shape 12"/>
-          <p:cNvSpPr/>
-          <p:nvPr/>
-        </p:nvSpPr>
-        <p:spPr>
-          <a:xfrm>
-            <a:off x="640080" y="4212336"/>
-            <a:ext cx="5327752" cy="1091184"/>
+              <a:t>An order from above does not expand your powers. Reply: "I cannot physically stop them. I will record and report."</a:t>
+            </a:r>
+            <a:endParaRPr lang="en-US" sz="850" dirty="0"/>
+          </a:p>
+        </p:txBody>
+      </p:sp>
+      <p:sp>
+        <p:nvSpPr>
+          <p:cNvPr id="24" name="Shape 21"/>
+          <p:cNvSpPr/>
+          <p:nvPr/>
+        </p:nvSpPr>
+        <p:spPr>
+          <a:xfrm>
+            <a:off x="640080" y="4828032"/>
+            <a:ext cx="10911535" cy="420624"/>
           </a:xfrm>
           <a:prstGeom prst="roundRect">
             <a:avLst>
-              <a:gd name="adj" fmla="val 3352"/>
+              <a:gd name="adj" fmla="val 8696"/>
             </a:avLst>
           </a:prstGeom>
           <a:solidFill>
-            <a:srgbClr val="E4F4F0"/>
+            <a:srgbClr val="EEF6FA"/>
           </a:solidFill>
           <a:ln/>
         </p:spPr>
       </p:sp>
       <p:sp>
         <p:nvSpPr>
-          <p:cNvPr id="16" name="Text 13"/>
-          <p:cNvSpPr/>
-          <p:nvPr/>
-        </p:nvSpPr>
-        <p:spPr>
-          <a:xfrm>
-            <a:off x="877824" y="4303776"/>
-            <a:ext cx="4852264" cy="908304"/>
-          </a:xfrm>
-          <a:prstGeom prst="rect">
-            <a:avLst/>
-          </a:prstGeom>
-          <a:noFill/>
-          <a:ln/>
-        </p:spPr>
-        <p:txBody>
-          <a:bodyPr wrap="square" lIns="0" tIns="0" rIns="0" bIns="0" rtlCol="0" anchor="t"/>
-          <a:lstStyle/>
-          <a:p>
-            <a:pPr indent="0" marL="0">
-              <a:lnSpc>
-                <a:spcPct val="90000"/>
-              </a:lnSpc>
-              <a:buNone/>
-            </a:pPr>
-            <a:r>
-              <a:rPr lang="en-US" sz="1050" b="1" dirty="0">
+          <p:cNvPr id="25" name="Text 22"/>
+          <p:cNvSpPr/>
+          <p:nvPr/>
+        </p:nvSpPr>
+        <p:spPr>
+          <a:xfrm>
+            <a:off x="859536" y="4855464"/>
+            <a:ext cx="10472623" cy="365760"/>
+          </a:xfrm>
+          <a:prstGeom prst="rect">
+            <a:avLst/>
+          </a:prstGeom>
+          <a:noFill/>
+          <a:ln/>
+        </p:spPr>
+        <p:txBody>
+          <a:bodyPr wrap="square" lIns="0" tIns="0" rIns="0" bIns="0" rtlCol="0" anchor="ctr"/>
+          <a:lstStyle/>
+          <a:p>
+            <a:pPr indent="0" marL="0">
+              <a:lnSpc>
+                <a:spcPct val="86000"/>
+              </a:lnSpc>
+              <a:buNone/>
+            </a:pPr>
+            <a:r>
+              <a:rPr lang="en-US" sz="850" b="1" dirty="0">
                 <a:solidFill>
                   <a:srgbClr val="0D8A76"/>
                 </a:solidFill>
@@ -11041,19 +11316,33 @@
                 <a:ea typeface="Yu Gothic" pitchFamily="34" charset="-122"/>
                 <a:cs typeface="Yu Gothic" pitchFamily="34" charset="-120"/>
               </a:rPr>
-              <a:t>「出口で止めろ」</a:t>
-            </a:r>
-            <a:endParaRPr lang="en-US" sz="1050" dirty="0"/>
-          </a:p>
-          <a:p>
-            <a:pPr indent="0" marL="0">
-              <a:lnSpc>
-                <a:spcPct val="90000"/>
-              </a:lnSpc>
-              <a:buNone/>
-            </a:pPr>
-            <a:r>
-              <a:rPr lang="en-US" sz="1050" b="1" dirty="0">
+              <a:t>追加付与②　</a:t>
+            </a:r>
+            <a:pPr indent="0" marL="0">
+              <a:lnSpc>
+                <a:spcPct val="86000"/>
+              </a:lnSpc>
+              <a:buNone/>
+            </a:pPr>
+            <a:r>
+              <a:rPr lang="en-US" sz="850" dirty="0">
+                <a:solidFill>
+                  <a:srgbClr val="5F7183"/>
+                </a:solidFill>
+                <a:latin typeface="Yu Gothic" pitchFamily="34" charset="0"/>
+                <a:ea typeface="Yu Gothic" pitchFamily="34" charset="-122"/>
+                <a:cs typeface="Yu Gothic" pitchFamily="34" charset="-120"/>
+              </a:rPr>
+              <a:t>そのまま出口へ向かった　→　</a:t>
+            </a:r>
+            <a:pPr indent="0" marL="0">
+              <a:lnSpc>
+                <a:spcPct val="86000"/>
+              </a:lnSpc>
+              <a:buNone/>
+            </a:pPr>
+            <a:r>
+              <a:rPr lang="en-US" sz="1100" b="1" dirty="0">
                 <a:solidFill>
                   <a:srgbClr val="1B2733"/>
                 </a:solidFill>
@@ -11061,19 +11350,19 @@
                 <a:ea typeface="Yu Gothic" pitchFamily="34" charset="-122"/>
                 <a:cs typeface="Yu Gothic" pitchFamily="34" charset="-120"/>
               </a:rPr>
-              <a:t>実力での制止はできない。指示に従っても権限は生じない。</a:t>
-            </a:r>
-            <a:endParaRPr lang="en-US" sz="1050" dirty="0"/>
-          </a:p>
-          <a:p>
-            <a:pPr indent="0" marL="0">
-              <a:lnSpc>
-                <a:spcPct val="90000"/>
-              </a:lnSpc>
-              <a:buNone/>
-            </a:pPr>
-            <a:r>
-              <a:rPr lang="en-US" sz="800" i="1" dirty="0">
+              <a:t>追わない。追跡は有形力に発展しやすく、安全と信用を同時に損なう。</a:t>
+            </a:r>
+            <a:endParaRPr lang="en-US" sz="850" dirty="0"/>
+          </a:p>
+          <a:p>
+            <a:pPr indent="0" marL="0">
+              <a:lnSpc>
+                <a:spcPct val="86000"/>
+              </a:lnSpc>
+              <a:buNone/>
+            </a:pPr>
+            <a:r>
+              <a:rPr lang="en-US" sz="750" i="1" dirty="0">
                 <a:solidFill>
                   <a:srgbClr val="5F7183"/>
                 </a:solidFill>
@@ -11081,130 +11370,26 @@
                 <a:ea typeface="Calibri" pitchFamily="34" charset="-122"/>
                 <a:cs typeface="Calibri" pitchFamily="34" charset="-120"/>
               </a:rPr>
-              <a:t>You cannot physically stop them. Obeying the order does not create authority.</a:t>
-            </a:r>
-            <a:endParaRPr lang="en-US" sz="1050" dirty="0"/>
-          </a:p>
-        </p:txBody>
-      </p:sp>
-      <p:sp>
-        <p:nvSpPr>
-          <p:cNvPr id="17" name="Shape 14"/>
-          <p:cNvSpPr/>
-          <p:nvPr/>
-        </p:nvSpPr>
-        <p:spPr>
-          <a:xfrm>
-            <a:off x="6223864" y="4212336"/>
-            <a:ext cx="5327752" cy="1091184"/>
+              <a:t>Do not follow. Pursuit escalates into force, and risks both safety and reputation.</a:t>
+            </a:r>
+            <a:endParaRPr lang="en-US" sz="850" dirty="0"/>
+          </a:p>
+        </p:txBody>
+      </p:sp>
+      <p:sp>
+        <p:nvSpPr>
+          <p:cNvPr id="26" name="Shape 23"/>
+          <p:cNvSpPr/>
+          <p:nvPr/>
+        </p:nvSpPr>
+        <p:spPr>
+          <a:xfrm>
+            <a:off x="640080" y="5358384"/>
+            <a:ext cx="10911535" cy="457200"/>
           </a:xfrm>
           <a:prstGeom prst="roundRect">
             <a:avLst>
-              <a:gd name="adj" fmla="val 3352"/>
-            </a:avLst>
-          </a:prstGeom>
-          <a:solidFill>
-            <a:srgbClr val="E4F4F0"/>
-          </a:solidFill>
-          <a:ln/>
-        </p:spPr>
-      </p:sp>
-      <p:sp>
-        <p:nvSpPr>
-          <p:cNvPr id="18" name="Text 15"/>
-          <p:cNvSpPr/>
-          <p:nvPr/>
-        </p:nvSpPr>
-        <p:spPr>
-          <a:xfrm>
-            <a:off x="6461608" y="4303776"/>
-            <a:ext cx="4852264" cy="908304"/>
-          </a:xfrm>
-          <a:prstGeom prst="rect">
-            <a:avLst/>
-          </a:prstGeom>
-          <a:noFill/>
-          <a:ln/>
-        </p:spPr>
-        <p:txBody>
-          <a:bodyPr wrap="square" lIns="0" tIns="0" rIns="0" bIns="0" rtlCol="0" anchor="t"/>
-          <a:lstStyle/>
-          <a:p>
-            <a:pPr indent="0" marL="0">
-              <a:lnSpc>
-                <a:spcPct val="90000"/>
-              </a:lnSpc>
-              <a:buNone/>
-            </a:pPr>
-            <a:r>
-              <a:rPr lang="en-US" sz="1050" b="1" dirty="0">
-                <a:solidFill>
-                  <a:srgbClr val="0D8A76"/>
-                </a:solidFill>
-                <a:latin typeface="Yu Gothic" pitchFamily="34" charset="0"/>
-                <a:ea typeface="Yu Gothic" pitchFamily="34" charset="-122"/>
-                <a:cs typeface="Yu Gothic" pitchFamily="34" charset="-120"/>
-              </a:rPr>
-              <a:t>断り方</a:t>
-            </a:r>
-            <a:endParaRPr lang="en-US" sz="1050" dirty="0"/>
-          </a:p>
-          <a:p>
-            <a:pPr indent="0" marL="0">
-              <a:lnSpc>
-                <a:spcPct val="90000"/>
-              </a:lnSpc>
-              <a:buNone/>
-            </a:pPr>
-            <a:r>
-              <a:rPr lang="en-US" sz="1050" b="1" dirty="0">
-                <a:solidFill>
-                  <a:srgbClr val="1B2733"/>
-                </a:solidFill>
-                <a:latin typeface="Yu Gothic" pitchFamily="34" charset="0"/>
-                <a:ea typeface="Yu Gothic" pitchFamily="34" charset="-122"/>
-                <a:cs typeface="Yu Gothic" pitchFamily="34" charset="-120"/>
-              </a:rPr>
-              <a:t>「実力での制止はできません。記録と報告を行います」と代替案を返す。</a:t>
-            </a:r>
-            <a:endParaRPr lang="en-US" sz="1050" dirty="0"/>
-          </a:p>
-          <a:p>
-            <a:pPr indent="0" marL="0">
-              <a:lnSpc>
-                <a:spcPct val="90000"/>
-              </a:lnSpc>
-              <a:buNone/>
-            </a:pPr>
-            <a:r>
-              <a:rPr lang="en-US" sz="800" i="1" dirty="0">
-                <a:solidFill>
-                  <a:srgbClr val="5F7183"/>
-                </a:solidFill>
-                <a:latin typeface="Calibri" pitchFamily="34" charset="0"/>
-                <a:ea typeface="Calibri" pitchFamily="34" charset="-122"/>
-                <a:cs typeface="Calibri" pitchFamily="34" charset="-120"/>
-              </a:rPr>
-              <a:t>"I cannot physically stop them. I will record and report." Offer the alternative.</a:t>
-            </a:r>
-            <a:endParaRPr lang="en-US" sz="1050" dirty="0"/>
-          </a:p>
-        </p:txBody>
-      </p:sp>
-      <p:sp>
-        <p:nvSpPr>
-          <p:cNvPr id="19" name="Shape 16"/>
-          <p:cNvSpPr/>
-          <p:nvPr/>
-        </p:nvSpPr>
-        <p:spPr>
-          <a:xfrm>
-            <a:off x="640080" y="5358384"/>
-            <a:ext cx="10911535" cy="493776"/>
-          </a:xfrm>
-          <a:prstGeom prst="roundRect">
-            <a:avLst>
-              <a:gd name="adj" fmla="val 7407"/>
+              <a:gd name="adj" fmla="val 8000"/>
             </a:avLst>
           </a:prstGeom>
           <a:solidFill>
@@ -11215,14 +11400,14 @@
       </p:sp>
       <p:sp>
         <p:nvSpPr>
-          <p:cNvPr id="20" name="Text 17"/>
-          <p:cNvSpPr/>
-          <p:nvPr/>
-        </p:nvSpPr>
-        <p:spPr>
-          <a:xfrm>
-            <a:off x="877824" y="5404104"/>
-            <a:ext cx="10436047" cy="402336"/>
+          <p:cNvPr id="27" name="Text 24"/>
+          <p:cNvSpPr/>
+          <p:nvPr/>
+        </p:nvSpPr>
+        <p:spPr>
+          <a:xfrm>
+            <a:off x="859536" y="5385816"/>
+            <a:ext cx="10472623" cy="402336"/>
           </a:xfrm>
           <a:prstGeom prst="rect">
             <a:avLst/>
@@ -11241,7 +11426,7 @@
               <a:buNone/>
             </a:pPr>
             <a:r>
-              <a:rPr lang="en-US" sz="950" b="1" dirty="0">
+              <a:rPr lang="en-US" sz="900" b="1" dirty="0">
                 <a:solidFill>
                   <a:srgbClr val="12B198"/>
                 </a:solidFill>
@@ -11258,7 +11443,7 @@
               <a:buNone/>
             </a:pPr>
             <a:r>
-              <a:rPr lang="en-US" sz="1100" b="1" dirty="0">
+              <a:rPr lang="en-US" sz="1050" b="1" dirty="0">
                 <a:solidFill>
                   <a:srgbClr val="FFFFFF"/>
                 </a:solidFill>
@@ -11268,7 +11453,7 @@
               </a:rPr>
               <a:t>指示に従うか。従うと答えた班には「何をもって止めるのか」を問う。無言で従わないのが最も悪い。</a:t>
             </a:r>
-            <a:endParaRPr lang="en-US" sz="950" dirty="0"/>
+            <a:endParaRPr lang="en-US" sz="900" dirty="0"/>
           </a:p>
           <a:p>
             <a:pPr indent="0" marL="0">
@@ -11278,7 +11463,7 @@
               <a:buNone/>
             </a:pPr>
             <a:r>
-              <a:rPr lang="en-US" sz="800" i="1" dirty="0">
+              <a:rPr lang="en-US" sz="750" i="1" dirty="0">
                 <a:solidFill>
                   <a:srgbClr val="9FD8CD"/>
                 </a:solidFill>
@@ -11286,15 +11471,15 @@
                 <a:ea typeface="Calibri" pitchFamily="34" charset="-122"/>
                 <a:cs typeface="Calibri" pitchFamily="34" charset="-120"/>
               </a:rPr>
-              <a:t>Do you obey? Ask those who say yes: by what means would you stop them? Silent non-compliance is the worst outcome.</a:t>
-            </a:r>
-            <a:endParaRPr lang="en-US" sz="950" dirty="0"/>
-          </a:p>
-        </p:txBody>
-      </p:sp>
-      <p:sp>
-        <p:nvSpPr>
-          <p:cNvPr id="21" name="Text 18"/>
+              <a:t>Do you obey? Ask those who say yes: by what means? Silent non-compliance is the worst outcome.</a:t>
+            </a:r>
+            <a:endParaRPr lang="en-US" sz="900" dirty="0"/>
+          </a:p>
+        </p:txBody>
+      </p:sp>
+      <p:sp>
+        <p:nvSpPr>
+          <p:cNvPr id="28" name="Text 25"/>
           <p:cNvSpPr/>
           <p:nvPr/>
         </p:nvSpPr>
@@ -11373,7 +11558,7 @@
       </p:sp>
       <p:sp>
         <p:nvSpPr>
-          <p:cNvPr id="22" name="Text 19"/>
+          <p:cNvPr id="29" name="Text 26"/>
           <p:cNvSpPr/>
           <p:nvPr/>
         </p:nvSpPr>
@@ -11426,7 +11611,7 @@
       </p:sp>
       <p:sp>
         <p:nvSpPr>
-          <p:cNvPr id="23" name="Text 20"/>
+          <p:cNvPr id="30" name="Text 27"/>
           <p:cNvSpPr/>
           <p:nvPr/>
         </p:nvSpPr>
@@ -11479,7 +11664,7 @@
       </p:sp>
       <p:sp>
         <p:nvSpPr>
-          <p:cNvPr id="24" name="Text 21"/>
+          <p:cNvPr id="31" name="Text 28"/>
           <p:cNvSpPr/>
           <p:nvPr/>
         </p:nvSpPr>
@@ -12884,7 +13069,7 @@
                 <a:ea typeface="Yu Gothic" pitchFamily="34" charset="-122"/>
                 <a:cs typeface="Yu Gothic" pitchFamily="34" charset="-120"/>
               </a:rPr>
-              <a:t>TTX 2-B 講評 ― 模範解答</a:t>
+              <a:t>TTX 2-B 模範解答</a:t>
             </a:r>
             <a:endParaRPr lang="en-US" sz="2300" dirty="0"/>
           </a:p>
@@ -12904,7 +13089,7 @@
                 <a:ea typeface="Calibri" pitchFamily="34" charset="-122"/>
                 <a:cs typeface="Calibri" pitchFamily="34" charset="-120"/>
               </a:rPr>
-              <a:t>TTX 2-B Debrief — Model Answer</a:t>
+              <a:t>TTX 2-B — Model Answers</a:t>
             </a:r>
             <a:endParaRPr lang="en-US" sz="2300" dirty="0"/>
           </a:p>
@@ -12973,97 +13158,18 @@
       </p:sp>
       <p:sp>
         <p:nvSpPr>
-          <p:cNvPr id="6" name="Text 3"/>
+          <p:cNvPr id="6" name="Shape 3"/>
           <p:cNvSpPr/>
           <p:nvPr/>
         </p:nvSpPr>
         <p:spPr>
           <a:xfrm>
             <a:off x="640080" y="1188720"/>
-            <a:ext cx="10911535" cy="530352"/>
-          </a:xfrm>
-          <a:prstGeom prst="rect">
-            <a:avLst/>
-          </a:prstGeom>
-          <a:noFill/>
-          <a:ln/>
-        </p:spPr>
-        <p:txBody>
-          <a:bodyPr wrap="square" lIns="0" tIns="0" rIns="0" bIns="0" rtlCol="0" anchor="t"/>
-          <a:lstStyle/>
-          <a:p>
-            <a:pPr indent="0" marL="0">
-              <a:lnSpc>
-                <a:spcPct val="90000"/>
-              </a:lnSpc>
-              <a:buNone/>
-            </a:pPr>
-            <a:r>
-              <a:rPr lang="en-US" sz="1000" b="1" dirty="0">
-                <a:solidFill>
-                  <a:srgbClr val="0D8A76"/>
-                </a:solidFill>
-                <a:latin typeface="Yu Gothic" pitchFamily="34" charset="0"/>
-                <a:ea typeface="Yu Gothic" pitchFamily="34" charset="-122"/>
-                <a:cs typeface="Yu Gothic" pitchFamily="34" charset="-120"/>
-              </a:rPr>
-              <a:t>狙い　</a:t>
-            </a:r>
-            <a:pPr indent="0" marL="0">
-              <a:lnSpc>
-                <a:spcPct val="90000"/>
-              </a:lnSpc>
-              <a:buNone/>
-            </a:pPr>
-            <a:r>
-              <a:rPr lang="en-US" sz="1150" b="1" dirty="0">
-                <a:solidFill>
-                  <a:srgbClr val="093259"/>
-                </a:solidFill>
-                <a:latin typeface="Yu Gothic" pitchFamily="34" charset="0"/>
-                <a:ea typeface="Yu Gothic" pitchFamily="34" charset="-122"/>
-                <a:cs typeface="Yu Gothic" pitchFamily="34" charset="-120"/>
-              </a:rPr>
-              <a:t>「警察には協力すべき」という感覚と、情報の管理権が衝突する。</a:t>
-            </a:r>
-            <a:endParaRPr lang="en-US" sz="1000" dirty="0"/>
-          </a:p>
-          <a:p>
-            <a:pPr indent="0" marL="0">
-              <a:lnSpc>
-                <a:spcPct val="90000"/>
-              </a:lnSpc>
-              <a:buNone/>
-            </a:pPr>
-            <a:r>
-              <a:rPr lang="en-US" sz="850" i="1" dirty="0">
-                <a:solidFill>
-                  <a:srgbClr val="5F7183"/>
-                </a:solidFill>
-                <a:latin typeface="Calibri" pitchFamily="34" charset="0"/>
-                <a:ea typeface="Calibri" pitchFamily="34" charset="-122"/>
-                <a:cs typeface="Calibri" pitchFamily="34" charset="-120"/>
-              </a:rPr>
-              <a:t>The instinct to help the police collides with who actually controls the information.</a:t>
-            </a:r>
-            <a:endParaRPr lang="en-US" sz="1000" dirty="0"/>
-          </a:p>
-        </p:txBody>
-      </p:sp>
-      <p:sp>
-        <p:nvSpPr>
-          <p:cNvPr id="7" name="Shape 4"/>
-          <p:cNvSpPr/>
-          <p:nvPr/>
-        </p:nvSpPr>
-        <p:spPr>
-          <a:xfrm>
-            <a:off x="640080" y="1773936"/>
-            <a:ext cx="5327752" cy="1274064"/>
+            <a:ext cx="10911535" cy="825246"/>
           </a:xfrm>
           <a:prstGeom prst="roundRect">
             <a:avLst>
-              <a:gd name="adj" fmla="val 2871"/>
+              <a:gd name="adj" fmla="val 4432"/>
             </a:avLst>
           </a:prstGeom>
           <a:solidFill>
@@ -13074,53 +13180,112 @@
       </p:sp>
       <p:sp>
         <p:nvSpPr>
+          <p:cNvPr id="7" name="Shape 4"/>
+          <p:cNvSpPr/>
+          <p:nvPr/>
+        </p:nvSpPr>
+        <p:spPr>
+          <a:xfrm>
+            <a:off x="841248" y="1427607"/>
+            <a:ext cx="347472" cy="347472"/>
+          </a:xfrm>
+          <a:prstGeom prst="ellipse">
+            <a:avLst/>
+          </a:prstGeom>
+          <a:solidFill>
+            <a:srgbClr val="12B198"/>
+          </a:solidFill>
+          <a:ln/>
+        </p:spPr>
+      </p:sp>
+      <p:sp>
+        <p:nvSpPr>
           <p:cNvPr id="8" name="Text 5"/>
           <p:cNvSpPr/>
           <p:nvPr/>
         </p:nvSpPr>
         <p:spPr>
           <a:xfrm>
-            <a:off x="877824" y="1865376"/>
-            <a:ext cx="4852264" cy="1091184"/>
-          </a:xfrm>
-          <a:prstGeom prst="rect">
-            <a:avLst/>
-          </a:prstGeom>
-          <a:noFill/>
-          <a:ln/>
-        </p:spPr>
-        <p:txBody>
-          <a:bodyPr wrap="square" lIns="0" tIns="0" rIns="0" bIns="0" rtlCol="0" anchor="t"/>
-          <a:lstStyle/>
-          <a:p>
-            <a:pPr indent="0" marL="0">
-              <a:lnSpc>
-                <a:spcPct val="90000"/>
-              </a:lnSpc>
-              <a:buNone/>
-            </a:pPr>
-            <a:r>
-              <a:rPr lang="en-US" sz="1050" b="1" dirty="0">
-                <a:solidFill>
-                  <a:srgbClr val="0D8A76"/>
-                </a:solidFill>
-                <a:latin typeface="Yu Gothic" pitchFamily="34" charset="0"/>
-                <a:ea typeface="Yu Gothic" pitchFamily="34" charset="-122"/>
-                <a:cs typeface="Yu Gothic" pitchFamily="34" charset="-120"/>
-              </a:rPr>
-              <a:t>警察官であること</a:t>
-            </a:r>
-            <a:endParaRPr lang="en-US" sz="1050" dirty="0"/>
-          </a:p>
-          <a:p>
-            <a:pPr indent="0" marL="0">
-              <a:lnSpc>
-                <a:spcPct val="90000"/>
-              </a:lnSpc>
-              <a:buNone/>
-            </a:pPr>
-            <a:r>
-              <a:rPr lang="en-US" sz="1050" b="1" dirty="0">
+            <a:off x="841248" y="1427607"/>
+            <a:ext cx="347472" cy="347472"/>
+          </a:xfrm>
+          <a:prstGeom prst="rect">
+            <a:avLst/>
+          </a:prstGeom>
+          <a:noFill/>
+          <a:ln/>
+        </p:spPr>
+        <p:txBody>
+          <a:bodyPr wrap="square" lIns="0" tIns="0" rIns="0" bIns="0" rtlCol="0" anchor="ctr"/>
+          <a:lstStyle/>
+          <a:p>
+            <a:pPr algn="ctr" indent="0" marL="0">
+              <a:buNone/>
+            </a:pPr>
+            <a:r>
+              <a:rPr lang="en-US" sz="1100" b="1" dirty="0">
+                <a:solidFill>
+                  <a:srgbClr val="FFFFFF"/>
+                </a:solidFill>
+                <a:latin typeface="Calibri" pitchFamily="34" charset="0"/>
+                <a:ea typeface="Calibri" pitchFamily="34" charset="-122"/>
+                <a:cs typeface="Calibri" pitchFamily="34" charset="-120"/>
+              </a:rPr>
+              <a:t>1</a:t>
+            </a:r>
+            <a:endParaRPr lang="en-US" sz="1100" dirty="0"/>
+          </a:p>
+        </p:txBody>
+      </p:sp>
+      <p:sp>
+        <p:nvSpPr>
+          <p:cNvPr id="9" name="Text 6"/>
+          <p:cNvSpPr/>
+          <p:nvPr/>
+        </p:nvSpPr>
+        <p:spPr>
+          <a:xfrm>
+            <a:off x="1280160" y="1252728"/>
+            <a:ext cx="10033711" cy="697230"/>
+          </a:xfrm>
+          <a:prstGeom prst="rect">
+            <a:avLst/>
+          </a:prstGeom>
+          <a:noFill/>
+          <a:ln/>
+        </p:spPr>
+        <p:txBody>
+          <a:bodyPr wrap="square" lIns="0" tIns="0" rIns="0" bIns="0" rtlCol="0" anchor="ctr"/>
+          <a:lstStyle/>
+          <a:p>
+            <a:pPr indent="0" marL="0">
+              <a:lnSpc>
+                <a:spcPct val="88000"/>
+              </a:lnSpc>
+              <a:buNone/>
+            </a:pPr>
+            <a:r>
+              <a:rPr lang="en-US" sz="900" dirty="0">
+                <a:solidFill>
+                  <a:srgbClr val="5F7183"/>
+                </a:solidFill>
+                <a:latin typeface="Yu Gothic" pitchFamily="34" charset="0"/>
+                <a:ea typeface="Yu Gothic" pitchFamily="34" charset="-122"/>
+                <a:cs typeface="Yu Gothic" pitchFamily="34" charset="-120"/>
+              </a:rPr>
+              <a:t>問1　警察官であることは根拠になるか</a:t>
+            </a:r>
+            <a:endParaRPr lang="en-US" sz="900" dirty="0"/>
+          </a:p>
+          <a:p>
+            <a:pPr indent="0" marL="0">
+              <a:lnSpc>
+                <a:spcPct val="88000"/>
+              </a:lnSpc>
+              <a:buNone/>
+            </a:pPr>
+            <a:r>
+              <a:rPr lang="en-US" sz="1200" b="1" dirty="0">
                 <a:solidFill>
                   <a:srgbClr val="1B2733"/>
                 </a:solidFill>
@@ -13128,14 +13293,14 @@
                 <a:ea typeface="Yu Gothic" pitchFamily="34" charset="-122"/>
                 <a:cs typeface="Yu Gothic" pitchFamily="34" charset="-120"/>
               </a:rPr>
-              <a:t>開示の根拠にならない。情報の管理権はクライアントにある。</a:t>
-            </a:r>
-            <a:endParaRPr lang="en-US" sz="1050" dirty="0"/>
-          </a:p>
-          <a:p>
-            <a:pPr indent="0" marL="0">
-              <a:lnSpc>
-                <a:spcPct val="90000"/>
+              <a:t>ならない。情報の管理権はクライアントにある。警察官であることは開示の根拠ではない。</a:t>
+            </a:r>
+            <a:endParaRPr lang="en-US" sz="900" dirty="0"/>
+          </a:p>
+          <a:p>
+            <a:pPr indent="0" marL="0">
+              <a:lnSpc>
+                <a:spcPct val="88000"/>
               </a:lnSpc>
               <a:buNone/>
             </a:pPr>
@@ -13148,26 +13313,26 @@
                 <a:ea typeface="Calibri" pitchFamily="34" charset="-122"/>
                 <a:cs typeface="Calibri" pitchFamily="34" charset="-120"/>
               </a:rPr>
-              <a:t>Not a basis for disclosure. The client controls the information.</a:t>
-            </a:r>
-            <a:endParaRPr lang="en-US" sz="1050" dirty="0"/>
-          </a:p>
-        </p:txBody>
-      </p:sp>
-      <p:sp>
-        <p:nvSpPr>
-          <p:cNvPr id="9" name="Shape 6"/>
-          <p:cNvSpPr/>
-          <p:nvPr/>
-        </p:nvSpPr>
-        <p:spPr>
-          <a:xfrm>
-            <a:off x="6223864" y="1773936"/>
-            <a:ext cx="5327752" cy="1274064"/>
+              <a:t>No. The client controls the information. Being a police officer is not a basis for disclosure.</a:t>
+            </a:r>
+            <a:endParaRPr lang="en-US" sz="900" dirty="0"/>
+          </a:p>
+        </p:txBody>
+      </p:sp>
+      <p:sp>
+        <p:nvSpPr>
+          <p:cNvPr id="10" name="Shape 7"/>
+          <p:cNvSpPr/>
+          <p:nvPr/>
+        </p:nvSpPr>
+        <p:spPr>
+          <a:xfrm>
+            <a:off x="640080" y="2114550"/>
+            <a:ext cx="10911535" cy="825246"/>
           </a:xfrm>
           <a:prstGeom prst="roundRect">
             <a:avLst>
-              <a:gd name="adj" fmla="val 2871"/>
+              <a:gd name="adj" fmla="val 4432"/>
             </a:avLst>
           </a:prstGeom>
           <a:solidFill>
@@ -13178,53 +13343,112 @@
       </p:sp>
       <p:sp>
         <p:nvSpPr>
-          <p:cNvPr id="10" name="Text 7"/>
-          <p:cNvSpPr/>
-          <p:nvPr/>
-        </p:nvSpPr>
-        <p:spPr>
-          <a:xfrm>
-            <a:off x="6461608" y="1865376"/>
-            <a:ext cx="4852264" cy="1091184"/>
-          </a:xfrm>
-          <a:prstGeom prst="rect">
-            <a:avLst/>
-          </a:prstGeom>
-          <a:noFill/>
-          <a:ln/>
-        </p:spPr>
-        <p:txBody>
-          <a:bodyPr wrap="square" lIns="0" tIns="0" rIns="0" bIns="0" rtlCol="0" anchor="t"/>
-          <a:lstStyle/>
-          <a:p>
-            <a:pPr indent="0" marL="0">
-              <a:lnSpc>
-                <a:spcPct val="90000"/>
-              </a:lnSpc>
-              <a:buNone/>
-            </a:pPr>
-            <a:r>
-              <a:rPr lang="en-US" sz="1050" b="1" dirty="0">
-                <a:solidFill>
-                  <a:srgbClr val="093259"/>
-                </a:solidFill>
-                <a:latin typeface="Yu Gothic" pitchFamily="34" charset="0"/>
-                <a:ea typeface="Yu Gothic" pitchFamily="34" charset="-122"/>
-                <a:cs typeface="Yu Gothic" pitchFamily="34" charset="-120"/>
-              </a:rPr>
-              <a:t>警備員の権限</a:t>
-            </a:r>
-            <a:endParaRPr lang="en-US" sz="1050" dirty="0"/>
-          </a:p>
-          <a:p>
-            <a:pPr indent="0" marL="0">
-              <a:lnSpc>
-                <a:spcPct val="90000"/>
-              </a:lnSpc>
-              <a:buNone/>
-            </a:pPr>
-            <a:r>
-              <a:rPr lang="en-US" sz="1050" b="1" dirty="0">
+          <p:cNvPr id="11" name="Shape 8"/>
+          <p:cNvSpPr/>
+          <p:nvPr/>
+        </p:nvSpPr>
+        <p:spPr>
+          <a:xfrm>
+            <a:off x="841248" y="2353437"/>
+            <a:ext cx="347472" cy="347472"/>
+          </a:xfrm>
+          <a:prstGeom prst="ellipse">
+            <a:avLst/>
+          </a:prstGeom>
+          <a:solidFill>
+            <a:srgbClr val="12B198"/>
+          </a:solidFill>
+          <a:ln/>
+        </p:spPr>
+      </p:sp>
+      <p:sp>
+        <p:nvSpPr>
+          <p:cNvPr id="12" name="Text 9"/>
+          <p:cNvSpPr/>
+          <p:nvPr/>
+        </p:nvSpPr>
+        <p:spPr>
+          <a:xfrm>
+            <a:off x="841248" y="2353437"/>
+            <a:ext cx="347472" cy="347472"/>
+          </a:xfrm>
+          <a:prstGeom prst="rect">
+            <a:avLst/>
+          </a:prstGeom>
+          <a:noFill/>
+          <a:ln/>
+        </p:spPr>
+        <p:txBody>
+          <a:bodyPr wrap="square" lIns="0" tIns="0" rIns="0" bIns="0" rtlCol="0" anchor="ctr"/>
+          <a:lstStyle/>
+          <a:p>
+            <a:pPr algn="ctr" indent="0" marL="0">
+              <a:buNone/>
+            </a:pPr>
+            <a:r>
+              <a:rPr lang="en-US" sz="1100" b="1" dirty="0">
+                <a:solidFill>
+                  <a:srgbClr val="FFFFFF"/>
+                </a:solidFill>
+                <a:latin typeface="Calibri" pitchFamily="34" charset="0"/>
+                <a:ea typeface="Calibri" pitchFamily="34" charset="-122"/>
+                <a:cs typeface="Calibri" pitchFamily="34" charset="-120"/>
+              </a:rPr>
+              <a:t>2</a:t>
+            </a:r>
+            <a:endParaRPr lang="en-US" sz="1100" dirty="0"/>
+          </a:p>
+        </p:txBody>
+      </p:sp>
+      <p:sp>
+        <p:nvSpPr>
+          <p:cNvPr id="13" name="Text 10"/>
+          <p:cNvSpPr/>
+          <p:nvPr/>
+        </p:nvSpPr>
+        <p:spPr>
+          <a:xfrm>
+            <a:off x="1280160" y="2178558"/>
+            <a:ext cx="10033711" cy="697230"/>
+          </a:xfrm>
+          <a:prstGeom prst="rect">
+            <a:avLst/>
+          </a:prstGeom>
+          <a:noFill/>
+          <a:ln/>
+        </p:spPr>
+        <p:txBody>
+          <a:bodyPr wrap="square" lIns="0" tIns="0" rIns="0" bIns="0" rtlCol="0" anchor="ctr"/>
+          <a:lstStyle/>
+          <a:p>
+            <a:pPr indent="0" marL="0">
+              <a:lnSpc>
+                <a:spcPct val="88000"/>
+              </a:lnSpc>
+              <a:buNone/>
+            </a:pPr>
+            <a:r>
+              <a:rPr lang="en-US" sz="900" dirty="0">
+                <a:solidFill>
+                  <a:srgbClr val="5F7183"/>
+                </a:solidFill>
+                <a:latin typeface="Yu Gothic" pitchFamily="34" charset="0"/>
+                <a:ea typeface="Yu Gothic" pitchFamily="34" charset="-122"/>
+                <a:cs typeface="Yu Gothic" pitchFamily="34" charset="-120"/>
+              </a:rPr>
+              <a:t>問2　警備員に判断する権限はあるか</a:t>
+            </a:r>
+            <a:endParaRPr lang="en-US" sz="900" dirty="0"/>
+          </a:p>
+          <a:p>
+            <a:pPr indent="0" marL="0">
+              <a:lnSpc>
+                <a:spcPct val="88000"/>
+              </a:lnSpc>
+              <a:buNone/>
+            </a:pPr>
+            <a:r>
+              <a:rPr lang="en-US" sz="1200" b="1" dirty="0">
                 <a:solidFill>
                   <a:srgbClr val="1B2733"/>
                 </a:solidFill>
@@ -13232,14 +13456,14 @@
                 <a:ea typeface="Yu Gothic" pitchFamily="34" charset="-122"/>
                 <a:cs typeface="Yu Gothic" pitchFamily="34" charset="-120"/>
               </a:rPr>
-              <a:t>開示の可否を判断する立場にない。取り次ぐところまで。</a:t>
-            </a:r>
-            <a:endParaRPr lang="en-US" sz="1050" dirty="0"/>
-          </a:p>
-          <a:p>
-            <a:pPr indent="0" marL="0">
-              <a:lnSpc>
-                <a:spcPct val="90000"/>
+              <a:t>ない。取り次ぐところまでが役割。開示の可否は契約とクライアントが決める。</a:t>
+            </a:r>
+            <a:endParaRPr lang="en-US" sz="900" dirty="0"/>
+          </a:p>
+          <a:p>
+            <a:pPr indent="0" marL="0">
+              <a:lnSpc>
+                <a:spcPct val="88000"/>
               </a:lnSpc>
               <a:buNone/>
             </a:pPr>
@@ -13252,26 +13476,26 @@
                 <a:ea typeface="Calibri" pitchFamily="34" charset="-122"/>
                 <a:cs typeface="Calibri" pitchFamily="34" charset="-120"/>
               </a:rPr>
-              <a:t>You are not in a position to decide. Your role ends at referral.</a:t>
-            </a:r>
-            <a:endParaRPr lang="en-US" sz="1050" dirty="0"/>
-          </a:p>
-        </p:txBody>
-      </p:sp>
-      <p:sp>
-        <p:nvSpPr>
-          <p:cNvPr id="11" name="Shape 8"/>
-          <p:cNvSpPr/>
-          <p:nvPr/>
-        </p:nvSpPr>
-        <p:spPr>
-          <a:xfrm>
-            <a:off x="640080" y="3176016"/>
-            <a:ext cx="5327752" cy="1274064"/>
+              <a:t>No. Your role ends at referral. The contract and the client decide.</a:t>
+            </a:r>
+            <a:endParaRPr lang="en-US" sz="900" dirty="0"/>
+          </a:p>
+        </p:txBody>
+      </p:sp>
+      <p:sp>
+        <p:nvSpPr>
+          <p:cNvPr id="14" name="Shape 11"/>
+          <p:cNvSpPr/>
+          <p:nvPr/>
+        </p:nvSpPr>
+        <p:spPr>
+          <a:xfrm>
+            <a:off x="640080" y="3040380"/>
+            <a:ext cx="10911535" cy="825246"/>
           </a:xfrm>
           <a:prstGeom prst="roundRect">
             <a:avLst>
-              <a:gd name="adj" fmla="val 2871"/>
+              <a:gd name="adj" fmla="val 4432"/>
             </a:avLst>
           </a:prstGeom>
           <a:solidFill>
@@ -13282,53 +13506,112 @@
       </p:sp>
       <p:sp>
         <p:nvSpPr>
-          <p:cNvPr id="12" name="Text 9"/>
-          <p:cNvSpPr/>
-          <p:nvPr/>
-        </p:nvSpPr>
-        <p:spPr>
-          <a:xfrm>
-            <a:off x="877824" y="3267456"/>
-            <a:ext cx="4852264" cy="1091184"/>
-          </a:xfrm>
-          <a:prstGeom prst="rect">
-            <a:avLst/>
-          </a:prstGeom>
-          <a:noFill/>
-          <a:ln/>
-        </p:spPr>
-        <p:txBody>
-          <a:bodyPr wrap="square" lIns="0" tIns="0" rIns="0" bIns="0" rtlCol="0" anchor="t"/>
-          <a:lstStyle/>
-          <a:p>
-            <a:pPr indent="0" marL="0">
-              <a:lnSpc>
-                <a:spcPct val="90000"/>
-              </a:lnSpc>
-              <a:buNone/>
-            </a:pPr>
-            <a:r>
-              <a:rPr lang="en-US" sz="1050" b="1" dirty="0">
-                <a:solidFill>
-                  <a:srgbClr val="093259"/>
-                </a:solidFill>
-                <a:latin typeface="Yu Gothic" pitchFamily="34" charset="0"/>
-                <a:ea typeface="Yu Gothic" pitchFamily="34" charset="-122"/>
-                <a:cs typeface="Yu Gothic" pitchFamily="34" charset="-120"/>
-              </a:rPr>
-              <a:t>身分確認</a:t>
-            </a:r>
-            <a:endParaRPr lang="en-US" sz="1050" dirty="0"/>
-          </a:p>
-          <a:p>
-            <a:pPr indent="0" marL="0">
-              <a:lnSpc>
-                <a:spcPct val="90000"/>
-              </a:lnSpc>
-              <a:buNone/>
-            </a:pPr>
-            <a:r>
-              <a:rPr lang="en-US" sz="1050" b="1" dirty="0">
+          <p:cNvPr id="15" name="Shape 12"/>
+          <p:cNvSpPr/>
+          <p:nvPr/>
+        </p:nvSpPr>
+        <p:spPr>
+          <a:xfrm>
+            <a:off x="841248" y="3279267"/>
+            <a:ext cx="347472" cy="347472"/>
+          </a:xfrm>
+          <a:prstGeom prst="ellipse">
+            <a:avLst/>
+          </a:prstGeom>
+          <a:solidFill>
+            <a:srgbClr val="12B198"/>
+          </a:solidFill>
+          <a:ln/>
+        </p:spPr>
+      </p:sp>
+      <p:sp>
+        <p:nvSpPr>
+          <p:cNvPr id="16" name="Text 13"/>
+          <p:cNvSpPr/>
+          <p:nvPr/>
+        </p:nvSpPr>
+        <p:spPr>
+          <a:xfrm>
+            <a:off x="841248" y="3279267"/>
+            <a:ext cx="347472" cy="347472"/>
+          </a:xfrm>
+          <a:prstGeom prst="rect">
+            <a:avLst/>
+          </a:prstGeom>
+          <a:noFill/>
+          <a:ln/>
+        </p:spPr>
+        <p:txBody>
+          <a:bodyPr wrap="square" lIns="0" tIns="0" rIns="0" bIns="0" rtlCol="0" anchor="ctr"/>
+          <a:lstStyle/>
+          <a:p>
+            <a:pPr algn="ctr" indent="0" marL="0">
+              <a:buNone/>
+            </a:pPr>
+            <a:r>
+              <a:rPr lang="en-US" sz="1100" b="1" dirty="0">
+                <a:solidFill>
+                  <a:srgbClr val="FFFFFF"/>
+                </a:solidFill>
+                <a:latin typeface="Calibri" pitchFamily="34" charset="0"/>
+                <a:ea typeface="Calibri" pitchFamily="34" charset="-122"/>
+                <a:cs typeface="Calibri" pitchFamily="34" charset="-120"/>
+              </a:rPr>
+              <a:t>3</a:t>
+            </a:r>
+            <a:endParaRPr lang="en-US" sz="1100" dirty="0"/>
+          </a:p>
+        </p:txBody>
+      </p:sp>
+      <p:sp>
+        <p:nvSpPr>
+          <p:cNvPr id="17" name="Text 14"/>
+          <p:cNvSpPr/>
+          <p:nvPr/>
+        </p:nvSpPr>
+        <p:spPr>
+          <a:xfrm>
+            <a:off x="1280160" y="3104388"/>
+            <a:ext cx="10033711" cy="697230"/>
+          </a:xfrm>
+          <a:prstGeom prst="rect">
+            <a:avLst/>
+          </a:prstGeom>
+          <a:noFill/>
+          <a:ln/>
+        </p:spPr>
+        <p:txBody>
+          <a:bodyPr wrap="square" lIns="0" tIns="0" rIns="0" bIns="0" rtlCol="0" anchor="ctr"/>
+          <a:lstStyle/>
+          <a:p>
+            <a:pPr indent="0" marL="0">
+              <a:lnSpc>
+                <a:spcPct val="88000"/>
+              </a:lnSpc>
+              <a:buNone/>
+            </a:pPr>
+            <a:r>
+              <a:rPr lang="en-US" sz="900" dirty="0">
+                <a:solidFill>
+                  <a:srgbClr val="5F7183"/>
+                </a:solidFill>
+                <a:latin typeface="Yu Gothic" pitchFamily="34" charset="0"/>
+                <a:ea typeface="Yu Gothic" pitchFamily="34" charset="-122"/>
+                <a:cs typeface="Yu Gothic" pitchFamily="34" charset="-120"/>
+              </a:rPr>
+              <a:t>問3　上長に連絡がつかない場合</a:t>
+            </a:r>
+            <a:endParaRPr lang="en-US" sz="900" dirty="0"/>
+          </a:p>
+          <a:p>
+            <a:pPr indent="0" marL="0">
+              <a:lnSpc>
+                <a:spcPct val="88000"/>
+              </a:lnSpc>
+              <a:buNone/>
+            </a:pPr>
+            <a:r>
+              <a:rPr lang="en-US" sz="1200" b="1" dirty="0">
                 <a:solidFill>
                   <a:srgbClr val="1B2733"/>
                 </a:solidFill>
@@ -13336,14 +13619,14 @@
                 <a:ea typeface="Yu Gothic" pitchFamily="34" charset="-122"/>
                 <a:cs typeface="Yu Gothic" pitchFamily="34" charset="-120"/>
               </a:rPr>
-              <a:t>求めてよい。所属、階級、氏名、連絡先を控える。失礼ではない。</a:t>
-            </a:r>
-            <a:endParaRPr lang="en-US" sz="1050" dirty="0"/>
-          </a:p>
-          <a:p>
-            <a:pPr indent="0" marL="0">
-              <a:lnSpc>
-                <a:spcPct val="90000"/>
+              <a:t>緊急連絡体制の次順位者へ。不在を理由に自分で判断しない。待たせることは失礼ではない。</a:t>
+            </a:r>
+            <a:endParaRPr lang="en-US" sz="900" dirty="0"/>
+          </a:p>
+          <a:p>
+            <a:pPr indent="0" marL="0">
+              <a:lnSpc>
+                <a:spcPct val="88000"/>
               </a:lnSpc>
               <a:buNone/>
             </a:pPr>
@@ -13356,26 +13639,26 @@
                 <a:ea typeface="Calibri" pitchFamily="34" charset="-122"/>
                 <a:cs typeface="Calibri" pitchFamily="34" charset="-120"/>
               </a:rPr>
-              <a:t>Ask. Note the unit, rank, name and contact. It is not rude.</a:t>
-            </a:r>
-            <a:endParaRPr lang="en-US" sz="1050" dirty="0"/>
-          </a:p>
-        </p:txBody>
-      </p:sp>
-      <p:sp>
-        <p:nvSpPr>
-          <p:cNvPr id="13" name="Shape 10"/>
-          <p:cNvSpPr/>
-          <p:nvPr/>
-        </p:nvSpPr>
-        <p:spPr>
-          <a:xfrm>
-            <a:off x="6223864" y="3176016"/>
-            <a:ext cx="5327752" cy="1274064"/>
+              <a:t>Go to the next person on the call-out list. Absence is not authority to decide. Asking them to wait is not rude.</a:t>
+            </a:r>
+            <a:endParaRPr lang="en-US" sz="900" dirty="0"/>
+          </a:p>
+        </p:txBody>
+      </p:sp>
+      <p:sp>
+        <p:nvSpPr>
+          <p:cNvPr id="18" name="Shape 15"/>
+          <p:cNvSpPr/>
+          <p:nvPr/>
+        </p:nvSpPr>
+        <p:spPr>
+          <a:xfrm>
+            <a:off x="640080" y="3966210"/>
+            <a:ext cx="10911535" cy="825246"/>
           </a:xfrm>
           <a:prstGeom prst="roundRect">
             <a:avLst>
-              <a:gd name="adj" fmla="val 2871"/>
+              <a:gd name="adj" fmla="val 4432"/>
             </a:avLst>
           </a:prstGeom>
           <a:solidFill>
@@ -13386,53 +13669,112 @@
       </p:sp>
       <p:sp>
         <p:nvSpPr>
-          <p:cNvPr id="14" name="Text 11"/>
-          <p:cNvSpPr/>
-          <p:nvPr/>
-        </p:nvSpPr>
-        <p:spPr>
-          <a:xfrm>
-            <a:off x="6461608" y="3267456"/>
-            <a:ext cx="4852264" cy="1091184"/>
-          </a:xfrm>
-          <a:prstGeom prst="rect">
-            <a:avLst/>
-          </a:prstGeom>
-          <a:noFill/>
-          <a:ln/>
-        </p:spPr>
-        <p:txBody>
-          <a:bodyPr wrap="square" lIns="0" tIns="0" rIns="0" bIns="0" rtlCol="0" anchor="t"/>
-          <a:lstStyle/>
-          <a:p>
-            <a:pPr indent="0" marL="0">
-              <a:lnSpc>
-                <a:spcPct val="90000"/>
-              </a:lnSpc>
-              <a:buNone/>
-            </a:pPr>
-            <a:r>
-              <a:rPr lang="en-US" sz="1050" b="1" dirty="0">
-                <a:solidFill>
-                  <a:srgbClr val="093259"/>
-                </a:solidFill>
-                <a:latin typeface="Yu Gothic" pitchFamily="34" charset="0"/>
-                <a:ea typeface="Yu Gothic" pitchFamily="34" charset="-122"/>
-                <a:cs typeface="Yu Gothic" pitchFamily="34" charset="-120"/>
-              </a:rPr>
-              <a:t>上長不在</a:t>
-            </a:r>
-            <a:endParaRPr lang="en-US" sz="1050" dirty="0"/>
-          </a:p>
-          <a:p>
-            <a:pPr indent="0" marL="0">
-              <a:lnSpc>
-                <a:spcPct val="90000"/>
-              </a:lnSpc>
-              <a:buNone/>
-            </a:pPr>
-            <a:r>
-              <a:rPr lang="en-US" sz="1050" b="1" dirty="0">
+          <p:cNvPr id="19" name="Shape 16"/>
+          <p:cNvSpPr/>
+          <p:nvPr/>
+        </p:nvSpPr>
+        <p:spPr>
+          <a:xfrm>
+            <a:off x="841248" y="4205097"/>
+            <a:ext cx="347472" cy="347472"/>
+          </a:xfrm>
+          <a:prstGeom prst="ellipse">
+            <a:avLst/>
+          </a:prstGeom>
+          <a:solidFill>
+            <a:srgbClr val="12B198"/>
+          </a:solidFill>
+          <a:ln/>
+        </p:spPr>
+      </p:sp>
+      <p:sp>
+        <p:nvSpPr>
+          <p:cNvPr id="20" name="Text 17"/>
+          <p:cNvSpPr/>
+          <p:nvPr/>
+        </p:nvSpPr>
+        <p:spPr>
+          <a:xfrm>
+            <a:off x="841248" y="4205097"/>
+            <a:ext cx="347472" cy="347472"/>
+          </a:xfrm>
+          <a:prstGeom prst="rect">
+            <a:avLst/>
+          </a:prstGeom>
+          <a:noFill/>
+          <a:ln/>
+        </p:spPr>
+        <p:txBody>
+          <a:bodyPr wrap="square" lIns="0" tIns="0" rIns="0" bIns="0" rtlCol="0" anchor="ctr"/>
+          <a:lstStyle/>
+          <a:p>
+            <a:pPr algn="ctr" indent="0" marL="0">
+              <a:buNone/>
+            </a:pPr>
+            <a:r>
+              <a:rPr lang="en-US" sz="1100" b="1" dirty="0">
+                <a:solidFill>
+                  <a:srgbClr val="FFFFFF"/>
+                </a:solidFill>
+                <a:latin typeface="Calibri" pitchFamily="34" charset="0"/>
+                <a:ea typeface="Calibri" pitchFamily="34" charset="-122"/>
+                <a:cs typeface="Calibri" pitchFamily="34" charset="-120"/>
+              </a:rPr>
+              <a:t>4</a:t>
+            </a:r>
+            <a:endParaRPr lang="en-US" sz="1100" dirty="0"/>
+          </a:p>
+        </p:txBody>
+      </p:sp>
+      <p:sp>
+        <p:nvSpPr>
+          <p:cNvPr id="21" name="Text 18"/>
+          <p:cNvSpPr/>
+          <p:nvPr/>
+        </p:nvSpPr>
+        <p:spPr>
+          <a:xfrm>
+            <a:off x="1280160" y="4030218"/>
+            <a:ext cx="10033711" cy="697230"/>
+          </a:xfrm>
+          <a:prstGeom prst="rect">
+            <a:avLst/>
+          </a:prstGeom>
+          <a:noFill/>
+          <a:ln/>
+        </p:spPr>
+        <p:txBody>
+          <a:bodyPr wrap="square" lIns="0" tIns="0" rIns="0" bIns="0" rtlCol="0" anchor="ctr"/>
+          <a:lstStyle/>
+          <a:p>
+            <a:pPr indent="0" marL="0">
+              <a:lnSpc>
+                <a:spcPct val="88000"/>
+              </a:lnSpc>
+              <a:buNone/>
+            </a:pPr>
+            <a:r>
+              <a:rPr lang="en-US" sz="900" dirty="0">
+                <a:solidFill>
+                  <a:srgbClr val="5F7183"/>
+                </a:solidFill>
+                <a:latin typeface="Yu Gothic" pitchFamily="34" charset="0"/>
+                <a:ea typeface="Yu Gothic" pitchFamily="34" charset="-122"/>
+                <a:cs typeface="Yu Gothic" pitchFamily="34" charset="-120"/>
+              </a:rPr>
+              <a:t>問4　身分をどう確認するか</a:t>
+            </a:r>
+            <a:endParaRPr lang="en-US" sz="900" dirty="0"/>
+          </a:p>
+          <a:p>
+            <a:pPr indent="0" marL="0">
+              <a:lnSpc>
+                <a:spcPct val="88000"/>
+              </a:lnSpc>
+              <a:buNone/>
+            </a:pPr>
+            <a:r>
+              <a:rPr lang="en-US" sz="1200" b="1" dirty="0">
                 <a:solidFill>
                   <a:srgbClr val="1B2733"/>
                 </a:solidFill>
@@ -13440,14 +13782,14 @@
                 <a:ea typeface="Yu Gothic" pitchFamily="34" charset="-122"/>
                 <a:cs typeface="Yu Gothic" pitchFamily="34" charset="-120"/>
               </a:rPr>
-              <a:t>緊急連絡体制の次順位者へ。不在を理由に自分で判断しない。</a:t>
-            </a:r>
-            <a:endParaRPr lang="en-US" sz="1050" dirty="0"/>
-          </a:p>
-          <a:p>
-            <a:pPr indent="0" marL="0">
-              <a:lnSpc>
-                <a:spcPct val="90000"/>
+              <a:t>求めてよい。所属、階級、氏名、連絡先を控える。確認は手続きであり失礼ではない。</a:t>
+            </a:r>
+            <a:endParaRPr lang="en-US" sz="900" dirty="0"/>
+          </a:p>
+          <a:p>
+            <a:pPr indent="0" marL="0">
+              <a:lnSpc>
+                <a:spcPct val="88000"/>
               </a:lnSpc>
               <a:buNone/>
             </a:pPr>
@@ -13460,83 +13802,97 @@
                 <a:ea typeface="Calibri" pitchFamily="34" charset="-122"/>
                 <a:cs typeface="Calibri" pitchFamily="34" charset="-120"/>
               </a:rPr>
-              <a:t>Go to the next person on the call-out list. Absence is not authority to decide.</a:t>
-            </a:r>
-            <a:endParaRPr lang="en-US" sz="1050" dirty="0"/>
-          </a:p>
-        </p:txBody>
-      </p:sp>
-      <p:sp>
-        <p:nvSpPr>
-          <p:cNvPr id="15" name="Shape 12"/>
-          <p:cNvSpPr/>
-          <p:nvPr/>
-        </p:nvSpPr>
-        <p:spPr>
-          <a:xfrm>
-            <a:off x="640080" y="4578096"/>
-            <a:ext cx="5327752" cy="1274064"/>
+              <a:t>Ask. Note the unit, rank, name and contact. Verifying is procedure, not discourtesy.</a:t>
+            </a:r>
+            <a:endParaRPr lang="en-US" sz="900" dirty="0"/>
+          </a:p>
+        </p:txBody>
+      </p:sp>
+      <p:sp>
+        <p:nvSpPr>
+          <p:cNvPr id="22" name="Shape 19"/>
+          <p:cNvSpPr/>
+          <p:nvPr/>
+        </p:nvSpPr>
+        <p:spPr>
+          <a:xfrm>
+            <a:off x="640080" y="4901184"/>
+            <a:ext cx="10911535" cy="420624"/>
           </a:xfrm>
           <a:prstGeom prst="roundRect">
             <a:avLst>
-              <a:gd name="adj" fmla="val 2871"/>
+              <a:gd name="adj" fmla="val 8696"/>
             </a:avLst>
           </a:prstGeom>
           <a:solidFill>
-            <a:srgbClr val="EFF4F8"/>
+            <a:srgbClr val="EEF6FA"/>
           </a:solidFill>
           <a:ln/>
         </p:spPr>
       </p:sp>
       <p:sp>
         <p:nvSpPr>
-          <p:cNvPr id="16" name="Text 13"/>
-          <p:cNvSpPr/>
-          <p:nvPr/>
-        </p:nvSpPr>
-        <p:spPr>
-          <a:xfrm>
-            <a:off x="877824" y="4669536"/>
-            <a:ext cx="4852264" cy="1091184"/>
-          </a:xfrm>
-          <a:prstGeom prst="rect">
-            <a:avLst/>
-          </a:prstGeom>
-          <a:noFill/>
-          <a:ln/>
-        </p:spPr>
-        <p:txBody>
-          <a:bodyPr wrap="square" lIns="0" tIns="0" rIns="0" bIns="0" rtlCol="0" anchor="t"/>
-          <a:lstStyle/>
-          <a:p>
-            <a:pPr indent="0" marL="0">
-              <a:lnSpc>
-                <a:spcPct val="90000"/>
-              </a:lnSpc>
-              <a:buNone/>
-            </a:pPr>
-            <a:r>
-              <a:rPr lang="en-US" sz="1050" b="1" dirty="0">
-                <a:solidFill>
-                  <a:srgbClr val="093259"/>
-                </a:solidFill>
-                <a:latin typeface="Yu Gothic" pitchFamily="34" charset="0"/>
-                <a:ea typeface="Yu Gothic" pitchFamily="34" charset="-122"/>
-                <a:cs typeface="Yu Gothic" pitchFamily="34" charset="-120"/>
-              </a:rPr>
-              <a:t>「任意で協力を」</a:t>
-            </a:r>
-            <a:endParaRPr lang="en-US" sz="1050" dirty="0"/>
-          </a:p>
-          <a:p>
-            <a:pPr indent="0" marL="0">
-              <a:lnSpc>
-                <a:spcPct val="90000"/>
-              </a:lnSpc>
-              <a:buNone/>
-            </a:pPr>
-            <a:r>
-              <a:rPr lang="en-US" sz="1050" b="1" dirty="0">
+          <p:cNvPr id="23" name="Text 20"/>
+          <p:cNvSpPr/>
+          <p:nvPr/>
+        </p:nvSpPr>
+        <p:spPr>
+          <a:xfrm>
+            <a:off x="859536" y="4928616"/>
+            <a:ext cx="10472623" cy="365760"/>
+          </a:xfrm>
+          <a:prstGeom prst="rect">
+            <a:avLst/>
+          </a:prstGeom>
+          <a:noFill/>
+          <a:ln/>
+        </p:spPr>
+        <p:txBody>
+          <a:bodyPr wrap="square" lIns="0" tIns="0" rIns="0" bIns="0" rtlCol="0" anchor="ctr"/>
+          <a:lstStyle/>
+          <a:p>
+            <a:pPr indent="0" marL="0">
+              <a:lnSpc>
+                <a:spcPct val="86000"/>
+              </a:lnSpc>
+              <a:buNone/>
+            </a:pPr>
+            <a:r>
+              <a:rPr lang="en-US" sz="850" b="1" dirty="0">
+                <a:solidFill>
+                  <a:srgbClr val="0D8A76"/>
+                </a:solidFill>
+                <a:latin typeface="Yu Gothic" pitchFamily="34" charset="0"/>
+                <a:ea typeface="Yu Gothic" pitchFamily="34" charset="-122"/>
+                <a:cs typeface="Yu Gothic" pitchFamily="34" charset="-120"/>
+              </a:rPr>
+              <a:t>追加付与①　</a:t>
+            </a:r>
+            <a:pPr indent="0" marL="0">
+              <a:lnSpc>
+                <a:spcPct val="86000"/>
+              </a:lnSpc>
+              <a:buNone/>
+            </a:pPr>
+            <a:r>
+              <a:rPr lang="en-US" sz="850" dirty="0">
+                <a:solidFill>
+                  <a:srgbClr val="5F7183"/>
+                </a:solidFill>
+                <a:latin typeface="Yu Gothic" pitchFamily="34" charset="0"/>
+                <a:ea typeface="Yu Gothic" pitchFamily="34" charset="-122"/>
+                <a:cs typeface="Yu Gothic" pitchFamily="34" charset="-120"/>
+              </a:rPr>
+              <a:t>「令状がなくても任意で」　→　</a:t>
+            </a:r>
+            <a:pPr indent="0" marL="0">
+              <a:lnSpc>
+                <a:spcPct val="86000"/>
+              </a:lnSpc>
+              <a:buNone/>
+            </a:pPr>
+            <a:r>
+              <a:rPr lang="en-US" sz="1100" b="1" dirty="0">
                 <a:solidFill>
                   <a:srgbClr val="1B2733"/>
                 </a:solidFill>
@@ -13544,19 +13900,19 @@
                 <a:ea typeface="Yu Gothic" pitchFamily="34" charset="-122"/>
                 <a:cs typeface="Yu Gothic" pitchFamily="34" charset="-120"/>
               </a:rPr>
-              <a:t>任意であるからこそ、応じるか否かはクライアントが決める。</a:t>
-            </a:r>
-            <a:endParaRPr lang="en-US" sz="1050" dirty="0"/>
-          </a:p>
-          <a:p>
-            <a:pPr indent="0" marL="0">
-              <a:lnSpc>
-                <a:spcPct val="90000"/>
-              </a:lnSpc>
-              <a:buNone/>
-            </a:pPr>
-            <a:r>
-              <a:rPr lang="en-US" sz="800" i="1" dirty="0">
+              <a:t>任意であるからこそ、応じるか否かはクライアントが決める。警備員は応じられない。</a:t>
+            </a:r>
+            <a:endParaRPr lang="en-US" sz="850" dirty="0"/>
+          </a:p>
+          <a:p>
+            <a:pPr indent="0" marL="0">
+              <a:lnSpc>
+                <a:spcPct val="86000"/>
+              </a:lnSpc>
+              <a:buNone/>
+            </a:pPr>
+            <a:r>
+              <a:rPr lang="en-US" sz="750" i="1" dirty="0">
                 <a:solidFill>
                   <a:srgbClr val="5F7183"/>
                 </a:solidFill>
@@ -13564,63 +13920,63 @@
                 <a:ea typeface="Calibri" pitchFamily="34" charset="-122"/>
                 <a:cs typeface="Calibri" pitchFamily="34" charset="-120"/>
               </a:rPr>
-              <a:t>Precisely because it is voluntary, the client decides whether to comply.</a:t>
-            </a:r>
-            <a:endParaRPr lang="en-US" sz="1050" dirty="0"/>
-          </a:p>
-        </p:txBody>
-      </p:sp>
-      <p:sp>
-        <p:nvSpPr>
-          <p:cNvPr id="17" name="Shape 14"/>
-          <p:cNvSpPr/>
-          <p:nvPr/>
-        </p:nvSpPr>
-        <p:spPr>
-          <a:xfrm>
-            <a:off x="6223864" y="4578096"/>
-            <a:ext cx="5327752" cy="1274064"/>
+              <a:t>Precisely because it is voluntary, the client decides. A guard cannot agree on their behalf.</a:t>
+            </a:r>
+            <a:endParaRPr lang="en-US" sz="850" dirty="0"/>
+          </a:p>
+        </p:txBody>
+      </p:sp>
+      <p:sp>
+        <p:nvSpPr>
+          <p:cNvPr id="24" name="Shape 21"/>
+          <p:cNvSpPr/>
+          <p:nvPr/>
+        </p:nvSpPr>
+        <p:spPr>
+          <a:xfrm>
+            <a:off x="640080" y="5394960"/>
+            <a:ext cx="10911535" cy="420624"/>
           </a:xfrm>
           <a:prstGeom prst="roundRect">
             <a:avLst>
-              <a:gd name="adj" fmla="val 2871"/>
+              <a:gd name="adj" fmla="val 8696"/>
             </a:avLst>
           </a:prstGeom>
           <a:solidFill>
-            <a:srgbClr val="E4F4F0"/>
+            <a:srgbClr val="EEF6FA"/>
           </a:solidFill>
           <a:ln/>
         </p:spPr>
       </p:sp>
       <p:sp>
         <p:nvSpPr>
-          <p:cNvPr id="18" name="Text 15"/>
-          <p:cNvSpPr/>
-          <p:nvPr/>
-        </p:nvSpPr>
-        <p:spPr>
-          <a:xfrm>
-            <a:off x="6461608" y="4669536"/>
-            <a:ext cx="4852264" cy="1091184"/>
-          </a:xfrm>
-          <a:prstGeom prst="rect">
-            <a:avLst/>
-          </a:prstGeom>
-          <a:noFill/>
-          <a:ln/>
-        </p:spPr>
-        <p:txBody>
-          <a:bodyPr wrap="square" lIns="0" tIns="0" rIns="0" bIns="0" rtlCol="0" anchor="t"/>
-          <a:lstStyle/>
-          <a:p>
-            <a:pPr indent="0" marL="0">
-              <a:lnSpc>
-                <a:spcPct val="90000"/>
-              </a:lnSpc>
-              <a:buNone/>
-            </a:pPr>
-            <a:r>
-              <a:rPr lang="en-US" sz="1050" b="1" dirty="0">
+          <p:cNvPr id="25" name="Text 22"/>
+          <p:cNvSpPr/>
+          <p:nvPr/>
+        </p:nvSpPr>
+        <p:spPr>
+          <a:xfrm>
+            <a:off x="859536" y="5422392"/>
+            <a:ext cx="10472623" cy="365760"/>
+          </a:xfrm>
+          <a:prstGeom prst="rect">
+            <a:avLst/>
+          </a:prstGeom>
+          <a:noFill/>
+          <a:ln/>
+        </p:spPr>
+        <p:txBody>
+          <a:bodyPr wrap="square" lIns="0" tIns="0" rIns="0" bIns="0" rtlCol="0" anchor="ctr"/>
+          <a:lstStyle/>
+          <a:p>
+            <a:pPr indent="0" marL="0">
+              <a:lnSpc>
+                <a:spcPct val="86000"/>
+              </a:lnSpc>
+              <a:buNone/>
+            </a:pPr>
+            <a:r>
+              <a:rPr lang="en-US" sz="850" b="1" dirty="0">
                 <a:solidFill>
                   <a:srgbClr val="0D8A76"/>
                 </a:solidFill>
@@ -13628,19 +13984,33 @@
                 <a:ea typeface="Yu Gothic" pitchFamily="34" charset="-122"/>
                 <a:cs typeface="Yu Gothic" pitchFamily="34" charset="-120"/>
               </a:rPr>
-              <a:t>有無だけ教えて</a:t>
-            </a:r>
-            <a:endParaRPr lang="en-US" sz="1050" dirty="0"/>
-          </a:p>
-          <a:p>
-            <a:pPr indent="0" marL="0">
-              <a:lnSpc>
-                <a:spcPct val="90000"/>
-              </a:lnSpc>
-              <a:buNone/>
-            </a:pPr>
-            <a:r>
-              <a:rPr lang="en-US" sz="1050" b="1" dirty="0">
+              <a:t>追加付与②　</a:t>
+            </a:r>
+            <a:pPr indent="0" marL="0">
+              <a:lnSpc>
+                <a:spcPct val="86000"/>
+              </a:lnSpc>
+              <a:buNone/>
+            </a:pPr>
+            <a:r>
+              <a:rPr lang="en-US" sz="850" dirty="0">
+                <a:solidFill>
+                  <a:srgbClr val="5F7183"/>
+                </a:solidFill>
+                <a:latin typeface="Yu Gothic" pitchFamily="34" charset="0"/>
+                <a:ea typeface="Yu Gothic" pitchFamily="34" charset="-122"/>
+                <a:cs typeface="Yu Gothic" pitchFamily="34" charset="-120"/>
+              </a:rPr>
+              <a:t>「名前があったかだけ教えて」　→　</a:t>
+            </a:r>
+            <a:pPr indent="0" marL="0">
+              <a:lnSpc>
+                <a:spcPct val="86000"/>
+              </a:lnSpc>
+              <a:buNone/>
+            </a:pPr>
+            <a:r>
+              <a:rPr lang="en-US" sz="1100" b="1" dirty="0">
                 <a:solidFill>
                   <a:srgbClr val="1B2733"/>
                 </a:solidFill>
@@ -13648,19 +14018,19 @@
                 <a:ea typeface="Yu Gothic" pitchFamily="34" charset="-122"/>
                 <a:cs typeface="Yu Gothic" pitchFamily="34" charset="-120"/>
               </a:rPr>
-              <a:t>有無を答えるのも開示。第10時限10-Bと同じ構造。</a:t>
-            </a:r>
-            <a:endParaRPr lang="en-US" sz="1050" dirty="0"/>
-          </a:p>
-          <a:p>
-            <a:pPr indent="0" marL="0">
-              <a:lnSpc>
-                <a:spcPct val="90000"/>
-              </a:lnSpc>
-              <a:buNone/>
-            </a:pPr>
-            <a:r>
-              <a:rPr lang="en-US" sz="800" i="1" dirty="0">
+              <a:t>同じこと。有無を答えるのも開示。第10時限10-Bと同じ構造。</a:t>
+            </a:r>
+            <a:endParaRPr lang="en-US" sz="850" dirty="0"/>
+          </a:p>
+          <a:p>
+            <a:pPr indent="0" marL="0">
+              <a:lnSpc>
+                <a:spcPct val="86000"/>
+              </a:lnSpc>
+              <a:buNone/>
+            </a:pPr>
+            <a:r>
+              <a:rPr lang="en-US" sz="750" i="1" dirty="0">
                 <a:solidFill>
                   <a:srgbClr val="5F7183"/>
                 </a:solidFill>
@@ -13668,15 +14038,15 @@
                 <a:ea typeface="Calibri" pitchFamily="34" charset="-122"/>
                 <a:cs typeface="Calibri" pitchFamily="34" charset="-120"/>
               </a:rPr>
-              <a:t>Confirming yes or no is still disclosure. Same structure as case 10-B.</a:t>
-            </a:r>
-            <a:endParaRPr lang="en-US" sz="1050" dirty="0"/>
-          </a:p>
-        </p:txBody>
-      </p:sp>
-      <p:sp>
-        <p:nvSpPr>
-          <p:cNvPr id="19" name="Text 16"/>
+              <a:t>The same thing. Confirming yes or no is still disclosure — the same structure as case 10-B.</a:t>
+            </a:r>
+            <a:endParaRPr lang="en-US" sz="850" dirty="0"/>
+          </a:p>
+        </p:txBody>
+      </p:sp>
+      <p:sp>
+        <p:nvSpPr>
+          <p:cNvPr id="26" name="Text 23"/>
           <p:cNvSpPr/>
           <p:nvPr/>
         </p:nvSpPr>
@@ -13755,7 +14125,7 @@
       </p:sp>
       <p:sp>
         <p:nvSpPr>
-          <p:cNvPr id="20" name="Text 17"/>
+          <p:cNvPr id="27" name="Text 24"/>
           <p:cNvSpPr/>
           <p:nvPr/>
         </p:nvSpPr>
@@ -13808,7 +14178,7 @@
       </p:sp>
       <p:sp>
         <p:nvSpPr>
-          <p:cNvPr id="21" name="Text 18"/>
+          <p:cNvPr id="28" name="Text 25"/>
           <p:cNvSpPr/>
           <p:nvPr/>
         </p:nvSpPr>
@@ -13861,7 +14231,7 @@
       </p:sp>
       <p:sp>
         <p:nvSpPr>
-          <p:cNvPr id="22" name="Text 19"/>
+          <p:cNvPr id="29" name="Text 26"/>
           <p:cNvSpPr/>
           <p:nvPr/>
         </p:nvSpPr>

--- a/decks/02_2限_法令.pptx
+++ b/decks/02_2限_法令.pptx
@@ -9421,11 +9421,11 @@
         <p:spPr>
           <a:xfrm>
             <a:off x="640080" y="3081528"/>
-            <a:ext cx="5327752" cy="1074420"/>
+            <a:ext cx="5327752" cy="836676"/>
           </a:xfrm>
           <a:prstGeom prst="roundRect">
             <a:avLst>
-              <a:gd name="adj" fmla="val 3404"/>
+              <a:gd name="adj" fmla="val 4372"/>
             </a:avLst>
           </a:prstGeom>
           <a:solidFill>
@@ -9442,7 +9442,7 @@
         </p:nvSpPr>
         <p:spPr>
           <a:xfrm>
-            <a:off x="804672" y="3472434"/>
+            <a:off x="804672" y="3353562"/>
             <a:ext cx="292608" cy="292608"/>
           </a:xfrm>
           <a:prstGeom prst="ellipse">
@@ -9462,7 +9462,7 @@
         </p:nvSpPr>
         <p:spPr>
           <a:xfrm>
-            <a:off x="804672" y="3472434"/>
+            <a:off x="804672" y="3353562"/>
             <a:ext cx="292608" cy="292608"/>
           </a:xfrm>
           <a:prstGeom prst="rect">
@@ -9502,7 +9502,7 @@
         <p:spPr>
           <a:xfrm>
             <a:off x="1188720" y="3136392"/>
-            <a:ext cx="4596232" cy="964692"/>
+            <a:ext cx="4596232" cy="726948"/>
           </a:xfrm>
           <a:prstGeom prst="rect">
             <a:avLst/>
@@ -9564,11 +9564,11 @@
         <p:spPr>
           <a:xfrm>
             <a:off x="6223864" y="3081528"/>
-            <a:ext cx="5327752" cy="1074420"/>
+            <a:ext cx="5327752" cy="836676"/>
           </a:xfrm>
           <a:prstGeom prst="roundRect">
             <a:avLst>
-              <a:gd name="adj" fmla="val 3404"/>
+              <a:gd name="adj" fmla="val 4372"/>
             </a:avLst>
           </a:prstGeom>
           <a:solidFill>
@@ -9585,7 +9585,7 @@
         </p:nvSpPr>
         <p:spPr>
           <a:xfrm>
-            <a:off x="6388456" y="3472434"/>
+            <a:off x="6388456" y="3353562"/>
             <a:ext cx="292608" cy="292608"/>
           </a:xfrm>
           <a:prstGeom prst="ellipse">
@@ -9605,7 +9605,7 @@
         </p:nvSpPr>
         <p:spPr>
           <a:xfrm>
-            <a:off x="6388456" y="3472434"/>
+            <a:off x="6388456" y="3353562"/>
             <a:ext cx="292608" cy="292608"/>
           </a:xfrm>
           <a:prstGeom prst="rect">
@@ -9645,7 +9645,7 @@
         <p:spPr>
           <a:xfrm>
             <a:off x="6772504" y="3136392"/>
-            <a:ext cx="4596232" cy="964692"/>
+            <a:ext cx="4596232" cy="726948"/>
           </a:xfrm>
           <a:prstGeom prst="rect">
             <a:avLst/>
@@ -9706,12 +9706,12 @@
         </p:nvSpPr>
         <p:spPr>
           <a:xfrm>
-            <a:off x="640080" y="4265676"/>
-            <a:ext cx="5327752" cy="1074420"/>
+            <a:off x="640080" y="4027932"/>
+            <a:ext cx="5327752" cy="836676"/>
           </a:xfrm>
           <a:prstGeom prst="roundRect">
             <a:avLst>
-              <a:gd name="adj" fmla="val 3404"/>
+              <a:gd name="adj" fmla="val 4372"/>
             </a:avLst>
           </a:prstGeom>
           <a:solidFill>
@@ -9728,7 +9728,7 @@
         </p:nvSpPr>
         <p:spPr>
           <a:xfrm>
-            <a:off x="804672" y="4656582"/>
+            <a:off x="804672" y="4299966"/>
             <a:ext cx="292608" cy="292608"/>
           </a:xfrm>
           <a:prstGeom prst="ellipse">
@@ -9748,7 +9748,7 @@
         </p:nvSpPr>
         <p:spPr>
           <a:xfrm>
-            <a:off x="804672" y="4656582"/>
+            <a:off x="804672" y="4299966"/>
             <a:ext cx="292608" cy="292608"/>
           </a:xfrm>
           <a:prstGeom prst="rect">
@@ -9787,8 +9787,8 @@
         </p:nvSpPr>
         <p:spPr>
           <a:xfrm>
-            <a:off x="1188720" y="4320540"/>
-            <a:ext cx="4596232" cy="964692"/>
+            <a:off x="1188720" y="4082796"/>
+            <a:ext cx="4596232" cy="726948"/>
           </a:xfrm>
           <a:prstGeom prst="rect">
             <a:avLst/>
@@ -9849,12 +9849,12 @@
         </p:nvSpPr>
         <p:spPr>
           <a:xfrm>
-            <a:off x="6223864" y="4265676"/>
-            <a:ext cx="5327752" cy="1074420"/>
+            <a:off x="6223864" y="4027932"/>
+            <a:ext cx="5327752" cy="836676"/>
           </a:xfrm>
           <a:prstGeom prst="roundRect">
             <a:avLst>
-              <a:gd name="adj" fmla="val 3404"/>
+              <a:gd name="adj" fmla="val 4372"/>
             </a:avLst>
           </a:prstGeom>
           <a:solidFill>
@@ -9871,7 +9871,7 @@
         </p:nvSpPr>
         <p:spPr>
           <a:xfrm>
-            <a:off x="6388456" y="4656582"/>
+            <a:off x="6388456" y="4299966"/>
             <a:ext cx="292608" cy="292608"/>
           </a:xfrm>
           <a:prstGeom prst="ellipse">
@@ -9891,7 +9891,7 @@
         </p:nvSpPr>
         <p:spPr>
           <a:xfrm>
-            <a:off x="6388456" y="4656582"/>
+            <a:off x="6388456" y="4299966"/>
             <a:ext cx="292608" cy="292608"/>
           </a:xfrm>
           <a:prstGeom prst="rect">
@@ -9930,8 +9930,8 @@
         </p:nvSpPr>
         <p:spPr>
           <a:xfrm>
-            <a:off x="6772504" y="4320540"/>
-            <a:ext cx="4596232" cy="964692"/>
+            <a:off x="6772504" y="4082796"/>
+            <a:ext cx="4596232" cy="726948"/>
           </a:xfrm>
           <a:prstGeom prst="rect">
             <a:avLst/>
@@ -9992,12 +9992,12 @@
         </p:nvSpPr>
         <p:spPr>
           <a:xfrm>
-            <a:off x="640080" y="5394960"/>
-            <a:ext cx="10911535" cy="457200"/>
+            <a:off x="640080" y="4919472"/>
+            <a:ext cx="10911535" cy="420624"/>
           </a:xfrm>
           <a:prstGeom prst="roundRect">
             <a:avLst>
-              <a:gd name="adj" fmla="val 8000"/>
+              <a:gd name="adj" fmla="val 8696"/>
             </a:avLst>
           </a:prstGeom>
           <a:solidFill>
@@ -10014,8 +10014,8 @@
         </p:nvSpPr>
         <p:spPr>
           <a:xfrm>
-            <a:off x="877824" y="5431536"/>
-            <a:ext cx="10436047" cy="384048"/>
+            <a:off x="877824" y="4946904"/>
+            <a:ext cx="10436047" cy="365760"/>
           </a:xfrm>
           <a:prstGeom prst="rect">
             <a:avLst/>
@@ -10042,7 +10042,7 @@
                 <a:ea typeface="Yu Gothic" pitchFamily="34" charset="-122"/>
                 <a:cs typeface="Yu Gothic" pitchFamily="34" charset="-120"/>
               </a:rPr>
-              <a:t>追加付与　</a:t>
+              <a:t>追加付与①　</a:t>
             </a:r>
             <a:pPr indent="0" marL="0">
               <a:lnSpc>
@@ -10087,7 +10087,108 @@
       </p:sp>
       <p:sp>
         <p:nvSpPr>
-          <p:cNvPr id="27" name="Text 24"/>
+          <p:cNvPr id="27" name="Shape 24"/>
+          <p:cNvSpPr/>
+          <p:nvPr/>
+        </p:nvSpPr>
+        <p:spPr>
+          <a:xfrm>
+            <a:off x="640080" y="5394960"/>
+            <a:ext cx="10911535" cy="420624"/>
+          </a:xfrm>
+          <a:prstGeom prst="roundRect">
+            <a:avLst>
+              <a:gd name="adj" fmla="val 8696"/>
+            </a:avLst>
+          </a:prstGeom>
+          <a:solidFill>
+            <a:srgbClr val="E4F4F0"/>
+          </a:solidFill>
+          <a:ln/>
+        </p:spPr>
+      </p:sp>
+      <p:sp>
+        <p:nvSpPr>
+          <p:cNvPr id="28" name="Text 25"/>
+          <p:cNvSpPr/>
+          <p:nvPr/>
+        </p:nvSpPr>
+        <p:spPr>
+          <a:xfrm>
+            <a:off x="877824" y="5422392"/>
+            <a:ext cx="10436047" cy="365760"/>
+          </a:xfrm>
+          <a:prstGeom prst="rect">
+            <a:avLst/>
+          </a:prstGeom>
+          <a:noFill/>
+          <a:ln/>
+        </p:spPr>
+        <p:txBody>
+          <a:bodyPr wrap="square" lIns="0" tIns="0" rIns="0" bIns="0" rtlCol="0" anchor="ctr"/>
+          <a:lstStyle/>
+          <a:p>
+            <a:pPr indent="0" marL="0">
+              <a:lnSpc>
+                <a:spcPct val="86000"/>
+              </a:lnSpc>
+              <a:buNone/>
+            </a:pPr>
+            <a:r>
+              <a:rPr lang="en-US" sz="850" b="1" dirty="0">
+                <a:solidFill>
+                  <a:srgbClr val="0D8A76"/>
+                </a:solidFill>
+                <a:latin typeface="Yu Gothic" pitchFamily="34" charset="0"/>
+                <a:ea typeface="Yu Gothic" pitchFamily="34" charset="-122"/>
+                <a:cs typeface="Yu Gothic" pitchFamily="34" charset="-120"/>
+              </a:rPr>
+              <a:t>追加付与②　</a:t>
+            </a:r>
+            <a:pPr indent="0" marL="0">
+              <a:lnSpc>
+                <a:spcPct val="86000"/>
+              </a:lnSpc>
+              <a:buNone/>
+            </a:pPr>
+            <a:r>
+              <a:rPr lang="en-US" sz="1050" b="1" dirty="0">
+                <a:solidFill>
+                  <a:srgbClr val="1B2733"/>
+                </a:solidFill>
+                <a:latin typeface="Yu Gothic" pitchFamily="34" charset="0"/>
+                <a:ea typeface="Yu Gothic" pitchFamily="34" charset="-122"/>
+                <a:cs typeface="Yu Gothic" pitchFamily="34" charset="-120"/>
+              </a:rPr>
+              <a:t>相手はそのまま出口へ向かった。追うか、追わないか。</a:t>
+            </a:r>
+            <a:endParaRPr lang="en-US" sz="850" dirty="0"/>
+          </a:p>
+          <a:p>
+            <a:pPr indent="0" marL="0">
+              <a:lnSpc>
+                <a:spcPct val="86000"/>
+              </a:lnSpc>
+              <a:buNone/>
+            </a:pPr>
+            <a:r>
+              <a:rPr lang="en-US" sz="750" i="1" dirty="0">
+                <a:solidFill>
+                  <a:srgbClr val="5F7183"/>
+                </a:solidFill>
+                <a:latin typeface="Calibri" pitchFamily="34" charset="0"/>
+                <a:ea typeface="Calibri" pitchFamily="34" charset="-122"/>
+                <a:cs typeface="Calibri" pitchFamily="34" charset="-120"/>
+              </a:rPr>
+              <a:t>They head straight for the exit. Do you follow, or not?</a:t>
+            </a:r>
+            <a:endParaRPr lang="en-US" sz="850" dirty="0"/>
+          </a:p>
+        </p:txBody>
+      </p:sp>
+      <p:sp>
+        <p:nvSpPr>
+          <p:cNvPr id="29" name="Text 26"/>
           <p:cNvSpPr/>
           <p:nvPr/>
         </p:nvSpPr>
@@ -10166,7 +10267,7 @@
       </p:sp>
       <p:sp>
         <p:nvSpPr>
-          <p:cNvPr id="28" name="Text 25"/>
+          <p:cNvPr id="30" name="Text 27"/>
           <p:cNvSpPr/>
           <p:nvPr/>
         </p:nvSpPr>
@@ -10219,7 +10320,7 @@
       </p:sp>
       <p:sp>
         <p:nvSpPr>
-          <p:cNvPr id="29" name="Text 26"/>
+          <p:cNvPr id="31" name="Text 28"/>
           <p:cNvSpPr/>
           <p:nvPr/>
         </p:nvSpPr>
@@ -10272,7 +10373,7 @@
       </p:sp>
       <p:sp>
         <p:nvSpPr>
-          <p:cNvPr id="30" name="Text 27"/>
+          <p:cNvPr id="32" name="Text 29"/>
           <p:cNvSpPr/>
           <p:nvPr/>
         </p:nvSpPr>
@@ -11513,7 +11614,7 @@
                 <a:ea typeface="Yu Gothic" pitchFamily="34" charset="-122"/>
                 <a:cs typeface="Yu Gothic" pitchFamily="34" charset="-120"/>
               </a:rPr>
-              <a:t>Site SOP優先　</a:t>
+              <a:t>注記　</a:t>
             </a:r>
             <a:pPr indent="0" marL="0">
               <a:lnSpc>
@@ -12089,11 +12190,11 @@
         <p:spPr>
           <a:xfrm>
             <a:off x="640080" y="3081528"/>
-            <a:ext cx="5327752" cy="1074420"/>
+            <a:ext cx="5327752" cy="836676"/>
           </a:xfrm>
           <a:prstGeom prst="roundRect">
             <a:avLst>
-              <a:gd name="adj" fmla="val 3404"/>
+              <a:gd name="adj" fmla="val 4372"/>
             </a:avLst>
           </a:prstGeom>
           <a:solidFill>
@@ -12110,7 +12211,7 @@
         </p:nvSpPr>
         <p:spPr>
           <a:xfrm>
-            <a:off x="804672" y="3472434"/>
+            <a:off x="804672" y="3353562"/>
             <a:ext cx="292608" cy="292608"/>
           </a:xfrm>
           <a:prstGeom prst="ellipse">
@@ -12130,7 +12231,7 @@
         </p:nvSpPr>
         <p:spPr>
           <a:xfrm>
-            <a:off x="804672" y="3472434"/>
+            <a:off x="804672" y="3353562"/>
             <a:ext cx="292608" cy="292608"/>
           </a:xfrm>
           <a:prstGeom prst="rect">
@@ -12170,7 +12271,7 @@
         <p:spPr>
           <a:xfrm>
             <a:off x="1188720" y="3136392"/>
-            <a:ext cx="4596232" cy="964692"/>
+            <a:ext cx="4596232" cy="726948"/>
           </a:xfrm>
           <a:prstGeom prst="rect">
             <a:avLst/>
@@ -12232,11 +12333,11 @@
         <p:spPr>
           <a:xfrm>
             <a:off x="6223864" y="3081528"/>
-            <a:ext cx="5327752" cy="1074420"/>
+            <a:ext cx="5327752" cy="836676"/>
           </a:xfrm>
           <a:prstGeom prst="roundRect">
             <a:avLst>
-              <a:gd name="adj" fmla="val 3404"/>
+              <a:gd name="adj" fmla="val 4372"/>
             </a:avLst>
           </a:prstGeom>
           <a:solidFill>
@@ -12253,7 +12354,7 @@
         </p:nvSpPr>
         <p:spPr>
           <a:xfrm>
-            <a:off x="6388456" y="3472434"/>
+            <a:off x="6388456" y="3353562"/>
             <a:ext cx="292608" cy="292608"/>
           </a:xfrm>
           <a:prstGeom prst="ellipse">
@@ -12273,7 +12374,7 @@
         </p:nvSpPr>
         <p:spPr>
           <a:xfrm>
-            <a:off x="6388456" y="3472434"/>
+            <a:off x="6388456" y="3353562"/>
             <a:ext cx="292608" cy="292608"/>
           </a:xfrm>
           <a:prstGeom prst="rect">
@@ -12313,7 +12414,7 @@
         <p:spPr>
           <a:xfrm>
             <a:off x="6772504" y="3136392"/>
-            <a:ext cx="4596232" cy="964692"/>
+            <a:ext cx="4596232" cy="726948"/>
           </a:xfrm>
           <a:prstGeom prst="rect">
             <a:avLst/>
@@ -12374,12 +12475,12 @@
         </p:nvSpPr>
         <p:spPr>
           <a:xfrm>
-            <a:off x="640080" y="4265676"/>
-            <a:ext cx="5327752" cy="1074420"/>
+            <a:off x="640080" y="4027932"/>
+            <a:ext cx="5327752" cy="836676"/>
           </a:xfrm>
           <a:prstGeom prst="roundRect">
             <a:avLst>
-              <a:gd name="adj" fmla="val 3404"/>
+              <a:gd name="adj" fmla="val 4372"/>
             </a:avLst>
           </a:prstGeom>
           <a:solidFill>
@@ -12396,7 +12497,7 @@
         </p:nvSpPr>
         <p:spPr>
           <a:xfrm>
-            <a:off x="804672" y="4656582"/>
+            <a:off x="804672" y="4299966"/>
             <a:ext cx="292608" cy="292608"/>
           </a:xfrm>
           <a:prstGeom prst="ellipse">
@@ -12416,7 +12517,7 @@
         </p:nvSpPr>
         <p:spPr>
           <a:xfrm>
-            <a:off x="804672" y="4656582"/>
+            <a:off x="804672" y="4299966"/>
             <a:ext cx="292608" cy="292608"/>
           </a:xfrm>
           <a:prstGeom prst="rect">
@@ -12455,8 +12556,8 @@
         </p:nvSpPr>
         <p:spPr>
           <a:xfrm>
-            <a:off x="1188720" y="4320540"/>
-            <a:ext cx="4596232" cy="964692"/>
+            <a:off x="1188720" y="4082796"/>
+            <a:ext cx="4596232" cy="726948"/>
           </a:xfrm>
           <a:prstGeom prst="rect">
             <a:avLst/>
@@ -12517,12 +12618,12 @@
         </p:nvSpPr>
         <p:spPr>
           <a:xfrm>
-            <a:off x="6223864" y="4265676"/>
-            <a:ext cx="5327752" cy="1074420"/>
+            <a:off x="6223864" y="4027932"/>
+            <a:ext cx="5327752" cy="836676"/>
           </a:xfrm>
           <a:prstGeom prst="roundRect">
             <a:avLst>
-              <a:gd name="adj" fmla="val 3404"/>
+              <a:gd name="adj" fmla="val 4372"/>
             </a:avLst>
           </a:prstGeom>
           <a:solidFill>
@@ -12539,7 +12640,7 @@
         </p:nvSpPr>
         <p:spPr>
           <a:xfrm>
-            <a:off x="6388456" y="4656582"/>
+            <a:off x="6388456" y="4299966"/>
             <a:ext cx="292608" cy="292608"/>
           </a:xfrm>
           <a:prstGeom prst="ellipse">
@@ -12559,7 +12660,7 @@
         </p:nvSpPr>
         <p:spPr>
           <a:xfrm>
-            <a:off x="6388456" y="4656582"/>
+            <a:off x="6388456" y="4299966"/>
             <a:ext cx="292608" cy="292608"/>
           </a:xfrm>
           <a:prstGeom prst="rect">
@@ -12598,8 +12699,8 @@
         </p:nvSpPr>
         <p:spPr>
           <a:xfrm>
-            <a:off x="6772504" y="4320540"/>
-            <a:ext cx="4596232" cy="964692"/>
+            <a:off x="6772504" y="4082796"/>
+            <a:ext cx="4596232" cy="726948"/>
           </a:xfrm>
           <a:prstGeom prst="rect">
             <a:avLst/>
@@ -12660,12 +12761,12 @@
         </p:nvSpPr>
         <p:spPr>
           <a:xfrm>
-            <a:off x="640080" y="5394960"/>
-            <a:ext cx="10911535" cy="457200"/>
+            <a:off x="640080" y="4919472"/>
+            <a:ext cx="10911535" cy="420624"/>
           </a:xfrm>
           <a:prstGeom prst="roundRect">
             <a:avLst>
-              <a:gd name="adj" fmla="val 8000"/>
+              <a:gd name="adj" fmla="val 8696"/>
             </a:avLst>
           </a:prstGeom>
           <a:solidFill>
@@ -12682,8 +12783,8 @@
         </p:nvSpPr>
         <p:spPr>
           <a:xfrm>
-            <a:off x="877824" y="5431536"/>
-            <a:ext cx="10436047" cy="384048"/>
+            <a:off x="877824" y="4946904"/>
+            <a:ext cx="10436047" cy="365760"/>
           </a:xfrm>
           <a:prstGeom prst="rect">
             <a:avLst/>
@@ -12710,7 +12811,7 @@
                 <a:ea typeface="Yu Gothic" pitchFamily="34" charset="-122"/>
                 <a:cs typeface="Yu Gothic" pitchFamily="34" charset="-120"/>
               </a:rPr>
-              <a:t>追加付与　</a:t>
+              <a:t>追加付与①　</a:t>
             </a:r>
             <a:pPr indent="0" marL="0">
               <a:lnSpc>
@@ -12755,7 +12856,108 @@
       </p:sp>
       <p:sp>
         <p:nvSpPr>
-          <p:cNvPr id="27" name="Text 24"/>
+          <p:cNvPr id="27" name="Shape 24"/>
+          <p:cNvSpPr/>
+          <p:nvPr/>
+        </p:nvSpPr>
+        <p:spPr>
+          <a:xfrm>
+            <a:off x="640080" y="5394960"/>
+            <a:ext cx="10911535" cy="420624"/>
+          </a:xfrm>
+          <a:prstGeom prst="roundRect">
+            <a:avLst>
+              <a:gd name="adj" fmla="val 8696"/>
+            </a:avLst>
+          </a:prstGeom>
+          <a:solidFill>
+            <a:srgbClr val="E4F4F0"/>
+          </a:solidFill>
+          <a:ln/>
+        </p:spPr>
+      </p:sp>
+      <p:sp>
+        <p:nvSpPr>
+          <p:cNvPr id="28" name="Text 25"/>
+          <p:cNvSpPr/>
+          <p:nvPr/>
+        </p:nvSpPr>
+        <p:spPr>
+          <a:xfrm>
+            <a:off x="877824" y="5422392"/>
+            <a:ext cx="10436047" cy="365760"/>
+          </a:xfrm>
+          <a:prstGeom prst="rect">
+            <a:avLst/>
+          </a:prstGeom>
+          <a:noFill/>
+          <a:ln/>
+        </p:spPr>
+        <p:txBody>
+          <a:bodyPr wrap="square" lIns="0" tIns="0" rIns="0" bIns="0" rtlCol="0" anchor="ctr"/>
+          <a:lstStyle/>
+          <a:p>
+            <a:pPr indent="0" marL="0">
+              <a:lnSpc>
+                <a:spcPct val="86000"/>
+              </a:lnSpc>
+              <a:buNone/>
+            </a:pPr>
+            <a:r>
+              <a:rPr lang="en-US" sz="850" b="1" dirty="0">
+                <a:solidFill>
+                  <a:srgbClr val="0D8A76"/>
+                </a:solidFill>
+                <a:latin typeface="Yu Gothic" pitchFamily="34" charset="0"/>
+                <a:ea typeface="Yu Gothic" pitchFamily="34" charset="-122"/>
+                <a:cs typeface="Yu Gothic" pitchFamily="34" charset="-120"/>
+              </a:rPr>
+              <a:t>追加付与②　</a:t>
+            </a:r>
+            <a:pPr indent="0" marL="0">
+              <a:lnSpc>
+                <a:spcPct val="86000"/>
+              </a:lnSpc>
+              <a:buNone/>
+            </a:pPr>
+            <a:r>
+              <a:rPr lang="en-US" sz="1050" b="1" dirty="0">
+                <a:solidFill>
+                  <a:srgbClr val="1B2733"/>
+                </a:solidFill>
+                <a:latin typeface="Yu Gothic" pitchFamily="34" charset="0"/>
+                <a:ea typeface="Yu Gothic" pitchFamily="34" charset="-122"/>
+                <a:cs typeface="Yu Gothic" pitchFamily="34" charset="-120"/>
+              </a:rPr>
+              <a:t>相手が「名簿は見せなくていい。ある名前があったかどうかだけ教えてほしい」と述べた。</a:t>
+            </a:r>
+            <a:endParaRPr lang="en-US" sz="850" dirty="0"/>
+          </a:p>
+          <a:p>
+            <a:pPr indent="0" marL="0">
+              <a:lnSpc>
+                <a:spcPct val="86000"/>
+              </a:lnSpc>
+              <a:buNone/>
+            </a:pPr>
+            <a:r>
+              <a:rPr lang="en-US" sz="750" i="1" dirty="0">
+                <a:solidFill>
+                  <a:srgbClr val="5F7183"/>
+                </a:solidFill>
+                <a:latin typeface="Calibri" pitchFamily="34" charset="0"/>
+                <a:ea typeface="Calibri" pitchFamily="34" charset="-122"/>
+                <a:cs typeface="Calibri" pitchFamily="34" charset="-120"/>
+              </a:rPr>
+              <a:t>They say: "Then do not show me the list. Just tell me whether a certain name appears."</a:t>
+            </a:r>
+            <a:endParaRPr lang="en-US" sz="850" dirty="0"/>
+          </a:p>
+        </p:txBody>
+      </p:sp>
+      <p:sp>
+        <p:nvSpPr>
+          <p:cNvPr id="29" name="Text 26"/>
           <p:cNvSpPr/>
           <p:nvPr/>
         </p:nvSpPr>
@@ -12834,7 +13036,7 @@
       </p:sp>
       <p:sp>
         <p:nvSpPr>
-          <p:cNvPr id="28" name="Text 25"/>
+          <p:cNvPr id="30" name="Text 27"/>
           <p:cNvSpPr/>
           <p:nvPr/>
         </p:nvSpPr>
@@ -12887,7 +13089,7 @@
       </p:sp>
       <p:sp>
         <p:nvSpPr>
-          <p:cNvPr id="29" name="Text 26"/>
+          <p:cNvPr id="31" name="Text 28"/>
           <p:cNvSpPr/>
           <p:nvPr/>
         </p:nvSpPr>
@@ -12940,7 +13142,7 @@
       </p:sp>
       <p:sp>
         <p:nvSpPr>
-          <p:cNvPr id="30" name="Text 27"/>
+          <p:cNvPr id="32" name="Text 29"/>
           <p:cNvSpPr/>
           <p:nvPr/>
         </p:nvSpPr>
@@ -14080,7 +14282,7 @@
                 <a:ea typeface="Yu Gothic" pitchFamily="34" charset="-122"/>
                 <a:cs typeface="Yu Gothic" pitchFamily="34" charset="-120"/>
               </a:rPr>
-              <a:t>Site SOP優先　</a:t>
+              <a:t>注記　</a:t>
             </a:r>
             <a:pPr indent="0" marL="0">
               <a:lnSpc>

--- a/decks/02_2限_法令.pptx
+++ b/decks/02_2限_法令.pptx
@@ -1675,7 +1675,7 @@
               <a:buNone/>
             </a:pPr>
             <a:r>
-              <a:rPr lang="en-US" sz="1050" i="1" dirty="0">
+              <a:rPr lang="en-US" sz="1050" dirty="0">
                 <a:solidFill>
                   <a:srgbClr val="A9BCCE"/>
                 </a:solidFill>
@@ -1852,7 +1852,7 @@
               <a:buNone/>
             </a:pPr>
             <a:r>
-              <a:rPr lang="en-US" sz="1000" i="1" dirty="0">
+              <a:rPr lang="en-US" sz="1000" dirty="0">
                 <a:solidFill>
                   <a:srgbClr val="8EA3B7"/>
                 </a:solidFill>
@@ -1970,7 +1970,7 @@
               <a:buNone/>
             </a:pPr>
             <a:r>
-              <a:rPr lang="en-US" sz="1250" i="1" dirty="0">
+              <a:rPr lang="en-US" sz="1350" dirty="0">
                 <a:solidFill>
                   <a:srgbClr val="12B198"/>
                 </a:solidFill>
@@ -2032,9 +2032,9 @@
               <a:buNone/>
             </a:pPr>
             <a:r>
-              <a:rPr lang="en-US" sz="1000" i="1" dirty="0">
-                <a:solidFill>
-                  <a:srgbClr val="5F7183"/>
+              <a:rPr lang="en-US" sz="1000" dirty="0">
+                <a:solidFill>
+                  <a:srgbClr val="1B2733"/>
                 </a:solidFill>
                 <a:latin typeface="Calibri" pitchFamily="34" charset="0"/>
                 <a:ea typeface="Calibri" pitchFamily="34" charset="-122"/>
@@ -2175,9 +2175,9 @@
               <a:buNone/>
             </a:pPr>
             <a:r>
-              <a:rPr lang="en-US" sz="900" i="1" dirty="0">
-                <a:solidFill>
-                  <a:srgbClr val="5F7183"/>
+              <a:rPr lang="en-US" sz="1050" dirty="0">
+                <a:solidFill>
+                  <a:srgbClr val="1B2733"/>
                 </a:solidFill>
                 <a:latin typeface="Calibri" pitchFamily="34" charset="0"/>
                 <a:ea typeface="Calibri" pitchFamily="34" charset="-122"/>
@@ -2318,9 +2318,9 @@
               <a:buNone/>
             </a:pPr>
             <a:r>
-              <a:rPr lang="en-US" sz="900" i="1" dirty="0">
-                <a:solidFill>
-                  <a:srgbClr val="5F7183"/>
+              <a:rPr lang="en-US" sz="1050" dirty="0">
+                <a:solidFill>
+                  <a:srgbClr val="1B2733"/>
                 </a:solidFill>
                 <a:latin typeface="Calibri" pitchFamily="34" charset="0"/>
                 <a:ea typeface="Calibri" pitchFamily="34" charset="-122"/>
@@ -2461,9 +2461,9 @@
               <a:buNone/>
             </a:pPr>
             <a:r>
-              <a:rPr lang="en-US" sz="900" i="1" dirty="0">
-                <a:solidFill>
-                  <a:srgbClr val="5F7183"/>
+              <a:rPr lang="en-US" sz="1050" dirty="0">
+                <a:solidFill>
+                  <a:srgbClr val="1B2733"/>
                 </a:solidFill>
                 <a:latin typeface="Calibri" pitchFamily="34" charset="0"/>
                 <a:ea typeface="Calibri" pitchFamily="34" charset="-122"/>
@@ -2604,9 +2604,9 @@
               <a:buNone/>
             </a:pPr>
             <a:r>
-              <a:rPr lang="en-US" sz="900" i="1" dirty="0">
-                <a:solidFill>
-                  <a:srgbClr val="5F7183"/>
+              <a:rPr lang="en-US" sz="1050" dirty="0">
+                <a:solidFill>
+                  <a:srgbClr val="1B2733"/>
                 </a:solidFill>
                 <a:latin typeface="Calibri" pitchFamily="34" charset="0"/>
                 <a:ea typeface="Calibri" pitchFamily="34" charset="-122"/>
@@ -2747,9 +2747,9 @@
               <a:buNone/>
             </a:pPr>
             <a:r>
-              <a:rPr lang="en-US" sz="900" i="1" dirty="0">
-                <a:solidFill>
-                  <a:srgbClr val="5F7183"/>
+              <a:rPr lang="en-US" sz="1050" dirty="0">
+                <a:solidFill>
+                  <a:srgbClr val="1B2733"/>
                 </a:solidFill>
                 <a:latin typeface="Calibri" pitchFamily="34" charset="0"/>
                 <a:ea typeface="Calibri" pitchFamily="34" charset="-122"/>
@@ -2890,9 +2890,9 @@
               <a:buNone/>
             </a:pPr>
             <a:r>
-              <a:rPr lang="en-US" sz="900" i="1" dirty="0">
-                <a:solidFill>
-                  <a:srgbClr val="5F7183"/>
+              <a:rPr lang="en-US" sz="1050" dirty="0">
+                <a:solidFill>
+                  <a:srgbClr val="1B2733"/>
                 </a:solidFill>
                 <a:latin typeface="Calibri" pitchFamily="34" charset="0"/>
                 <a:ea typeface="Calibri" pitchFamily="34" charset="-122"/>
@@ -3033,9 +3033,9 @@
               <a:buNone/>
             </a:pPr>
             <a:r>
-              <a:rPr lang="en-US" sz="900" i="1" dirty="0">
-                <a:solidFill>
-                  <a:srgbClr val="5F7183"/>
+              <a:rPr lang="en-US" sz="1050" dirty="0">
+                <a:solidFill>
+                  <a:srgbClr val="1B2733"/>
                 </a:solidFill>
                 <a:latin typeface="Calibri" pitchFamily="34" charset="0"/>
                 <a:ea typeface="Calibri" pitchFamily="34" charset="-122"/>
@@ -3176,49 +3176,49 @@
               <a:buNone/>
             </a:pPr>
             <a:r>
-              <a:rPr lang="en-US" sz="900" i="1" dirty="0">
+              <a:rPr lang="en-US" sz="1050" dirty="0">
+                <a:solidFill>
+                  <a:srgbClr val="1B2733"/>
+                </a:solidFill>
+                <a:latin typeface="Calibri" pitchFamily="34" charset="0"/>
+                <a:ea typeface="Calibri" pitchFamily="34" charset="-122"/>
+                <a:cs typeface="Calibri" pitchFamily="34" charset="-120"/>
+              </a:rPr>
+              <a:t>Refusing to leave. The request must come from the authority.</a:t>
+            </a:r>
+            <a:endParaRPr lang="en-US" sz="1150" dirty="0"/>
+          </a:p>
+        </p:txBody>
+      </p:sp>
+      <p:sp>
+        <p:nvSpPr>
+          <p:cNvPr id="37" name="Text 34"/>
+          <p:cNvSpPr/>
+          <p:nvPr/>
+        </p:nvSpPr>
+        <p:spPr>
+          <a:xfrm>
+            <a:off x="640080" y="6492240"/>
+            <a:ext cx="8778240" cy="292608"/>
+          </a:xfrm>
+          <a:prstGeom prst="rect">
+            <a:avLst/>
+          </a:prstGeom>
+          <a:noFill/>
+          <a:ln/>
+        </p:spPr>
+        <p:txBody>
+          <a:bodyPr wrap="square" lIns="0" tIns="0" rIns="0" bIns="0" rtlCol="0" anchor="ctr"/>
+          <a:lstStyle/>
+          <a:p>
+            <a:pPr indent="0" marL="0">
+              <a:buNone/>
+            </a:pPr>
+            <a:r>
+              <a:rPr lang="en-US" sz="900" dirty="0">
                 <a:solidFill>
                   <a:srgbClr val="5F7183"/>
                 </a:solidFill>
-                <a:latin typeface="Calibri" pitchFamily="34" charset="0"/>
-                <a:ea typeface="Calibri" pitchFamily="34" charset="-122"/>
-                <a:cs typeface="Calibri" pitchFamily="34" charset="-120"/>
-              </a:rPr>
-              <a:t>Refusing to leave. The request must come from the authority.</a:t>
-            </a:r>
-            <a:endParaRPr lang="en-US" sz="1150" dirty="0"/>
-          </a:p>
-        </p:txBody>
-      </p:sp>
-      <p:sp>
-        <p:nvSpPr>
-          <p:cNvPr id="37" name="Text 34"/>
-          <p:cNvSpPr/>
-          <p:nvPr/>
-        </p:nvSpPr>
-        <p:spPr>
-          <a:xfrm>
-            <a:off x="640080" y="6382512"/>
-            <a:ext cx="8778240" cy="292608"/>
-          </a:xfrm>
-          <a:prstGeom prst="rect">
-            <a:avLst/>
-          </a:prstGeom>
-          <a:noFill/>
-          <a:ln/>
-        </p:spPr>
-        <p:txBody>
-          <a:bodyPr wrap="square" lIns="0" tIns="0" rIns="0" bIns="0" rtlCol="0" anchor="ctr"/>
-          <a:lstStyle/>
-          <a:p>
-            <a:pPr indent="0" marL="0">
-              <a:buNone/>
-            </a:pPr>
-            <a:r>
-              <a:rPr lang="en-US" sz="900" dirty="0">
-                <a:solidFill>
-                  <a:srgbClr val="5F7183"/>
-                </a:solidFill>
                 <a:latin typeface="Yu Gothic" pitchFamily="34" charset="0"/>
                 <a:ea typeface="Yu Gothic" pitchFamily="34" charset="-122"/>
                 <a:cs typeface="Yu Gothic" pitchFamily="34" charset="-120"/>
@@ -3251,7 +3251,7 @@
         </p:nvSpPr>
         <p:spPr>
           <a:xfrm>
-            <a:off x="10637215" y="6382512"/>
+            <a:off x="10637215" y="6492240"/>
             <a:ext cx="914400" cy="292608"/>
           </a:xfrm>
           <a:prstGeom prst="rect">
@@ -3346,8 +3346,8 @@
         </p:nvSpPr>
         <p:spPr>
           <a:xfrm>
-            <a:off x="640080" y="384048"/>
-            <a:ext cx="8982151" cy="768096"/>
+            <a:off x="640080" y="365760"/>
+            <a:ext cx="8982151" cy="749808"/>
           </a:xfrm>
           <a:prstGeom prst="rect">
             <a:avLst/>
@@ -3386,7 +3386,7 @@
               <a:buNone/>
             </a:pPr>
             <a:r>
-              <a:rPr lang="en-US" sz="1100" i="1" dirty="0">
+              <a:rPr lang="en-US" sz="1100" dirty="0">
                 <a:solidFill>
                   <a:srgbClr val="12B198"/>
                 </a:solidFill>
@@ -3408,7 +3408,7 @@
         </p:nvSpPr>
         <p:spPr>
           <a:xfrm>
-            <a:off x="9686239" y="438912"/>
+            <a:off x="9686239" y="420624"/>
             <a:ext cx="932688" cy="310896"/>
           </a:xfrm>
           <a:prstGeom prst="roundRect">
@@ -3430,7 +3430,7 @@
         </p:nvSpPr>
         <p:spPr>
           <a:xfrm>
-            <a:off x="9686239" y="438912"/>
+            <a:off x="9686239" y="420624"/>
             <a:ext cx="932688" cy="310896"/>
           </a:xfrm>
           <a:prstGeom prst="rect">
@@ -3469,12 +3469,12 @@
         </p:nvSpPr>
         <p:spPr>
           <a:xfrm>
-            <a:off x="640080" y="1188720"/>
-            <a:ext cx="10911535" cy="530352"/>
+            <a:off x="640080" y="1115568"/>
+            <a:ext cx="10911535" cy="585216"/>
           </a:xfrm>
           <a:prstGeom prst="roundRect">
             <a:avLst>
-              <a:gd name="adj" fmla="val 6897"/>
+              <a:gd name="adj" fmla="val 6250"/>
             </a:avLst>
           </a:prstGeom>
           <a:solidFill>
@@ -3491,8 +3491,8 @@
         </p:nvSpPr>
         <p:spPr>
           <a:xfrm>
-            <a:off x="877824" y="1234440"/>
-            <a:ext cx="10436047" cy="438912"/>
+            <a:off x="877824" y="1161288"/>
+            <a:ext cx="10436047" cy="493776"/>
           </a:xfrm>
           <a:prstGeom prst="rect">
             <a:avLst/>
@@ -3528,7 +3528,7 @@
               <a:buNone/>
             </a:pPr>
             <a:r>
-              <a:rPr lang="en-US" sz="800" dirty="0">
+              <a:rPr lang="en-US" sz="900" dirty="0">
                 <a:solidFill>
                   <a:srgbClr val="0D8A76"/>
                 </a:solidFill>
@@ -3565,9 +3565,9 @@
               <a:buNone/>
             </a:pPr>
             <a:r>
-              <a:rPr lang="en-US" sz="850" i="1" dirty="0">
-                <a:solidFill>
-                  <a:srgbClr val="5F7183"/>
+              <a:rPr lang="en-US" sz="1050" dirty="0">
+                <a:solidFill>
+                  <a:srgbClr val="1B2733"/>
                 </a:solidFill>
                 <a:latin typeface="Calibri" pitchFamily="34" charset="0"/>
                 <a:ea typeface="Calibri" pitchFamily="34" charset="-122"/>
@@ -3587,12 +3587,12 @@
         </p:nvSpPr>
         <p:spPr>
           <a:xfrm>
-            <a:off x="640080" y="1810512"/>
-            <a:ext cx="5327752" cy="1920240"/>
+            <a:off x="640080" y="1773936"/>
+            <a:ext cx="5327752" cy="1965960"/>
           </a:xfrm>
           <a:prstGeom prst="roundRect">
             <a:avLst>
-              <a:gd name="adj" fmla="val 1905"/>
+              <a:gd name="adj" fmla="val 1860"/>
             </a:avLst>
           </a:prstGeom>
           <a:solidFill>
@@ -3609,7 +3609,7 @@
         </p:nvSpPr>
         <p:spPr>
           <a:xfrm>
-            <a:off x="822960" y="1975104"/>
+            <a:off x="822960" y="1938528"/>
             <a:ext cx="310896" cy="310896"/>
           </a:xfrm>
           <a:prstGeom prst="ellipse">
@@ -3629,7 +3629,7 @@
         </p:nvSpPr>
         <p:spPr>
           <a:xfrm>
-            <a:off x="822960" y="1975104"/>
+            <a:off x="822960" y="1938528"/>
             <a:ext cx="310896" cy="310896"/>
           </a:xfrm>
           <a:prstGeom prst="rect">
@@ -3668,7 +3668,7 @@
         </p:nvSpPr>
         <p:spPr>
           <a:xfrm>
-            <a:off x="1207008" y="1938528"/>
+            <a:off x="1207008" y="1901952"/>
             <a:ext cx="4559656" cy="512064"/>
           </a:xfrm>
           <a:prstGeom prst="rect">
@@ -3708,7 +3708,7 @@
               <a:buNone/>
             </a:pPr>
             <a:r>
-              <a:rPr lang="en-US" sz="800" i="1" dirty="0">
+              <a:rPr lang="en-US" sz="1050" dirty="0">
                 <a:solidFill>
                   <a:srgbClr val="12B198"/>
                 </a:solidFill>
@@ -3730,8 +3730,8 @@
         </p:nvSpPr>
         <p:spPr>
           <a:xfrm>
-            <a:off x="859536" y="2487168"/>
-            <a:ext cx="4888840" cy="1097280"/>
+            <a:off x="859536" y="2450592"/>
+            <a:ext cx="4888840" cy="1143000"/>
           </a:xfrm>
           <a:prstGeom prst="rect">
             <a:avLst/>
@@ -3776,9 +3776,9 @@
               <a:buNone/>
             </a:pPr>
             <a:r>
-              <a:rPr lang="en-US" sz="750" i="1" dirty="0">
-                <a:solidFill>
-                  <a:srgbClr val="5F7183"/>
+              <a:rPr lang="en-US" sz="950" dirty="0">
+                <a:solidFill>
+                  <a:srgbClr val="1B2733"/>
                 </a:solidFill>
                 <a:latin typeface="Calibri" pitchFamily="34" charset="0"/>
                 <a:ea typeface="Calibri" pitchFamily="34" charset="-122"/>
@@ -3822,9 +3822,9 @@
               <a:buNone/>
             </a:pPr>
             <a:r>
-              <a:rPr lang="en-US" sz="750" i="1" dirty="0">
-                <a:solidFill>
-                  <a:srgbClr val="5F7183"/>
+              <a:rPr lang="en-US" sz="950" dirty="0">
+                <a:solidFill>
+                  <a:srgbClr val="1B2733"/>
                 </a:solidFill>
                 <a:latin typeface="Calibri" pitchFamily="34" charset="0"/>
                 <a:ea typeface="Calibri" pitchFamily="34" charset="-122"/>
@@ -3868,9 +3868,9 @@
               <a:buNone/>
             </a:pPr>
             <a:r>
-              <a:rPr lang="en-US" sz="750" i="1" dirty="0">
-                <a:solidFill>
-                  <a:srgbClr val="5F7183"/>
+              <a:rPr lang="en-US" sz="950" dirty="0">
+                <a:solidFill>
+                  <a:srgbClr val="1B2733"/>
                 </a:solidFill>
                 <a:latin typeface="Calibri" pitchFamily="34" charset="0"/>
                 <a:ea typeface="Calibri" pitchFamily="34" charset="-122"/>
@@ -3914,9 +3914,9 @@
               <a:buNone/>
             </a:pPr>
             <a:r>
-              <a:rPr lang="en-US" sz="750" i="1" dirty="0">
-                <a:solidFill>
-                  <a:srgbClr val="5F7183"/>
+              <a:rPr lang="en-US" sz="950" dirty="0">
+                <a:solidFill>
+                  <a:srgbClr val="1B2733"/>
                 </a:solidFill>
                 <a:latin typeface="Calibri" pitchFamily="34" charset="0"/>
                 <a:ea typeface="Calibri" pitchFamily="34" charset="-122"/>
@@ -3936,12 +3936,12 @@
         </p:nvSpPr>
         <p:spPr>
           <a:xfrm>
-            <a:off x="6223864" y="1810512"/>
-            <a:ext cx="5327752" cy="1920240"/>
+            <a:off x="6223864" y="1773936"/>
+            <a:ext cx="5327752" cy="1965960"/>
           </a:xfrm>
           <a:prstGeom prst="roundRect">
             <a:avLst>
-              <a:gd name="adj" fmla="val 1905"/>
+              <a:gd name="adj" fmla="val 1860"/>
             </a:avLst>
           </a:prstGeom>
           <a:solidFill>
@@ -3958,7 +3958,7 @@
         </p:nvSpPr>
         <p:spPr>
           <a:xfrm>
-            <a:off x="6406744" y="1975104"/>
+            <a:off x="6406744" y="1938528"/>
             <a:ext cx="310896" cy="310896"/>
           </a:xfrm>
           <a:prstGeom prst="ellipse">
@@ -3978,7 +3978,7 @@
         </p:nvSpPr>
         <p:spPr>
           <a:xfrm>
-            <a:off x="6406744" y="1975104"/>
+            <a:off x="6406744" y="1938528"/>
             <a:ext cx="310896" cy="310896"/>
           </a:xfrm>
           <a:prstGeom prst="rect">
@@ -4017,7 +4017,7 @@
         </p:nvSpPr>
         <p:spPr>
           <a:xfrm>
-            <a:off x="6790792" y="1938528"/>
+            <a:off x="6790792" y="1901952"/>
             <a:ext cx="4559656" cy="512064"/>
           </a:xfrm>
           <a:prstGeom prst="rect">
@@ -4057,7 +4057,7 @@
               <a:buNone/>
             </a:pPr>
             <a:r>
-              <a:rPr lang="en-US" sz="800" i="1" dirty="0">
+              <a:rPr lang="en-US" sz="1050" dirty="0">
                 <a:solidFill>
                   <a:srgbClr val="12B198"/>
                 </a:solidFill>
@@ -4079,8 +4079,8 @@
         </p:nvSpPr>
         <p:spPr>
           <a:xfrm>
-            <a:off x="6443320" y="2487168"/>
-            <a:ext cx="4888840" cy="1097280"/>
+            <a:off x="6443320" y="2450592"/>
+            <a:ext cx="4888840" cy="1143000"/>
           </a:xfrm>
           <a:prstGeom prst="rect">
             <a:avLst/>
@@ -4125,9 +4125,9 @@
               <a:buNone/>
             </a:pPr>
             <a:r>
-              <a:rPr lang="en-US" sz="750" i="1" dirty="0">
-                <a:solidFill>
-                  <a:srgbClr val="5F7183"/>
+              <a:rPr lang="en-US" sz="950" dirty="0">
+                <a:solidFill>
+                  <a:srgbClr val="1B2733"/>
                 </a:solidFill>
                 <a:latin typeface="Calibri" pitchFamily="34" charset="0"/>
                 <a:ea typeface="Calibri" pitchFamily="34" charset="-122"/>
@@ -4171,9 +4171,9 @@
               <a:buNone/>
             </a:pPr>
             <a:r>
-              <a:rPr lang="en-US" sz="750" i="1" dirty="0">
-                <a:solidFill>
-                  <a:srgbClr val="5F7183"/>
+              <a:rPr lang="en-US" sz="950" dirty="0">
+                <a:solidFill>
+                  <a:srgbClr val="1B2733"/>
                 </a:solidFill>
                 <a:latin typeface="Calibri" pitchFamily="34" charset="0"/>
                 <a:ea typeface="Calibri" pitchFamily="34" charset="-122"/>
@@ -4217,9 +4217,9 @@
               <a:buNone/>
             </a:pPr>
             <a:r>
-              <a:rPr lang="en-US" sz="750" i="1" dirty="0">
-                <a:solidFill>
-                  <a:srgbClr val="5F7183"/>
+              <a:rPr lang="en-US" sz="950" dirty="0">
+                <a:solidFill>
+                  <a:srgbClr val="1B2733"/>
                 </a:solidFill>
                 <a:latin typeface="Calibri" pitchFamily="34" charset="0"/>
                 <a:ea typeface="Calibri" pitchFamily="34" charset="-122"/>
@@ -4263,9 +4263,9 @@
               <a:buNone/>
             </a:pPr>
             <a:r>
-              <a:rPr lang="en-US" sz="750" i="1" dirty="0">
-                <a:solidFill>
-                  <a:srgbClr val="5F7183"/>
+              <a:rPr lang="en-US" sz="950" dirty="0">
+                <a:solidFill>
+                  <a:srgbClr val="1B2733"/>
                 </a:solidFill>
                 <a:latin typeface="Calibri" pitchFamily="34" charset="0"/>
                 <a:ea typeface="Calibri" pitchFamily="34" charset="-122"/>
@@ -4285,12 +4285,12 @@
         </p:nvSpPr>
         <p:spPr>
           <a:xfrm>
-            <a:off x="640080" y="3931920"/>
-            <a:ext cx="5327752" cy="1920240"/>
+            <a:off x="640080" y="3941064"/>
+            <a:ext cx="5327752" cy="1965960"/>
           </a:xfrm>
           <a:prstGeom prst="roundRect">
             <a:avLst>
-              <a:gd name="adj" fmla="val 1905"/>
+              <a:gd name="adj" fmla="val 1860"/>
             </a:avLst>
           </a:prstGeom>
           <a:solidFill>
@@ -4307,7 +4307,7 @@
         </p:nvSpPr>
         <p:spPr>
           <a:xfrm>
-            <a:off x="822960" y="4096512"/>
+            <a:off x="822960" y="4105656"/>
             <a:ext cx="310896" cy="310896"/>
           </a:xfrm>
           <a:prstGeom prst="ellipse">
@@ -4327,7 +4327,7 @@
         </p:nvSpPr>
         <p:spPr>
           <a:xfrm>
-            <a:off x="822960" y="4096512"/>
+            <a:off x="822960" y="4105656"/>
             <a:ext cx="310896" cy="310896"/>
           </a:xfrm>
           <a:prstGeom prst="rect">
@@ -4366,7 +4366,7 @@
         </p:nvSpPr>
         <p:spPr>
           <a:xfrm>
-            <a:off x="1207008" y="4059936"/>
+            <a:off x="1207008" y="4069080"/>
             <a:ext cx="4559656" cy="512064"/>
           </a:xfrm>
           <a:prstGeom prst="rect">
@@ -4406,7 +4406,7 @@
               <a:buNone/>
             </a:pPr>
             <a:r>
-              <a:rPr lang="en-US" sz="800" i="1" dirty="0">
+              <a:rPr lang="en-US" sz="1050" dirty="0">
                 <a:solidFill>
                   <a:srgbClr val="12B198"/>
                 </a:solidFill>
@@ -4428,8 +4428,8 @@
         </p:nvSpPr>
         <p:spPr>
           <a:xfrm>
-            <a:off x="859536" y="4608576"/>
-            <a:ext cx="4888840" cy="1097280"/>
+            <a:off x="859536" y="4617720"/>
+            <a:ext cx="4888840" cy="1143000"/>
           </a:xfrm>
           <a:prstGeom prst="rect">
             <a:avLst/>
@@ -4474,9 +4474,9 @@
               <a:buNone/>
             </a:pPr>
             <a:r>
-              <a:rPr lang="en-US" sz="750" i="1" dirty="0">
-                <a:solidFill>
-                  <a:srgbClr val="5F7183"/>
+              <a:rPr lang="en-US" sz="950" dirty="0">
+                <a:solidFill>
+                  <a:srgbClr val="1B2733"/>
                 </a:solidFill>
                 <a:latin typeface="Calibri" pitchFamily="34" charset="0"/>
                 <a:ea typeface="Calibri" pitchFamily="34" charset="-122"/>
@@ -4520,9 +4520,9 @@
               <a:buNone/>
             </a:pPr>
             <a:r>
-              <a:rPr lang="en-US" sz="750" i="1" dirty="0">
-                <a:solidFill>
-                  <a:srgbClr val="5F7183"/>
+              <a:rPr lang="en-US" sz="950" dirty="0">
+                <a:solidFill>
+                  <a:srgbClr val="1B2733"/>
                 </a:solidFill>
                 <a:latin typeface="Calibri" pitchFamily="34" charset="0"/>
                 <a:ea typeface="Calibri" pitchFamily="34" charset="-122"/>
@@ -4566,9 +4566,9 @@
               <a:buNone/>
             </a:pPr>
             <a:r>
-              <a:rPr lang="en-US" sz="750" i="1" dirty="0">
-                <a:solidFill>
-                  <a:srgbClr val="5F7183"/>
+              <a:rPr lang="en-US" sz="950" dirty="0">
+                <a:solidFill>
+                  <a:srgbClr val="1B2733"/>
                 </a:solidFill>
                 <a:latin typeface="Calibri" pitchFamily="34" charset="0"/>
                 <a:ea typeface="Calibri" pitchFamily="34" charset="-122"/>
@@ -4612,9 +4612,9 @@
               <a:buNone/>
             </a:pPr>
             <a:r>
-              <a:rPr lang="en-US" sz="750" i="1" dirty="0">
-                <a:solidFill>
-                  <a:srgbClr val="5F7183"/>
+              <a:rPr lang="en-US" sz="950" dirty="0">
+                <a:solidFill>
+                  <a:srgbClr val="1B2733"/>
                 </a:solidFill>
                 <a:latin typeface="Calibri" pitchFamily="34" charset="0"/>
                 <a:ea typeface="Calibri" pitchFamily="34" charset="-122"/>
@@ -4634,12 +4634,12 @@
         </p:nvSpPr>
         <p:spPr>
           <a:xfrm>
-            <a:off x="6223864" y="3931920"/>
-            <a:ext cx="5327752" cy="1920240"/>
+            <a:off x="6223864" y="3941064"/>
+            <a:ext cx="5327752" cy="1965960"/>
           </a:xfrm>
           <a:prstGeom prst="roundRect">
             <a:avLst>
-              <a:gd name="adj" fmla="val 1905"/>
+              <a:gd name="adj" fmla="val 1860"/>
             </a:avLst>
           </a:prstGeom>
           <a:solidFill>
@@ -4656,7 +4656,7 @@
         </p:nvSpPr>
         <p:spPr>
           <a:xfrm>
-            <a:off x="6406744" y="4096512"/>
+            <a:off x="6406744" y="4105656"/>
             <a:ext cx="310896" cy="310896"/>
           </a:xfrm>
           <a:prstGeom prst="ellipse">
@@ -4676,7 +4676,7 @@
         </p:nvSpPr>
         <p:spPr>
           <a:xfrm>
-            <a:off x="6406744" y="4096512"/>
+            <a:off x="6406744" y="4105656"/>
             <a:ext cx="310896" cy="310896"/>
           </a:xfrm>
           <a:prstGeom prst="rect">
@@ -4715,7 +4715,7 @@
         </p:nvSpPr>
         <p:spPr>
           <a:xfrm>
-            <a:off x="6790792" y="4059936"/>
+            <a:off x="6790792" y="4069080"/>
             <a:ext cx="4559656" cy="512064"/>
           </a:xfrm>
           <a:prstGeom prst="rect">
@@ -4755,7 +4755,7 @@
               <a:buNone/>
             </a:pPr>
             <a:r>
-              <a:rPr lang="en-US" sz="800" i="1" dirty="0">
+              <a:rPr lang="en-US" sz="1050" dirty="0">
                 <a:solidFill>
                   <a:srgbClr val="12B198"/>
                 </a:solidFill>
@@ -4777,8 +4777,8 @@
         </p:nvSpPr>
         <p:spPr>
           <a:xfrm>
-            <a:off x="6443320" y="4608576"/>
-            <a:ext cx="4888840" cy="1097280"/>
+            <a:off x="6443320" y="4617720"/>
+            <a:ext cx="4888840" cy="1143000"/>
           </a:xfrm>
           <a:prstGeom prst="rect">
             <a:avLst/>
@@ -4823,9 +4823,9 @@
               <a:buNone/>
             </a:pPr>
             <a:r>
-              <a:rPr lang="en-US" sz="750" i="1" dirty="0">
-                <a:solidFill>
-                  <a:srgbClr val="5F7183"/>
+              <a:rPr lang="en-US" sz="950" dirty="0">
+                <a:solidFill>
+                  <a:srgbClr val="1B2733"/>
                 </a:solidFill>
                 <a:latin typeface="Calibri" pitchFamily="34" charset="0"/>
                 <a:ea typeface="Calibri" pitchFamily="34" charset="-122"/>
@@ -4869,9 +4869,9 @@
               <a:buNone/>
             </a:pPr>
             <a:r>
-              <a:rPr lang="en-US" sz="750" i="1" dirty="0">
-                <a:solidFill>
-                  <a:srgbClr val="5F7183"/>
+              <a:rPr lang="en-US" sz="950" dirty="0">
+                <a:solidFill>
+                  <a:srgbClr val="1B2733"/>
                 </a:solidFill>
                 <a:latin typeface="Calibri" pitchFamily="34" charset="0"/>
                 <a:ea typeface="Calibri" pitchFamily="34" charset="-122"/>
@@ -4915,9 +4915,9 @@
               <a:buNone/>
             </a:pPr>
             <a:r>
-              <a:rPr lang="en-US" sz="750" i="1" dirty="0">
-                <a:solidFill>
-                  <a:srgbClr val="5F7183"/>
+              <a:rPr lang="en-US" sz="950" dirty="0">
+                <a:solidFill>
+                  <a:srgbClr val="1B2733"/>
                 </a:solidFill>
                 <a:latin typeface="Calibri" pitchFamily="34" charset="0"/>
                 <a:ea typeface="Calibri" pitchFamily="34" charset="-122"/>
@@ -4961,7 +4961,86 @@
               <a:buNone/>
             </a:pPr>
             <a:r>
-              <a:rPr lang="en-US" sz="750" i="1" dirty="0">
+              <a:rPr lang="en-US" sz="950" dirty="0">
+                <a:solidFill>
+                  <a:srgbClr val="1B2733"/>
+                </a:solidFill>
+                <a:latin typeface="Calibri" pitchFamily="34" charset="0"/>
+                <a:ea typeface="Calibri" pitchFamily="34" charset="-122"/>
+                <a:cs typeface="Calibri" pitchFamily="34" charset="-120"/>
+              </a:rPr>
+              <a:t>  Photographing them, or posting anything</a:t>
+            </a:r>
+            <a:endParaRPr lang="en-US" sz="950" dirty="0"/>
+          </a:p>
+        </p:txBody>
+      </p:sp>
+      <p:sp>
+        <p:nvSpPr>
+          <p:cNvPr id="28" name="Text 25"/>
+          <p:cNvSpPr/>
+          <p:nvPr/>
+        </p:nvSpPr>
+        <p:spPr>
+          <a:xfrm>
+            <a:off x="640080" y="5961888"/>
+            <a:ext cx="10911535" cy="292608"/>
+          </a:xfrm>
+          <a:prstGeom prst="rect">
+            <a:avLst/>
+          </a:prstGeom>
+          <a:noFill/>
+          <a:ln/>
+        </p:spPr>
+        <p:txBody>
+          <a:bodyPr wrap="square" lIns="0" tIns="0" rIns="0" bIns="0" rtlCol="0" anchor="t"/>
+          <a:lstStyle/>
+          <a:p>
+            <a:pPr indent="0" marL="0">
+              <a:lnSpc>
+                <a:spcPct val="88000"/>
+              </a:lnSpc>
+              <a:buNone/>
+            </a:pPr>
+            <a:r>
+              <a:rPr lang="en-US" sz="900" b="1" dirty="0">
+                <a:solidFill>
+                  <a:srgbClr val="0D8A76"/>
+                </a:solidFill>
+                <a:latin typeface="Yu Gothic" pitchFamily="34" charset="0"/>
+                <a:ea typeface="Yu Gothic" pitchFamily="34" charset="-122"/>
+                <a:cs typeface="Yu Gothic" pitchFamily="34" charset="-120"/>
+              </a:rPr>
+              <a:t>Site SOP優先　</a:t>
+            </a:r>
+            <a:pPr indent="0" marL="0">
+              <a:lnSpc>
+                <a:spcPct val="88000"/>
+              </a:lnSpc>
+              <a:buNone/>
+            </a:pPr>
+            <a:r>
+              <a:rPr lang="en-US" sz="900" dirty="0">
+                <a:solidFill>
+                  <a:srgbClr val="1B2733"/>
+                </a:solidFill>
+                <a:latin typeface="Yu Gothic" pitchFamily="34" charset="0"/>
+                <a:ea typeface="Yu Gothic" pitchFamily="34" charset="-122"/>
+                <a:cs typeface="Yu Gothic" pitchFamily="34" charset="-120"/>
+              </a:rPr>
+              <a:t>逮捕に至った場合の社内連絡順序と、クライアントへの報告方法は現場ごとに異なる。Site SOPに従う。</a:t>
+            </a:r>
+            <a:endParaRPr lang="en-US" sz="900" dirty="0"/>
+          </a:p>
+          <a:p>
+            <a:pPr indent="0" marL="0">
+              <a:lnSpc>
+                <a:spcPct val="88000"/>
+              </a:lnSpc>
+              <a:buNone/>
+            </a:pPr>
+            <a:r>
+              <a:rPr lang="en-US" sz="800" i="1" dirty="0">
                 <a:solidFill>
                   <a:srgbClr val="5F7183"/>
                 </a:solidFill>
@@ -4969,22 +5048,22 @@
                 <a:ea typeface="Calibri" pitchFamily="34" charset="-122"/>
                 <a:cs typeface="Calibri" pitchFamily="34" charset="-120"/>
               </a:rPr>
-              <a:t>  Photographing them, or posting anything</a:t>
-            </a:r>
-            <a:endParaRPr lang="en-US" sz="950" dirty="0"/>
-          </a:p>
-        </p:txBody>
-      </p:sp>
-      <p:sp>
-        <p:nvSpPr>
-          <p:cNvPr id="28" name="Text 25"/>
-          <p:cNvSpPr/>
-          <p:nvPr/>
-        </p:nvSpPr>
-        <p:spPr>
-          <a:xfrm>
-            <a:off x="640080" y="5907024"/>
-            <a:ext cx="10911535" cy="310896"/>
+              <a:t>Internal notification order and client reporting after an arrest differ by site. Follow the Site SOP.</a:t>
+            </a:r>
+            <a:endParaRPr lang="en-US" sz="900" dirty="0"/>
+          </a:p>
+        </p:txBody>
+      </p:sp>
+      <p:sp>
+        <p:nvSpPr>
+          <p:cNvPr id="29" name="Text 26"/>
+          <p:cNvSpPr/>
+          <p:nvPr/>
+        </p:nvSpPr>
+        <p:spPr>
+          <a:xfrm>
+            <a:off x="640080" y="6272784"/>
+            <a:ext cx="9905695" cy="219456"/>
           </a:xfrm>
           <a:prstGeom prst="rect">
             <a:avLst/>
@@ -4997,167 +5076,88 @@
           <a:lstStyle/>
           <a:p>
             <a:pPr indent="0" marL="0">
-              <a:lnSpc>
-                <a:spcPct val="88000"/>
-              </a:lnSpc>
-              <a:buNone/>
-            </a:pPr>
-            <a:r>
-              <a:rPr lang="en-US" sz="900" b="1" dirty="0">
-                <a:solidFill>
-                  <a:srgbClr val="0D8A76"/>
-                </a:solidFill>
-                <a:latin typeface="Yu Gothic" pitchFamily="34" charset="0"/>
-                <a:ea typeface="Yu Gothic" pitchFamily="34" charset="-122"/>
-                <a:cs typeface="Yu Gothic" pitchFamily="34" charset="-120"/>
-              </a:rPr>
-              <a:t>Site SOP優先　</a:t>
-            </a:r>
-            <a:pPr indent="0" marL="0">
-              <a:lnSpc>
-                <a:spcPct val="88000"/>
-              </a:lnSpc>
+              <a:buNone/>
+            </a:pPr>
+            <a:r>
+              <a:rPr lang="en-US" sz="750" b="1" dirty="0">
+                <a:solidFill>
+                  <a:srgbClr val="D6E0E9"/>
+                </a:solidFill>
+                <a:latin typeface="Yu Gothic" pitchFamily="34" charset="0"/>
+                <a:ea typeface="Yu Gothic" pitchFamily="34" charset="-122"/>
+                <a:cs typeface="Yu Gothic" pitchFamily="34" charset="-120"/>
+              </a:rPr>
+              <a:t>ソース　</a:t>
+            </a:r>
+            <a:pPr indent="0" marL="0">
+              <a:buNone/>
+            </a:pPr>
+            <a:r>
+              <a:rPr lang="en-US" sz="750" dirty="0">
+                <a:solidFill>
+                  <a:srgbClr val="5F7183"/>
+                </a:solidFill>
+                <a:latin typeface="Yu Gothic" pitchFamily="34" charset="0"/>
+                <a:ea typeface="Yu Gothic" pitchFamily="34" charset="-122"/>
+                <a:cs typeface="Yu Gothic" pitchFamily="34" charset="-120"/>
+              </a:rPr>
+              <a:t>警備業法、刑法、刑事訴訟法、警察官職務執行法</a:t>
+            </a:r>
+            <a:endParaRPr lang="en-US" sz="750" dirty="0"/>
+          </a:p>
+        </p:txBody>
+      </p:sp>
+      <p:sp>
+        <p:nvSpPr>
+          <p:cNvPr id="30" name="Text 27"/>
+          <p:cNvSpPr/>
+          <p:nvPr/>
+        </p:nvSpPr>
+        <p:spPr>
+          <a:xfrm>
+            <a:off x="640080" y="6492240"/>
+            <a:ext cx="8778240" cy="292608"/>
+          </a:xfrm>
+          <a:prstGeom prst="rect">
+            <a:avLst/>
+          </a:prstGeom>
+          <a:noFill/>
+          <a:ln/>
+        </p:spPr>
+        <p:txBody>
+          <a:bodyPr wrap="square" lIns="0" tIns="0" rIns="0" bIns="0" rtlCol="0" anchor="ctr"/>
+          <a:lstStyle/>
+          <a:p>
+            <a:pPr indent="0" marL="0">
               <a:buNone/>
             </a:pPr>
             <a:r>
               <a:rPr lang="en-US" sz="900" dirty="0">
                 <a:solidFill>
-                  <a:srgbClr val="1B2733"/>
-                </a:solidFill>
-                <a:latin typeface="Yu Gothic" pitchFamily="34" charset="0"/>
-                <a:ea typeface="Yu Gothic" pitchFamily="34" charset="-122"/>
-                <a:cs typeface="Yu Gothic" pitchFamily="34" charset="-120"/>
-              </a:rPr>
-              <a:t>逮捕に至った場合の社内連絡順序と、クライアントへの報告方法は現場ごとに異なる。Site SOPに従う。</a:t>
+                  <a:srgbClr val="5F7183"/>
+                </a:solidFill>
+                <a:latin typeface="Yu Gothic" pitchFamily="34" charset="0"/>
+                <a:ea typeface="Yu Gothic" pitchFamily="34" charset="-122"/>
+                <a:cs typeface="Yu Gothic" pitchFamily="34" charset="-120"/>
+              </a:rPr>
+              <a:t>第2時限｜基本教育2 警備業法その他警備業務の適正な実施に必要な法令  </a:t>
+            </a:r>
+            <a:pPr indent="0" marL="0">
+              <a:buNone/>
+            </a:pPr>
+            <a:r>
+              <a:rPr lang="en-US" sz="850" i="1" dirty="0">
+                <a:solidFill>
+                  <a:srgbClr val="D6E0E9"/>
+                </a:solidFill>
+                <a:latin typeface="Calibri" pitchFamily="34" charset="0"/>
+                <a:ea typeface="Calibri" pitchFamily="34" charset="-122"/>
+                <a:cs typeface="Calibri" pitchFamily="34" charset="-120"/>
+              </a:rPr>
+              <a:t>Period 2 | Basic Training 2 — Applicable Law</a:t>
             </a:r>
             <a:endParaRPr lang="en-US" sz="900" dirty="0"/>
           </a:p>
-          <a:p>
-            <a:pPr indent="0" marL="0">
-              <a:lnSpc>
-                <a:spcPct val="88000"/>
-              </a:lnSpc>
-              <a:buNone/>
-            </a:pPr>
-            <a:r>
-              <a:rPr lang="en-US" sz="750" i="1" dirty="0">
-                <a:solidFill>
-                  <a:srgbClr val="5F7183"/>
-                </a:solidFill>
-                <a:latin typeface="Calibri" pitchFamily="34" charset="0"/>
-                <a:ea typeface="Calibri" pitchFamily="34" charset="-122"/>
-                <a:cs typeface="Calibri" pitchFamily="34" charset="-120"/>
-              </a:rPr>
-              <a:t>Internal notification order and client reporting after an arrest differ by site. Follow the Site SOP.</a:t>
-            </a:r>
-            <a:endParaRPr lang="en-US" sz="900" dirty="0"/>
-          </a:p>
-        </p:txBody>
-      </p:sp>
-      <p:sp>
-        <p:nvSpPr>
-          <p:cNvPr id="29" name="Text 26"/>
-          <p:cNvSpPr/>
-          <p:nvPr/>
-        </p:nvSpPr>
-        <p:spPr>
-          <a:xfrm>
-            <a:off x="640080" y="6272784"/>
-            <a:ext cx="9905695" cy="237744"/>
-          </a:xfrm>
-          <a:prstGeom prst="rect">
-            <a:avLst/>
-          </a:prstGeom>
-          <a:noFill/>
-          <a:ln/>
-        </p:spPr>
-        <p:txBody>
-          <a:bodyPr wrap="square" lIns="0" tIns="0" rIns="0" bIns="0" rtlCol="0" anchor="t"/>
-          <a:lstStyle/>
-          <a:p>
-            <a:pPr indent="0" marL="0">
-              <a:buNone/>
-            </a:pPr>
-            <a:r>
-              <a:rPr lang="en-US" sz="750" b="1" dirty="0">
-                <a:solidFill>
-                  <a:srgbClr val="D6E0E9"/>
-                </a:solidFill>
-                <a:latin typeface="Yu Gothic" pitchFamily="34" charset="0"/>
-                <a:ea typeface="Yu Gothic" pitchFamily="34" charset="-122"/>
-                <a:cs typeface="Yu Gothic" pitchFamily="34" charset="-120"/>
-              </a:rPr>
-              <a:t>ソース　</a:t>
-            </a:r>
-            <a:pPr indent="0" marL="0">
-              <a:buNone/>
-            </a:pPr>
-            <a:r>
-              <a:rPr lang="en-US" sz="750" dirty="0">
-                <a:solidFill>
-                  <a:srgbClr val="5F7183"/>
-                </a:solidFill>
-                <a:latin typeface="Yu Gothic" pitchFamily="34" charset="0"/>
-                <a:ea typeface="Yu Gothic" pitchFamily="34" charset="-122"/>
-                <a:cs typeface="Yu Gothic" pitchFamily="34" charset="-120"/>
-              </a:rPr>
-              <a:t>警備業法、刑法、刑事訴訟法、警察官職務執行法</a:t>
-            </a:r>
-            <a:endParaRPr lang="en-US" sz="750" dirty="0"/>
-          </a:p>
-        </p:txBody>
-      </p:sp>
-      <p:sp>
-        <p:nvSpPr>
-          <p:cNvPr id="30" name="Text 27"/>
-          <p:cNvSpPr/>
-          <p:nvPr/>
-        </p:nvSpPr>
-        <p:spPr>
-          <a:xfrm>
-            <a:off x="640080" y="6382512"/>
-            <a:ext cx="8778240" cy="292608"/>
-          </a:xfrm>
-          <a:prstGeom prst="rect">
-            <a:avLst/>
-          </a:prstGeom>
-          <a:noFill/>
-          <a:ln/>
-        </p:spPr>
-        <p:txBody>
-          <a:bodyPr wrap="square" lIns="0" tIns="0" rIns="0" bIns="0" rtlCol="0" anchor="ctr"/>
-          <a:lstStyle/>
-          <a:p>
-            <a:pPr indent="0" marL="0">
-              <a:buNone/>
-            </a:pPr>
-            <a:r>
-              <a:rPr lang="en-US" sz="900" dirty="0">
-                <a:solidFill>
-                  <a:srgbClr val="5F7183"/>
-                </a:solidFill>
-                <a:latin typeface="Yu Gothic" pitchFamily="34" charset="0"/>
-                <a:ea typeface="Yu Gothic" pitchFamily="34" charset="-122"/>
-                <a:cs typeface="Yu Gothic" pitchFamily="34" charset="-120"/>
-              </a:rPr>
-              <a:t>第2時限｜基本教育2 警備業法その他警備業務の適正な実施に必要な法令  </a:t>
-            </a:r>
-            <a:pPr indent="0" marL="0">
-              <a:buNone/>
-            </a:pPr>
-            <a:r>
-              <a:rPr lang="en-US" sz="850" i="1" dirty="0">
-                <a:solidFill>
-                  <a:srgbClr val="D6E0E9"/>
-                </a:solidFill>
-                <a:latin typeface="Calibri" pitchFamily="34" charset="0"/>
-                <a:ea typeface="Calibri" pitchFamily="34" charset="-122"/>
-                <a:cs typeface="Calibri" pitchFamily="34" charset="-120"/>
-              </a:rPr>
-              <a:t>Period 2 | Basic Training 2 — Applicable Law</a:t>
-            </a:r>
-            <a:endParaRPr lang="en-US" sz="900" dirty="0"/>
-          </a:p>
         </p:txBody>
       </p:sp>
       <p:sp>
@@ -5168,7 +5168,7 @@
         </p:nvSpPr>
         <p:spPr>
           <a:xfrm>
-            <a:off x="10637215" y="6382512"/>
+            <a:off x="10637215" y="6492240"/>
             <a:ext cx="914400" cy="292608"/>
           </a:xfrm>
           <a:prstGeom prst="rect">
@@ -5263,8 +5263,8 @@
         </p:nvSpPr>
         <p:spPr>
           <a:xfrm>
-            <a:off x="640080" y="384048"/>
-            <a:ext cx="8982151" cy="768096"/>
+            <a:off x="640080" y="365760"/>
+            <a:ext cx="8982151" cy="749808"/>
           </a:xfrm>
           <a:prstGeom prst="rect">
             <a:avLst/>
@@ -5303,7 +5303,7 @@
               <a:buNone/>
             </a:pPr>
             <a:r>
-              <a:rPr lang="en-US" sz="1100" i="1" dirty="0">
+              <a:rPr lang="en-US" sz="1100" dirty="0">
                 <a:solidFill>
                   <a:srgbClr val="12B198"/>
                 </a:solidFill>
@@ -5325,7 +5325,7 @@
         </p:nvSpPr>
         <p:spPr>
           <a:xfrm>
-            <a:off x="9686239" y="438912"/>
+            <a:off x="9686239" y="420624"/>
             <a:ext cx="932688" cy="310896"/>
           </a:xfrm>
           <a:prstGeom prst="roundRect">
@@ -5347,7 +5347,7 @@
         </p:nvSpPr>
         <p:spPr>
           <a:xfrm>
-            <a:off x="9686239" y="438912"/>
+            <a:off x="9686239" y="420624"/>
             <a:ext cx="932688" cy="310896"/>
           </a:xfrm>
           <a:prstGeom prst="rect">
@@ -5386,12 +5386,12 @@
         </p:nvSpPr>
         <p:spPr>
           <a:xfrm>
-            <a:off x="640080" y="1188720"/>
-            <a:ext cx="10911535" cy="530352"/>
+            <a:off x="640080" y="1115568"/>
+            <a:ext cx="10911535" cy="585216"/>
           </a:xfrm>
           <a:prstGeom prst="roundRect">
             <a:avLst>
-              <a:gd name="adj" fmla="val 6897"/>
+              <a:gd name="adj" fmla="val 6250"/>
             </a:avLst>
           </a:prstGeom>
           <a:solidFill>
@@ -5408,8 +5408,8 @@
         </p:nvSpPr>
         <p:spPr>
           <a:xfrm>
-            <a:off x="877824" y="1234440"/>
-            <a:ext cx="10436047" cy="438912"/>
+            <a:off x="877824" y="1161288"/>
+            <a:ext cx="10436047" cy="493776"/>
           </a:xfrm>
           <a:prstGeom prst="rect">
             <a:avLst/>
@@ -5445,7 +5445,7 @@
               <a:buNone/>
             </a:pPr>
             <a:r>
-              <a:rPr lang="en-US" sz="800" dirty="0">
+              <a:rPr lang="en-US" sz="900" dirty="0">
                 <a:solidFill>
                   <a:srgbClr val="0D8A76"/>
                 </a:solidFill>
@@ -5482,9 +5482,9 @@
               <a:buNone/>
             </a:pPr>
             <a:r>
-              <a:rPr lang="en-US" sz="850" i="1" dirty="0">
-                <a:solidFill>
-                  <a:srgbClr val="5F7183"/>
+              <a:rPr lang="en-US" sz="1050" dirty="0">
+                <a:solidFill>
+                  <a:srgbClr val="1B2733"/>
                 </a:solidFill>
                 <a:latin typeface="Calibri" pitchFamily="34" charset="0"/>
                 <a:ea typeface="Calibri" pitchFamily="34" charset="-122"/>
@@ -5504,12 +5504,12 @@
         </p:nvSpPr>
         <p:spPr>
           <a:xfrm>
-            <a:off x="640080" y="1810512"/>
-            <a:ext cx="5327752" cy="1920240"/>
+            <a:off x="640080" y="1773936"/>
+            <a:ext cx="5327752" cy="1965960"/>
           </a:xfrm>
           <a:prstGeom prst="roundRect">
             <a:avLst>
-              <a:gd name="adj" fmla="val 1905"/>
+              <a:gd name="adj" fmla="val 1860"/>
             </a:avLst>
           </a:prstGeom>
           <a:solidFill>
@@ -5526,7 +5526,7 @@
         </p:nvSpPr>
         <p:spPr>
           <a:xfrm>
-            <a:off x="822960" y="1975104"/>
+            <a:off x="822960" y="1938528"/>
             <a:ext cx="310896" cy="310896"/>
           </a:xfrm>
           <a:prstGeom prst="ellipse">
@@ -5546,7 +5546,7 @@
         </p:nvSpPr>
         <p:spPr>
           <a:xfrm>
-            <a:off x="822960" y="1975104"/>
+            <a:off x="822960" y="1938528"/>
             <a:ext cx="310896" cy="310896"/>
           </a:xfrm>
           <a:prstGeom prst="rect">
@@ -5585,7 +5585,7 @@
         </p:nvSpPr>
         <p:spPr>
           <a:xfrm>
-            <a:off x="1207008" y="1938528"/>
+            <a:off x="1207008" y="1901952"/>
             <a:ext cx="4559656" cy="512064"/>
           </a:xfrm>
           <a:prstGeom prst="rect">
@@ -5625,7 +5625,7 @@
               <a:buNone/>
             </a:pPr>
             <a:r>
-              <a:rPr lang="en-US" sz="800" i="1" dirty="0">
+              <a:rPr lang="en-US" sz="1050" dirty="0">
                 <a:solidFill>
                   <a:srgbClr val="12B198"/>
                 </a:solidFill>
@@ -5647,8 +5647,8 @@
         </p:nvSpPr>
         <p:spPr>
           <a:xfrm>
-            <a:off x="859536" y="2487168"/>
-            <a:ext cx="4888840" cy="1097280"/>
+            <a:off x="859536" y="2450592"/>
+            <a:ext cx="4888840" cy="1143000"/>
           </a:xfrm>
           <a:prstGeom prst="rect">
             <a:avLst/>
@@ -5693,9 +5693,9 @@
               <a:buNone/>
             </a:pPr>
             <a:r>
-              <a:rPr lang="en-US" sz="750" i="1" dirty="0">
-                <a:solidFill>
-                  <a:srgbClr val="5F7183"/>
+              <a:rPr lang="en-US" sz="950" dirty="0">
+                <a:solidFill>
+                  <a:srgbClr val="1B2733"/>
                 </a:solidFill>
                 <a:latin typeface="Calibri" pitchFamily="34" charset="0"/>
                 <a:ea typeface="Calibri" pitchFamily="34" charset="-122"/>
@@ -5739,9 +5739,9 @@
               <a:buNone/>
             </a:pPr>
             <a:r>
-              <a:rPr lang="en-US" sz="750" i="1" dirty="0">
-                <a:solidFill>
-                  <a:srgbClr val="5F7183"/>
+              <a:rPr lang="en-US" sz="950" dirty="0">
+                <a:solidFill>
+                  <a:srgbClr val="1B2733"/>
                 </a:solidFill>
                 <a:latin typeface="Calibri" pitchFamily="34" charset="0"/>
                 <a:ea typeface="Calibri" pitchFamily="34" charset="-122"/>
@@ -5785,9 +5785,9 @@
               <a:buNone/>
             </a:pPr>
             <a:r>
-              <a:rPr lang="en-US" sz="750" i="1" dirty="0">
-                <a:solidFill>
-                  <a:srgbClr val="5F7183"/>
+              <a:rPr lang="en-US" sz="950" dirty="0">
+                <a:solidFill>
+                  <a:srgbClr val="1B2733"/>
                 </a:solidFill>
                 <a:latin typeface="Calibri" pitchFamily="34" charset="0"/>
                 <a:ea typeface="Calibri" pitchFamily="34" charset="-122"/>
@@ -5831,9 +5831,9 @@
               <a:buNone/>
             </a:pPr>
             <a:r>
-              <a:rPr lang="en-US" sz="750" i="1" dirty="0">
-                <a:solidFill>
-                  <a:srgbClr val="5F7183"/>
+              <a:rPr lang="en-US" sz="950" dirty="0">
+                <a:solidFill>
+                  <a:srgbClr val="1B2733"/>
                 </a:solidFill>
                 <a:latin typeface="Calibri" pitchFamily="34" charset="0"/>
                 <a:ea typeface="Calibri" pitchFamily="34" charset="-122"/>
@@ -5853,12 +5853,12 @@
         </p:nvSpPr>
         <p:spPr>
           <a:xfrm>
-            <a:off x="6223864" y="1810512"/>
-            <a:ext cx="5327752" cy="1920240"/>
+            <a:off x="6223864" y="1773936"/>
+            <a:ext cx="5327752" cy="1965960"/>
           </a:xfrm>
           <a:prstGeom prst="roundRect">
             <a:avLst>
-              <a:gd name="adj" fmla="val 1905"/>
+              <a:gd name="adj" fmla="val 1860"/>
             </a:avLst>
           </a:prstGeom>
           <a:solidFill>
@@ -5875,7 +5875,7 @@
         </p:nvSpPr>
         <p:spPr>
           <a:xfrm>
-            <a:off x="6406744" y="1975104"/>
+            <a:off x="6406744" y="1938528"/>
             <a:ext cx="310896" cy="310896"/>
           </a:xfrm>
           <a:prstGeom prst="ellipse">
@@ -5895,7 +5895,7 @@
         </p:nvSpPr>
         <p:spPr>
           <a:xfrm>
-            <a:off x="6406744" y="1975104"/>
+            <a:off x="6406744" y="1938528"/>
             <a:ext cx="310896" cy="310896"/>
           </a:xfrm>
           <a:prstGeom prst="rect">
@@ -5934,7 +5934,7 @@
         </p:nvSpPr>
         <p:spPr>
           <a:xfrm>
-            <a:off x="6790792" y="1938528"/>
+            <a:off x="6790792" y="1901952"/>
             <a:ext cx="4559656" cy="512064"/>
           </a:xfrm>
           <a:prstGeom prst="rect">
@@ -5974,7 +5974,7 @@
               <a:buNone/>
             </a:pPr>
             <a:r>
-              <a:rPr lang="en-US" sz="800" i="1" dirty="0">
+              <a:rPr lang="en-US" sz="1050" dirty="0">
                 <a:solidFill>
                   <a:srgbClr val="12B198"/>
                 </a:solidFill>
@@ -5996,8 +5996,8 @@
         </p:nvSpPr>
         <p:spPr>
           <a:xfrm>
-            <a:off x="6443320" y="2487168"/>
-            <a:ext cx="4888840" cy="1097280"/>
+            <a:off x="6443320" y="2450592"/>
+            <a:ext cx="4888840" cy="1143000"/>
           </a:xfrm>
           <a:prstGeom prst="rect">
             <a:avLst/>
@@ -6042,9 +6042,9 @@
               <a:buNone/>
             </a:pPr>
             <a:r>
-              <a:rPr lang="en-US" sz="750" i="1" dirty="0">
-                <a:solidFill>
-                  <a:srgbClr val="5F7183"/>
+              <a:rPr lang="en-US" sz="950" dirty="0">
+                <a:solidFill>
+                  <a:srgbClr val="1B2733"/>
                 </a:solidFill>
                 <a:latin typeface="Calibri" pitchFamily="34" charset="0"/>
                 <a:ea typeface="Calibri" pitchFamily="34" charset="-122"/>
@@ -6088,9 +6088,9 @@
               <a:buNone/>
             </a:pPr>
             <a:r>
-              <a:rPr lang="en-US" sz="750" i="1" dirty="0">
-                <a:solidFill>
-                  <a:srgbClr val="5F7183"/>
+              <a:rPr lang="en-US" sz="950" dirty="0">
+                <a:solidFill>
+                  <a:srgbClr val="1B2733"/>
                 </a:solidFill>
                 <a:latin typeface="Calibri" pitchFamily="34" charset="0"/>
                 <a:ea typeface="Calibri" pitchFamily="34" charset="-122"/>
@@ -6134,9 +6134,9 @@
               <a:buNone/>
             </a:pPr>
             <a:r>
-              <a:rPr lang="en-US" sz="750" i="1" dirty="0">
-                <a:solidFill>
-                  <a:srgbClr val="5F7183"/>
+              <a:rPr lang="en-US" sz="950" dirty="0">
+                <a:solidFill>
+                  <a:srgbClr val="1B2733"/>
                 </a:solidFill>
                 <a:latin typeface="Calibri" pitchFamily="34" charset="0"/>
                 <a:ea typeface="Calibri" pitchFamily="34" charset="-122"/>
@@ -6180,9 +6180,9 @@
               <a:buNone/>
             </a:pPr>
             <a:r>
-              <a:rPr lang="en-US" sz="750" i="1" dirty="0">
-                <a:solidFill>
-                  <a:srgbClr val="5F7183"/>
+              <a:rPr lang="en-US" sz="950" dirty="0">
+                <a:solidFill>
+                  <a:srgbClr val="1B2733"/>
                 </a:solidFill>
                 <a:latin typeface="Calibri" pitchFamily="34" charset="0"/>
                 <a:ea typeface="Calibri" pitchFamily="34" charset="-122"/>
@@ -6202,12 +6202,12 @@
         </p:nvSpPr>
         <p:spPr>
           <a:xfrm>
-            <a:off x="640080" y="3931920"/>
-            <a:ext cx="5327752" cy="1920240"/>
+            <a:off x="640080" y="3941064"/>
+            <a:ext cx="5327752" cy="1965960"/>
           </a:xfrm>
           <a:prstGeom prst="roundRect">
             <a:avLst>
-              <a:gd name="adj" fmla="val 1905"/>
+              <a:gd name="adj" fmla="val 1860"/>
             </a:avLst>
           </a:prstGeom>
           <a:solidFill>
@@ -6224,7 +6224,7 @@
         </p:nvSpPr>
         <p:spPr>
           <a:xfrm>
-            <a:off x="822960" y="4096512"/>
+            <a:off x="822960" y="4105656"/>
             <a:ext cx="310896" cy="310896"/>
           </a:xfrm>
           <a:prstGeom prst="ellipse">
@@ -6244,7 +6244,7 @@
         </p:nvSpPr>
         <p:spPr>
           <a:xfrm>
-            <a:off x="822960" y="4096512"/>
+            <a:off x="822960" y="4105656"/>
             <a:ext cx="310896" cy="310896"/>
           </a:xfrm>
           <a:prstGeom prst="rect">
@@ -6283,7 +6283,7 @@
         </p:nvSpPr>
         <p:spPr>
           <a:xfrm>
-            <a:off x="1207008" y="4059936"/>
+            <a:off x="1207008" y="4069080"/>
             <a:ext cx="4559656" cy="512064"/>
           </a:xfrm>
           <a:prstGeom prst="rect">
@@ -6323,7 +6323,7 @@
               <a:buNone/>
             </a:pPr>
             <a:r>
-              <a:rPr lang="en-US" sz="800" i="1" dirty="0">
+              <a:rPr lang="en-US" sz="1050" dirty="0">
                 <a:solidFill>
                   <a:srgbClr val="12B198"/>
                 </a:solidFill>
@@ -6345,8 +6345,8 @@
         </p:nvSpPr>
         <p:spPr>
           <a:xfrm>
-            <a:off x="859536" y="4608576"/>
-            <a:ext cx="4888840" cy="1097280"/>
+            <a:off x="859536" y="4617720"/>
+            <a:ext cx="4888840" cy="1143000"/>
           </a:xfrm>
           <a:prstGeom prst="rect">
             <a:avLst/>
@@ -6391,9 +6391,9 @@
               <a:buNone/>
             </a:pPr>
             <a:r>
-              <a:rPr lang="en-US" sz="750" i="1" dirty="0">
-                <a:solidFill>
-                  <a:srgbClr val="5F7183"/>
+              <a:rPr lang="en-US" sz="950" dirty="0">
+                <a:solidFill>
+                  <a:srgbClr val="1B2733"/>
                 </a:solidFill>
                 <a:latin typeface="Calibri" pitchFamily="34" charset="0"/>
                 <a:ea typeface="Calibri" pitchFamily="34" charset="-122"/>
@@ -6437,9 +6437,9 @@
               <a:buNone/>
             </a:pPr>
             <a:r>
-              <a:rPr lang="en-US" sz="750" i="1" dirty="0">
-                <a:solidFill>
-                  <a:srgbClr val="5F7183"/>
+              <a:rPr lang="en-US" sz="950" dirty="0">
+                <a:solidFill>
+                  <a:srgbClr val="1B2733"/>
                 </a:solidFill>
                 <a:latin typeface="Calibri" pitchFamily="34" charset="0"/>
                 <a:ea typeface="Calibri" pitchFamily="34" charset="-122"/>
@@ -6483,9 +6483,9 @@
               <a:buNone/>
             </a:pPr>
             <a:r>
-              <a:rPr lang="en-US" sz="750" i="1" dirty="0">
-                <a:solidFill>
-                  <a:srgbClr val="5F7183"/>
+              <a:rPr lang="en-US" sz="950" dirty="0">
+                <a:solidFill>
+                  <a:srgbClr val="1B2733"/>
                 </a:solidFill>
                 <a:latin typeface="Calibri" pitchFamily="34" charset="0"/>
                 <a:ea typeface="Calibri" pitchFamily="34" charset="-122"/>
@@ -6529,9 +6529,9 @@
               <a:buNone/>
             </a:pPr>
             <a:r>
-              <a:rPr lang="en-US" sz="750" i="1" dirty="0">
-                <a:solidFill>
-                  <a:srgbClr val="5F7183"/>
+              <a:rPr lang="en-US" sz="950" dirty="0">
+                <a:solidFill>
+                  <a:srgbClr val="1B2733"/>
                 </a:solidFill>
                 <a:latin typeface="Calibri" pitchFamily="34" charset="0"/>
                 <a:ea typeface="Calibri" pitchFamily="34" charset="-122"/>
@@ -6551,12 +6551,12 @@
         </p:nvSpPr>
         <p:spPr>
           <a:xfrm>
-            <a:off x="6223864" y="3931920"/>
-            <a:ext cx="5327752" cy="1920240"/>
+            <a:off x="6223864" y="3941064"/>
+            <a:ext cx="5327752" cy="1965960"/>
           </a:xfrm>
           <a:prstGeom prst="roundRect">
             <a:avLst>
-              <a:gd name="adj" fmla="val 1905"/>
+              <a:gd name="adj" fmla="val 1860"/>
             </a:avLst>
           </a:prstGeom>
           <a:solidFill>
@@ -6573,7 +6573,7 @@
         </p:nvSpPr>
         <p:spPr>
           <a:xfrm>
-            <a:off x="6406744" y="4096512"/>
+            <a:off x="6406744" y="4105656"/>
             <a:ext cx="310896" cy="310896"/>
           </a:xfrm>
           <a:prstGeom prst="ellipse">
@@ -6593,7 +6593,7 @@
         </p:nvSpPr>
         <p:spPr>
           <a:xfrm>
-            <a:off x="6406744" y="4096512"/>
+            <a:off x="6406744" y="4105656"/>
             <a:ext cx="310896" cy="310896"/>
           </a:xfrm>
           <a:prstGeom prst="rect">
@@ -6632,7 +6632,7 @@
         </p:nvSpPr>
         <p:spPr>
           <a:xfrm>
-            <a:off x="6790792" y="4059936"/>
+            <a:off x="6790792" y="4069080"/>
             <a:ext cx="4559656" cy="512064"/>
           </a:xfrm>
           <a:prstGeom prst="rect">
@@ -6672,7 +6672,7 @@
               <a:buNone/>
             </a:pPr>
             <a:r>
-              <a:rPr lang="en-US" sz="800" i="1" dirty="0">
+              <a:rPr lang="en-US" sz="1050" dirty="0">
                 <a:solidFill>
                   <a:srgbClr val="12B198"/>
                 </a:solidFill>
@@ -6694,8 +6694,8 @@
         </p:nvSpPr>
         <p:spPr>
           <a:xfrm>
-            <a:off x="6443320" y="4608576"/>
-            <a:ext cx="4888840" cy="1097280"/>
+            <a:off x="6443320" y="4617720"/>
+            <a:ext cx="4888840" cy="1143000"/>
           </a:xfrm>
           <a:prstGeom prst="rect">
             <a:avLst/>
@@ -6740,9 +6740,9 @@
               <a:buNone/>
             </a:pPr>
             <a:r>
-              <a:rPr lang="en-US" sz="750" i="1" dirty="0">
-                <a:solidFill>
-                  <a:srgbClr val="5F7183"/>
+              <a:rPr lang="en-US" sz="950" dirty="0">
+                <a:solidFill>
+                  <a:srgbClr val="1B2733"/>
                 </a:solidFill>
                 <a:latin typeface="Calibri" pitchFamily="34" charset="0"/>
                 <a:ea typeface="Calibri" pitchFamily="34" charset="-122"/>
@@ -6786,9 +6786,9 @@
               <a:buNone/>
             </a:pPr>
             <a:r>
-              <a:rPr lang="en-US" sz="750" i="1" dirty="0">
-                <a:solidFill>
-                  <a:srgbClr val="5F7183"/>
+              <a:rPr lang="en-US" sz="950" dirty="0">
+                <a:solidFill>
+                  <a:srgbClr val="1B2733"/>
                 </a:solidFill>
                 <a:latin typeface="Calibri" pitchFamily="34" charset="0"/>
                 <a:ea typeface="Calibri" pitchFamily="34" charset="-122"/>
@@ -6832,9 +6832,9 @@
               <a:buNone/>
             </a:pPr>
             <a:r>
-              <a:rPr lang="en-US" sz="750" i="1" dirty="0">
-                <a:solidFill>
-                  <a:srgbClr val="5F7183"/>
+              <a:rPr lang="en-US" sz="950" dirty="0">
+                <a:solidFill>
+                  <a:srgbClr val="1B2733"/>
                 </a:solidFill>
                 <a:latin typeface="Calibri" pitchFamily="34" charset="0"/>
                 <a:ea typeface="Calibri" pitchFamily="34" charset="-122"/>
@@ -6878,7 +6878,86 @@
               <a:buNone/>
             </a:pPr>
             <a:r>
-              <a:rPr lang="en-US" sz="750" i="1" dirty="0">
+              <a:rPr lang="en-US" sz="950" dirty="0">
+                <a:solidFill>
+                  <a:srgbClr val="1B2733"/>
+                </a:solidFill>
+                <a:latin typeface="Calibri" pitchFamily="34" charset="0"/>
+                <a:ea typeface="Calibri" pitchFamily="34" charset="-122"/>
+                <a:cs typeface="Calibri" pitchFamily="34" charset="-120"/>
+              </a:rPr>
+              <a:t>  Touching or seizing. Only incidental to self-defence or a lawful arrest</a:t>
+            </a:r>
+            <a:endParaRPr lang="en-US" sz="950" dirty="0"/>
+          </a:p>
+        </p:txBody>
+      </p:sp>
+      <p:sp>
+        <p:nvSpPr>
+          <p:cNvPr id="28" name="Text 25"/>
+          <p:cNvSpPr/>
+          <p:nvPr/>
+        </p:nvSpPr>
+        <p:spPr>
+          <a:xfrm>
+            <a:off x="640080" y="5961888"/>
+            <a:ext cx="10911535" cy="292608"/>
+          </a:xfrm>
+          <a:prstGeom prst="rect">
+            <a:avLst/>
+          </a:prstGeom>
+          <a:noFill/>
+          <a:ln/>
+        </p:spPr>
+        <p:txBody>
+          <a:bodyPr wrap="square" lIns="0" tIns="0" rIns="0" bIns="0" rtlCol="0" anchor="t"/>
+          <a:lstStyle/>
+          <a:p>
+            <a:pPr indent="0" marL="0">
+              <a:lnSpc>
+                <a:spcPct val="88000"/>
+              </a:lnSpc>
+              <a:buNone/>
+            </a:pPr>
+            <a:r>
+              <a:rPr lang="en-US" sz="900" b="1" dirty="0">
+                <a:solidFill>
+                  <a:srgbClr val="0D8A76"/>
+                </a:solidFill>
+                <a:latin typeface="Yu Gothic" pitchFamily="34" charset="0"/>
+                <a:ea typeface="Yu Gothic" pitchFamily="34" charset="-122"/>
+                <a:cs typeface="Yu Gothic" pitchFamily="34" charset="-120"/>
+              </a:rPr>
+              <a:t>Site SOP優先　</a:t>
+            </a:r>
+            <a:pPr indent="0" marL="0">
+              <a:lnSpc>
+                <a:spcPct val="88000"/>
+              </a:lnSpc>
+              <a:buNone/>
+            </a:pPr>
+            <a:r>
+              <a:rPr lang="en-US" sz="900" dirty="0">
+                <a:solidFill>
+                  <a:srgbClr val="1B2733"/>
+                </a:solidFill>
+                <a:latin typeface="Yu Gothic" pitchFamily="34" charset="0"/>
+                <a:ea typeface="Yu Gothic" pitchFamily="34" charset="-122"/>
+                <a:cs typeface="Yu Gothic" pitchFamily="34" charset="-120"/>
+              </a:rPr>
+              <a:t>護身用具の有無と使用基準は現場ごとに異なる。配備がない現場では使用を前提としない。</a:t>
+            </a:r>
+            <a:endParaRPr lang="en-US" sz="900" dirty="0"/>
+          </a:p>
+          <a:p>
+            <a:pPr indent="0" marL="0">
+              <a:lnSpc>
+                <a:spcPct val="88000"/>
+              </a:lnSpc>
+              <a:buNone/>
+            </a:pPr>
+            <a:r>
+              <a:rPr lang="en-US" sz="800" i="1" dirty="0">
                 <a:solidFill>
                   <a:srgbClr val="5F7183"/>
                 </a:solidFill>
@@ -6886,22 +6965,22 @@
                 <a:ea typeface="Calibri" pitchFamily="34" charset="-122"/>
                 <a:cs typeface="Calibri" pitchFamily="34" charset="-120"/>
               </a:rPr>
-              <a:t>  Touching or seizing. Only incidental to self-defence or a lawful arrest</a:t>
-            </a:r>
-            <a:endParaRPr lang="en-US" sz="950" dirty="0"/>
-          </a:p>
-        </p:txBody>
-      </p:sp>
-      <p:sp>
-        <p:nvSpPr>
-          <p:cNvPr id="28" name="Text 25"/>
-          <p:cNvSpPr/>
-          <p:nvPr/>
-        </p:nvSpPr>
-        <p:spPr>
-          <a:xfrm>
-            <a:off x="640080" y="5907024"/>
-            <a:ext cx="10911535" cy="310896"/>
+              <a:t>Whether protective equipment is issued, and the rules for it, differ by site.</a:t>
+            </a:r>
+            <a:endParaRPr lang="en-US" sz="900" dirty="0"/>
+          </a:p>
+        </p:txBody>
+      </p:sp>
+      <p:sp>
+        <p:nvSpPr>
+          <p:cNvPr id="29" name="Text 26"/>
+          <p:cNvSpPr/>
+          <p:nvPr/>
+        </p:nvSpPr>
+        <p:spPr>
+          <a:xfrm>
+            <a:off x="640080" y="6272784"/>
+            <a:ext cx="9905695" cy="219456"/>
           </a:xfrm>
           <a:prstGeom prst="rect">
             <a:avLst/>
@@ -6914,167 +6993,88 @@
           <a:lstStyle/>
           <a:p>
             <a:pPr indent="0" marL="0">
-              <a:lnSpc>
-                <a:spcPct val="88000"/>
-              </a:lnSpc>
-              <a:buNone/>
-            </a:pPr>
-            <a:r>
-              <a:rPr lang="en-US" sz="900" b="1" dirty="0">
-                <a:solidFill>
-                  <a:srgbClr val="0D8A76"/>
-                </a:solidFill>
-                <a:latin typeface="Yu Gothic" pitchFamily="34" charset="0"/>
-                <a:ea typeface="Yu Gothic" pitchFamily="34" charset="-122"/>
-                <a:cs typeface="Yu Gothic" pitchFamily="34" charset="-120"/>
-              </a:rPr>
-              <a:t>Site SOP優先　</a:t>
-            </a:r>
-            <a:pPr indent="0" marL="0">
-              <a:lnSpc>
-                <a:spcPct val="88000"/>
-              </a:lnSpc>
+              <a:buNone/>
+            </a:pPr>
+            <a:r>
+              <a:rPr lang="en-US" sz="750" b="1" dirty="0">
+                <a:solidFill>
+                  <a:srgbClr val="D6E0E9"/>
+                </a:solidFill>
+                <a:latin typeface="Yu Gothic" pitchFamily="34" charset="0"/>
+                <a:ea typeface="Yu Gothic" pitchFamily="34" charset="-122"/>
+                <a:cs typeface="Yu Gothic" pitchFamily="34" charset="-120"/>
+              </a:rPr>
+              <a:t>ソース　</a:t>
+            </a:r>
+            <a:pPr indent="0" marL="0">
+              <a:buNone/>
+            </a:pPr>
+            <a:r>
+              <a:rPr lang="en-US" sz="750" dirty="0">
+                <a:solidFill>
+                  <a:srgbClr val="5F7183"/>
+                </a:solidFill>
+                <a:latin typeface="Yu Gothic" pitchFamily="34" charset="0"/>
+                <a:ea typeface="Yu Gothic" pitchFamily="34" charset="-122"/>
+                <a:cs typeface="Yu Gothic" pitchFamily="34" charset="-120"/>
+              </a:rPr>
+              <a:t>警備業法、刑法、刑事訴訟法、警察官職務執行法</a:t>
+            </a:r>
+            <a:endParaRPr lang="en-US" sz="750" dirty="0"/>
+          </a:p>
+        </p:txBody>
+      </p:sp>
+      <p:sp>
+        <p:nvSpPr>
+          <p:cNvPr id="30" name="Text 27"/>
+          <p:cNvSpPr/>
+          <p:nvPr/>
+        </p:nvSpPr>
+        <p:spPr>
+          <a:xfrm>
+            <a:off x="640080" y="6492240"/>
+            <a:ext cx="8778240" cy="292608"/>
+          </a:xfrm>
+          <a:prstGeom prst="rect">
+            <a:avLst/>
+          </a:prstGeom>
+          <a:noFill/>
+          <a:ln/>
+        </p:spPr>
+        <p:txBody>
+          <a:bodyPr wrap="square" lIns="0" tIns="0" rIns="0" bIns="0" rtlCol="0" anchor="ctr"/>
+          <a:lstStyle/>
+          <a:p>
+            <a:pPr indent="0" marL="0">
               <a:buNone/>
             </a:pPr>
             <a:r>
               <a:rPr lang="en-US" sz="900" dirty="0">
                 <a:solidFill>
-                  <a:srgbClr val="1B2733"/>
-                </a:solidFill>
-                <a:latin typeface="Yu Gothic" pitchFamily="34" charset="0"/>
-                <a:ea typeface="Yu Gothic" pitchFamily="34" charset="-122"/>
-                <a:cs typeface="Yu Gothic" pitchFamily="34" charset="-120"/>
-              </a:rPr>
-              <a:t>護身用具の有無と使用基準は現場ごとに異なる。配備がない現場では使用を前提としない。</a:t>
+                  <a:srgbClr val="5F7183"/>
+                </a:solidFill>
+                <a:latin typeface="Yu Gothic" pitchFamily="34" charset="0"/>
+                <a:ea typeface="Yu Gothic" pitchFamily="34" charset="-122"/>
+                <a:cs typeface="Yu Gothic" pitchFamily="34" charset="-120"/>
+              </a:rPr>
+              <a:t>第2時限｜基本教育2 警備業法その他警備業務の適正な実施に必要な法令  </a:t>
+            </a:r>
+            <a:pPr indent="0" marL="0">
+              <a:buNone/>
+            </a:pPr>
+            <a:r>
+              <a:rPr lang="en-US" sz="850" i="1" dirty="0">
+                <a:solidFill>
+                  <a:srgbClr val="D6E0E9"/>
+                </a:solidFill>
+                <a:latin typeface="Calibri" pitchFamily="34" charset="0"/>
+                <a:ea typeface="Calibri" pitchFamily="34" charset="-122"/>
+                <a:cs typeface="Calibri" pitchFamily="34" charset="-120"/>
+              </a:rPr>
+              <a:t>Period 2 | Basic Training 2 — Applicable Law</a:t>
             </a:r>
             <a:endParaRPr lang="en-US" sz="900" dirty="0"/>
           </a:p>
-          <a:p>
-            <a:pPr indent="0" marL="0">
-              <a:lnSpc>
-                <a:spcPct val="88000"/>
-              </a:lnSpc>
-              <a:buNone/>
-            </a:pPr>
-            <a:r>
-              <a:rPr lang="en-US" sz="750" i="1" dirty="0">
-                <a:solidFill>
-                  <a:srgbClr val="5F7183"/>
-                </a:solidFill>
-                <a:latin typeface="Calibri" pitchFamily="34" charset="0"/>
-                <a:ea typeface="Calibri" pitchFamily="34" charset="-122"/>
-                <a:cs typeface="Calibri" pitchFamily="34" charset="-120"/>
-              </a:rPr>
-              <a:t>Whether protective equipment is issued, and the rules for it, differ by site.</a:t>
-            </a:r>
-            <a:endParaRPr lang="en-US" sz="900" dirty="0"/>
-          </a:p>
-        </p:txBody>
-      </p:sp>
-      <p:sp>
-        <p:nvSpPr>
-          <p:cNvPr id="29" name="Text 26"/>
-          <p:cNvSpPr/>
-          <p:nvPr/>
-        </p:nvSpPr>
-        <p:spPr>
-          <a:xfrm>
-            <a:off x="640080" y="6272784"/>
-            <a:ext cx="9905695" cy="237744"/>
-          </a:xfrm>
-          <a:prstGeom prst="rect">
-            <a:avLst/>
-          </a:prstGeom>
-          <a:noFill/>
-          <a:ln/>
-        </p:spPr>
-        <p:txBody>
-          <a:bodyPr wrap="square" lIns="0" tIns="0" rIns="0" bIns="0" rtlCol="0" anchor="t"/>
-          <a:lstStyle/>
-          <a:p>
-            <a:pPr indent="0" marL="0">
-              <a:buNone/>
-            </a:pPr>
-            <a:r>
-              <a:rPr lang="en-US" sz="750" b="1" dirty="0">
-                <a:solidFill>
-                  <a:srgbClr val="D6E0E9"/>
-                </a:solidFill>
-                <a:latin typeface="Yu Gothic" pitchFamily="34" charset="0"/>
-                <a:ea typeface="Yu Gothic" pitchFamily="34" charset="-122"/>
-                <a:cs typeface="Yu Gothic" pitchFamily="34" charset="-120"/>
-              </a:rPr>
-              <a:t>ソース　</a:t>
-            </a:r>
-            <a:pPr indent="0" marL="0">
-              <a:buNone/>
-            </a:pPr>
-            <a:r>
-              <a:rPr lang="en-US" sz="750" dirty="0">
-                <a:solidFill>
-                  <a:srgbClr val="5F7183"/>
-                </a:solidFill>
-                <a:latin typeface="Yu Gothic" pitchFamily="34" charset="0"/>
-                <a:ea typeface="Yu Gothic" pitchFamily="34" charset="-122"/>
-                <a:cs typeface="Yu Gothic" pitchFamily="34" charset="-120"/>
-              </a:rPr>
-              <a:t>警備業法、刑法、刑事訴訟法、警察官職務執行法</a:t>
-            </a:r>
-            <a:endParaRPr lang="en-US" sz="750" dirty="0"/>
-          </a:p>
-        </p:txBody>
-      </p:sp>
-      <p:sp>
-        <p:nvSpPr>
-          <p:cNvPr id="30" name="Text 27"/>
-          <p:cNvSpPr/>
-          <p:nvPr/>
-        </p:nvSpPr>
-        <p:spPr>
-          <a:xfrm>
-            <a:off x="640080" y="6382512"/>
-            <a:ext cx="8778240" cy="292608"/>
-          </a:xfrm>
-          <a:prstGeom prst="rect">
-            <a:avLst/>
-          </a:prstGeom>
-          <a:noFill/>
-          <a:ln/>
-        </p:spPr>
-        <p:txBody>
-          <a:bodyPr wrap="square" lIns="0" tIns="0" rIns="0" bIns="0" rtlCol="0" anchor="ctr"/>
-          <a:lstStyle/>
-          <a:p>
-            <a:pPr indent="0" marL="0">
-              <a:buNone/>
-            </a:pPr>
-            <a:r>
-              <a:rPr lang="en-US" sz="900" dirty="0">
-                <a:solidFill>
-                  <a:srgbClr val="5F7183"/>
-                </a:solidFill>
-                <a:latin typeface="Yu Gothic" pitchFamily="34" charset="0"/>
-                <a:ea typeface="Yu Gothic" pitchFamily="34" charset="-122"/>
-                <a:cs typeface="Yu Gothic" pitchFamily="34" charset="-120"/>
-              </a:rPr>
-              <a:t>第2時限｜基本教育2 警備業法その他警備業務の適正な実施に必要な法令  </a:t>
-            </a:r>
-            <a:pPr indent="0" marL="0">
-              <a:buNone/>
-            </a:pPr>
-            <a:r>
-              <a:rPr lang="en-US" sz="850" i="1" dirty="0">
-                <a:solidFill>
-                  <a:srgbClr val="D6E0E9"/>
-                </a:solidFill>
-                <a:latin typeface="Calibri" pitchFamily="34" charset="0"/>
-                <a:ea typeface="Calibri" pitchFamily="34" charset="-122"/>
-                <a:cs typeface="Calibri" pitchFamily="34" charset="-120"/>
-              </a:rPr>
-              <a:t>Period 2 | Basic Training 2 — Applicable Law</a:t>
-            </a:r>
-            <a:endParaRPr lang="en-US" sz="900" dirty="0"/>
-          </a:p>
         </p:txBody>
       </p:sp>
       <p:sp>
@@ -7085,7 +7085,7 @@
         </p:nvSpPr>
         <p:spPr>
           <a:xfrm>
-            <a:off x="10637215" y="6382512"/>
+            <a:off x="10637215" y="6492240"/>
             <a:ext cx="914400" cy="292608"/>
           </a:xfrm>
           <a:prstGeom prst="rect">
@@ -7180,8 +7180,8 @@
         </p:nvSpPr>
         <p:spPr>
           <a:xfrm>
-            <a:off x="640080" y="384048"/>
-            <a:ext cx="8982151" cy="768096"/>
+            <a:off x="640080" y="365760"/>
+            <a:ext cx="8982151" cy="749808"/>
           </a:xfrm>
           <a:prstGeom prst="rect">
             <a:avLst/>
@@ -7220,7 +7220,7 @@
               <a:buNone/>
             </a:pPr>
             <a:r>
-              <a:rPr lang="en-US" sz="1100" i="1" dirty="0">
+              <a:rPr lang="en-US" sz="1100" dirty="0">
                 <a:solidFill>
                   <a:srgbClr val="12B198"/>
                 </a:solidFill>
@@ -7242,7 +7242,7 @@
         </p:nvSpPr>
         <p:spPr>
           <a:xfrm>
-            <a:off x="9686239" y="438912"/>
+            <a:off x="9686239" y="420624"/>
             <a:ext cx="932688" cy="310896"/>
           </a:xfrm>
           <a:prstGeom prst="roundRect">
@@ -7264,7 +7264,7 @@
         </p:nvSpPr>
         <p:spPr>
           <a:xfrm>
-            <a:off x="9686239" y="438912"/>
+            <a:off x="9686239" y="420624"/>
             <a:ext cx="932688" cy="310896"/>
           </a:xfrm>
           <a:prstGeom prst="rect">
@@ -7303,12 +7303,12 @@
         </p:nvSpPr>
         <p:spPr>
           <a:xfrm>
-            <a:off x="640080" y="1188720"/>
-            <a:ext cx="10911535" cy="530352"/>
+            <a:off x="640080" y="1115568"/>
+            <a:ext cx="10911535" cy="585216"/>
           </a:xfrm>
           <a:prstGeom prst="roundRect">
             <a:avLst>
-              <a:gd name="adj" fmla="val 6897"/>
+              <a:gd name="adj" fmla="val 6250"/>
             </a:avLst>
           </a:prstGeom>
           <a:solidFill>
@@ -7325,8 +7325,8 @@
         </p:nvSpPr>
         <p:spPr>
           <a:xfrm>
-            <a:off x="877824" y="1234440"/>
-            <a:ext cx="10436047" cy="438912"/>
+            <a:off x="877824" y="1161288"/>
+            <a:ext cx="10436047" cy="493776"/>
           </a:xfrm>
           <a:prstGeom prst="rect">
             <a:avLst/>
@@ -7362,7 +7362,7 @@
               <a:buNone/>
             </a:pPr>
             <a:r>
-              <a:rPr lang="en-US" sz="800" dirty="0">
+              <a:rPr lang="en-US" sz="900" dirty="0">
                 <a:solidFill>
                   <a:srgbClr val="0D8A76"/>
                 </a:solidFill>
@@ -7399,9 +7399,9 @@
               <a:buNone/>
             </a:pPr>
             <a:r>
-              <a:rPr lang="en-US" sz="850" i="1" dirty="0">
-                <a:solidFill>
-                  <a:srgbClr val="5F7183"/>
+              <a:rPr lang="en-US" sz="1050" dirty="0">
+                <a:solidFill>
+                  <a:srgbClr val="1B2733"/>
                 </a:solidFill>
                 <a:latin typeface="Calibri" pitchFamily="34" charset="0"/>
                 <a:ea typeface="Calibri" pitchFamily="34" charset="-122"/>
@@ -7421,12 +7421,12 @@
         </p:nvSpPr>
         <p:spPr>
           <a:xfrm>
-            <a:off x="640080" y="1810512"/>
-            <a:ext cx="5327752" cy="1920240"/>
+            <a:off x="640080" y="1773936"/>
+            <a:ext cx="5327752" cy="1965960"/>
           </a:xfrm>
           <a:prstGeom prst="roundRect">
             <a:avLst>
-              <a:gd name="adj" fmla="val 1905"/>
+              <a:gd name="adj" fmla="val 1860"/>
             </a:avLst>
           </a:prstGeom>
           <a:solidFill>
@@ -7443,7 +7443,7 @@
         </p:nvSpPr>
         <p:spPr>
           <a:xfrm>
-            <a:off x="822960" y="1975104"/>
+            <a:off x="822960" y="1938528"/>
             <a:ext cx="310896" cy="310896"/>
           </a:xfrm>
           <a:prstGeom prst="ellipse">
@@ -7463,7 +7463,7 @@
         </p:nvSpPr>
         <p:spPr>
           <a:xfrm>
-            <a:off x="822960" y="1975104"/>
+            <a:off x="822960" y="1938528"/>
             <a:ext cx="310896" cy="310896"/>
           </a:xfrm>
           <a:prstGeom prst="rect">
@@ -7502,7 +7502,7 @@
         </p:nvSpPr>
         <p:spPr>
           <a:xfrm>
-            <a:off x="1207008" y="1938528"/>
+            <a:off x="1207008" y="1901952"/>
             <a:ext cx="4559656" cy="512064"/>
           </a:xfrm>
           <a:prstGeom prst="rect">
@@ -7542,7 +7542,7 @@
               <a:buNone/>
             </a:pPr>
             <a:r>
-              <a:rPr lang="en-US" sz="800" i="1" dirty="0">
+              <a:rPr lang="en-US" sz="1050" dirty="0">
                 <a:solidFill>
                   <a:srgbClr val="12B198"/>
                 </a:solidFill>
@@ -7564,8 +7564,8 @@
         </p:nvSpPr>
         <p:spPr>
           <a:xfrm>
-            <a:off x="859536" y="2487168"/>
-            <a:ext cx="4888840" cy="1097280"/>
+            <a:off x="859536" y="2450592"/>
+            <a:ext cx="4888840" cy="1143000"/>
           </a:xfrm>
           <a:prstGeom prst="rect">
             <a:avLst/>
@@ -7610,9 +7610,9 @@
               <a:buNone/>
             </a:pPr>
             <a:r>
-              <a:rPr lang="en-US" sz="750" i="1" dirty="0">
-                <a:solidFill>
-                  <a:srgbClr val="5F7183"/>
+              <a:rPr lang="en-US" sz="950" dirty="0">
+                <a:solidFill>
+                  <a:srgbClr val="1B2733"/>
                 </a:solidFill>
                 <a:latin typeface="Calibri" pitchFamily="34" charset="0"/>
                 <a:ea typeface="Calibri" pitchFamily="34" charset="-122"/>
@@ -7656,9 +7656,9 @@
               <a:buNone/>
             </a:pPr>
             <a:r>
-              <a:rPr lang="en-US" sz="750" i="1" dirty="0">
-                <a:solidFill>
-                  <a:srgbClr val="5F7183"/>
+              <a:rPr lang="en-US" sz="950" dirty="0">
+                <a:solidFill>
+                  <a:srgbClr val="1B2733"/>
                 </a:solidFill>
                 <a:latin typeface="Calibri" pitchFamily="34" charset="0"/>
                 <a:ea typeface="Calibri" pitchFamily="34" charset="-122"/>
@@ -7702,9 +7702,9 @@
               <a:buNone/>
             </a:pPr>
             <a:r>
-              <a:rPr lang="en-US" sz="750" i="1" dirty="0">
-                <a:solidFill>
-                  <a:srgbClr val="5F7183"/>
+              <a:rPr lang="en-US" sz="950" dirty="0">
+                <a:solidFill>
+                  <a:srgbClr val="1B2733"/>
                 </a:solidFill>
                 <a:latin typeface="Calibri" pitchFamily="34" charset="0"/>
                 <a:ea typeface="Calibri" pitchFamily="34" charset="-122"/>
@@ -7748,9 +7748,9 @@
               <a:buNone/>
             </a:pPr>
             <a:r>
-              <a:rPr lang="en-US" sz="750" i="1" dirty="0">
-                <a:solidFill>
-                  <a:srgbClr val="5F7183"/>
+              <a:rPr lang="en-US" sz="950" dirty="0">
+                <a:solidFill>
+                  <a:srgbClr val="1B2733"/>
                 </a:solidFill>
                 <a:latin typeface="Calibri" pitchFamily="34" charset="0"/>
                 <a:ea typeface="Calibri" pitchFamily="34" charset="-122"/>
@@ -7770,12 +7770,12 @@
         </p:nvSpPr>
         <p:spPr>
           <a:xfrm>
-            <a:off x="6223864" y="1810512"/>
-            <a:ext cx="5327752" cy="1920240"/>
+            <a:off x="6223864" y="1773936"/>
+            <a:ext cx="5327752" cy="1965960"/>
           </a:xfrm>
           <a:prstGeom prst="roundRect">
             <a:avLst>
-              <a:gd name="adj" fmla="val 1905"/>
+              <a:gd name="adj" fmla="val 1860"/>
             </a:avLst>
           </a:prstGeom>
           <a:solidFill>
@@ -7792,7 +7792,7 @@
         </p:nvSpPr>
         <p:spPr>
           <a:xfrm>
-            <a:off x="6406744" y="1975104"/>
+            <a:off x="6406744" y="1938528"/>
             <a:ext cx="310896" cy="310896"/>
           </a:xfrm>
           <a:prstGeom prst="ellipse">
@@ -7812,7 +7812,7 @@
         </p:nvSpPr>
         <p:spPr>
           <a:xfrm>
-            <a:off x="6406744" y="1975104"/>
+            <a:off x="6406744" y="1938528"/>
             <a:ext cx="310896" cy="310896"/>
           </a:xfrm>
           <a:prstGeom prst="rect">
@@ -7851,7 +7851,7 @@
         </p:nvSpPr>
         <p:spPr>
           <a:xfrm>
-            <a:off x="6790792" y="1938528"/>
+            <a:off x="6790792" y="1901952"/>
             <a:ext cx="4559656" cy="512064"/>
           </a:xfrm>
           <a:prstGeom prst="rect">
@@ -7891,7 +7891,7 @@
               <a:buNone/>
             </a:pPr>
             <a:r>
-              <a:rPr lang="en-US" sz="800" i="1" dirty="0">
+              <a:rPr lang="en-US" sz="1050" dirty="0">
                 <a:solidFill>
                   <a:srgbClr val="12B198"/>
                 </a:solidFill>
@@ -7913,8 +7913,8 @@
         </p:nvSpPr>
         <p:spPr>
           <a:xfrm>
-            <a:off x="6443320" y="2487168"/>
-            <a:ext cx="4888840" cy="1097280"/>
+            <a:off x="6443320" y="2450592"/>
+            <a:ext cx="4888840" cy="1143000"/>
           </a:xfrm>
           <a:prstGeom prst="rect">
             <a:avLst/>
@@ -7959,9 +7959,9 @@
               <a:buNone/>
             </a:pPr>
             <a:r>
-              <a:rPr lang="en-US" sz="750" i="1" dirty="0">
-                <a:solidFill>
-                  <a:srgbClr val="5F7183"/>
+              <a:rPr lang="en-US" sz="950" dirty="0">
+                <a:solidFill>
+                  <a:srgbClr val="1B2733"/>
                 </a:solidFill>
                 <a:latin typeface="Calibri" pitchFamily="34" charset="0"/>
                 <a:ea typeface="Calibri" pitchFamily="34" charset="-122"/>
@@ -8005,9 +8005,9 @@
               <a:buNone/>
             </a:pPr>
             <a:r>
-              <a:rPr lang="en-US" sz="750" i="1" dirty="0">
-                <a:solidFill>
-                  <a:srgbClr val="5F7183"/>
+              <a:rPr lang="en-US" sz="950" dirty="0">
+                <a:solidFill>
+                  <a:srgbClr val="1B2733"/>
                 </a:solidFill>
                 <a:latin typeface="Calibri" pitchFamily="34" charset="0"/>
                 <a:ea typeface="Calibri" pitchFamily="34" charset="-122"/>
@@ -8051,9 +8051,9 @@
               <a:buNone/>
             </a:pPr>
             <a:r>
-              <a:rPr lang="en-US" sz="750" i="1" dirty="0">
-                <a:solidFill>
-                  <a:srgbClr val="5F7183"/>
+              <a:rPr lang="en-US" sz="950" dirty="0">
+                <a:solidFill>
+                  <a:srgbClr val="1B2733"/>
                 </a:solidFill>
                 <a:latin typeface="Calibri" pitchFamily="34" charset="0"/>
                 <a:ea typeface="Calibri" pitchFamily="34" charset="-122"/>
@@ -8097,9 +8097,9 @@
               <a:buNone/>
             </a:pPr>
             <a:r>
-              <a:rPr lang="en-US" sz="750" i="1" dirty="0">
-                <a:solidFill>
-                  <a:srgbClr val="5F7183"/>
+              <a:rPr lang="en-US" sz="950" dirty="0">
+                <a:solidFill>
+                  <a:srgbClr val="1B2733"/>
                 </a:solidFill>
                 <a:latin typeface="Calibri" pitchFamily="34" charset="0"/>
                 <a:ea typeface="Calibri" pitchFamily="34" charset="-122"/>
@@ -8119,12 +8119,12 @@
         </p:nvSpPr>
         <p:spPr>
           <a:xfrm>
-            <a:off x="640080" y="3931920"/>
-            <a:ext cx="5327752" cy="1920240"/>
+            <a:off x="640080" y="3941064"/>
+            <a:ext cx="5327752" cy="1965960"/>
           </a:xfrm>
           <a:prstGeom prst="roundRect">
             <a:avLst>
-              <a:gd name="adj" fmla="val 1905"/>
+              <a:gd name="adj" fmla="val 1860"/>
             </a:avLst>
           </a:prstGeom>
           <a:solidFill>
@@ -8141,7 +8141,7 @@
         </p:nvSpPr>
         <p:spPr>
           <a:xfrm>
-            <a:off x="822960" y="4096512"/>
+            <a:off x="822960" y="4105656"/>
             <a:ext cx="310896" cy="310896"/>
           </a:xfrm>
           <a:prstGeom prst="ellipse">
@@ -8161,7 +8161,7 @@
         </p:nvSpPr>
         <p:spPr>
           <a:xfrm>
-            <a:off x="822960" y="4096512"/>
+            <a:off x="822960" y="4105656"/>
             <a:ext cx="310896" cy="310896"/>
           </a:xfrm>
           <a:prstGeom prst="rect">
@@ -8200,7 +8200,7 @@
         </p:nvSpPr>
         <p:spPr>
           <a:xfrm>
-            <a:off x="1207008" y="4059936"/>
+            <a:off x="1207008" y="4069080"/>
             <a:ext cx="4559656" cy="512064"/>
           </a:xfrm>
           <a:prstGeom prst="rect">
@@ -8240,7 +8240,7 @@
               <a:buNone/>
             </a:pPr>
             <a:r>
-              <a:rPr lang="en-US" sz="800" i="1" dirty="0">
+              <a:rPr lang="en-US" sz="1050" dirty="0">
                 <a:solidFill>
                   <a:srgbClr val="12B198"/>
                 </a:solidFill>
@@ -8262,8 +8262,8 @@
         </p:nvSpPr>
         <p:spPr>
           <a:xfrm>
-            <a:off x="859536" y="4608576"/>
-            <a:ext cx="4888840" cy="1097280"/>
+            <a:off x="859536" y="4617720"/>
+            <a:ext cx="4888840" cy="1143000"/>
           </a:xfrm>
           <a:prstGeom prst="rect">
             <a:avLst/>
@@ -8308,9 +8308,9 @@
               <a:buNone/>
             </a:pPr>
             <a:r>
-              <a:rPr lang="en-US" sz="750" i="1" dirty="0">
-                <a:solidFill>
-                  <a:srgbClr val="5F7183"/>
+              <a:rPr lang="en-US" sz="950" dirty="0">
+                <a:solidFill>
+                  <a:srgbClr val="1B2733"/>
                 </a:solidFill>
                 <a:latin typeface="Calibri" pitchFamily="34" charset="0"/>
                 <a:ea typeface="Calibri" pitchFamily="34" charset="-122"/>
@@ -8354,9 +8354,9 @@
               <a:buNone/>
             </a:pPr>
             <a:r>
-              <a:rPr lang="en-US" sz="750" i="1" dirty="0">
-                <a:solidFill>
-                  <a:srgbClr val="5F7183"/>
+              <a:rPr lang="en-US" sz="950" dirty="0">
+                <a:solidFill>
+                  <a:srgbClr val="1B2733"/>
                 </a:solidFill>
                 <a:latin typeface="Calibri" pitchFamily="34" charset="0"/>
                 <a:ea typeface="Calibri" pitchFamily="34" charset="-122"/>
@@ -8400,9 +8400,9 @@
               <a:buNone/>
             </a:pPr>
             <a:r>
-              <a:rPr lang="en-US" sz="750" i="1" dirty="0">
-                <a:solidFill>
-                  <a:srgbClr val="5F7183"/>
+              <a:rPr lang="en-US" sz="950" dirty="0">
+                <a:solidFill>
+                  <a:srgbClr val="1B2733"/>
                 </a:solidFill>
                 <a:latin typeface="Calibri" pitchFamily="34" charset="0"/>
                 <a:ea typeface="Calibri" pitchFamily="34" charset="-122"/>
@@ -8446,9 +8446,9 @@
               <a:buNone/>
             </a:pPr>
             <a:r>
-              <a:rPr lang="en-US" sz="750" i="1" dirty="0">
-                <a:solidFill>
-                  <a:srgbClr val="5F7183"/>
+              <a:rPr lang="en-US" sz="950" dirty="0">
+                <a:solidFill>
+                  <a:srgbClr val="1B2733"/>
                 </a:solidFill>
                 <a:latin typeface="Calibri" pitchFamily="34" charset="0"/>
                 <a:ea typeface="Calibri" pitchFamily="34" charset="-122"/>
@@ -8468,12 +8468,12 @@
         </p:nvSpPr>
         <p:spPr>
           <a:xfrm>
-            <a:off x="6223864" y="3931920"/>
-            <a:ext cx="5327752" cy="1920240"/>
+            <a:off x="6223864" y="3941064"/>
+            <a:ext cx="5327752" cy="1965960"/>
           </a:xfrm>
           <a:prstGeom prst="roundRect">
             <a:avLst>
-              <a:gd name="adj" fmla="val 1905"/>
+              <a:gd name="adj" fmla="val 1860"/>
             </a:avLst>
           </a:prstGeom>
           <a:solidFill>
@@ -8490,7 +8490,7 @@
         </p:nvSpPr>
         <p:spPr>
           <a:xfrm>
-            <a:off x="6406744" y="4096512"/>
+            <a:off x="6406744" y="4105656"/>
             <a:ext cx="310896" cy="310896"/>
           </a:xfrm>
           <a:prstGeom prst="ellipse">
@@ -8510,7 +8510,7 @@
         </p:nvSpPr>
         <p:spPr>
           <a:xfrm>
-            <a:off x="6406744" y="4096512"/>
+            <a:off x="6406744" y="4105656"/>
             <a:ext cx="310896" cy="310896"/>
           </a:xfrm>
           <a:prstGeom prst="rect">
@@ -8549,7 +8549,7 @@
         </p:nvSpPr>
         <p:spPr>
           <a:xfrm>
-            <a:off x="6790792" y="4059936"/>
+            <a:off x="6790792" y="4069080"/>
             <a:ext cx="4559656" cy="512064"/>
           </a:xfrm>
           <a:prstGeom prst="rect">
@@ -8589,7 +8589,7 @@
               <a:buNone/>
             </a:pPr>
             <a:r>
-              <a:rPr lang="en-US" sz="800" i="1" dirty="0">
+              <a:rPr lang="en-US" sz="1050" dirty="0">
                 <a:solidFill>
                   <a:srgbClr val="12B198"/>
                 </a:solidFill>
@@ -8611,8 +8611,8 @@
         </p:nvSpPr>
         <p:spPr>
           <a:xfrm>
-            <a:off x="6443320" y="4608576"/>
-            <a:ext cx="4888840" cy="1097280"/>
+            <a:off x="6443320" y="4617720"/>
+            <a:ext cx="4888840" cy="1143000"/>
           </a:xfrm>
           <a:prstGeom prst="rect">
             <a:avLst/>
@@ -8657,9 +8657,9 @@
               <a:buNone/>
             </a:pPr>
             <a:r>
-              <a:rPr lang="en-US" sz="750" i="1" dirty="0">
-                <a:solidFill>
-                  <a:srgbClr val="5F7183"/>
+              <a:rPr lang="en-US" sz="950" dirty="0">
+                <a:solidFill>
+                  <a:srgbClr val="1B2733"/>
                 </a:solidFill>
                 <a:latin typeface="Calibri" pitchFamily="34" charset="0"/>
                 <a:ea typeface="Calibri" pitchFamily="34" charset="-122"/>
@@ -8703,9 +8703,9 @@
               <a:buNone/>
             </a:pPr>
             <a:r>
-              <a:rPr lang="en-US" sz="750" i="1" dirty="0">
-                <a:solidFill>
-                  <a:srgbClr val="5F7183"/>
+              <a:rPr lang="en-US" sz="950" dirty="0">
+                <a:solidFill>
+                  <a:srgbClr val="1B2733"/>
                 </a:solidFill>
                 <a:latin typeface="Calibri" pitchFamily="34" charset="0"/>
                 <a:ea typeface="Calibri" pitchFamily="34" charset="-122"/>
@@ -8749,9 +8749,9 @@
               <a:buNone/>
             </a:pPr>
             <a:r>
-              <a:rPr lang="en-US" sz="750" i="1" dirty="0">
-                <a:solidFill>
-                  <a:srgbClr val="5F7183"/>
+              <a:rPr lang="en-US" sz="950" dirty="0">
+                <a:solidFill>
+                  <a:srgbClr val="1B2733"/>
                 </a:solidFill>
                 <a:latin typeface="Calibri" pitchFamily="34" charset="0"/>
                 <a:ea typeface="Calibri" pitchFamily="34" charset="-122"/>
@@ -8795,7 +8795,86 @@
               <a:buNone/>
             </a:pPr>
             <a:r>
-              <a:rPr lang="en-US" sz="750" i="1" dirty="0">
+              <a:rPr lang="en-US" sz="950" dirty="0">
+                <a:solidFill>
+                  <a:srgbClr val="1B2733"/>
+                </a:solidFill>
+                <a:latin typeface="Calibri" pitchFamily="34" charset="0"/>
+                <a:ea typeface="Calibri" pitchFamily="34" charset="-122"/>
+                <a:cs typeface="Calibri" pitchFamily="34" charset="-120"/>
+              </a:rPr>
+              <a:t>  If you notice a conflict, report it rather than acting on it</a:t>
+            </a:r>
+            <a:endParaRPr lang="en-US" sz="950" dirty="0"/>
+          </a:p>
+        </p:txBody>
+      </p:sp>
+      <p:sp>
+        <p:nvSpPr>
+          <p:cNvPr id="28" name="Text 25"/>
+          <p:cNvSpPr/>
+          <p:nvPr/>
+        </p:nvSpPr>
+        <p:spPr>
+          <a:xfrm>
+            <a:off x="640080" y="5961888"/>
+            <a:ext cx="10911535" cy="292608"/>
+          </a:xfrm>
+          <a:prstGeom prst="rect">
+            <a:avLst/>
+          </a:prstGeom>
+          <a:noFill/>
+          <a:ln/>
+        </p:spPr>
+        <p:txBody>
+          <a:bodyPr wrap="square" lIns="0" tIns="0" rIns="0" bIns="0" rtlCol="0" anchor="t"/>
+          <a:lstStyle/>
+          <a:p>
+            <a:pPr indent="0" marL="0">
+              <a:lnSpc>
+                <a:spcPct val="88000"/>
+              </a:lnSpc>
+              <a:buNone/>
+            </a:pPr>
+            <a:r>
+              <a:rPr lang="en-US" sz="900" b="1" dirty="0">
+                <a:solidFill>
+                  <a:srgbClr val="0D8A76"/>
+                </a:solidFill>
+                <a:latin typeface="Yu Gothic" pitchFamily="34" charset="0"/>
+                <a:ea typeface="Yu Gothic" pitchFamily="34" charset="-122"/>
+                <a:cs typeface="Yu Gothic" pitchFamily="34" charset="-120"/>
+              </a:rPr>
+              <a:t>Site SOP優先　</a:t>
+            </a:r>
+            <a:pPr indent="0" marL="0">
+              <a:lnSpc>
+                <a:spcPct val="88000"/>
+              </a:lnSpc>
+              <a:buNone/>
+            </a:pPr>
+            <a:r>
+              <a:rPr lang="en-US" sz="900" dirty="0">
+                <a:solidFill>
+                  <a:srgbClr val="1B2733"/>
+                </a:solidFill>
+                <a:latin typeface="Yu Gothic" pitchFamily="34" charset="0"/>
+                <a:ea typeface="Yu Gothic" pitchFamily="34" charset="-122"/>
+                <a:cs typeface="Yu Gothic" pitchFamily="34" charset="-120"/>
+              </a:rPr>
+              <a:t>カメラ画像の保存期間、閲覧権限、開示手続は現場ごとに異なる。Site SOPと契約による。</a:t>
+            </a:r>
+            <a:endParaRPr lang="en-US" sz="900" dirty="0"/>
+          </a:p>
+          <a:p>
+            <a:pPr indent="0" marL="0">
+              <a:lnSpc>
+                <a:spcPct val="88000"/>
+              </a:lnSpc>
+              <a:buNone/>
+            </a:pPr>
+            <a:r>
+              <a:rPr lang="en-US" sz="800" i="1" dirty="0">
                 <a:solidFill>
                   <a:srgbClr val="5F7183"/>
                 </a:solidFill>
@@ -8803,22 +8882,22 @@
                 <a:ea typeface="Calibri" pitchFamily="34" charset="-122"/>
                 <a:cs typeface="Calibri" pitchFamily="34" charset="-120"/>
               </a:rPr>
-              <a:t>  If you notice a conflict, report it rather than acting on it</a:t>
-            </a:r>
-            <a:endParaRPr lang="en-US" sz="950" dirty="0"/>
-          </a:p>
-        </p:txBody>
-      </p:sp>
-      <p:sp>
-        <p:nvSpPr>
-          <p:cNvPr id="28" name="Text 25"/>
-          <p:cNvSpPr/>
-          <p:nvPr/>
-        </p:nvSpPr>
-        <p:spPr>
-          <a:xfrm>
-            <a:off x="640080" y="5907024"/>
-            <a:ext cx="10911535" cy="310896"/>
+              <a:t>Retention, viewing rights and disclosure procedures for footage differ by site.</a:t>
+            </a:r>
+            <a:endParaRPr lang="en-US" sz="900" dirty="0"/>
+          </a:p>
+        </p:txBody>
+      </p:sp>
+      <p:sp>
+        <p:nvSpPr>
+          <p:cNvPr id="29" name="Text 26"/>
+          <p:cNvSpPr/>
+          <p:nvPr/>
+        </p:nvSpPr>
+        <p:spPr>
+          <a:xfrm>
+            <a:off x="640080" y="6272784"/>
+            <a:ext cx="9905695" cy="219456"/>
           </a:xfrm>
           <a:prstGeom prst="rect">
             <a:avLst/>
@@ -8831,167 +8910,88 @@
           <a:lstStyle/>
           <a:p>
             <a:pPr indent="0" marL="0">
-              <a:lnSpc>
-                <a:spcPct val="88000"/>
-              </a:lnSpc>
-              <a:buNone/>
-            </a:pPr>
-            <a:r>
-              <a:rPr lang="en-US" sz="900" b="1" dirty="0">
-                <a:solidFill>
-                  <a:srgbClr val="0D8A76"/>
-                </a:solidFill>
-                <a:latin typeface="Yu Gothic" pitchFamily="34" charset="0"/>
-                <a:ea typeface="Yu Gothic" pitchFamily="34" charset="-122"/>
-                <a:cs typeface="Yu Gothic" pitchFamily="34" charset="-120"/>
-              </a:rPr>
-              <a:t>Site SOP優先　</a:t>
-            </a:r>
-            <a:pPr indent="0" marL="0">
-              <a:lnSpc>
-                <a:spcPct val="88000"/>
-              </a:lnSpc>
+              <a:buNone/>
+            </a:pPr>
+            <a:r>
+              <a:rPr lang="en-US" sz="750" b="1" dirty="0">
+                <a:solidFill>
+                  <a:srgbClr val="D6E0E9"/>
+                </a:solidFill>
+                <a:latin typeface="Yu Gothic" pitchFamily="34" charset="0"/>
+                <a:ea typeface="Yu Gothic" pitchFamily="34" charset="-122"/>
+                <a:cs typeface="Yu Gothic" pitchFamily="34" charset="-120"/>
+              </a:rPr>
+              <a:t>ソース　</a:t>
+            </a:r>
+            <a:pPr indent="0" marL="0">
+              <a:buNone/>
+            </a:pPr>
+            <a:r>
+              <a:rPr lang="en-US" sz="750" dirty="0">
+                <a:solidFill>
+                  <a:srgbClr val="5F7183"/>
+                </a:solidFill>
+                <a:latin typeface="Yu Gothic" pitchFamily="34" charset="0"/>
+                <a:ea typeface="Yu Gothic" pitchFamily="34" charset="-122"/>
+                <a:cs typeface="Yu Gothic" pitchFamily="34" charset="-120"/>
+              </a:rPr>
+              <a:t>個人情報保護法、不正競争防止法、経済産業省「営業秘密管理指針」</a:t>
+            </a:r>
+            <a:endParaRPr lang="en-US" sz="750" dirty="0"/>
+          </a:p>
+        </p:txBody>
+      </p:sp>
+      <p:sp>
+        <p:nvSpPr>
+          <p:cNvPr id="30" name="Text 27"/>
+          <p:cNvSpPr/>
+          <p:nvPr/>
+        </p:nvSpPr>
+        <p:spPr>
+          <a:xfrm>
+            <a:off x="640080" y="6492240"/>
+            <a:ext cx="8778240" cy="292608"/>
+          </a:xfrm>
+          <a:prstGeom prst="rect">
+            <a:avLst/>
+          </a:prstGeom>
+          <a:noFill/>
+          <a:ln/>
+        </p:spPr>
+        <p:txBody>
+          <a:bodyPr wrap="square" lIns="0" tIns="0" rIns="0" bIns="0" rtlCol="0" anchor="ctr"/>
+          <a:lstStyle/>
+          <a:p>
+            <a:pPr indent="0" marL="0">
               <a:buNone/>
             </a:pPr>
             <a:r>
               <a:rPr lang="en-US" sz="900" dirty="0">
                 <a:solidFill>
-                  <a:srgbClr val="1B2733"/>
-                </a:solidFill>
-                <a:latin typeface="Yu Gothic" pitchFamily="34" charset="0"/>
-                <a:ea typeface="Yu Gothic" pitchFamily="34" charset="-122"/>
-                <a:cs typeface="Yu Gothic" pitchFamily="34" charset="-120"/>
-              </a:rPr>
-              <a:t>カメラ画像の保存期間、閲覧権限、開示手続は現場ごとに異なる。Site SOPと契約による。</a:t>
+                  <a:srgbClr val="5F7183"/>
+                </a:solidFill>
+                <a:latin typeface="Yu Gothic" pitchFamily="34" charset="0"/>
+                <a:ea typeface="Yu Gothic" pitchFamily="34" charset="-122"/>
+                <a:cs typeface="Yu Gothic" pitchFamily="34" charset="-120"/>
+              </a:rPr>
+              <a:t>第2時限｜基本教育2 警備業法その他警備業務の適正な実施に必要な法令  </a:t>
+            </a:r>
+            <a:pPr indent="0" marL="0">
+              <a:buNone/>
+            </a:pPr>
+            <a:r>
+              <a:rPr lang="en-US" sz="850" i="1" dirty="0">
+                <a:solidFill>
+                  <a:srgbClr val="D6E0E9"/>
+                </a:solidFill>
+                <a:latin typeface="Calibri" pitchFamily="34" charset="0"/>
+                <a:ea typeface="Calibri" pitchFamily="34" charset="-122"/>
+                <a:cs typeface="Calibri" pitchFamily="34" charset="-120"/>
+              </a:rPr>
+              <a:t>Period 2 | Basic Training 2 — Applicable Law</a:t>
             </a:r>
             <a:endParaRPr lang="en-US" sz="900" dirty="0"/>
           </a:p>
-          <a:p>
-            <a:pPr indent="0" marL="0">
-              <a:lnSpc>
-                <a:spcPct val="88000"/>
-              </a:lnSpc>
-              <a:buNone/>
-            </a:pPr>
-            <a:r>
-              <a:rPr lang="en-US" sz="750" i="1" dirty="0">
-                <a:solidFill>
-                  <a:srgbClr val="5F7183"/>
-                </a:solidFill>
-                <a:latin typeface="Calibri" pitchFamily="34" charset="0"/>
-                <a:ea typeface="Calibri" pitchFamily="34" charset="-122"/>
-                <a:cs typeface="Calibri" pitchFamily="34" charset="-120"/>
-              </a:rPr>
-              <a:t>Retention, viewing rights and disclosure procedures for footage differ by site.</a:t>
-            </a:r>
-            <a:endParaRPr lang="en-US" sz="900" dirty="0"/>
-          </a:p>
-        </p:txBody>
-      </p:sp>
-      <p:sp>
-        <p:nvSpPr>
-          <p:cNvPr id="29" name="Text 26"/>
-          <p:cNvSpPr/>
-          <p:nvPr/>
-        </p:nvSpPr>
-        <p:spPr>
-          <a:xfrm>
-            <a:off x="640080" y="6272784"/>
-            <a:ext cx="9905695" cy="237744"/>
-          </a:xfrm>
-          <a:prstGeom prst="rect">
-            <a:avLst/>
-          </a:prstGeom>
-          <a:noFill/>
-          <a:ln/>
-        </p:spPr>
-        <p:txBody>
-          <a:bodyPr wrap="square" lIns="0" tIns="0" rIns="0" bIns="0" rtlCol="0" anchor="t"/>
-          <a:lstStyle/>
-          <a:p>
-            <a:pPr indent="0" marL="0">
-              <a:buNone/>
-            </a:pPr>
-            <a:r>
-              <a:rPr lang="en-US" sz="750" b="1" dirty="0">
-                <a:solidFill>
-                  <a:srgbClr val="D6E0E9"/>
-                </a:solidFill>
-                <a:latin typeface="Yu Gothic" pitchFamily="34" charset="0"/>
-                <a:ea typeface="Yu Gothic" pitchFamily="34" charset="-122"/>
-                <a:cs typeface="Yu Gothic" pitchFamily="34" charset="-120"/>
-              </a:rPr>
-              <a:t>ソース　</a:t>
-            </a:r>
-            <a:pPr indent="0" marL="0">
-              <a:buNone/>
-            </a:pPr>
-            <a:r>
-              <a:rPr lang="en-US" sz="750" dirty="0">
-                <a:solidFill>
-                  <a:srgbClr val="5F7183"/>
-                </a:solidFill>
-                <a:latin typeface="Yu Gothic" pitchFamily="34" charset="0"/>
-                <a:ea typeface="Yu Gothic" pitchFamily="34" charset="-122"/>
-                <a:cs typeface="Yu Gothic" pitchFamily="34" charset="-120"/>
-              </a:rPr>
-              <a:t>個人情報保護法、不正競争防止法、経済産業省「営業秘密管理指針」</a:t>
-            </a:r>
-            <a:endParaRPr lang="en-US" sz="750" dirty="0"/>
-          </a:p>
-        </p:txBody>
-      </p:sp>
-      <p:sp>
-        <p:nvSpPr>
-          <p:cNvPr id="30" name="Text 27"/>
-          <p:cNvSpPr/>
-          <p:nvPr/>
-        </p:nvSpPr>
-        <p:spPr>
-          <a:xfrm>
-            <a:off x="640080" y="6382512"/>
-            <a:ext cx="8778240" cy="292608"/>
-          </a:xfrm>
-          <a:prstGeom prst="rect">
-            <a:avLst/>
-          </a:prstGeom>
-          <a:noFill/>
-          <a:ln/>
-        </p:spPr>
-        <p:txBody>
-          <a:bodyPr wrap="square" lIns="0" tIns="0" rIns="0" bIns="0" rtlCol="0" anchor="ctr"/>
-          <a:lstStyle/>
-          <a:p>
-            <a:pPr indent="0" marL="0">
-              <a:buNone/>
-            </a:pPr>
-            <a:r>
-              <a:rPr lang="en-US" sz="900" dirty="0">
-                <a:solidFill>
-                  <a:srgbClr val="5F7183"/>
-                </a:solidFill>
-                <a:latin typeface="Yu Gothic" pitchFamily="34" charset="0"/>
-                <a:ea typeface="Yu Gothic" pitchFamily="34" charset="-122"/>
-                <a:cs typeface="Yu Gothic" pitchFamily="34" charset="-120"/>
-              </a:rPr>
-              <a:t>第2時限｜基本教育2 警備業法その他警備業務の適正な実施に必要な法令  </a:t>
-            </a:r>
-            <a:pPr indent="0" marL="0">
-              <a:buNone/>
-            </a:pPr>
-            <a:r>
-              <a:rPr lang="en-US" sz="850" i="1" dirty="0">
-                <a:solidFill>
-                  <a:srgbClr val="D6E0E9"/>
-                </a:solidFill>
-                <a:latin typeface="Calibri" pitchFamily="34" charset="0"/>
-                <a:ea typeface="Calibri" pitchFamily="34" charset="-122"/>
-                <a:cs typeface="Calibri" pitchFamily="34" charset="-120"/>
-              </a:rPr>
-              <a:t>Period 2 | Basic Training 2 — Applicable Law</a:t>
-            </a:r>
-            <a:endParaRPr lang="en-US" sz="900" dirty="0"/>
-          </a:p>
         </p:txBody>
       </p:sp>
       <p:sp>
@@ -9002,7 +9002,7 @@
         </p:nvSpPr>
         <p:spPr>
           <a:xfrm>
-            <a:off x="10637215" y="6382512"/>
+            <a:off x="10637215" y="6492240"/>
             <a:ext cx="914400" cy="292608"/>
           </a:xfrm>
           <a:prstGeom prst="rect">
@@ -9097,8 +9097,8 @@
         </p:nvSpPr>
         <p:spPr>
           <a:xfrm>
-            <a:off x="640080" y="384048"/>
-            <a:ext cx="8982151" cy="768096"/>
+            <a:off x="640080" y="365760"/>
+            <a:ext cx="8982151" cy="749808"/>
           </a:xfrm>
           <a:prstGeom prst="rect">
             <a:avLst/>
@@ -9137,7 +9137,7 @@
               <a:buNone/>
             </a:pPr>
             <a:r>
-              <a:rPr lang="en-US" sz="1100" i="1" dirty="0">
+              <a:rPr lang="en-US" sz="1100" dirty="0">
                 <a:solidFill>
                   <a:srgbClr val="12B198"/>
                 </a:solidFill>
@@ -9159,7 +9159,7 @@
         </p:nvSpPr>
         <p:spPr>
           <a:xfrm>
-            <a:off x="9686239" y="438912"/>
+            <a:off x="9686239" y="420624"/>
             <a:ext cx="932688" cy="310896"/>
           </a:xfrm>
           <a:prstGeom prst="roundRect">
@@ -9181,7 +9181,7 @@
         </p:nvSpPr>
         <p:spPr>
           <a:xfrm>
-            <a:off x="9686239" y="438912"/>
+            <a:off x="9686239" y="420624"/>
             <a:ext cx="932688" cy="310896"/>
           </a:xfrm>
           <a:prstGeom prst="rect">
@@ -9220,7 +9220,7 @@
         </p:nvSpPr>
         <p:spPr>
           <a:xfrm>
-            <a:off x="640080" y="1188720"/>
+            <a:off x="640080" y="1115568"/>
             <a:ext cx="10911535" cy="1124712"/>
           </a:xfrm>
           <a:prstGeom prst="roundRect">
@@ -9242,7 +9242,7 @@
         </p:nvSpPr>
         <p:spPr>
           <a:xfrm>
-            <a:off x="950976" y="1316736"/>
+            <a:off x="950976" y="1243584"/>
             <a:ext cx="10289743" cy="868680"/>
           </a:xfrm>
           <a:prstGeom prst="rect">
@@ -9319,9 +9319,9 @@
               <a:buNone/>
             </a:pPr>
             <a:r>
-              <a:rPr lang="en-US" sz="800" i="1" dirty="0">
-                <a:solidFill>
-                  <a:srgbClr val="9FD8CD"/>
+              <a:rPr lang="en-US" sz="1000" dirty="0">
+                <a:solidFill>
+                  <a:srgbClr val="DCEFEB"/>
                 </a:solidFill>
                 <a:latin typeface="Calibri" pitchFamily="34" charset="0"/>
                 <a:ea typeface="Calibri" pitchFamily="34" charset="-122"/>
@@ -9341,7 +9341,7 @@
         </p:nvSpPr>
         <p:spPr>
           <a:xfrm>
-            <a:off x="640080" y="2459736"/>
+            <a:off x="640080" y="2386584"/>
             <a:ext cx="10911535" cy="566928"/>
           </a:xfrm>
           <a:prstGeom prst="rect">
@@ -9398,9 +9398,9 @@
               <a:buNone/>
             </a:pPr>
             <a:r>
-              <a:rPr lang="en-US" sz="850" i="1" dirty="0">
-                <a:solidFill>
-                  <a:srgbClr val="5F7183"/>
+              <a:rPr lang="en-US" sz="1050" dirty="0">
+                <a:solidFill>
+                  <a:srgbClr val="1B2733"/>
                 </a:solidFill>
                 <a:latin typeface="Calibri" pitchFamily="34" charset="0"/>
                 <a:ea typeface="Calibri" pitchFamily="34" charset="-122"/>
@@ -9420,12 +9420,12 @@
         </p:nvSpPr>
         <p:spPr>
           <a:xfrm>
-            <a:off x="640080" y="3081528"/>
-            <a:ext cx="5327752" cy="836676"/>
+            <a:off x="640080" y="3008376"/>
+            <a:ext cx="5327752" cy="900684"/>
           </a:xfrm>
           <a:prstGeom prst="roundRect">
             <a:avLst>
-              <a:gd name="adj" fmla="val 4372"/>
+              <a:gd name="adj" fmla="val 4061"/>
             </a:avLst>
           </a:prstGeom>
           <a:solidFill>
@@ -9442,7 +9442,7 @@
         </p:nvSpPr>
         <p:spPr>
           <a:xfrm>
-            <a:off x="804672" y="3353562"/>
+            <a:off x="804672" y="3312414"/>
             <a:ext cx="292608" cy="292608"/>
           </a:xfrm>
           <a:prstGeom prst="ellipse">
@@ -9462,7 +9462,7 @@
         </p:nvSpPr>
         <p:spPr>
           <a:xfrm>
-            <a:off x="804672" y="3353562"/>
+            <a:off x="804672" y="3312414"/>
             <a:ext cx="292608" cy="292608"/>
           </a:xfrm>
           <a:prstGeom prst="rect">
@@ -9501,8 +9501,8 @@
         </p:nvSpPr>
         <p:spPr>
           <a:xfrm>
-            <a:off x="1188720" y="3136392"/>
-            <a:ext cx="4596232" cy="726948"/>
+            <a:off x="1188720" y="3063240"/>
+            <a:ext cx="4596232" cy="790956"/>
           </a:xfrm>
           <a:prstGeom prst="rect">
             <a:avLst/>
@@ -9541,9 +9541,9 @@
               <a:buNone/>
             </a:pPr>
             <a:r>
-              <a:rPr lang="en-US" sz="800" i="1" dirty="0">
-                <a:solidFill>
-                  <a:srgbClr val="5F7183"/>
+              <a:rPr lang="en-US" sz="1050" dirty="0">
+                <a:solidFill>
+                  <a:srgbClr val="1B2733"/>
                 </a:solidFill>
                 <a:latin typeface="Calibri" pitchFamily="34" charset="0"/>
                 <a:ea typeface="Calibri" pitchFamily="34" charset="-122"/>
@@ -9563,12 +9563,12 @@
         </p:nvSpPr>
         <p:spPr>
           <a:xfrm>
-            <a:off x="6223864" y="3081528"/>
-            <a:ext cx="5327752" cy="836676"/>
+            <a:off x="6223864" y="3008376"/>
+            <a:ext cx="5327752" cy="900684"/>
           </a:xfrm>
           <a:prstGeom prst="roundRect">
             <a:avLst>
-              <a:gd name="adj" fmla="val 4372"/>
+              <a:gd name="adj" fmla="val 4061"/>
             </a:avLst>
           </a:prstGeom>
           <a:solidFill>
@@ -9585,7 +9585,7 @@
         </p:nvSpPr>
         <p:spPr>
           <a:xfrm>
-            <a:off x="6388456" y="3353562"/>
+            <a:off x="6388456" y="3312414"/>
             <a:ext cx="292608" cy="292608"/>
           </a:xfrm>
           <a:prstGeom prst="ellipse">
@@ -9605,7 +9605,7 @@
         </p:nvSpPr>
         <p:spPr>
           <a:xfrm>
-            <a:off x="6388456" y="3353562"/>
+            <a:off x="6388456" y="3312414"/>
             <a:ext cx="292608" cy="292608"/>
           </a:xfrm>
           <a:prstGeom prst="rect">
@@ -9644,8 +9644,8 @@
         </p:nvSpPr>
         <p:spPr>
           <a:xfrm>
-            <a:off x="6772504" y="3136392"/>
-            <a:ext cx="4596232" cy="726948"/>
+            <a:off x="6772504" y="3063240"/>
+            <a:ext cx="4596232" cy="790956"/>
           </a:xfrm>
           <a:prstGeom prst="rect">
             <a:avLst/>
@@ -9684,9 +9684,9 @@
               <a:buNone/>
             </a:pPr>
             <a:r>
-              <a:rPr lang="en-US" sz="800" i="1" dirty="0">
-                <a:solidFill>
-                  <a:srgbClr val="5F7183"/>
+              <a:rPr lang="en-US" sz="1050" dirty="0">
+                <a:solidFill>
+                  <a:srgbClr val="1B2733"/>
                 </a:solidFill>
                 <a:latin typeface="Calibri" pitchFamily="34" charset="0"/>
                 <a:ea typeface="Calibri" pitchFamily="34" charset="-122"/>
@@ -9706,12 +9706,12 @@
         </p:nvSpPr>
         <p:spPr>
           <a:xfrm>
-            <a:off x="640080" y="4027932"/>
-            <a:ext cx="5327752" cy="836676"/>
+            <a:off x="640080" y="4018788"/>
+            <a:ext cx="5327752" cy="900684"/>
           </a:xfrm>
           <a:prstGeom prst="roundRect">
             <a:avLst>
-              <a:gd name="adj" fmla="val 4372"/>
+              <a:gd name="adj" fmla="val 4061"/>
             </a:avLst>
           </a:prstGeom>
           <a:solidFill>
@@ -9728,7 +9728,7 @@
         </p:nvSpPr>
         <p:spPr>
           <a:xfrm>
-            <a:off x="804672" y="4299966"/>
+            <a:off x="804672" y="4322826"/>
             <a:ext cx="292608" cy="292608"/>
           </a:xfrm>
           <a:prstGeom prst="ellipse">
@@ -9748,7 +9748,7 @@
         </p:nvSpPr>
         <p:spPr>
           <a:xfrm>
-            <a:off x="804672" y="4299966"/>
+            <a:off x="804672" y="4322826"/>
             <a:ext cx="292608" cy="292608"/>
           </a:xfrm>
           <a:prstGeom prst="rect">
@@ -9787,8 +9787,8 @@
         </p:nvSpPr>
         <p:spPr>
           <a:xfrm>
-            <a:off x="1188720" y="4082796"/>
-            <a:ext cx="4596232" cy="726948"/>
+            <a:off x="1188720" y="4073652"/>
+            <a:ext cx="4596232" cy="790956"/>
           </a:xfrm>
           <a:prstGeom prst="rect">
             <a:avLst/>
@@ -9827,9 +9827,9 @@
               <a:buNone/>
             </a:pPr>
             <a:r>
-              <a:rPr lang="en-US" sz="800" i="1" dirty="0">
-                <a:solidFill>
-                  <a:srgbClr val="5F7183"/>
+              <a:rPr lang="en-US" sz="1050" dirty="0">
+                <a:solidFill>
+                  <a:srgbClr val="1B2733"/>
                 </a:solidFill>
                 <a:latin typeface="Calibri" pitchFamily="34" charset="0"/>
                 <a:ea typeface="Calibri" pitchFamily="34" charset="-122"/>
@@ -9849,12 +9849,12 @@
         </p:nvSpPr>
         <p:spPr>
           <a:xfrm>
-            <a:off x="6223864" y="4027932"/>
-            <a:ext cx="5327752" cy="836676"/>
+            <a:off x="6223864" y="4018788"/>
+            <a:ext cx="5327752" cy="900684"/>
           </a:xfrm>
           <a:prstGeom prst="roundRect">
             <a:avLst>
-              <a:gd name="adj" fmla="val 4372"/>
+              <a:gd name="adj" fmla="val 4061"/>
             </a:avLst>
           </a:prstGeom>
           <a:solidFill>
@@ -9871,7 +9871,7 @@
         </p:nvSpPr>
         <p:spPr>
           <a:xfrm>
-            <a:off x="6388456" y="4299966"/>
+            <a:off x="6388456" y="4322826"/>
             <a:ext cx="292608" cy="292608"/>
           </a:xfrm>
           <a:prstGeom prst="ellipse">
@@ -9891,7 +9891,7 @@
         </p:nvSpPr>
         <p:spPr>
           <a:xfrm>
-            <a:off x="6388456" y="4299966"/>
+            <a:off x="6388456" y="4322826"/>
             <a:ext cx="292608" cy="292608"/>
           </a:xfrm>
           <a:prstGeom prst="rect">
@@ -9930,8 +9930,8 @@
         </p:nvSpPr>
         <p:spPr>
           <a:xfrm>
-            <a:off x="6772504" y="4082796"/>
-            <a:ext cx="4596232" cy="726948"/>
+            <a:off x="6772504" y="4073652"/>
+            <a:ext cx="4596232" cy="790956"/>
           </a:xfrm>
           <a:prstGeom prst="rect">
             <a:avLst/>
@@ -9970,9 +9970,9 @@
               <a:buNone/>
             </a:pPr>
             <a:r>
-              <a:rPr lang="en-US" sz="800" i="1" dirty="0">
-                <a:solidFill>
-                  <a:srgbClr val="5F7183"/>
+              <a:rPr lang="en-US" sz="1050" dirty="0">
+                <a:solidFill>
+                  <a:srgbClr val="1B2733"/>
                 </a:solidFill>
                 <a:latin typeface="Calibri" pitchFamily="34" charset="0"/>
                 <a:ea typeface="Calibri" pitchFamily="34" charset="-122"/>
@@ -9992,7 +9992,7 @@
         </p:nvSpPr>
         <p:spPr>
           <a:xfrm>
-            <a:off x="640080" y="4919472"/>
+            <a:off x="640080" y="4974336"/>
             <a:ext cx="10911535" cy="420624"/>
           </a:xfrm>
           <a:prstGeom prst="roundRect">
@@ -10014,7 +10014,7 @@
         </p:nvSpPr>
         <p:spPr>
           <a:xfrm>
-            <a:off x="877824" y="4946904"/>
+            <a:off x="877824" y="5001768"/>
             <a:ext cx="10436047" cy="365760"/>
           </a:xfrm>
           <a:prstGeom prst="rect">
@@ -10071,9 +10071,9 @@
               <a:buNone/>
             </a:pPr>
             <a:r>
-              <a:rPr lang="en-US" sz="750" i="1" dirty="0">
-                <a:solidFill>
-                  <a:srgbClr val="5F7183"/>
+              <a:rPr lang="en-US" sz="950" dirty="0">
+                <a:solidFill>
+                  <a:srgbClr val="1B2733"/>
                 </a:solidFill>
                 <a:latin typeface="Calibri" pitchFamily="34" charset="0"/>
                 <a:ea typeface="Calibri" pitchFamily="34" charset="-122"/>
@@ -10093,7 +10093,7 @@
         </p:nvSpPr>
         <p:spPr>
           <a:xfrm>
-            <a:off x="640080" y="5394960"/>
+            <a:off x="640080" y="5449824"/>
             <a:ext cx="10911535" cy="420624"/>
           </a:xfrm>
           <a:prstGeom prst="roundRect">
@@ -10115,7 +10115,7 @@
         </p:nvSpPr>
         <p:spPr>
           <a:xfrm>
-            <a:off x="877824" y="5422392"/>
+            <a:off x="877824" y="5477256"/>
             <a:ext cx="10436047" cy="365760"/>
           </a:xfrm>
           <a:prstGeom prst="rect">
@@ -10172,7 +10172,86 @@
               <a:buNone/>
             </a:pPr>
             <a:r>
-              <a:rPr lang="en-US" sz="750" i="1" dirty="0">
+              <a:rPr lang="en-US" sz="950" dirty="0">
+                <a:solidFill>
+                  <a:srgbClr val="1B2733"/>
+                </a:solidFill>
+                <a:latin typeface="Calibri" pitchFamily="34" charset="0"/>
+                <a:ea typeface="Calibri" pitchFamily="34" charset="-122"/>
+                <a:cs typeface="Calibri" pitchFamily="34" charset="-120"/>
+              </a:rPr>
+              <a:t>They head straight for the exit. Do you follow, or not?</a:t>
+            </a:r>
+            <a:endParaRPr lang="en-US" sz="850" dirty="0"/>
+          </a:p>
+        </p:txBody>
+      </p:sp>
+      <p:sp>
+        <p:nvSpPr>
+          <p:cNvPr id="29" name="Text 26"/>
+          <p:cNvSpPr/>
+          <p:nvPr/>
+        </p:nvSpPr>
+        <p:spPr>
+          <a:xfrm>
+            <a:off x="640080" y="5961888"/>
+            <a:ext cx="10911535" cy="292608"/>
+          </a:xfrm>
+          <a:prstGeom prst="rect">
+            <a:avLst/>
+          </a:prstGeom>
+          <a:noFill/>
+          <a:ln/>
+        </p:spPr>
+        <p:txBody>
+          <a:bodyPr wrap="square" lIns="0" tIns="0" rIns="0" bIns="0" rtlCol="0" anchor="t"/>
+          <a:lstStyle/>
+          <a:p>
+            <a:pPr indent="0" marL="0">
+              <a:lnSpc>
+                <a:spcPct val="88000"/>
+              </a:lnSpc>
+              <a:buNone/>
+            </a:pPr>
+            <a:r>
+              <a:rPr lang="en-US" sz="900" b="1" dirty="0">
+                <a:solidFill>
+                  <a:srgbClr val="0D8A76"/>
+                </a:solidFill>
+                <a:latin typeface="Yu Gothic" pitchFamily="34" charset="0"/>
+                <a:ea typeface="Yu Gothic" pitchFamily="34" charset="-122"/>
+                <a:cs typeface="Yu Gothic" pitchFamily="34" charset="-120"/>
+              </a:rPr>
+              <a:t>Site SOP優先　</a:t>
+            </a:r>
+            <a:pPr indent="0" marL="0">
+              <a:lnSpc>
+                <a:spcPct val="88000"/>
+              </a:lnSpc>
+              <a:buNone/>
+            </a:pPr>
+            <a:r>
+              <a:rPr lang="en-US" sz="900" dirty="0">
+                <a:solidFill>
+                  <a:srgbClr val="1B2733"/>
+                </a:solidFill>
+                <a:latin typeface="Yu Gothic" pitchFamily="34" charset="0"/>
+                <a:ea typeface="Yu Gothic" pitchFamily="34" charset="-122"/>
+                <a:cs typeface="Yu Gothic" pitchFamily="34" charset="-120"/>
+              </a:rPr>
+              <a:t>持ち出し許可の運用と、確認を求める相手は現場ごとに異なる。Site SOPを確認する。</a:t>
+            </a:r>
+            <a:endParaRPr lang="en-US" sz="900" dirty="0"/>
+          </a:p>
+          <a:p>
+            <a:pPr indent="0" marL="0">
+              <a:lnSpc>
+                <a:spcPct val="88000"/>
+              </a:lnSpc>
+              <a:buNone/>
+            </a:pPr>
+            <a:r>
+              <a:rPr lang="en-US" sz="800" i="1" dirty="0">
                 <a:solidFill>
                   <a:srgbClr val="5F7183"/>
                 </a:solidFill>
@@ -10180,22 +10259,22 @@
                 <a:ea typeface="Calibri" pitchFamily="34" charset="-122"/>
                 <a:cs typeface="Calibri" pitchFamily="34" charset="-120"/>
               </a:rPr>
-              <a:t>They head straight for the exit. Do you follow, or not?</a:t>
-            </a:r>
-            <a:endParaRPr lang="en-US" sz="850" dirty="0"/>
-          </a:p>
-        </p:txBody>
-      </p:sp>
-      <p:sp>
-        <p:nvSpPr>
-          <p:cNvPr id="29" name="Text 26"/>
-          <p:cNvSpPr/>
-          <p:nvPr/>
-        </p:nvSpPr>
-        <p:spPr>
-          <a:xfrm>
-            <a:off x="640080" y="5907024"/>
-            <a:ext cx="10911535" cy="310896"/>
+              <a:t>Removal-permit procedures and who to verify with differ by site. Check the Site SOP.</a:t>
+            </a:r>
+            <a:endParaRPr lang="en-US" sz="900" dirty="0"/>
+          </a:p>
+        </p:txBody>
+      </p:sp>
+      <p:sp>
+        <p:nvSpPr>
+          <p:cNvPr id="30" name="Text 27"/>
+          <p:cNvSpPr/>
+          <p:nvPr/>
+        </p:nvSpPr>
+        <p:spPr>
+          <a:xfrm>
+            <a:off x="640080" y="6272784"/>
+            <a:ext cx="9905695" cy="219456"/>
           </a:xfrm>
           <a:prstGeom prst="rect">
             <a:avLst/>
@@ -10208,167 +10287,88 @@
           <a:lstStyle/>
           <a:p>
             <a:pPr indent="0" marL="0">
-              <a:lnSpc>
-                <a:spcPct val="88000"/>
-              </a:lnSpc>
-              <a:buNone/>
-            </a:pPr>
-            <a:r>
-              <a:rPr lang="en-US" sz="900" b="1" dirty="0">
-                <a:solidFill>
-                  <a:srgbClr val="0D8A76"/>
-                </a:solidFill>
-                <a:latin typeface="Yu Gothic" pitchFamily="34" charset="0"/>
-                <a:ea typeface="Yu Gothic" pitchFamily="34" charset="-122"/>
-                <a:cs typeface="Yu Gothic" pitchFamily="34" charset="-120"/>
-              </a:rPr>
-              <a:t>Site SOP優先　</a:t>
-            </a:r>
-            <a:pPr indent="0" marL="0">
-              <a:lnSpc>
-                <a:spcPct val="88000"/>
-              </a:lnSpc>
+              <a:buNone/>
+            </a:pPr>
+            <a:r>
+              <a:rPr lang="en-US" sz="750" b="1" dirty="0">
+                <a:solidFill>
+                  <a:srgbClr val="D6E0E9"/>
+                </a:solidFill>
+                <a:latin typeface="Yu Gothic" pitchFamily="34" charset="0"/>
+                <a:ea typeface="Yu Gothic" pitchFamily="34" charset="-122"/>
+                <a:cs typeface="Yu Gothic" pitchFamily="34" charset="-120"/>
+              </a:rPr>
+              <a:t>ソース　</a:t>
+            </a:r>
+            <a:pPr indent="0" marL="0">
+              <a:buNone/>
+            </a:pPr>
+            <a:r>
+              <a:rPr lang="en-US" sz="750" dirty="0">
+                <a:solidFill>
+                  <a:srgbClr val="5F7183"/>
+                </a:solidFill>
+                <a:latin typeface="Yu Gothic" pitchFamily="34" charset="0"/>
+                <a:ea typeface="Yu Gothic" pitchFamily="34" charset="-122"/>
+                <a:cs typeface="Yu Gothic" pitchFamily="34" charset="-120"/>
+              </a:rPr>
+              <a:t>警備業法、刑法、刑事訴訟法、警察官職務執行法</a:t>
+            </a:r>
+            <a:endParaRPr lang="en-US" sz="750" dirty="0"/>
+          </a:p>
+        </p:txBody>
+      </p:sp>
+      <p:sp>
+        <p:nvSpPr>
+          <p:cNvPr id="31" name="Text 28"/>
+          <p:cNvSpPr/>
+          <p:nvPr/>
+        </p:nvSpPr>
+        <p:spPr>
+          <a:xfrm>
+            <a:off x="640080" y="6492240"/>
+            <a:ext cx="8778240" cy="292608"/>
+          </a:xfrm>
+          <a:prstGeom prst="rect">
+            <a:avLst/>
+          </a:prstGeom>
+          <a:noFill/>
+          <a:ln/>
+        </p:spPr>
+        <p:txBody>
+          <a:bodyPr wrap="square" lIns="0" tIns="0" rIns="0" bIns="0" rtlCol="0" anchor="ctr"/>
+          <a:lstStyle/>
+          <a:p>
+            <a:pPr indent="0" marL="0">
               <a:buNone/>
             </a:pPr>
             <a:r>
               <a:rPr lang="en-US" sz="900" dirty="0">
                 <a:solidFill>
-                  <a:srgbClr val="1B2733"/>
-                </a:solidFill>
-                <a:latin typeface="Yu Gothic" pitchFamily="34" charset="0"/>
-                <a:ea typeface="Yu Gothic" pitchFamily="34" charset="-122"/>
-                <a:cs typeface="Yu Gothic" pitchFamily="34" charset="-120"/>
-              </a:rPr>
-              <a:t>持ち出し許可の運用と、確認を求める相手は現場ごとに異なる。Site SOPを確認する。</a:t>
+                  <a:srgbClr val="5F7183"/>
+                </a:solidFill>
+                <a:latin typeface="Yu Gothic" pitchFamily="34" charset="0"/>
+                <a:ea typeface="Yu Gothic" pitchFamily="34" charset="-122"/>
+                <a:cs typeface="Yu Gothic" pitchFamily="34" charset="-120"/>
+              </a:rPr>
+              <a:t>第2時限｜基本教育2 警備業法その他警備業務の適正な実施に必要な法令  </a:t>
+            </a:r>
+            <a:pPr indent="0" marL="0">
+              <a:buNone/>
+            </a:pPr>
+            <a:r>
+              <a:rPr lang="en-US" sz="850" i="1" dirty="0">
+                <a:solidFill>
+                  <a:srgbClr val="D6E0E9"/>
+                </a:solidFill>
+                <a:latin typeface="Calibri" pitchFamily="34" charset="0"/>
+                <a:ea typeface="Calibri" pitchFamily="34" charset="-122"/>
+                <a:cs typeface="Calibri" pitchFamily="34" charset="-120"/>
+              </a:rPr>
+              <a:t>Period 2 | Basic Training 2 — Applicable Law</a:t>
             </a:r>
             <a:endParaRPr lang="en-US" sz="900" dirty="0"/>
           </a:p>
-          <a:p>
-            <a:pPr indent="0" marL="0">
-              <a:lnSpc>
-                <a:spcPct val="88000"/>
-              </a:lnSpc>
-              <a:buNone/>
-            </a:pPr>
-            <a:r>
-              <a:rPr lang="en-US" sz="750" i="1" dirty="0">
-                <a:solidFill>
-                  <a:srgbClr val="5F7183"/>
-                </a:solidFill>
-                <a:latin typeface="Calibri" pitchFamily="34" charset="0"/>
-                <a:ea typeface="Calibri" pitchFamily="34" charset="-122"/>
-                <a:cs typeface="Calibri" pitchFamily="34" charset="-120"/>
-              </a:rPr>
-              <a:t>Removal-permit procedures and who to verify with differ by site. Check the Site SOP.</a:t>
-            </a:r>
-            <a:endParaRPr lang="en-US" sz="900" dirty="0"/>
-          </a:p>
-        </p:txBody>
-      </p:sp>
-      <p:sp>
-        <p:nvSpPr>
-          <p:cNvPr id="30" name="Text 27"/>
-          <p:cNvSpPr/>
-          <p:nvPr/>
-        </p:nvSpPr>
-        <p:spPr>
-          <a:xfrm>
-            <a:off x="640080" y="6272784"/>
-            <a:ext cx="9905695" cy="237744"/>
-          </a:xfrm>
-          <a:prstGeom prst="rect">
-            <a:avLst/>
-          </a:prstGeom>
-          <a:noFill/>
-          <a:ln/>
-        </p:spPr>
-        <p:txBody>
-          <a:bodyPr wrap="square" lIns="0" tIns="0" rIns="0" bIns="0" rtlCol="0" anchor="t"/>
-          <a:lstStyle/>
-          <a:p>
-            <a:pPr indent="0" marL="0">
-              <a:buNone/>
-            </a:pPr>
-            <a:r>
-              <a:rPr lang="en-US" sz="750" b="1" dirty="0">
-                <a:solidFill>
-                  <a:srgbClr val="D6E0E9"/>
-                </a:solidFill>
-                <a:latin typeface="Yu Gothic" pitchFamily="34" charset="0"/>
-                <a:ea typeface="Yu Gothic" pitchFamily="34" charset="-122"/>
-                <a:cs typeface="Yu Gothic" pitchFamily="34" charset="-120"/>
-              </a:rPr>
-              <a:t>ソース　</a:t>
-            </a:r>
-            <a:pPr indent="0" marL="0">
-              <a:buNone/>
-            </a:pPr>
-            <a:r>
-              <a:rPr lang="en-US" sz="750" dirty="0">
-                <a:solidFill>
-                  <a:srgbClr val="5F7183"/>
-                </a:solidFill>
-                <a:latin typeface="Yu Gothic" pitchFamily="34" charset="0"/>
-                <a:ea typeface="Yu Gothic" pitchFamily="34" charset="-122"/>
-                <a:cs typeface="Yu Gothic" pitchFamily="34" charset="-120"/>
-              </a:rPr>
-              <a:t>警備業法、刑法、刑事訴訟法、警察官職務執行法</a:t>
-            </a:r>
-            <a:endParaRPr lang="en-US" sz="750" dirty="0"/>
-          </a:p>
-        </p:txBody>
-      </p:sp>
-      <p:sp>
-        <p:nvSpPr>
-          <p:cNvPr id="31" name="Text 28"/>
-          <p:cNvSpPr/>
-          <p:nvPr/>
-        </p:nvSpPr>
-        <p:spPr>
-          <a:xfrm>
-            <a:off x="640080" y="6382512"/>
-            <a:ext cx="8778240" cy="292608"/>
-          </a:xfrm>
-          <a:prstGeom prst="rect">
-            <a:avLst/>
-          </a:prstGeom>
-          <a:noFill/>
-          <a:ln/>
-        </p:spPr>
-        <p:txBody>
-          <a:bodyPr wrap="square" lIns="0" tIns="0" rIns="0" bIns="0" rtlCol="0" anchor="ctr"/>
-          <a:lstStyle/>
-          <a:p>
-            <a:pPr indent="0" marL="0">
-              <a:buNone/>
-            </a:pPr>
-            <a:r>
-              <a:rPr lang="en-US" sz="900" dirty="0">
-                <a:solidFill>
-                  <a:srgbClr val="5F7183"/>
-                </a:solidFill>
-                <a:latin typeface="Yu Gothic" pitchFamily="34" charset="0"/>
-                <a:ea typeface="Yu Gothic" pitchFamily="34" charset="-122"/>
-                <a:cs typeface="Yu Gothic" pitchFamily="34" charset="-120"/>
-              </a:rPr>
-              <a:t>第2時限｜基本教育2 警備業法その他警備業務の適正な実施に必要な法令  </a:t>
-            </a:r>
-            <a:pPr indent="0" marL="0">
-              <a:buNone/>
-            </a:pPr>
-            <a:r>
-              <a:rPr lang="en-US" sz="850" i="1" dirty="0">
-                <a:solidFill>
-                  <a:srgbClr val="D6E0E9"/>
-                </a:solidFill>
-                <a:latin typeface="Calibri" pitchFamily="34" charset="0"/>
-                <a:ea typeface="Calibri" pitchFamily="34" charset="-122"/>
-                <a:cs typeface="Calibri" pitchFamily="34" charset="-120"/>
-              </a:rPr>
-              <a:t>Period 2 | Basic Training 2 — Applicable Law</a:t>
-            </a:r>
-            <a:endParaRPr lang="en-US" sz="900" dirty="0"/>
-          </a:p>
         </p:txBody>
       </p:sp>
       <p:sp>
@@ -10379,7 +10379,7 @@
         </p:nvSpPr>
         <p:spPr>
           <a:xfrm>
-            <a:off x="10637215" y="6382512"/>
+            <a:off x="10637215" y="6492240"/>
             <a:ext cx="914400" cy="292608"/>
           </a:xfrm>
           <a:prstGeom prst="rect">
@@ -10474,8 +10474,8 @@
         </p:nvSpPr>
         <p:spPr>
           <a:xfrm>
-            <a:off x="640080" y="384048"/>
-            <a:ext cx="8982151" cy="768096"/>
+            <a:off x="640080" y="365760"/>
+            <a:ext cx="8982151" cy="749808"/>
           </a:xfrm>
           <a:prstGeom prst="rect">
             <a:avLst/>
@@ -10514,7 +10514,7 @@
               <a:buNone/>
             </a:pPr>
             <a:r>
-              <a:rPr lang="en-US" sz="1100" i="1" dirty="0">
+              <a:rPr lang="en-US" sz="1100" dirty="0">
                 <a:solidFill>
                   <a:srgbClr val="12B198"/>
                 </a:solidFill>
@@ -10536,7 +10536,7 @@
         </p:nvSpPr>
         <p:spPr>
           <a:xfrm>
-            <a:off x="9686239" y="438912"/>
+            <a:off x="9686239" y="420624"/>
             <a:ext cx="932688" cy="310896"/>
           </a:xfrm>
           <a:prstGeom prst="roundRect">
@@ -10558,7 +10558,7 @@
         </p:nvSpPr>
         <p:spPr>
           <a:xfrm>
-            <a:off x="9686239" y="438912"/>
+            <a:off x="9686239" y="420624"/>
             <a:ext cx="932688" cy="310896"/>
           </a:xfrm>
           <a:prstGeom prst="rect">
@@ -10597,12 +10597,12 @@
         </p:nvSpPr>
         <p:spPr>
           <a:xfrm>
-            <a:off x="640080" y="1188720"/>
-            <a:ext cx="10911535" cy="683514"/>
+            <a:off x="640080" y="1115568"/>
+            <a:ext cx="10911535" cy="715518"/>
           </a:xfrm>
           <a:prstGeom prst="roundRect">
             <a:avLst>
-              <a:gd name="adj" fmla="val 5351"/>
+              <a:gd name="adj" fmla="val 5112"/>
             </a:avLst>
           </a:prstGeom>
           <a:solidFill>
@@ -10619,7 +10619,7 @@
         </p:nvSpPr>
         <p:spPr>
           <a:xfrm>
-            <a:off x="841248" y="1356741"/>
+            <a:off x="841248" y="1299591"/>
             <a:ext cx="347472" cy="347472"/>
           </a:xfrm>
           <a:prstGeom prst="ellipse">
@@ -10639,7 +10639,7 @@
         </p:nvSpPr>
         <p:spPr>
           <a:xfrm>
-            <a:off x="841248" y="1356741"/>
+            <a:off x="841248" y="1299591"/>
             <a:ext cx="347472" cy="347472"/>
           </a:xfrm>
           <a:prstGeom prst="rect">
@@ -10678,8 +10678,8 @@
         </p:nvSpPr>
         <p:spPr>
           <a:xfrm>
-            <a:off x="1280160" y="1252728"/>
-            <a:ext cx="10033711" cy="555498"/>
+            <a:off x="1280160" y="1179576"/>
+            <a:ext cx="10033711" cy="587502"/>
           </a:xfrm>
           <a:prstGeom prst="rect">
             <a:avLst/>
@@ -10698,7 +10698,7 @@
               <a:buNone/>
             </a:pPr>
             <a:r>
-              <a:rPr lang="en-US" sz="900" dirty="0">
+              <a:rPr lang="en-US" sz="950" dirty="0">
                 <a:solidFill>
                   <a:srgbClr val="5F7183"/>
                 </a:solidFill>
@@ -10708,7 +10708,7 @@
               </a:rPr>
               <a:t>問1　犯罪か、確認事項か</a:t>
             </a:r>
-            <a:endParaRPr lang="en-US" sz="900" dirty="0"/>
+            <a:endParaRPr lang="en-US" sz="950" dirty="0"/>
           </a:p>
           <a:p>
             <a:pPr indent="0" marL="0">
@@ -10728,7 +10728,7 @@
               </a:rPr>
               <a:t>確認が必要な事象。社員が会社備品を持つこと自体は犯罪ではなく、明白性を満たさない。</a:t>
             </a:r>
-            <a:endParaRPr lang="en-US" sz="900" dirty="0"/>
+            <a:endParaRPr lang="en-US" sz="950" dirty="0"/>
           </a:p>
           <a:p>
             <a:pPr indent="0" marL="0">
@@ -10738,9 +10738,9 @@
               <a:buNone/>
             </a:pPr>
             <a:r>
-              <a:rPr lang="en-US" sz="800" i="1" dirty="0">
-                <a:solidFill>
-                  <a:srgbClr val="5F7183"/>
+              <a:rPr lang="en-US" sz="1100" dirty="0">
+                <a:solidFill>
+                  <a:srgbClr val="1B2733"/>
                 </a:solidFill>
                 <a:latin typeface="Calibri" pitchFamily="34" charset="0"/>
                 <a:ea typeface="Calibri" pitchFamily="34" charset="-122"/>
@@ -10748,7 +10748,7 @@
               </a:rPr>
               <a:t>A matter to verify. An employee holding company property is not itself a crime, and the obviousness test is not met.</a:t>
             </a:r>
-            <a:endParaRPr lang="en-US" sz="900" dirty="0"/>
+            <a:endParaRPr lang="en-US" sz="950" dirty="0"/>
           </a:p>
         </p:txBody>
       </p:sp>
@@ -10760,12 +10760,12 @@
         </p:nvSpPr>
         <p:spPr>
           <a:xfrm>
-            <a:off x="640080" y="1972818"/>
-            <a:ext cx="10911535" cy="683514"/>
+            <a:off x="640080" y="1931670"/>
+            <a:ext cx="10911535" cy="715518"/>
           </a:xfrm>
           <a:prstGeom prst="roundRect">
             <a:avLst>
-              <a:gd name="adj" fmla="val 5351"/>
+              <a:gd name="adj" fmla="val 5112"/>
             </a:avLst>
           </a:prstGeom>
           <a:solidFill>
@@ -10782,7 +10782,7 @@
         </p:nvSpPr>
         <p:spPr>
           <a:xfrm>
-            <a:off x="841248" y="2140839"/>
+            <a:off x="841248" y="2115693"/>
             <a:ext cx="347472" cy="347472"/>
           </a:xfrm>
           <a:prstGeom prst="ellipse">
@@ -10802,7 +10802,7 @@
         </p:nvSpPr>
         <p:spPr>
           <a:xfrm>
-            <a:off x="841248" y="2140839"/>
+            <a:off x="841248" y="2115693"/>
             <a:ext cx="347472" cy="347472"/>
           </a:xfrm>
           <a:prstGeom prst="rect">
@@ -10841,8 +10841,8 @@
         </p:nvSpPr>
         <p:spPr>
           <a:xfrm>
-            <a:off x="1280160" y="2036826"/>
-            <a:ext cx="10033711" cy="555498"/>
+            <a:off x="1280160" y="1995678"/>
+            <a:ext cx="10033711" cy="587502"/>
           </a:xfrm>
           <a:prstGeom prst="rect">
             <a:avLst/>
@@ -10861,7 +10861,7 @@
               <a:buNone/>
             </a:pPr>
             <a:r>
-              <a:rPr lang="en-US" sz="900" dirty="0">
+              <a:rPr lang="en-US" sz="950" dirty="0">
                 <a:solidFill>
                   <a:srgbClr val="5F7183"/>
                 </a:solidFill>
@@ -10871,7 +10871,7 @@
               </a:rPr>
               <a:t>問2　様式を知らないことの影響</a:t>
             </a:r>
-            <a:endParaRPr lang="en-US" sz="900" dirty="0"/>
+            <a:endParaRPr lang="en-US" sz="950" dirty="0"/>
           </a:p>
           <a:p>
             <a:pPr indent="0" marL="0">
@@ -10891,7 +10891,7 @@
               </a:rPr>
               <a:t>判断の根拠にしない。知らないなら確認できる者に確認する。</a:t>
             </a:r>
-            <a:endParaRPr lang="en-US" sz="900" dirty="0"/>
+            <a:endParaRPr lang="en-US" sz="950" dirty="0"/>
           </a:p>
           <a:p>
             <a:pPr indent="0" marL="0">
@@ -10901,9 +10901,9 @@
               <a:buNone/>
             </a:pPr>
             <a:r>
-              <a:rPr lang="en-US" sz="800" i="1" dirty="0">
-                <a:solidFill>
-                  <a:srgbClr val="5F7183"/>
+              <a:rPr lang="en-US" sz="1100" dirty="0">
+                <a:solidFill>
+                  <a:srgbClr val="1B2733"/>
                 </a:solidFill>
                 <a:latin typeface="Calibri" pitchFamily="34" charset="0"/>
                 <a:ea typeface="Calibri" pitchFamily="34" charset="-122"/>
@@ -10911,7 +10911,7 @@
               </a:rPr>
               <a:t>It is not a basis for a decision. If you do not know, ask someone who can confirm.</a:t>
             </a:r>
-            <a:endParaRPr lang="en-US" sz="900" dirty="0"/>
+            <a:endParaRPr lang="en-US" sz="950" dirty="0"/>
           </a:p>
         </p:txBody>
       </p:sp>
@@ -10923,12 +10923,12 @@
         </p:nvSpPr>
         <p:spPr>
           <a:xfrm>
-            <a:off x="640080" y="2756916"/>
-            <a:ext cx="10911535" cy="683514"/>
+            <a:off x="640080" y="2747772"/>
+            <a:ext cx="10911535" cy="715518"/>
           </a:xfrm>
           <a:prstGeom prst="roundRect">
             <a:avLst>
-              <a:gd name="adj" fmla="val 5351"/>
+              <a:gd name="adj" fmla="val 5112"/>
             </a:avLst>
           </a:prstGeom>
           <a:solidFill>
@@ -10945,7 +10945,7 @@
         </p:nvSpPr>
         <p:spPr>
           <a:xfrm>
-            <a:off x="841248" y="2924937"/>
+            <a:off x="841248" y="2931795"/>
             <a:ext cx="347472" cy="347472"/>
           </a:xfrm>
           <a:prstGeom prst="ellipse">
@@ -10965,7 +10965,7 @@
         </p:nvSpPr>
         <p:spPr>
           <a:xfrm>
-            <a:off x="841248" y="2924937"/>
+            <a:off x="841248" y="2931795"/>
             <a:ext cx="347472" cy="347472"/>
           </a:xfrm>
           <a:prstGeom prst="rect">
@@ -11004,8 +11004,8 @@
         </p:nvSpPr>
         <p:spPr>
           <a:xfrm>
-            <a:off x="1280160" y="2820924"/>
-            <a:ext cx="10033711" cy="555498"/>
+            <a:off x="1280160" y="2811780"/>
+            <a:ext cx="10033711" cy="587502"/>
           </a:xfrm>
           <a:prstGeom prst="rect">
             <a:avLst/>
@@ -11024,7 +11024,7 @@
               <a:buNone/>
             </a:pPr>
             <a:r>
-              <a:rPr lang="en-US" sz="900" dirty="0">
+              <a:rPr lang="en-US" sz="950" dirty="0">
                 <a:solidFill>
                   <a:srgbClr val="5F7183"/>
                 </a:solidFill>
@@ -11034,7 +11034,7 @@
               </a:rPr>
               <a:t>問3　できること／できないこと</a:t>
             </a:r>
-            <a:endParaRPr lang="en-US" sz="900" dirty="0"/>
+            <a:endParaRPr lang="en-US" sz="950" dirty="0"/>
           </a:p>
           <a:p>
             <a:pPr indent="0" marL="0">
@@ -11054,7 +11054,7 @@
               </a:rPr>
               <a:t>できるのは確認の依頼、記録、報告。強制、取り上げ、進路をふさぐことはできない。</a:t>
             </a:r>
-            <a:endParaRPr lang="en-US" sz="900" dirty="0"/>
+            <a:endParaRPr lang="en-US" sz="950" dirty="0"/>
           </a:p>
           <a:p>
             <a:pPr indent="0" marL="0">
@@ -11064,9 +11064,9 @@
               <a:buNone/>
             </a:pPr>
             <a:r>
-              <a:rPr lang="en-US" sz="800" i="1" dirty="0">
-                <a:solidFill>
-                  <a:srgbClr val="5F7183"/>
+              <a:rPr lang="en-US" sz="1100" dirty="0">
+                <a:solidFill>
+                  <a:srgbClr val="1B2733"/>
                 </a:solidFill>
                 <a:latin typeface="Calibri" pitchFamily="34" charset="0"/>
                 <a:ea typeface="Calibri" pitchFamily="34" charset="-122"/>
@@ -11074,7 +11074,7 @@
               </a:rPr>
               <a:t>You may request, record and report. You may not compel, seize, or block their path.</a:t>
             </a:r>
-            <a:endParaRPr lang="en-US" sz="900" dirty="0"/>
+            <a:endParaRPr lang="en-US" sz="950" dirty="0"/>
           </a:p>
         </p:txBody>
       </p:sp>
@@ -11086,12 +11086,12 @@
         </p:nvSpPr>
         <p:spPr>
           <a:xfrm>
-            <a:off x="640080" y="3541014"/>
-            <a:ext cx="10911535" cy="683514"/>
+            <a:off x="640080" y="3563874"/>
+            <a:ext cx="10911535" cy="715518"/>
           </a:xfrm>
           <a:prstGeom prst="roundRect">
             <a:avLst>
-              <a:gd name="adj" fmla="val 5351"/>
+              <a:gd name="adj" fmla="val 5112"/>
             </a:avLst>
           </a:prstGeom>
           <a:solidFill>
@@ -11108,7 +11108,7 @@
         </p:nvSpPr>
         <p:spPr>
           <a:xfrm>
-            <a:off x="841248" y="3709035"/>
+            <a:off x="841248" y="3747897"/>
             <a:ext cx="347472" cy="347472"/>
           </a:xfrm>
           <a:prstGeom prst="ellipse">
@@ -11128,7 +11128,7 @@
         </p:nvSpPr>
         <p:spPr>
           <a:xfrm>
-            <a:off x="841248" y="3709035"/>
+            <a:off x="841248" y="3747897"/>
             <a:ext cx="347472" cy="347472"/>
           </a:xfrm>
           <a:prstGeom prst="rect">
@@ -11167,8 +11167,8 @@
         </p:nvSpPr>
         <p:spPr>
           <a:xfrm>
-            <a:off x="1280160" y="3605022"/>
-            <a:ext cx="10033711" cy="555498"/>
+            <a:off x="1280160" y="3627882"/>
+            <a:ext cx="10033711" cy="587502"/>
           </a:xfrm>
           <a:prstGeom prst="rect">
             <a:avLst/>
@@ -11187,7 +11187,7 @@
               <a:buNone/>
             </a:pPr>
             <a:r>
-              <a:rPr lang="en-US" sz="900" dirty="0">
+              <a:rPr lang="en-US" sz="950" dirty="0">
                 <a:solidFill>
                   <a:srgbClr val="5F7183"/>
                 </a:solidFill>
@@ -11197,7 +11197,7 @@
               </a:rPr>
               <a:t>問4　誰に何分以内に報告するか</a:t>
             </a:r>
-            <a:endParaRPr lang="en-US" sz="900" dirty="0"/>
+            <a:endParaRPr lang="en-US" sz="950" dirty="0"/>
           </a:p>
           <a:p>
             <a:pPr indent="0" marL="0">
@@ -11217,7 +11217,7 @@
               </a:rPr>
               <a:t>警備責任者へ即時。品目、型番、時刻、会話をそのまま伝える。</a:t>
             </a:r>
-            <a:endParaRPr lang="en-US" sz="900" dirty="0"/>
+            <a:endParaRPr lang="en-US" sz="950" dirty="0"/>
           </a:p>
           <a:p>
             <a:pPr indent="0" marL="0">
@@ -11227,9 +11227,9 @@
               <a:buNone/>
             </a:pPr>
             <a:r>
-              <a:rPr lang="en-US" sz="800" i="1" dirty="0">
-                <a:solidFill>
-                  <a:srgbClr val="5F7183"/>
+              <a:rPr lang="en-US" sz="1100" dirty="0">
+                <a:solidFill>
+                  <a:srgbClr val="1B2733"/>
                 </a:solidFill>
                 <a:latin typeface="Calibri" pitchFamily="34" charset="0"/>
                 <a:ea typeface="Calibri" pitchFamily="34" charset="-122"/>
@@ -11237,7 +11237,7 @@
               </a:rPr>
               <a:t>The security supervisor, immediately: item, model, time, and what was said.</a:t>
             </a:r>
-            <a:endParaRPr lang="en-US" sz="900" dirty="0"/>
+            <a:endParaRPr lang="en-US" sz="950" dirty="0"/>
           </a:p>
         </p:txBody>
       </p:sp>
@@ -11249,7 +11249,7 @@
         </p:nvSpPr>
         <p:spPr>
           <a:xfrm>
-            <a:off x="640080" y="4334256"/>
+            <a:off x="640080" y="4389120"/>
             <a:ext cx="10911535" cy="420624"/>
           </a:xfrm>
           <a:prstGeom prst="roundRect">
@@ -11271,7 +11271,7 @@
         </p:nvSpPr>
         <p:spPr>
           <a:xfrm>
-            <a:off x="859536" y="4361688"/>
+            <a:off x="859536" y="4416552"/>
             <a:ext cx="10472623" cy="365760"/>
           </a:xfrm>
           <a:prstGeom prst="rect">
@@ -11345,9 +11345,9 @@
               <a:buNone/>
             </a:pPr>
             <a:r>
-              <a:rPr lang="en-US" sz="750" i="1" dirty="0">
-                <a:solidFill>
-                  <a:srgbClr val="5F7183"/>
+              <a:rPr lang="en-US" sz="950" dirty="0">
+                <a:solidFill>
+                  <a:srgbClr val="1B2733"/>
                 </a:solidFill>
                 <a:latin typeface="Calibri" pitchFamily="34" charset="0"/>
                 <a:ea typeface="Calibri" pitchFamily="34" charset="-122"/>
@@ -11367,7 +11367,7 @@
         </p:nvSpPr>
         <p:spPr>
           <a:xfrm>
-            <a:off x="640080" y="4828032"/>
+            <a:off x="640080" y="4882896"/>
             <a:ext cx="10911535" cy="420624"/>
           </a:xfrm>
           <a:prstGeom prst="roundRect">
@@ -11389,7 +11389,7 @@
         </p:nvSpPr>
         <p:spPr>
           <a:xfrm>
-            <a:off x="859536" y="4855464"/>
+            <a:off x="859536" y="4910328"/>
             <a:ext cx="10472623" cy="365760"/>
           </a:xfrm>
           <a:prstGeom prst="rect">
@@ -11463,9 +11463,9 @@
               <a:buNone/>
             </a:pPr>
             <a:r>
-              <a:rPr lang="en-US" sz="750" i="1" dirty="0">
-                <a:solidFill>
-                  <a:srgbClr val="5F7183"/>
+              <a:rPr lang="en-US" sz="950" dirty="0">
+                <a:solidFill>
+                  <a:srgbClr val="1B2733"/>
                 </a:solidFill>
                 <a:latin typeface="Calibri" pitchFamily="34" charset="0"/>
                 <a:ea typeface="Calibri" pitchFamily="34" charset="-122"/>
@@ -11485,7 +11485,7 @@
         </p:nvSpPr>
         <p:spPr>
           <a:xfrm>
-            <a:off x="640080" y="5358384"/>
+            <a:off x="640080" y="5413248"/>
             <a:ext cx="10911535" cy="457200"/>
           </a:xfrm>
           <a:prstGeom prst="roundRect">
@@ -11507,7 +11507,7 @@
         </p:nvSpPr>
         <p:spPr>
           <a:xfrm>
-            <a:off x="859536" y="5385816"/>
+            <a:off x="859536" y="5440680"/>
             <a:ext cx="10472623" cy="402336"/>
           </a:xfrm>
           <a:prstGeom prst="rect">
@@ -11564,9 +11564,9 @@
               <a:buNone/>
             </a:pPr>
             <a:r>
-              <a:rPr lang="en-US" sz="750" i="1" dirty="0">
-                <a:solidFill>
-                  <a:srgbClr val="9FD8CD"/>
+              <a:rPr lang="en-US" sz="950" dirty="0">
+                <a:solidFill>
+                  <a:srgbClr val="DCEFEB"/>
                 </a:solidFill>
                 <a:latin typeface="Calibri" pitchFamily="34" charset="0"/>
                 <a:ea typeface="Calibri" pitchFamily="34" charset="-122"/>
@@ -11586,8 +11586,8 @@
         </p:nvSpPr>
         <p:spPr>
           <a:xfrm>
-            <a:off x="640080" y="5907024"/>
-            <a:ext cx="10911535" cy="310896"/>
+            <a:off x="640080" y="5961888"/>
+            <a:ext cx="10911535" cy="292608"/>
           </a:xfrm>
           <a:prstGeom prst="rect">
             <a:avLst/>
@@ -11643,7 +11643,7 @@
               <a:buNone/>
             </a:pPr>
             <a:r>
-              <a:rPr lang="en-US" sz="750" i="1" dirty="0">
+              <a:rPr lang="en-US" sz="800" i="1" dirty="0">
                 <a:solidFill>
                   <a:srgbClr val="5F7183"/>
                 </a:solidFill>
@@ -11666,7 +11666,7 @@
         <p:spPr>
           <a:xfrm>
             <a:off x="640080" y="6272784"/>
-            <a:ext cx="9905695" cy="237744"/>
+            <a:ext cx="9905695" cy="219456"/>
           </a:xfrm>
           <a:prstGeom prst="rect">
             <a:avLst/>
@@ -11718,7 +11718,7 @@
         </p:nvSpPr>
         <p:spPr>
           <a:xfrm>
-            <a:off x="640080" y="6382512"/>
+            <a:off x="640080" y="6492240"/>
             <a:ext cx="8778240" cy="292608"/>
           </a:xfrm>
           <a:prstGeom prst="rect">
@@ -11771,7 +11771,7 @@
         </p:nvSpPr>
         <p:spPr>
           <a:xfrm>
-            <a:off x="10637215" y="6382512"/>
+            <a:off x="10637215" y="6492240"/>
             <a:ext cx="914400" cy="292608"/>
           </a:xfrm>
           <a:prstGeom prst="rect">
@@ -11866,8 +11866,8 @@
         </p:nvSpPr>
         <p:spPr>
           <a:xfrm>
-            <a:off x="640080" y="384048"/>
-            <a:ext cx="8982151" cy="768096"/>
+            <a:off x="640080" y="365760"/>
+            <a:ext cx="8982151" cy="749808"/>
           </a:xfrm>
           <a:prstGeom prst="rect">
             <a:avLst/>
@@ -11906,7 +11906,7 @@
               <a:buNone/>
             </a:pPr>
             <a:r>
-              <a:rPr lang="en-US" sz="1100" i="1" dirty="0">
+              <a:rPr lang="en-US" sz="1100" dirty="0">
                 <a:solidFill>
                   <a:srgbClr val="12B198"/>
                 </a:solidFill>
@@ -11928,7 +11928,7 @@
         </p:nvSpPr>
         <p:spPr>
           <a:xfrm>
-            <a:off x="9686239" y="438912"/>
+            <a:off x="9686239" y="420624"/>
             <a:ext cx="932688" cy="310896"/>
           </a:xfrm>
           <a:prstGeom prst="roundRect">
@@ -11950,7 +11950,7 @@
         </p:nvSpPr>
         <p:spPr>
           <a:xfrm>
-            <a:off x="9686239" y="438912"/>
+            <a:off x="9686239" y="420624"/>
             <a:ext cx="932688" cy="310896"/>
           </a:xfrm>
           <a:prstGeom prst="rect">
@@ -11989,7 +11989,7 @@
         </p:nvSpPr>
         <p:spPr>
           <a:xfrm>
-            <a:off x="640080" y="1188720"/>
+            <a:off x="640080" y="1115568"/>
             <a:ext cx="10911535" cy="1124712"/>
           </a:xfrm>
           <a:prstGeom prst="roundRect">
@@ -12011,7 +12011,7 @@
         </p:nvSpPr>
         <p:spPr>
           <a:xfrm>
-            <a:off x="950976" y="1316736"/>
+            <a:off x="950976" y="1243584"/>
             <a:ext cx="10289743" cy="868680"/>
           </a:xfrm>
           <a:prstGeom prst="rect">
@@ -12088,9 +12088,9 @@
               <a:buNone/>
             </a:pPr>
             <a:r>
-              <a:rPr lang="en-US" sz="800" i="1" dirty="0">
-                <a:solidFill>
-                  <a:srgbClr val="9FD8CD"/>
+              <a:rPr lang="en-US" sz="1000" dirty="0">
+                <a:solidFill>
+                  <a:srgbClr val="DCEFEB"/>
                 </a:solidFill>
                 <a:latin typeface="Calibri" pitchFamily="34" charset="0"/>
                 <a:ea typeface="Calibri" pitchFamily="34" charset="-122"/>
@@ -12110,7 +12110,7 @@
         </p:nvSpPr>
         <p:spPr>
           <a:xfrm>
-            <a:off x="640080" y="2459736"/>
+            <a:off x="640080" y="2386584"/>
             <a:ext cx="10911535" cy="566928"/>
           </a:xfrm>
           <a:prstGeom prst="rect">
@@ -12167,9 +12167,9 @@
               <a:buNone/>
             </a:pPr>
             <a:r>
-              <a:rPr lang="en-US" sz="850" i="1" dirty="0">
-                <a:solidFill>
-                  <a:srgbClr val="5F7183"/>
+              <a:rPr lang="en-US" sz="1050" dirty="0">
+                <a:solidFill>
+                  <a:srgbClr val="1B2733"/>
                 </a:solidFill>
                 <a:latin typeface="Calibri" pitchFamily="34" charset="0"/>
                 <a:ea typeface="Calibri" pitchFamily="34" charset="-122"/>
@@ -12189,12 +12189,12 @@
         </p:nvSpPr>
         <p:spPr>
           <a:xfrm>
-            <a:off x="640080" y="3081528"/>
-            <a:ext cx="5327752" cy="836676"/>
+            <a:off x="640080" y="3008376"/>
+            <a:ext cx="5327752" cy="900684"/>
           </a:xfrm>
           <a:prstGeom prst="roundRect">
             <a:avLst>
-              <a:gd name="adj" fmla="val 4372"/>
+              <a:gd name="adj" fmla="val 4061"/>
             </a:avLst>
           </a:prstGeom>
           <a:solidFill>
@@ -12211,7 +12211,7 @@
         </p:nvSpPr>
         <p:spPr>
           <a:xfrm>
-            <a:off x="804672" y="3353562"/>
+            <a:off x="804672" y="3312414"/>
             <a:ext cx="292608" cy="292608"/>
           </a:xfrm>
           <a:prstGeom prst="ellipse">
@@ -12231,7 +12231,7 @@
         </p:nvSpPr>
         <p:spPr>
           <a:xfrm>
-            <a:off x="804672" y="3353562"/>
+            <a:off x="804672" y="3312414"/>
             <a:ext cx="292608" cy="292608"/>
           </a:xfrm>
           <a:prstGeom prst="rect">
@@ -12270,8 +12270,8 @@
         </p:nvSpPr>
         <p:spPr>
           <a:xfrm>
-            <a:off x="1188720" y="3136392"/>
-            <a:ext cx="4596232" cy="726948"/>
+            <a:off x="1188720" y="3063240"/>
+            <a:ext cx="4596232" cy="790956"/>
           </a:xfrm>
           <a:prstGeom prst="rect">
             <a:avLst/>
@@ -12310,9 +12310,9 @@
               <a:buNone/>
             </a:pPr>
             <a:r>
-              <a:rPr lang="en-US" sz="800" i="1" dirty="0">
-                <a:solidFill>
-                  <a:srgbClr val="5F7183"/>
+              <a:rPr lang="en-US" sz="1050" dirty="0">
+                <a:solidFill>
+                  <a:srgbClr val="1B2733"/>
                 </a:solidFill>
                 <a:latin typeface="Calibri" pitchFamily="34" charset="0"/>
                 <a:ea typeface="Calibri" pitchFamily="34" charset="-122"/>
@@ -12332,12 +12332,12 @@
         </p:nvSpPr>
         <p:spPr>
           <a:xfrm>
-            <a:off x="6223864" y="3081528"/>
-            <a:ext cx="5327752" cy="836676"/>
+            <a:off x="6223864" y="3008376"/>
+            <a:ext cx="5327752" cy="900684"/>
           </a:xfrm>
           <a:prstGeom prst="roundRect">
             <a:avLst>
-              <a:gd name="adj" fmla="val 4372"/>
+              <a:gd name="adj" fmla="val 4061"/>
             </a:avLst>
           </a:prstGeom>
           <a:solidFill>
@@ -12354,7 +12354,7 @@
         </p:nvSpPr>
         <p:spPr>
           <a:xfrm>
-            <a:off x="6388456" y="3353562"/>
+            <a:off x="6388456" y="3312414"/>
             <a:ext cx="292608" cy="292608"/>
           </a:xfrm>
           <a:prstGeom prst="ellipse">
@@ -12374,7 +12374,7 @@
         </p:nvSpPr>
         <p:spPr>
           <a:xfrm>
-            <a:off x="6388456" y="3353562"/>
+            <a:off x="6388456" y="3312414"/>
             <a:ext cx="292608" cy="292608"/>
           </a:xfrm>
           <a:prstGeom prst="rect">
@@ -12413,8 +12413,8 @@
         </p:nvSpPr>
         <p:spPr>
           <a:xfrm>
-            <a:off x="6772504" y="3136392"/>
-            <a:ext cx="4596232" cy="726948"/>
+            <a:off x="6772504" y="3063240"/>
+            <a:ext cx="4596232" cy="790956"/>
           </a:xfrm>
           <a:prstGeom prst="rect">
             <a:avLst/>
@@ -12453,9 +12453,9 @@
               <a:buNone/>
             </a:pPr>
             <a:r>
-              <a:rPr lang="en-US" sz="800" i="1" dirty="0">
-                <a:solidFill>
-                  <a:srgbClr val="5F7183"/>
+              <a:rPr lang="en-US" sz="1050" dirty="0">
+                <a:solidFill>
+                  <a:srgbClr val="1B2733"/>
                 </a:solidFill>
                 <a:latin typeface="Calibri" pitchFamily="34" charset="0"/>
                 <a:ea typeface="Calibri" pitchFamily="34" charset="-122"/>
@@ -12475,12 +12475,12 @@
         </p:nvSpPr>
         <p:spPr>
           <a:xfrm>
-            <a:off x="640080" y="4027932"/>
-            <a:ext cx="5327752" cy="836676"/>
+            <a:off x="640080" y="4018788"/>
+            <a:ext cx="5327752" cy="900684"/>
           </a:xfrm>
           <a:prstGeom prst="roundRect">
             <a:avLst>
-              <a:gd name="adj" fmla="val 4372"/>
+              <a:gd name="adj" fmla="val 4061"/>
             </a:avLst>
           </a:prstGeom>
           <a:solidFill>
@@ -12497,7 +12497,7 @@
         </p:nvSpPr>
         <p:spPr>
           <a:xfrm>
-            <a:off x="804672" y="4299966"/>
+            <a:off x="804672" y="4322826"/>
             <a:ext cx="292608" cy="292608"/>
           </a:xfrm>
           <a:prstGeom prst="ellipse">
@@ -12517,7 +12517,7 @@
         </p:nvSpPr>
         <p:spPr>
           <a:xfrm>
-            <a:off x="804672" y="4299966"/>
+            <a:off x="804672" y="4322826"/>
             <a:ext cx="292608" cy="292608"/>
           </a:xfrm>
           <a:prstGeom prst="rect">
@@ -12556,8 +12556,8 @@
         </p:nvSpPr>
         <p:spPr>
           <a:xfrm>
-            <a:off x="1188720" y="4082796"/>
-            <a:ext cx="4596232" cy="726948"/>
+            <a:off x="1188720" y="4073652"/>
+            <a:ext cx="4596232" cy="790956"/>
           </a:xfrm>
           <a:prstGeom prst="rect">
             <a:avLst/>
@@ -12596,9 +12596,9 @@
               <a:buNone/>
             </a:pPr>
             <a:r>
-              <a:rPr lang="en-US" sz="800" i="1" dirty="0">
-                <a:solidFill>
-                  <a:srgbClr val="5F7183"/>
+              <a:rPr lang="en-US" sz="1050" dirty="0">
+                <a:solidFill>
+                  <a:srgbClr val="1B2733"/>
                 </a:solidFill>
                 <a:latin typeface="Calibri" pitchFamily="34" charset="0"/>
                 <a:ea typeface="Calibri" pitchFamily="34" charset="-122"/>
@@ -12618,12 +12618,12 @@
         </p:nvSpPr>
         <p:spPr>
           <a:xfrm>
-            <a:off x="6223864" y="4027932"/>
-            <a:ext cx="5327752" cy="836676"/>
+            <a:off x="6223864" y="4018788"/>
+            <a:ext cx="5327752" cy="900684"/>
           </a:xfrm>
           <a:prstGeom prst="roundRect">
             <a:avLst>
-              <a:gd name="adj" fmla="val 4372"/>
+              <a:gd name="adj" fmla="val 4061"/>
             </a:avLst>
           </a:prstGeom>
           <a:solidFill>
@@ -12640,7 +12640,7 @@
         </p:nvSpPr>
         <p:spPr>
           <a:xfrm>
-            <a:off x="6388456" y="4299966"/>
+            <a:off x="6388456" y="4322826"/>
             <a:ext cx="292608" cy="292608"/>
           </a:xfrm>
           <a:prstGeom prst="ellipse">
@@ -12660,7 +12660,7 @@
         </p:nvSpPr>
         <p:spPr>
           <a:xfrm>
-            <a:off x="6388456" y="4299966"/>
+            <a:off x="6388456" y="4322826"/>
             <a:ext cx="292608" cy="292608"/>
           </a:xfrm>
           <a:prstGeom prst="rect">
@@ -12699,8 +12699,8 @@
         </p:nvSpPr>
         <p:spPr>
           <a:xfrm>
-            <a:off x="6772504" y="4082796"/>
-            <a:ext cx="4596232" cy="726948"/>
+            <a:off x="6772504" y="4073652"/>
+            <a:ext cx="4596232" cy="790956"/>
           </a:xfrm>
           <a:prstGeom prst="rect">
             <a:avLst/>
@@ -12739,9 +12739,9 @@
               <a:buNone/>
             </a:pPr>
             <a:r>
-              <a:rPr lang="en-US" sz="800" i="1" dirty="0">
-                <a:solidFill>
-                  <a:srgbClr val="5F7183"/>
+              <a:rPr lang="en-US" sz="1050" dirty="0">
+                <a:solidFill>
+                  <a:srgbClr val="1B2733"/>
                 </a:solidFill>
                 <a:latin typeface="Calibri" pitchFamily="34" charset="0"/>
                 <a:ea typeface="Calibri" pitchFamily="34" charset="-122"/>
@@ -12761,7 +12761,7 @@
         </p:nvSpPr>
         <p:spPr>
           <a:xfrm>
-            <a:off x="640080" y="4919472"/>
+            <a:off x="640080" y="4974336"/>
             <a:ext cx="10911535" cy="420624"/>
           </a:xfrm>
           <a:prstGeom prst="roundRect">
@@ -12783,7 +12783,7 @@
         </p:nvSpPr>
         <p:spPr>
           <a:xfrm>
-            <a:off x="877824" y="4946904"/>
+            <a:off x="877824" y="5001768"/>
             <a:ext cx="10436047" cy="365760"/>
           </a:xfrm>
           <a:prstGeom prst="rect">
@@ -12840,9 +12840,9 @@
               <a:buNone/>
             </a:pPr>
             <a:r>
-              <a:rPr lang="en-US" sz="750" i="1" dirty="0">
-                <a:solidFill>
-                  <a:srgbClr val="5F7183"/>
+              <a:rPr lang="en-US" sz="950" dirty="0">
+                <a:solidFill>
+                  <a:srgbClr val="1B2733"/>
                 </a:solidFill>
                 <a:latin typeface="Calibri" pitchFamily="34" charset="0"/>
                 <a:ea typeface="Calibri" pitchFamily="34" charset="-122"/>
@@ -12862,7 +12862,7 @@
         </p:nvSpPr>
         <p:spPr>
           <a:xfrm>
-            <a:off x="640080" y="5394960"/>
+            <a:off x="640080" y="5449824"/>
             <a:ext cx="10911535" cy="420624"/>
           </a:xfrm>
           <a:prstGeom prst="roundRect">
@@ -12884,7 +12884,7 @@
         </p:nvSpPr>
         <p:spPr>
           <a:xfrm>
-            <a:off x="877824" y="5422392"/>
+            <a:off x="877824" y="5477256"/>
             <a:ext cx="10436047" cy="365760"/>
           </a:xfrm>
           <a:prstGeom prst="rect">
@@ -12941,7 +12941,86 @@
               <a:buNone/>
             </a:pPr>
             <a:r>
-              <a:rPr lang="en-US" sz="750" i="1" dirty="0">
+              <a:rPr lang="en-US" sz="950" dirty="0">
+                <a:solidFill>
+                  <a:srgbClr val="1B2733"/>
+                </a:solidFill>
+                <a:latin typeface="Calibri" pitchFamily="34" charset="0"/>
+                <a:ea typeface="Calibri" pitchFamily="34" charset="-122"/>
+                <a:cs typeface="Calibri" pitchFamily="34" charset="-120"/>
+              </a:rPr>
+              <a:t>They say: "Then do not show me the list. Just tell me whether a certain name appears."</a:t>
+            </a:r>
+            <a:endParaRPr lang="en-US" sz="850" dirty="0"/>
+          </a:p>
+        </p:txBody>
+      </p:sp>
+      <p:sp>
+        <p:nvSpPr>
+          <p:cNvPr id="29" name="Text 26"/>
+          <p:cNvSpPr/>
+          <p:nvPr/>
+        </p:nvSpPr>
+        <p:spPr>
+          <a:xfrm>
+            <a:off x="640080" y="5961888"/>
+            <a:ext cx="10911535" cy="292608"/>
+          </a:xfrm>
+          <a:prstGeom prst="rect">
+            <a:avLst/>
+          </a:prstGeom>
+          <a:noFill/>
+          <a:ln/>
+        </p:spPr>
+        <p:txBody>
+          <a:bodyPr wrap="square" lIns="0" tIns="0" rIns="0" bIns="0" rtlCol="0" anchor="t"/>
+          <a:lstStyle/>
+          <a:p>
+            <a:pPr indent="0" marL="0">
+              <a:lnSpc>
+                <a:spcPct val="88000"/>
+              </a:lnSpc>
+              <a:buNone/>
+            </a:pPr>
+            <a:r>
+              <a:rPr lang="en-US" sz="900" b="1" dirty="0">
+                <a:solidFill>
+                  <a:srgbClr val="0D8A76"/>
+                </a:solidFill>
+                <a:latin typeface="Yu Gothic" pitchFamily="34" charset="0"/>
+                <a:ea typeface="Yu Gothic" pitchFamily="34" charset="-122"/>
+                <a:cs typeface="Yu Gothic" pitchFamily="34" charset="-120"/>
+              </a:rPr>
+              <a:t>Site SOP優先　</a:t>
+            </a:r>
+            <a:pPr indent="0" marL="0">
+              <a:lnSpc>
+                <a:spcPct val="88000"/>
+              </a:lnSpc>
+              <a:buNone/>
+            </a:pPr>
+            <a:r>
+              <a:rPr lang="en-US" sz="900" dirty="0">
+                <a:solidFill>
+                  <a:srgbClr val="1B2733"/>
+                </a:solidFill>
+                <a:latin typeface="Yu Gothic" pitchFamily="34" charset="0"/>
+                <a:ea typeface="Yu Gothic" pitchFamily="34" charset="-122"/>
+                <a:cs typeface="Yu Gothic" pitchFamily="34" charset="-120"/>
+              </a:rPr>
+              <a:t>捜査関係事項照会への対応は、クライアントと自社の法務が決める。警備員は取り次ぐ。</a:t>
+            </a:r>
+            <a:endParaRPr lang="en-US" sz="900" dirty="0"/>
+          </a:p>
+          <a:p>
+            <a:pPr indent="0" marL="0">
+              <a:lnSpc>
+                <a:spcPct val="88000"/>
+              </a:lnSpc>
+              <a:buNone/>
+            </a:pPr>
+            <a:r>
+              <a:rPr lang="en-US" sz="800" i="1" dirty="0">
                 <a:solidFill>
                   <a:srgbClr val="5F7183"/>
                 </a:solidFill>
@@ -12949,22 +13028,22 @@
                 <a:ea typeface="Calibri" pitchFamily="34" charset="-122"/>
                 <a:cs typeface="Calibri" pitchFamily="34" charset="-120"/>
               </a:rPr>
-              <a:t>They say: "Then do not show me the list. Just tell me whether a certain name appears."</a:t>
-            </a:r>
-            <a:endParaRPr lang="en-US" sz="850" dirty="0"/>
-          </a:p>
-        </p:txBody>
-      </p:sp>
-      <p:sp>
-        <p:nvSpPr>
-          <p:cNvPr id="29" name="Text 26"/>
-          <p:cNvSpPr/>
-          <p:nvPr/>
-        </p:nvSpPr>
-        <p:spPr>
-          <a:xfrm>
-            <a:off x="640080" y="5907024"/>
-            <a:ext cx="10911535" cy="310896"/>
+              <a:t>Responses to investigative enquiries are decided by the client and legal. The guard refers, and does not decide.</a:t>
+            </a:r>
+            <a:endParaRPr lang="en-US" sz="900" dirty="0"/>
+          </a:p>
+        </p:txBody>
+      </p:sp>
+      <p:sp>
+        <p:nvSpPr>
+          <p:cNvPr id="30" name="Text 27"/>
+          <p:cNvSpPr/>
+          <p:nvPr/>
+        </p:nvSpPr>
+        <p:spPr>
+          <a:xfrm>
+            <a:off x="640080" y="6272784"/>
+            <a:ext cx="9905695" cy="219456"/>
           </a:xfrm>
           <a:prstGeom prst="rect">
             <a:avLst/>
@@ -12977,167 +13056,88 @@
           <a:lstStyle/>
           <a:p>
             <a:pPr indent="0" marL="0">
-              <a:lnSpc>
-                <a:spcPct val="88000"/>
-              </a:lnSpc>
-              <a:buNone/>
-            </a:pPr>
-            <a:r>
-              <a:rPr lang="en-US" sz="900" b="1" dirty="0">
-                <a:solidFill>
-                  <a:srgbClr val="0D8A76"/>
-                </a:solidFill>
-                <a:latin typeface="Yu Gothic" pitchFamily="34" charset="0"/>
-                <a:ea typeface="Yu Gothic" pitchFamily="34" charset="-122"/>
-                <a:cs typeface="Yu Gothic" pitchFamily="34" charset="-120"/>
-              </a:rPr>
-              <a:t>Site SOP優先　</a:t>
-            </a:r>
-            <a:pPr indent="0" marL="0">
-              <a:lnSpc>
-                <a:spcPct val="88000"/>
-              </a:lnSpc>
+              <a:buNone/>
+            </a:pPr>
+            <a:r>
+              <a:rPr lang="en-US" sz="750" b="1" dirty="0">
+                <a:solidFill>
+                  <a:srgbClr val="D6E0E9"/>
+                </a:solidFill>
+                <a:latin typeface="Yu Gothic" pitchFamily="34" charset="0"/>
+                <a:ea typeface="Yu Gothic" pitchFamily="34" charset="-122"/>
+                <a:cs typeface="Yu Gothic" pitchFamily="34" charset="-120"/>
+              </a:rPr>
+              <a:t>ソース　</a:t>
+            </a:r>
+            <a:pPr indent="0" marL="0">
+              <a:buNone/>
+            </a:pPr>
+            <a:r>
+              <a:rPr lang="en-US" sz="750" dirty="0">
+                <a:solidFill>
+                  <a:srgbClr val="5F7183"/>
+                </a:solidFill>
+                <a:latin typeface="Yu Gothic" pitchFamily="34" charset="0"/>
+                <a:ea typeface="Yu Gothic" pitchFamily="34" charset="-122"/>
+                <a:cs typeface="Yu Gothic" pitchFamily="34" charset="-120"/>
+              </a:rPr>
+              <a:t>個人情報保護法、不正競争防止法、経済産業省「営業秘密管理指針」</a:t>
+            </a:r>
+            <a:endParaRPr lang="en-US" sz="750" dirty="0"/>
+          </a:p>
+        </p:txBody>
+      </p:sp>
+      <p:sp>
+        <p:nvSpPr>
+          <p:cNvPr id="31" name="Text 28"/>
+          <p:cNvSpPr/>
+          <p:nvPr/>
+        </p:nvSpPr>
+        <p:spPr>
+          <a:xfrm>
+            <a:off x="640080" y="6492240"/>
+            <a:ext cx="8778240" cy="292608"/>
+          </a:xfrm>
+          <a:prstGeom prst="rect">
+            <a:avLst/>
+          </a:prstGeom>
+          <a:noFill/>
+          <a:ln/>
+        </p:spPr>
+        <p:txBody>
+          <a:bodyPr wrap="square" lIns="0" tIns="0" rIns="0" bIns="0" rtlCol="0" anchor="ctr"/>
+          <a:lstStyle/>
+          <a:p>
+            <a:pPr indent="0" marL="0">
               <a:buNone/>
             </a:pPr>
             <a:r>
               <a:rPr lang="en-US" sz="900" dirty="0">
                 <a:solidFill>
-                  <a:srgbClr val="1B2733"/>
-                </a:solidFill>
-                <a:latin typeface="Yu Gothic" pitchFamily="34" charset="0"/>
-                <a:ea typeface="Yu Gothic" pitchFamily="34" charset="-122"/>
-                <a:cs typeface="Yu Gothic" pitchFamily="34" charset="-120"/>
-              </a:rPr>
-              <a:t>捜査関係事項照会への対応は、クライアントと自社の法務が決める。警備員は取り次ぐ。</a:t>
+                  <a:srgbClr val="5F7183"/>
+                </a:solidFill>
+                <a:latin typeface="Yu Gothic" pitchFamily="34" charset="0"/>
+                <a:ea typeface="Yu Gothic" pitchFamily="34" charset="-122"/>
+                <a:cs typeface="Yu Gothic" pitchFamily="34" charset="-120"/>
+              </a:rPr>
+              <a:t>第2時限｜基本教育2 警備業法その他警備業務の適正な実施に必要な法令  </a:t>
+            </a:r>
+            <a:pPr indent="0" marL="0">
+              <a:buNone/>
+            </a:pPr>
+            <a:r>
+              <a:rPr lang="en-US" sz="850" i="1" dirty="0">
+                <a:solidFill>
+                  <a:srgbClr val="D6E0E9"/>
+                </a:solidFill>
+                <a:latin typeface="Calibri" pitchFamily="34" charset="0"/>
+                <a:ea typeface="Calibri" pitchFamily="34" charset="-122"/>
+                <a:cs typeface="Calibri" pitchFamily="34" charset="-120"/>
+              </a:rPr>
+              <a:t>Period 2 | Basic Training 2 — Applicable Law</a:t>
             </a:r>
             <a:endParaRPr lang="en-US" sz="900" dirty="0"/>
           </a:p>
-          <a:p>
-            <a:pPr indent="0" marL="0">
-              <a:lnSpc>
-                <a:spcPct val="88000"/>
-              </a:lnSpc>
-              <a:buNone/>
-            </a:pPr>
-            <a:r>
-              <a:rPr lang="en-US" sz="750" i="1" dirty="0">
-                <a:solidFill>
-                  <a:srgbClr val="5F7183"/>
-                </a:solidFill>
-                <a:latin typeface="Calibri" pitchFamily="34" charset="0"/>
-                <a:ea typeface="Calibri" pitchFamily="34" charset="-122"/>
-                <a:cs typeface="Calibri" pitchFamily="34" charset="-120"/>
-              </a:rPr>
-              <a:t>Responses to investigative enquiries are decided by the client and legal. The guard refers, and does not decide.</a:t>
-            </a:r>
-            <a:endParaRPr lang="en-US" sz="900" dirty="0"/>
-          </a:p>
-        </p:txBody>
-      </p:sp>
-      <p:sp>
-        <p:nvSpPr>
-          <p:cNvPr id="30" name="Text 27"/>
-          <p:cNvSpPr/>
-          <p:nvPr/>
-        </p:nvSpPr>
-        <p:spPr>
-          <a:xfrm>
-            <a:off x="640080" y="6272784"/>
-            <a:ext cx="9905695" cy="237744"/>
-          </a:xfrm>
-          <a:prstGeom prst="rect">
-            <a:avLst/>
-          </a:prstGeom>
-          <a:noFill/>
-          <a:ln/>
-        </p:spPr>
-        <p:txBody>
-          <a:bodyPr wrap="square" lIns="0" tIns="0" rIns="0" bIns="0" rtlCol="0" anchor="t"/>
-          <a:lstStyle/>
-          <a:p>
-            <a:pPr indent="0" marL="0">
-              <a:buNone/>
-            </a:pPr>
-            <a:r>
-              <a:rPr lang="en-US" sz="750" b="1" dirty="0">
-                <a:solidFill>
-                  <a:srgbClr val="D6E0E9"/>
-                </a:solidFill>
-                <a:latin typeface="Yu Gothic" pitchFamily="34" charset="0"/>
-                <a:ea typeface="Yu Gothic" pitchFamily="34" charset="-122"/>
-                <a:cs typeface="Yu Gothic" pitchFamily="34" charset="-120"/>
-              </a:rPr>
-              <a:t>ソース　</a:t>
-            </a:r>
-            <a:pPr indent="0" marL="0">
-              <a:buNone/>
-            </a:pPr>
-            <a:r>
-              <a:rPr lang="en-US" sz="750" dirty="0">
-                <a:solidFill>
-                  <a:srgbClr val="5F7183"/>
-                </a:solidFill>
-                <a:latin typeface="Yu Gothic" pitchFamily="34" charset="0"/>
-                <a:ea typeface="Yu Gothic" pitchFamily="34" charset="-122"/>
-                <a:cs typeface="Yu Gothic" pitchFamily="34" charset="-120"/>
-              </a:rPr>
-              <a:t>個人情報保護法、不正競争防止法、経済産業省「営業秘密管理指針」</a:t>
-            </a:r>
-            <a:endParaRPr lang="en-US" sz="750" dirty="0"/>
-          </a:p>
-        </p:txBody>
-      </p:sp>
-      <p:sp>
-        <p:nvSpPr>
-          <p:cNvPr id="31" name="Text 28"/>
-          <p:cNvSpPr/>
-          <p:nvPr/>
-        </p:nvSpPr>
-        <p:spPr>
-          <a:xfrm>
-            <a:off x="640080" y="6382512"/>
-            <a:ext cx="8778240" cy="292608"/>
-          </a:xfrm>
-          <a:prstGeom prst="rect">
-            <a:avLst/>
-          </a:prstGeom>
-          <a:noFill/>
-          <a:ln/>
-        </p:spPr>
-        <p:txBody>
-          <a:bodyPr wrap="square" lIns="0" tIns="0" rIns="0" bIns="0" rtlCol="0" anchor="ctr"/>
-          <a:lstStyle/>
-          <a:p>
-            <a:pPr indent="0" marL="0">
-              <a:buNone/>
-            </a:pPr>
-            <a:r>
-              <a:rPr lang="en-US" sz="900" dirty="0">
-                <a:solidFill>
-                  <a:srgbClr val="5F7183"/>
-                </a:solidFill>
-                <a:latin typeface="Yu Gothic" pitchFamily="34" charset="0"/>
-                <a:ea typeface="Yu Gothic" pitchFamily="34" charset="-122"/>
-                <a:cs typeface="Yu Gothic" pitchFamily="34" charset="-120"/>
-              </a:rPr>
-              <a:t>第2時限｜基本教育2 警備業法その他警備業務の適正な実施に必要な法令  </a:t>
-            </a:r>
-            <a:pPr indent="0" marL="0">
-              <a:buNone/>
-            </a:pPr>
-            <a:r>
-              <a:rPr lang="en-US" sz="850" i="1" dirty="0">
-                <a:solidFill>
-                  <a:srgbClr val="D6E0E9"/>
-                </a:solidFill>
-                <a:latin typeface="Calibri" pitchFamily="34" charset="0"/>
-                <a:ea typeface="Calibri" pitchFamily="34" charset="-122"/>
-                <a:cs typeface="Calibri" pitchFamily="34" charset="-120"/>
-              </a:rPr>
-              <a:t>Period 2 | Basic Training 2 — Applicable Law</a:t>
-            </a:r>
-            <a:endParaRPr lang="en-US" sz="900" dirty="0"/>
-          </a:p>
         </p:txBody>
       </p:sp>
       <p:sp>
@@ -13148,7 +13148,7 @@
         </p:nvSpPr>
         <p:spPr>
           <a:xfrm>
-            <a:off x="10637215" y="6382512"/>
+            <a:off x="10637215" y="6492240"/>
             <a:ext cx="914400" cy="292608"/>
           </a:xfrm>
           <a:prstGeom prst="rect">
@@ -13243,8 +13243,8 @@
         </p:nvSpPr>
         <p:spPr>
           <a:xfrm>
-            <a:off x="640080" y="384048"/>
-            <a:ext cx="8982151" cy="768096"/>
+            <a:off x="640080" y="365760"/>
+            <a:ext cx="8982151" cy="749808"/>
           </a:xfrm>
           <a:prstGeom prst="rect">
             <a:avLst/>
@@ -13283,7 +13283,7 @@
               <a:buNone/>
             </a:pPr>
             <a:r>
-              <a:rPr lang="en-US" sz="1100" i="1" dirty="0">
+              <a:rPr lang="en-US" sz="1100" dirty="0">
                 <a:solidFill>
                   <a:srgbClr val="12B198"/>
                 </a:solidFill>
@@ -13305,7 +13305,7 @@
         </p:nvSpPr>
         <p:spPr>
           <a:xfrm>
-            <a:off x="9686239" y="438912"/>
+            <a:off x="9686239" y="420624"/>
             <a:ext cx="932688" cy="310896"/>
           </a:xfrm>
           <a:prstGeom prst="roundRect">
@@ -13327,7 +13327,7 @@
         </p:nvSpPr>
         <p:spPr>
           <a:xfrm>
-            <a:off x="9686239" y="438912"/>
+            <a:off x="9686239" y="420624"/>
             <a:ext cx="932688" cy="310896"/>
           </a:xfrm>
           <a:prstGeom prst="rect">
@@ -13366,12 +13366,12 @@
         </p:nvSpPr>
         <p:spPr>
           <a:xfrm>
-            <a:off x="640080" y="1188720"/>
-            <a:ext cx="10911535" cy="825246"/>
+            <a:off x="640080" y="1115568"/>
+            <a:ext cx="10911535" cy="857250"/>
           </a:xfrm>
           <a:prstGeom prst="roundRect">
             <a:avLst>
-              <a:gd name="adj" fmla="val 4432"/>
+              <a:gd name="adj" fmla="val 4267"/>
             </a:avLst>
           </a:prstGeom>
           <a:solidFill>
@@ -13388,7 +13388,7 @@
         </p:nvSpPr>
         <p:spPr>
           <a:xfrm>
-            <a:off x="841248" y="1427607"/>
+            <a:off x="841248" y="1370457"/>
             <a:ext cx="347472" cy="347472"/>
           </a:xfrm>
           <a:prstGeom prst="ellipse">
@@ -13408,7 +13408,7 @@
         </p:nvSpPr>
         <p:spPr>
           <a:xfrm>
-            <a:off x="841248" y="1427607"/>
+            <a:off x="841248" y="1370457"/>
             <a:ext cx="347472" cy="347472"/>
           </a:xfrm>
           <a:prstGeom prst="rect">
@@ -13447,8 +13447,8 @@
         </p:nvSpPr>
         <p:spPr>
           <a:xfrm>
-            <a:off x="1280160" y="1252728"/>
-            <a:ext cx="10033711" cy="697230"/>
+            <a:off x="1280160" y="1179576"/>
+            <a:ext cx="10033711" cy="729234"/>
           </a:xfrm>
           <a:prstGeom prst="rect">
             <a:avLst/>
@@ -13467,7 +13467,7 @@
               <a:buNone/>
             </a:pPr>
             <a:r>
-              <a:rPr lang="en-US" sz="900" dirty="0">
+              <a:rPr lang="en-US" sz="950" dirty="0">
                 <a:solidFill>
                   <a:srgbClr val="5F7183"/>
                 </a:solidFill>
@@ -13477,7 +13477,7 @@
               </a:rPr>
               <a:t>問1　警察官であることは根拠になるか</a:t>
             </a:r>
-            <a:endParaRPr lang="en-US" sz="900" dirty="0"/>
+            <a:endParaRPr lang="en-US" sz="950" dirty="0"/>
           </a:p>
           <a:p>
             <a:pPr indent="0" marL="0">
@@ -13497,7 +13497,7 @@
               </a:rPr>
               <a:t>ならない。情報の管理権はクライアントにある。警察官であることは開示の根拠ではない。</a:t>
             </a:r>
-            <a:endParaRPr lang="en-US" sz="900" dirty="0"/>
+            <a:endParaRPr lang="en-US" sz="950" dirty="0"/>
           </a:p>
           <a:p>
             <a:pPr indent="0" marL="0">
@@ -13507,9 +13507,9 @@
               <a:buNone/>
             </a:pPr>
             <a:r>
-              <a:rPr lang="en-US" sz="800" i="1" dirty="0">
-                <a:solidFill>
-                  <a:srgbClr val="5F7183"/>
+              <a:rPr lang="en-US" sz="1100" dirty="0">
+                <a:solidFill>
+                  <a:srgbClr val="1B2733"/>
                 </a:solidFill>
                 <a:latin typeface="Calibri" pitchFamily="34" charset="0"/>
                 <a:ea typeface="Calibri" pitchFamily="34" charset="-122"/>
@@ -13517,7 +13517,7 @@
               </a:rPr>
               <a:t>No. The client controls the information. Being a police officer is not a basis for disclosure.</a:t>
             </a:r>
-            <a:endParaRPr lang="en-US" sz="900" dirty="0"/>
+            <a:endParaRPr lang="en-US" sz="950" dirty="0"/>
           </a:p>
         </p:txBody>
       </p:sp>
@@ -13529,12 +13529,12 @@
         </p:nvSpPr>
         <p:spPr>
           <a:xfrm>
-            <a:off x="640080" y="2114550"/>
-            <a:ext cx="10911535" cy="825246"/>
+            <a:off x="640080" y="2073402"/>
+            <a:ext cx="10911535" cy="857250"/>
           </a:xfrm>
           <a:prstGeom prst="roundRect">
             <a:avLst>
-              <a:gd name="adj" fmla="val 4432"/>
+              <a:gd name="adj" fmla="val 4267"/>
             </a:avLst>
           </a:prstGeom>
           <a:solidFill>
@@ -13551,7 +13551,7 @@
         </p:nvSpPr>
         <p:spPr>
           <a:xfrm>
-            <a:off x="841248" y="2353437"/>
+            <a:off x="841248" y="2328291"/>
             <a:ext cx="347472" cy="347472"/>
           </a:xfrm>
           <a:prstGeom prst="ellipse">
@@ -13571,7 +13571,7 @@
         </p:nvSpPr>
         <p:spPr>
           <a:xfrm>
-            <a:off x="841248" y="2353437"/>
+            <a:off x="841248" y="2328291"/>
             <a:ext cx="347472" cy="347472"/>
           </a:xfrm>
           <a:prstGeom prst="rect">
@@ -13610,8 +13610,8 @@
         </p:nvSpPr>
         <p:spPr>
           <a:xfrm>
-            <a:off x="1280160" y="2178558"/>
-            <a:ext cx="10033711" cy="697230"/>
+            <a:off x="1280160" y="2137410"/>
+            <a:ext cx="10033711" cy="729234"/>
           </a:xfrm>
           <a:prstGeom prst="rect">
             <a:avLst/>
@@ -13630,7 +13630,7 @@
               <a:buNone/>
             </a:pPr>
             <a:r>
-              <a:rPr lang="en-US" sz="900" dirty="0">
+              <a:rPr lang="en-US" sz="950" dirty="0">
                 <a:solidFill>
                   <a:srgbClr val="5F7183"/>
                 </a:solidFill>
@@ -13640,7 +13640,7 @@
               </a:rPr>
               <a:t>問2　警備員に判断する権限はあるか</a:t>
             </a:r>
-            <a:endParaRPr lang="en-US" sz="900" dirty="0"/>
+            <a:endParaRPr lang="en-US" sz="950" dirty="0"/>
           </a:p>
           <a:p>
             <a:pPr indent="0" marL="0">
@@ -13660,7 +13660,7 @@
               </a:rPr>
               <a:t>ない。取り次ぐところまでが役割。開示の可否は契約とクライアントが決める。</a:t>
             </a:r>
-            <a:endParaRPr lang="en-US" sz="900" dirty="0"/>
+            <a:endParaRPr lang="en-US" sz="950" dirty="0"/>
           </a:p>
           <a:p>
             <a:pPr indent="0" marL="0">
@@ -13670,9 +13670,9 @@
               <a:buNone/>
             </a:pPr>
             <a:r>
-              <a:rPr lang="en-US" sz="800" i="1" dirty="0">
-                <a:solidFill>
-                  <a:srgbClr val="5F7183"/>
+              <a:rPr lang="en-US" sz="1100" dirty="0">
+                <a:solidFill>
+                  <a:srgbClr val="1B2733"/>
                 </a:solidFill>
                 <a:latin typeface="Calibri" pitchFamily="34" charset="0"/>
                 <a:ea typeface="Calibri" pitchFamily="34" charset="-122"/>
@@ -13680,7 +13680,7 @@
               </a:rPr>
               <a:t>No. Your role ends at referral. The contract and the client decide.</a:t>
             </a:r>
-            <a:endParaRPr lang="en-US" sz="900" dirty="0"/>
+            <a:endParaRPr lang="en-US" sz="950" dirty="0"/>
           </a:p>
         </p:txBody>
       </p:sp>
@@ -13692,12 +13692,12 @@
         </p:nvSpPr>
         <p:spPr>
           <a:xfrm>
-            <a:off x="640080" y="3040380"/>
-            <a:ext cx="10911535" cy="825246"/>
+            <a:off x="640080" y="3031236"/>
+            <a:ext cx="10911535" cy="857250"/>
           </a:xfrm>
           <a:prstGeom prst="roundRect">
             <a:avLst>
-              <a:gd name="adj" fmla="val 4432"/>
+              <a:gd name="adj" fmla="val 4267"/>
             </a:avLst>
           </a:prstGeom>
           <a:solidFill>
@@ -13714,7 +13714,7 @@
         </p:nvSpPr>
         <p:spPr>
           <a:xfrm>
-            <a:off x="841248" y="3279267"/>
+            <a:off x="841248" y="3286125"/>
             <a:ext cx="347472" cy="347472"/>
           </a:xfrm>
           <a:prstGeom prst="ellipse">
@@ -13734,7 +13734,7 @@
         </p:nvSpPr>
         <p:spPr>
           <a:xfrm>
-            <a:off x="841248" y="3279267"/>
+            <a:off x="841248" y="3286125"/>
             <a:ext cx="347472" cy="347472"/>
           </a:xfrm>
           <a:prstGeom prst="rect">
@@ -13773,8 +13773,8 @@
         </p:nvSpPr>
         <p:spPr>
           <a:xfrm>
-            <a:off x="1280160" y="3104388"/>
-            <a:ext cx="10033711" cy="697230"/>
+            <a:off x="1280160" y="3095244"/>
+            <a:ext cx="10033711" cy="729234"/>
           </a:xfrm>
           <a:prstGeom prst="rect">
             <a:avLst/>
@@ -13793,7 +13793,7 @@
               <a:buNone/>
             </a:pPr>
             <a:r>
-              <a:rPr lang="en-US" sz="900" dirty="0">
+              <a:rPr lang="en-US" sz="950" dirty="0">
                 <a:solidFill>
                   <a:srgbClr val="5F7183"/>
                 </a:solidFill>
@@ -13803,7 +13803,7 @@
               </a:rPr>
               <a:t>問3　上長に連絡がつかない場合</a:t>
             </a:r>
-            <a:endParaRPr lang="en-US" sz="900" dirty="0"/>
+            <a:endParaRPr lang="en-US" sz="950" dirty="0"/>
           </a:p>
           <a:p>
             <a:pPr indent="0" marL="0">
@@ -13823,7 +13823,7 @@
               </a:rPr>
               <a:t>緊急連絡体制の次順位者へ。不在を理由に自分で判断しない。待たせることは失礼ではない。</a:t>
             </a:r>
-            <a:endParaRPr lang="en-US" sz="900" dirty="0"/>
+            <a:endParaRPr lang="en-US" sz="950" dirty="0"/>
           </a:p>
           <a:p>
             <a:pPr indent="0" marL="0">
@@ -13833,9 +13833,9 @@
               <a:buNone/>
             </a:pPr>
             <a:r>
-              <a:rPr lang="en-US" sz="800" i="1" dirty="0">
-                <a:solidFill>
-                  <a:srgbClr val="5F7183"/>
+              <a:rPr lang="en-US" sz="1100" dirty="0">
+                <a:solidFill>
+                  <a:srgbClr val="1B2733"/>
                 </a:solidFill>
                 <a:latin typeface="Calibri" pitchFamily="34" charset="0"/>
                 <a:ea typeface="Calibri" pitchFamily="34" charset="-122"/>
@@ -13843,7 +13843,7 @@
               </a:rPr>
               <a:t>Go to the next person on the call-out list. Absence is not authority to decide. Asking them to wait is not rude.</a:t>
             </a:r>
-            <a:endParaRPr lang="en-US" sz="900" dirty="0"/>
+            <a:endParaRPr lang="en-US" sz="950" dirty="0"/>
           </a:p>
         </p:txBody>
       </p:sp>
@@ -13855,12 +13855,12 @@
         </p:nvSpPr>
         <p:spPr>
           <a:xfrm>
-            <a:off x="640080" y="3966210"/>
-            <a:ext cx="10911535" cy="825246"/>
+            <a:off x="640080" y="3989070"/>
+            <a:ext cx="10911535" cy="857250"/>
           </a:xfrm>
           <a:prstGeom prst="roundRect">
             <a:avLst>
-              <a:gd name="adj" fmla="val 4432"/>
+              <a:gd name="adj" fmla="val 4267"/>
             </a:avLst>
           </a:prstGeom>
           <a:solidFill>
@@ -13877,7 +13877,7 @@
         </p:nvSpPr>
         <p:spPr>
           <a:xfrm>
-            <a:off x="841248" y="4205097"/>
+            <a:off x="841248" y="4243959"/>
             <a:ext cx="347472" cy="347472"/>
           </a:xfrm>
           <a:prstGeom prst="ellipse">
@@ -13897,7 +13897,7 @@
         </p:nvSpPr>
         <p:spPr>
           <a:xfrm>
-            <a:off x="841248" y="4205097"/>
+            <a:off x="841248" y="4243959"/>
             <a:ext cx="347472" cy="347472"/>
           </a:xfrm>
           <a:prstGeom prst="rect">
@@ -13936,8 +13936,8 @@
         </p:nvSpPr>
         <p:spPr>
           <a:xfrm>
-            <a:off x="1280160" y="4030218"/>
-            <a:ext cx="10033711" cy="697230"/>
+            <a:off x="1280160" y="4053078"/>
+            <a:ext cx="10033711" cy="729234"/>
           </a:xfrm>
           <a:prstGeom prst="rect">
             <a:avLst/>
@@ -13956,7 +13956,7 @@
               <a:buNone/>
             </a:pPr>
             <a:r>
-              <a:rPr lang="en-US" sz="900" dirty="0">
+              <a:rPr lang="en-US" sz="950" dirty="0">
                 <a:solidFill>
                   <a:srgbClr val="5F7183"/>
                 </a:solidFill>
@@ -13966,7 +13966,7 @@
               </a:rPr>
               <a:t>問4　身分をどう確認するか</a:t>
             </a:r>
-            <a:endParaRPr lang="en-US" sz="900" dirty="0"/>
+            <a:endParaRPr lang="en-US" sz="950" dirty="0"/>
           </a:p>
           <a:p>
             <a:pPr indent="0" marL="0">
@@ -13986,7 +13986,7 @@
               </a:rPr>
               <a:t>求めてよい。所属、階級、氏名、連絡先を控える。確認は手続きであり失礼ではない。</a:t>
             </a:r>
-            <a:endParaRPr lang="en-US" sz="900" dirty="0"/>
+            <a:endParaRPr lang="en-US" sz="950" dirty="0"/>
           </a:p>
           <a:p>
             <a:pPr indent="0" marL="0">
@@ -13996,9 +13996,9 @@
               <a:buNone/>
             </a:pPr>
             <a:r>
-              <a:rPr lang="en-US" sz="800" i="1" dirty="0">
-                <a:solidFill>
-                  <a:srgbClr val="5F7183"/>
+              <a:rPr lang="en-US" sz="1100" dirty="0">
+                <a:solidFill>
+                  <a:srgbClr val="1B2733"/>
                 </a:solidFill>
                 <a:latin typeface="Calibri" pitchFamily="34" charset="0"/>
                 <a:ea typeface="Calibri" pitchFamily="34" charset="-122"/>
@@ -14006,7 +14006,7 @@
               </a:rPr>
               <a:t>Ask. Note the unit, rank, name and contact. Verifying is procedure, not discourtesy.</a:t>
             </a:r>
-            <a:endParaRPr lang="en-US" sz="900" dirty="0"/>
+            <a:endParaRPr lang="en-US" sz="950" dirty="0"/>
           </a:p>
         </p:txBody>
       </p:sp>
@@ -14018,7 +14018,7 @@
         </p:nvSpPr>
         <p:spPr>
           <a:xfrm>
-            <a:off x="640080" y="4901184"/>
+            <a:off x="640080" y="4956048"/>
             <a:ext cx="10911535" cy="420624"/>
           </a:xfrm>
           <a:prstGeom prst="roundRect">
@@ -14040,7 +14040,7 @@
         </p:nvSpPr>
         <p:spPr>
           <a:xfrm>
-            <a:off x="859536" y="4928616"/>
+            <a:off x="859536" y="4983480"/>
             <a:ext cx="10472623" cy="365760"/>
           </a:xfrm>
           <a:prstGeom prst="rect">
@@ -14114,9 +14114,9 @@
               <a:buNone/>
             </a:pPr>
             <a:r>
-              <a:rPr lang="en-US" sz="750" i="1" dirty="0">
-                <a:solidFill>
-                  <a:srgbClr val="5F7183"/>
+              <a:rPr lang="en-US" sz="950" dirty="0">
+                <a:solidFill>
+                  <a:srgbClr val="1B2733"/>
                 </a:solidFill>
                 <a:latin typeface="Calibri" pitchFamily="34" charset="0"/>
                 <a:ea typeface="Calibri" pitchFamily="34" charset="-122"/>
@@ -14136,7 +14136,7 @@
         </p:nvSpPr>
         <p:spPr>
           <a:xfrm>
-            <a:off x="640080" y="5394960"/>
+            <a:off x="640080" y="5449824"/>
             <a:ext cx="10911535" cy="420624"/>
           </a:xfrm>
           <a:prstGeom prst="roundRect">
@@ -14158,7 +14158,7 @@
         </p:nvSpPr>
         <p:spPr>
           <a:xfrm>
-            <a:off x="859536" y="5422392"/>
+            <a:off x="859536" y="5477256"/>
             <a:ext cx="10472623" cy="365760"/>
           </a:xfrm>
           <a:prstGeom prst="rect">
@@ -14232,7 +14232,86 @@
               <a:buNone/>
             </a:pPr>
             <a:r>
-              <a:rPr lang="en-US" sz="750" i="1" dirty="0">
+              <a:rPr lang="en-US" sz="950" dirty="0">
+                <a:solidFill>
+                  <a:srgbClr val="1B2733"/>
+                </a:solidFill>
+                <a:latin typeface="Calibri" pitchFamily="34" charset="0"/>
+                <a:ea typeface="Calibri" pitchFamily="34" charset="-122"/>
+                <a:cs typeface="Calibri" pitchFamily="34" charset="-120"/>
+              </a:rPr>
+              <a:t>The same thing. Confirming yes or no is still disclosure — the same structure as case 10-B.</a:t>
+            </a:r>
+            <a:endParaRPr lang="en-US" sz="850" dirty="0"/>
+          </a:p>
+        </p:txBody>
+      </p:sp>
+      <p:sp>
+        <p:nvSpPr>
+          <p:cNvPr id="26" name="Text 23"/>
+          <p:cNvSpPr/>
+          <p:nvPr/>
+        </p:nvSpPr>
+        <p:spPr>
+          <a:xfrm>
+            <a:off x="640080" y="5961888"/>
+            <a:ext cx="10911535" cy="292608"/>
+          </a:xfrm>
+          <a:prstGeom prst="rect">
+            <a:avLst/>
+          </a:prstGeom>
+          <a:noFill/>
+          <a:ln/>
+        </p:spPr>
+        <p:txBody>
+          <a:bodyPr wrap="square" lIns="0" tIns="0" rIns="0" bIns="0" rtlCol="0" anchor="t"/>
+          <a:lstStyle/>
+          <a:p>
+            <a:pPr indent="0" marL="0">
+              <a:lnSpc>
+                <a:spcPct val="88000"/>
+              </a:lnSpc>
+              <a:buNone/>
+            </a:pPr>
+            <a:r>
+              <a:rPr lang="en-US" sz="900" b="1" dirty="0">
+                <a:solidFill>
+                  <a:srgbClr val="0D8A76"/>
+                </a:solidFill>
+                <a:latin typeface="Yu Gothic" pitchFamily="34" charset="0"/>
+                <a:ea typeface="Yu Gothic" pitchFamily="34" charset="-122"/>
+                <a:cs typeface="Yu Gothic" pitchFamily="34" charset="-120"/>
+              </a:rPr>
+              <a:t>注記　</a:t>
+            </a:r>
+            <a:pPr indent="0" marL="0">
+              <a:lnSpc>
+                <a:spcPct val="88000"/>
+              </a:lnSpc>
+              <a:buNone/>
+            </a:pPr>
+            <a:r>
+              <a:rPr lang="en-US" sz="900" dirty="0">
+                <a:solidFill>
+                  <a:srgbClr val="1B2733"/>
+                </a:solidFill>
+                <a:latin typeface="Yu Gothic" pitchFamily="34" charset="0"/>
+                <a:ea typeface="Yu Gothic" pitchFamily="34" charset="-122"/>
+                <a:cs typeface="Yu Gothic" pitchFamily="34" charset="-120"/>
+              </a:rPr>
+              <a:t>模範解答は判断の型を示すものです。実際の手順は各現場のSite SOPと警備指令書が優先します。</a:t>
+            </a:r>
+            <a:endParaRPr lang="en-US" sz="900" dirty="0"/>
+          </a:p>
+          <a:p>
+            <a:pPr indent="0" marL="0">
+              <a:lnSpc>
+                <a:spcPct val="88000"/>
+              </a:lnSpc>
+              <a:buNone/>
+            </a:pPr>
+            <a:r>
+              <a:rPr lang="en-US" sz="800" i="1" dirty="0">
                 <a:solidFill>
                   <a:srgbClr val="5F7183"/>
                 </a:solidFill>
@@ -14240,22 +14319,22 @@
                 <a:ea typeface="Calibri" pitchFamily="34" charset="-122"/>
                 <a:cs typeface="Calibri" pitchFamily="34" charset="-120"/>
               </a:rPr>
-              <a:t>The same thing. Confirming yes or no is still disclosure — the same structure as case 10-B.</a:t>
-            </a:r>
-            <a:endParaRPr lang="en-US" sz="850" dirty="0"/>
-          </a:p>
-        </p:txBody>
-      </p:sp>
-      <p:sp>
-        <p:nvSpPr>
-          <p:cNvPr id="26" name="Text 23"/>
-          <p:cNvSpPr/>
-          <p:nvPr/>
-        </p:nvSpPr>
-        <p:spPr>
-          <a:xfrm>
-            <a:off x="640080" y="5907024"/>
-            <a:ext cx="10911535" cy="310896"/>
+              <a:t>These answers show a pattern of reasoning. The Site SOP and post orders always take precedence.</a:t>
+            </a:r>
+            <a:endParaRPr lang="en-US" sz="900" dirty="0"/>
+          </a:p>
+        </p:txBody>
+      </p:sp>
+      <p:sp>
+        <p:nvSpPr>
+          <p:cNvPr id="27" name="Text 24"/>
+          <p:cNvSpPr/>
+          <p:nvPr/>
+        </p:nvSpPr>
+        <p:spPr>
+          <a:xfrm>
+            <a:off x="640080" y="6272784"/>
+            <a:ext cx="9905695" cy="219456"/>
           </a:xfrm>
           <a:prstGeom prst="rect">
             <a:avLst/>
@@ -14268,167 +14347,88 @@
           <a:lstStyle/>
           <a:p>
             <a:pPr indent="0" marL="0">
-              <a:lnSpc>
-                <a:spcPct val="88000"/>
-              </a:lnSpc>
-              <a:buNone/>
-            </a:pPr>
-            <a:r>
-              <a:rPr lang="en-US" sz="900" b="1" dirty="0">
-                <a:solidFill>
-                  <a:srgbClr val="0D8A76"/>
-                </a:solidFill>
-                <a:latin typeface="Yu Gothic" pitchFamily="34" charset="0"/>
-                <a:ea typeface="Yu Gothic" pitchFamily="34" charset="-122"/>
-                <a:cs typeface="Yu Gothic" pitchFamily="34" charset="-120"/>
-              </a:rPr>
-              <a:t>注記　</a:t>
-            </a:r>
-            <a:pPr indent="0" marL="0">
-              <a:lnSpc>
-                <a:spcPct val="88000"/>
-              </a:lnSpc>
+              <a:buNone/>
+            </a:pPr>
+            <a:r>
+              <a:rPr lang="en-US" sz="750" b="1" dirty="0">
+                <a:solidFill>
+                  <a:srgbClr val="D6E0E9"/>
+                </a:solidFill>
+                <a:latin typeface="Yu Gothic" pitchFamily="34" charset="0"/>
+                <a:ea typeface="Yu Gothic" pitchFamily="34" charset="-122"/>
+                <a:cs typeface="Yu Gothic" pitchFamily="34" charset="-120"/>
+              </a:rPr>
+              <a:t>ソース　</a:t>
+            </a:r>
+            <a:pPr indent="0" marL="0">
+              <a:buNone/>
+            </a:pPr>
+            <a:r>
+              <a:rPr lang="en-US" sz="750" dirty="0">
+                <a:solidFill>
+                  <a:srgbClr val="5F7183"/>
+                </a:solidFill>
+                <a:latin typeface="Yu Gothic" pitchFamily="34" charset="0"/>
+                <a:ea typeface="Yu Gothic" pitchFamily="34" charset="-122"/>
+                <a:cs typeface="Yu Gothic" pitchFamily="34" charset="-120"/>
+              </a:rPr>
+              <a:t>個人情報保護法、刑事訴訟法、警察官職務執行法</a:t>
+            </a:r>
+            <a:endParaRPr lang="en-US" sz="750" dirty="0"/>
+          </a:p>
+        </p:txBody>
+      </p:sp>
+      <p:sp>
+        <p:nvSpPr>
+          <p:cNvPr id="28" name="Text 25"/>
+          <p:cNvSpPr/>
+          <p:nvPr/>
+        </p:nvSpPr>
+        <p:spPr>
+          <a:xfrm>
+            <a:off x="640080" y="6492240"/>
+            <a:ext cx="8778240" cy="292608"/>
+          </a:xfrm>
+          <a:prstGeom prst="rect">
+            <a:avLst/>
+          </a:prstGeom>
+          <a:noFill/>
+          <a:ln/>
+        </p:spPr>
+        <p:txBody>
+          <a:bodyPr wrap="square" lIns="0" tIns="0" rIns="0" bIns="0" rtlCol="0" anchor="ctr"/>
+          <a:lstStyle/>
+          <a:p>
+            <a:pPr indent="0" marL="0">
               <a:buNone/>
             </a:pPr>
             <a:r>
               <a:rPr lang="en-US" sz="900" dirty="0">
                 <a:solidFill>
-                  <a:srgbClr val="1B2733"/>
-                </a:solidFill>
-                <a:latin typeface="Yu Gothic" pitchFamily="34" charset="0"/>
-                <a:ea typeface="Yu Gothic" pitchFamily="34" charset="-122"/>
-                <a:cs typeface="Yu Gothic" pitchFamily="34" charset="-120"/>
-              </a:rPr>
-              <a:t>模範解答は判断の型を示すものです。実際の手順は各現場のSite SOPと警備指令書が優先します。</a:t>
+                  <a:srgbClr val="5F7183"/>
+                </a:solidFill>
+                <a:latin typeface="Yu Gothic" pitchFamily="34" charset="0"/>
+                <a:ea typeface="Yu Gothic" pitchFamily="34" charset="-122"/>
+                <a:cs typeface="Yu Gothic" pitchFamily="34" charset="-120"/>
+              </a:rPr>
+              <a:t>第2時限｜基本教育2 警備業法その他警備業務の適正な実施に必要な法令  </a:t>
+            </a:r>
+            <a:pPr indent="0" marL="0">
+              <a:buNone/>
+            </a:pPr>
+            <a:r>
+              <a:rPr lang="en-US" sz="850" i="1" dirty="0">
+                <a:solidFill>
+                  <a:srgbClr val="D6E0E9"/>
+                </a:solidFill>
+                <a:latin typeface="Calibri" pitchFamily="34" charset="0"/>
+                <a:ea typeface="Calibri" pitchFamily="34" charset="-122"/>
+                <a:cs typeface="Calibri" pitchFamily="34" charset="-120"/>
+              </a:rPr>
+              <a:t>Period 2 | Basic Training 2 — Applicable Law</a:t>
             </a:r>
             <a:endParaRPr lang="en-US" sz="900" dirty="0"/>
           </a:p>
-          <a:p>
-            <a:pPr indent="0" marL="0">
-              <a:lnSpc>
-                <a:spcPct val="88000"/>
-              </a:lnSpc>
-              <a:buNone/>
-            </a:pPr>
-            <a:r>
-              <a:rPr lang="en-US" sz="750" i="1" dirty="0">
-                <a:solidFill>
-                  <a:srgbClr val="5F7183"/>
-                </a:solidFill>
-                <a:latin typeface="Calibri" pitchFamily="34" charset="0"/>
-                <a:ea typeface="Calibri" pitchFamily="34" charset="-122"/>
-                <a:cs typeface="Calibri" pitchFamily="34" charset="-120"/>
-              </a:rPr>
-              <a:t>These answers show a pattern of reasoning. The Site SOP and post orders always take precedence.</a:t>
-            </a:r>
-            <a:endParaRPr lang="en-US" sz="900" dirty="0"/>
-          </a:p>
-        </p:txBody>
-      </p:sp>
-      <p:sp>
-        <p:nvSpPr>
-          <p:cNvPr id="27" name="Text 24"/>
-          <p:cNvSpPr/>
-          <p:nvPr/>
-        </p:nvSpPr>
-        <p:spPr>
-          <a:xfrm>
-            <a:off x="640080" y="6272784"/>
-            <a:ext cx="9905695" cy="237744"/>
-          </a:xfrm>
-          <a:prstGeom prst="rect">
-            <a:avLst/>
-          </a:prstGeom>
-          <a:noFill/>
-          <a:ln/>
-        </p:spPr>
-        <p:txBody>
-          <a:bodyPr wrap="square" lIns="0" tIns="0" rIns="0" bIns="0" rtlCol="0" anchor="t"/>
-          <a:lstStyle/>
-          <a:p>
-            <a:pPr indent="0" marL="0">
-              <a:buNone/>
-            </a:pPr>
-            <a:r>
-              <a:rPr lang="en-US" sz="750" b="1" dirty="0">
-                <a:solidFill>
-                  <a:srgbClr val="D6E0E9"/>
-                </a:solidFill>
-                <a:latin typeface="Yu Gothic" pitchFamily="34" charset="0"/>
-                <a:ea typeface="Yu Gothic" pitchFamily="34" charset="-122"/>
-                <a:cs typeface="Yu Gothic" pitchFamily="34" charset="-120"/>
-              </a:rPr>
-              <a:t>ソース　</a:t>
-            </a:r>
-            <a:pPr indent="0" marL="0">
-              <a:buNone/>
-            </a:pPr>
-            <a:r>
-              <a:rPr lang="en-US" sz="750" dirty="0">
-                <a:solidFill>
-                  <a:srgbClr val="5F7183"/>
-                </a:solidFill>
-                <a:latin typeface="Yu Gothic" pitchFamily="34" charset="0"/>
-                <a:ea typeface="Yu Gothic" pitchFamily="34" charset="-122"/>
-                <a:cs typeface="Yu Gothic" pitchFamily="34" charset="-120"/>
-              </a:rPr>
-              <a:t>個人情報保護法、刑事訴訟法、警察官職務執行法</a:t>
-            </a:r>
-            <a:endParaRPr lang="en-US" sz="750" dirty="0"/>
-          </a:p>
-        </p:txBody>
-      </p:sp>
-      <p:sp>
-        <p:nvSpPr>
-          <p:cNvPr id="28" name="Text 25"/>
-          <p:cNvSpPr/>
-          <p:nvPr/>
-        </p:nvSpPr>
-        <p:spPr>
-          <a:xfrm>
-            <a:off x="640080" y="6382512"/>
-            <a:ext cx="8778240" cy="292608"/>
-          </a:xfrm>
-          <a:prstGeom prst="rect">
-            <a:avLst/>
-          </a:prstGeom>
-          <a:noFill/>
-          <a:ln/>
-        </p:spPr>
-        <p:txBody>
-          <a:bodyPr wrap="square" lIns="0" tIns="0" rIns="0" bIns="0" rtlCol="0" anchor="ctr"/>
-          <a:lstStyle/>
-          <a:p>
-            <a:pPr indent="0" marL="0">
-              <a:buNone/>
-            </a:pPr>
-            <a:r>
-              <a:rPr lang="en-US" sz="900" dirty="0">
-                <a:solidFill>
-                  <a:srgbClr val="5F7183"/>
-                </a:solidFill>
-                <a:latin typeface="Yu Gothic" pitchFamily="34" charset="0"/>
-                <a:ea typeface="Yu Gothic" pitchFamily="34" charset="-122"/>
-                <a:cs typeface="Yu Gothic" pitchFamily="34" charset="-120"/>
-              </a:rPr>
-              <a:t>第2時限｜基本教育2 警備業法その他警備業務の適正な実施に必要な法令  </a:t>
-            </a:r>
-            <a:pPr indent="0" marL="0">
-              <a:buNone/>
-            </a:pPr>
-            <a:r>
-              <a:rPr lang="en-US" sz="850" i="1" dirty="0">
-                <a:solidFill>
-                  <a:srgbClr val="D6E0E9"/>
-                </a:solidFill>
-                <a:latin typeface="Calibri" pitchFamily="34" charset="0"/>
-                <a:ea typeface="Calibri" pitchFamily="34" charset="-122"/>
-                <a:cs typeface="Calibri" pitchFamily="34" charset="-120"/>
-              </a:rPr>
-              <a:t>Period 2 | Basic Training 2 — Applicable Law</a:t>
-            </a:r>
-            <a:endParaRPr lang="en-US" sz="900" dirty="0"/>
-          </a:p>
         </p:txBody>
       </p:sp>
       <p:sp>
@@ -14439,7 +14439,7 @@
         </p:nvSpPr>
         <p:spPr>
           <a:xfrm>
-            <a:off x="10637215" y="6382512"/>
+            <a:off x="10637215" y="6492240"/>
             <a:ext cx="914400" cy="292608"/>
           </a:xfrm>
           <a:prstGeom prst="rect">

--- a/decks/02_2限_法令.pptx
+++ b/decks/02_2限_法令.pptx
@@ -2508,7 +2508,7 @@
               <a:buNone/>
             </a:pPr>
             <a:r>
-              <a:rPr lang="en-US" sz="1350" dirty="0">
+              <a:rPr lang="en-US" sz="1450" dirty="0">
                 <a:solidFill>
                   <a:srgbClr val="DCEFEB"/>
                 </a:solidFill>
@@ -2587,7 +2587,7 @@
               <a:buNone/>
             </a:pPr>
             <a:r>
-              <a:rPr lang="en-US" sz="1350" dirty="0">
+              <a:rPr lang="en-US" sz="1500" dirty="0">
                 <a:solidFill>
                   <a:srgbClr val="1B2733"/>
                 </a:solidFill>
@@ -2730,7 +2730,7 @@
               <a:buNone/>
             </a:pPr>
             <a:r>
-              <a:rPr lang="en-US" sz="1350" dirty="0">
+              <a:rPr lang="en-US" sz="1400" dirty="0">
                 <a:solidFill>
                   <a:srgbClr val="1B2733"/>
                 </a:solidFill>
@@ -2873,7 +2873,7 @@
               <a:buNone/>
             </a:pPr>
             <a:r>
-              <a:rPr lang="en-US" sz="1350" dirty="0">
+              <a:rPr lang="en-US" sz="1400" dirty="0">
                 <a:solidFill>
                   <a:srgbClr val="1B2733"/>
                 </a:solidFill>
@@ -3016,7 +3016,7 @@
               <a:buNone/>
             </a:pPr>
             <a:r>
-              <a:rPr lang="en-US" sz="1350" dirty="0">
+              <a:rPr lang="en-US" sz="1400" dirty="0">
                 <a:solidFill>
                   <a:srgbClr val="1B2733"/>
                 </a:solidFill>
@@ -3159,7 +3159,7 @@
               <a:buNone/>
             </a:pPr>
             <a:r>
-              <a:rPr lang="en-US" sz="1350" dirty="0">
+              <a:rPr lang="en-US" sz="1400" dirty="0">
                 <a:solidFill>
                   <a:srgbClr val="1B2733"/>
                 </a:solidFill>
@@ -3260,7 +3260,7 @@
               <a:buNone/>
             </a:pPr>
             <a:r>
-              <a:rPr lang="en-US" sz="1250" dirty="0">
+              <a:rPr lang="en-US" sz="1350" dirty="0">
                 <a:solidFill>
                   <a:srgbClr val="1B2733"/>
                 </a:solidFill>
@@ -3361,7 +3361,7 @@
               <a:buNone/>
             </a:pPr>
             <a:r>
-              <a:rPr lang="en-US" sz="1250" dirty="0">
+              <a:rPr lang="en-US" sz="1350" dirty="0">
                 <a:solidFill>
                   <a:srgbClr val="1B2733"/>
                 </a:solidFill>
@@ -3787,11 +3787,11 @@
         <p:spPr>
           <a:xfrm>
             <a:off x="640080" y="1115568"/>
-            <a:ext cx="10911535" cy="715518"/>
+            <a:ext cx="10911535" cy="854714"/>
           </a:xfrm>
           <a:prstGeom prst="roundRect">
             <a:avLst>
-              <a:gd name="adj" fmla="val 5112"/>
+              <a:gd name="adj" fmla="val 4279"/>
             </a:avLst>
           </a:prstGeom>
           <a:solidFill>
@@ -3808,7 +3808,7 @@
         </p:nvSpPr>
         <p:spPr>
           <a:xfrm>
-            <a:off x="841248" y="1299591"/>
+            <a:off x="841248" y="1369189"/>
             <a:ext cx="347472" cy="347472"/>
           </a:xfrm>
           <a:prstGeom prst="ellipse">
@@ -3828,7 +3828,7 @@
         </p:nvSpPr>
         <p:spPr>
           <a:xfrm>
-            <a:off x="841248" y="1299591"/>
+            <a:off x="841248" y="1369189"/>
             <a:ext cx="347472" cy="347472"/>
           </a:xfrm>
           <a:prstGeom prst="rect">
@@ -3868,7 +3868,7 @@
         <p:spPr>
           <a:xfrm>
             <a:off x="1280160" y="1179576"/>
-            <a:ext cx="10033711" cy="587502"/>
+            <a:ext cx="10033711" cy="726698"/>
           </a:xfrm>
           <a:prstGeom prst="rect">
             <a:avLst/>
@@ -3927,7 +3927,7 @@
               <a:buNone/>
             </a:pPr>
             <a:r>
-              <a:rPr lang="en-US" sz="1400" dirty="0">
+              <a:rPr lang="en-US" sz="1500" dirty="0">
                 <a:solidFill>
                   <a:srgbClr val="1B2733"/>
                 </a:solidFill>
@@ -3949,12 +3949,12 @@
         </p:nvSpPr>
         <p:spPr>
           <a:xfrm>
-            <a:off x="640080" y="1931670"/>
-            <a:ext cx="10911535" cy="715518"/>
+            <a:off x="640080" y="2070866"/>
+            <a:ext cx="10911535" cy="669119"/>
           </a:xfrm>
           <a:prstGeom prst="roundRect">
             <a:avLst>
-              <a:gd name="adj" fmla="val 5112"/>
+              <a:gd name="adj" fmla="val 5466"/>
             </a:avLst>
           </a:prstGeom>
           <a:solidFill>
@@ -3971,7 +3971,7 @@
         </p:nvSpPr>
         <p:spPr>
           <a:xfrm>
-            <a:off x="841248" y="2115693"/>
+            <a:off x="841248" y="2231690"/>
             <a:ext cx="347472" cy="347472"/>
           </a:xfrm>
           <a:prstGeom prst="ellipse">
@@ -3991,7 +3991,7 @@
         </p:nvSpPr>
         <p:spPr>
           <a:xfrm>
-            <a:off x="841248" y="2115693"/>
+            <a:off x="841248" y="2231690"/>
             <a:ext cx="347472" cy="347472"/>
           </a:xfrm>
           <a:prstGeom prst="rect">
@@ -4030,8 +4030,8 @@
         </p:nvSpPr>
         <p:spPr>
           <a:xfrm>
-            <a:off x="1280160" y="1995678"/>
-            <a:ext cx="10033711" cy="587502"/>
+            <a:off x="1280160" y="2134874"/>
+            <a:ext cx="10033711" cy="541103"/>
           </a:xfrm>
           <a:prstGeom prst="rect">
             <a:avLst/>
@@ -4090,7 +4090,7 @@
               <a:buNone/>
             </a:pPr>
             <a:r>
-              <a:rPr lang="en-US" sz="1400" dirty="0">
+              <a:rPr lang="en-US" sz="1500" dirty="0">
                 <a:solidFill>
                   <a:srgbClr val="1B2733"/>
                 </a:solidFill>
@@ -4112,12 +4112,12 @@
         </p:nvSpPr>
         <p:spPr>
           <a:xfrm>
-            <a:off x="640080" y="2747772"/>
-            <a:ext cx="10911535" cy="715518"/>
+            <a:off x="640080" y="2840570"/>
+            <a:ext cx="10911535" cy="669119"/>
           </a:xfrm>
           <a:prstGeom prst="roundRect">
             <a:avLst>
-              <a:gd name="adj" fmla="val 5112"/>
+              <a:gd name="adj" fmla="val 5466"/>
             </a:avLst>
           </a:prstGeom>
           <a:solidFill>
@@ -4134,7 +4134,7 @@
         </p:nvSpPr>
         <p:spPr>
           <a:xfrm>
-            <a:off x="841248" y="2931795"/>
+            <a:off x="841248" y="3001393"/>
             <a:ext cx="347472" cy="347472"/>
           </a:xfrm>
           <a:prstGeom prst="ellipse">
@@ -4154,7 +4154,7 @@
         </p:nvSpPr>
         <p:spPr>
           <a:xfrm>
-            <a:off x="841248" y="2931795"/>
+            <a:off x="841248" y="3001393"/>
             <a:ext cx="347472" cy="347472"/>
           </a:xfrm>
           <a:prstGeom prst="rect">
@@ -4193,8 +4193,8 @@
         </p:nvSpPr>
         <p:spPr>
           <a:xfrm>
-            <a:off x="1280160" y="2811780"/>
-            <a:ext cx="10033711" cy="587502"/>
+            <a:off x="1280160" y="2904578"/>
+            <a:ext cx="10033711" cy="541103"/>
           </a:xfrm>
           <a:prstGeom prst="rect">
             <a:avLst/>
@@ -4253,7 +4253,7 @@
               <a:buNone/>
             </a:pPr>
             <a:r>
-              <a:rPr lang="en-US" sz="1400" dirty="0">
+              <a:rPr lang="en-US" sz="1500" dirty="0">
                 <a:solidFill>
                   <a:srgbClr val="1B2733"/>
                 </a:solidFill>
@@ -4275,12 +4275,12 @@
         </p:nvSpPr>
         <p:spPr>
           <a:xfrm>
-            <a:off x="640080" y="3563874"/>
-            <a:ext cx="10911535" cy="715518"/>
+            <a:off x="640080" y="3610273"/>
+            <a:ext cx="10911535" cy="669119"/>
           </a:xfrm>
           <a:prstGeom prst="roundRect">
             <a:avLst>
-              <a:gd name="adj" fmla="val 5112"/>
+              <a:gd name="adj" fmla="val 5466"/>
             </a:avLst>
           </a:prstGeom>
           <a:solidFill>
@@ -4297,7 +4297,7 @@
         </p:nvSpPr>
         <p:spPr>
           <a:xfrm>
-            <a:off x="841248" y="3747897"/>
+            <a:off x="841248" y="3771096"/>
             <a:ext cx="347472" cy="347472"/>
           </a:xfrm>
           <a:prstGeom prst="ellipse">
@@ -4317,7 +4317,7 @@
         </p:nvSpPr>
         <p:spPr>
           <a:xfrm>
-            <a:off x="841248" y="3747897"/>
+            <a:off x="841248" y="3771096"/>
             <a:ext cx="347472" cy="347472"/>
           </a:xfrm>
           <a:prstGeom prst="rect">
@@ -4356,8 +4356,8 @@
         </p:nvSpPr>
         <p:spPr>
           <a:xfrm>
-            <a:off x="1280160" y="3627882"/>
-            <a:ext cx="10033711" cy="587502"/>
+            <a:off x="1280160" y="3674281"/>
+            <a:ext cx="10033711" cy="541103"/>
           </a:xfrm>
           <a:prstGeom prst="rect">
             <a:avLst/>
@@ -4416,7 +4416,7 @@
               <a:buNone/>
             </a:pPr>
             <a:r>
-              <a:rPr lang="en-US" sz="1400" dirty="0">
+              <a:rPr lang="en-US" sz="1500" dirty="0">
                 <a:solidFill>
                   <a:srgbClr val="1B2733"/>
                 </a:solidFill>
@@ -4534,7 +4534,7 @@
               <a:buNone/>
             </a:pPr>
             <a:r>
-              <a:rPr lang="en-US" sz="1250" dirty="0">
+              <a:rPr lang="en-US" sz="1350" dirty="0">
                 <a:solidFill>
                   <a:srgbClr val="1B2733"/>
                 </a:solidFill>
@@ -4652,7 +4652,7 @@
               <a:buNone/>
             </a:pPr>
             <a:r>
-              <a:rPr lang="en-US" sz="1250" dirty="0">
+              <a:rPr lang="en-US" sz="1350" dirty="0">
                 <a:solidFill>
                   <a:srgbClr val="1B2733"/>
                 </a:solidFill>
@@ -4753,7 +4753,7 @@
               <a:buNone/>
             </a:pPr>
             <a:r>
-              <a:rPr lang="en-US" sz="1200" dirty="0">
+              <a:rPr lang="en-US" sz="1300" dirty="0">
                 <a:solidFill>
                   <a:srgbClr val="DCEFEB"/>
                 </a:solidFill>
@@ -5277,7 +5277,7 @@
               <a:buNone/>
             </a:pPr>
             <a:r>
-              <a:rPr lang="en-US" sz="1350" dirty="0">
+              <a:rPr lang="en-US" sz="1450" dirty="0">
                 <a:solidFill>
                   <a:srgbClr val="DCEFEB"/>
                 </a:solidFill>
@@ -5356,7 +5356,7 @@
               <a:buNone/>
             </a:pPr>
             <a:r>
-              <a:rPr lang="en-US" sz="1350" dirty="0">
+              <a:rPr lang="en-US" sz="1500" dirty="0">
                 <a:solidFill>
                   <a:srgbClr val="1B2733"/>
                 </a:solidFill>
@@ -5499,7 +5499,7 @@
               <a:buNone/>
             </a:pPr>
             <a:r>
-              <a:rPr lang="en-US" sz="1350" dirty="0">
+              <a:rPr lang="en-US" sz="1400" dirty="0">
                 <a:solidFill>
                   <a:srgbClr val="1B2733"/>
                 </a:solidFill>
@@ -5642,7 +5642,7 @@
               <a:buNone/>
             </a:pPr>
             <a:r>
-              <a:rPr lang="en-US" sz="1350" dirty="0">
+              <a:rPr lang="en-US" sz="1400" dirty="0">
                 <a:solidFill>
                   <a:srgbClr val="1B2733"/>
                 </a:solidFill>
@@ -5785,7 +5785,7 @@
               <a:buNone/>
             </a:pPr>
             <a:r>
-              <a:rPr lang="en-US" sz="1350" dirty="0">
+              <a:rPr lang="en-US" sz="1400" dirty="0">
                 <a:solidFill>
                   <a:srgbClr val="1B2733"/>
                 </a:solidFill>
@@ -5928,7 +5928,7 @@
               <a:buNone/>
             </a:pPr>
             <a:r>
-              <a:rPr lang="en-US" sz="1350" dirty="0">
+              <a:rPr lang="en-US" sz="1400" dirty="0">
                 <a:solidFill>
                   <a:srgbClr val="1B2733"/>
                 </a:solidFill>
@@ -6029,7 +6029,7 @@
               <a:buNone/>
             </a:pPr>
             <a:r>
-              <a:rPr lang="en-US" sz="1250" dirty="0">
+              <a:rPr lang="en-US" sz="1350" dirty="0">
                 <a:solidFill>
                   <a:srgbClr val="1B2733"/>
                 </a:solidFill>
@@ -6130,7 +6130,7 @@
               <a:buNone/>
             </a:pPr>
             <a:r>
-              <a:rPr lang="en-US" sz="1250" dirty="0">
+              <a:rPr lang="en-US" sz="1350" dirty="0">
                 <a:solidFill>
                   <a:srgbClr val="1B2733"/>
                 </a:solidFill>
@@ -6696,7 +6696,7 @@
               <a:buNone/>
             </a:pPr>
             <a:r>
-              <a:rPr lang="en-US" sz="1400" dirty="0">
+              <a:rPr lang="en-US" sz="1500" dirty="0">
                 <a:solidFill>
                   <a:srgbClr val="1B2733"/>
                 </a:solidFill>
@@ -6859,7 +6859,7 @@
               <a:buNone/>
             </a:pPr>
             <a:r>
-              <a:rPr lang="en-US" sz="1400" dirty="0">
+              <a:rPr lang="en-US" sz="1500" dirty="0">
                 <a:solidFill>
                   <a:srgbClr val="1B2733"/>
                 </a:solidFill>
@@ -7022,7 +7022,7 @@
               <a:buNone/>
             </a:pPr>
             <a:r>
-              <a:rPr lang="en-US" sz="1400" dirty="0">
+              <a:rPr lang="en-US" sz="1500" dirty="0">
                 <a:solidFill>
                   <a:srgbClr val="1B2733"/>
                 </a:solidFill>
@@ -7185,7 +7185,7 @@
               <a:buNone/>
             </a:pPr>
             <a:r>
-              <a:rPr lang="en-US" sz="1400" dirty="0">
+              <a:rPr lang="en-US" sz="1500" dirty="0">
                 <a:solidFill>
                   <a:srgbClr val="1B2733"/>
                 </a:solidFill>
@@ -7303,7 +7303,7 @@
               <a:buNone/>
             </a:pPr>
             <a:r>
-              <a:rPr lang="en-US" sz="1250" dirty="0">
+              <a:rPr lang="en-US" sz="1350" dirty="0">
                 <a:solidFill>
                   <a:srgbClr val="1B2733"/>
                 </a:solidFill>
@@ -7421,7 +7421,7 @@
               <a:buNone/>
             </a:pPr>
             <a:r>
-              <a:rPr lang="en-US" sz="1250" dirty="0">
+              <a:rPr lang="en-US" sz="1350" dirty="0">
                 <a:solidFill>
                   <a:srgbClr val="1B2733"/>
                 </a:solidFill>
@@ -7968,7 +7968,7 @@
               <a:buNone/>
             </a:pPr>
             <a:r>
-              <a:rPr lang="en-US" sz="1400" dirty="0">
+              <a:rPr lang="en-US" sz="1500" dirty="0">
                 <a:solidFill>
                   <a:srgbClr val="1B2733"/>
                 </a:solidFill>
@@ -8111,7 +8111,7 @@
               <a:buNone/>
             </a:pPr>
             <a:r>
-              <a:rPr lang="en-US" sz="1400" dirty="0">
+              <a:rPr lang="en-US" sz="1500" dirty="0">
                 <a:solidFill>
                   <a:srgbClr val="1B2733"/>
                 </a:solidFill>
@@ -8254,7 +8254,7 @@
               <a:buNone/>
             </a:pPr>
             <a:r>
-              <a:rPr lang="en-US" sz="1400" dirty="0">
+              <a:rPr lang="en-US" sz="1500" dirty="0">
                 <a:solidFill>
                   <a:srgbClr val="1B2733"/>
                 </a:solidFill>
@@ -8397,7 +8397,7 @@
               <a:buNone/>
             </a:pPr>
             <a:r>
-              <a:rPr lang="en-US" sz="1400" dirty="0">
+              <a:rPr lang="en-US" sz="1500" dirty="0">
                 <a:solidFill>
                   <a:srgbClr val="1B2733"/>
                 </a:solidFill>
@@ -8750,7 +8750,7 @@
               <a:buNone/>
             </a:pPr>
             <a:r>
-              <a:rPr lang="en-US" sz="1400" dirty="0">
+              <a:rPr lang="en-US" sz="1500" dirty="0">
                 <a:solidFill>
                   <a:srgbClr val="1B2733"/>
                 </a:solidFill>
@@ -8893,7 +8893,7 @@
               <a:buNone/>
             </a:pPr>
             <a:r>
-              <a:rPr lang="en-US" sz="1400" dirty="0">
+              <a:rPr lang="en-US" sz="1500" dirty="0">
                 <a:solidFill>
                   <a:srgbClr val="1B2733"/>
                 </a:solidFill>
@@ -9036,7 +9036,7 @@
               <a:buNone/>
             </a:pPr>
             <a:r>
-              <a:rPr lang="en-US" sz="1400" dirty="0">
+              <a:rPr lang="en-US" sz="1500" dirty="0">
                 <a:solidFill>
                   <a:srgbClr val="1B2733"/>
                 </a:solidFill>
@@ -9179,7 +9179,7 @@
               <a:buNone/>
             </a:pPr>
             <a:r>
-              <a:rPr lang="en-US" sz="1400" dirty="0">
+              <a:rPr lang="en-US" sz="1500" dirty="0">
                 <a:solidFill>
                   <a:srgbClr val="1B2733"/>
                 </a:solidFill>
@@ -9539,7 +9539,7 @@
                 <a:ea typeface="Calibri" pitchFamily="34" charset="-122"/>
                 <a:cs typeface="Calibri" pitchFamily="34" charset="-120"/>
               </a:rPr>
-              <a:t>What You'll Learn　</a:t>
+              <a:t>What You'll Learn  </a:t>
             </a:r>
             <a:pPr indent="0" marL="0">
               <a:lnSpc>
@@ -9568,7 +9568,7 @@
               <a:buNone/>
             </a:pPr>
             <a:r>
-              <a:rPr lang="en-US" sz="1250" dirty="0">
+              <a:rPr lang="en-US" sz="1300" dirty="0">
                 <a:solidFill>
                   <a:srgbClr val="1B2733"/>
                 </a:solidFill>
@@ -9711,7 +9711,7 @@
               <a:buNone/>
             </a:pPr>
             <a:r>
-              <a:rPr lang="en-US" sz="1400" dirty="0">
+              <a:rPr lang="en-US" sz="1500" dirty="0">
                 <a:solidFill>
                   <a:srgbClr val="12B198"/>
                 </a:solidFill>
@@ -9779,7 +9779,7 @@
               <a:buNone/>
             </a:pPr>
             <a:r>
-              <a:rPr lang="en-US" sz="1350" dirty="0">
+              <a:rPr lang="en-US" sz="1400" dirty="0">
                 <a:solidFill>
                   <a:srgbClr val="1B2733"/>
                 </a:solidFill>
@@ -9825,7 +9825,7 @@
               <a:buNone/>
             </a:pPr>
             <a:r>
-              <a:rPr lang="en-US" sz="1350" dirty="0">
+              <a:rPr lang="en-US" sz="1400" dirty="0">
                 <a:solidFill>
                   <a:srgbClr val="1B2733"/>
                 </a:solidFill>
@@ -9871,7 +9871,7 @@
               <a:buNone/>
             </a:pPr>
             <a:r>
-              <a:rPr lang="en-US" sz="1350" dirty="0">
+              <a:rPr lang="en-US" sz="1400" dirty="0">
                 <a:solidFill>
                   <a:srgbClr val="1B2733"/>
                 </a:solidFill>
@@ -9917,7 +9917,7 @@
               <a:buNone/>
             </a:pPr>
             <a:r>
-              <a:rPr lang="en-US" sz="1350" dirty="0">
+              <a:rPr lang="en-US" sz="1400" dirty="0">
                 <a:solidFill>
                   <a:srgbClr val="1B2733"/>
                 </a:solidFill>
@@ -10060,7 +10060,7 @@
               <a:buNone/>
             </a:pPr>
             <a:r>
-              <a:rPr lang="en-US" sz="1400" dirty="0">
+              <a:rPr lang="en-US" sz="1500" dirty="0">
                 <a:solidFill>
                   <a:srgbClr val="12B198"/>
                 </a:solidFill>
@@ -10128,7 +10128,7 @@
               <a:buNone/>
             </a:pPr>
             <a:r>
-              <a:rPr lang="en-US" sz="1350" dirty="0">
+              <a:rPr lang="en-US" sz="1400" dirty="0">
                 <a:solidFill>
                   <a:srgbClr val="1B2733"/>
                 </a:solidFill>
@@ -10174,7 +10174,7 @@
               <a:buNone/>
             </a:pPr>
             <a:r>
-              <a:rPr lang="en-US" sz="1350" dirty="0">
+              <a:rPr lang="en-US" sz="1400" dirty="0">
                 <a:solidFill>
                   <a:srgbClr val="1B2733"/>
                 </a:solidFill>
@@ -10220,7 +10220,7 @@
               <a:buNone/>
             </a:pPr>
             <a:r>
-              <a:rPr lang="en-US" sz="1350" dirty="0">
+              <a:rPr lang="en-US" sz="1400" dirty="0">
                 <a:solidFill>
                   <a:srgbClr val="1B2733"/>
                 </a:solidFill>
@@ -10266,7 +10266,7 @@
               <a:buNone/>
             </a:pPr>
             <a:r>
-              <a:rPr lang="en-US" sz="1350" dirty="0">
+              <a:rPr lang="en-US" sz="1400" dirty="0">
                 <a:solidFill>
                   <a:srgbClr val="1B2733"/>
                 </a:solidFill>
@@ -10812,7 +10812,7 @@
               <a:buNone/>
             </a:pPr>
             <a:r>
-              <a:rPr lang="en-US" sz="1400" dirty="0">
+              <a:rPr lang="en-US" sz="1500" dirty="0">
                 <a:solidFill>
                   <a:srgbClr val="12B198"/>
                 </a:solidFill>
@@ -10880,7 +10880,7 @@
               <a:buNone/>
             </a:pPr>
             <a:r>
-              <a:rPr lang="en-US" sz="1350" dirty="0">
+              <a:rPr lang="en-US" sz="1400" dirty="0">
                 <a:solidFill>
                   <a:srgbClr val="1B2733"/>
                 </a:solidFill>
@@ -10926,7 +10926,7 @@
               <a:buNone/>
             </a:pPr>
             <a:r>
-              <a:rPr lang="en-US" sz="1350" dirty="0">
+              <a:rPr lang="en-US" sz="1400" dirty="0">
                 <a:solidFill>
                   <a:srgbClr val="1B2733"/>
                 </a:solidFill>
@@ -10972,7 +10972,7 @@
               <a:buNone/>
             </a:pPr>
             <a:r>
-              <a:rPr lang="en-US" sz="1350" dirty="0">
+              <a:rPr lang="en-US" sz="1400" dirty="0">
                 <a:solidFill>
                   <a:srgbClr val="1B2733"/>
                 </a:solidFill>
@@ -11018,7 +11018,7 @@
               <a:buNone/>
             </a:pPr>
             <a:r>
-              <a:rPr lang="en-US" sz="1350" dirty="0">
+              <a:rPr lang="en-US" sz="1400" dirty="0">
                 <a:solidFill>
                   <a:srgbClr val="1B2733"/>
                 </a:solidFill>
@@ -11161,7 +11161,7 @@
               <a:buNone/>
             </a:pPr>
             <a:r>
-              <a:rPr lang="en-US" sz="1400" dirty="0">
+              <a:rPr lang="en-US" sz="1500" dirty="0">
                 <a:solidFill>
                   <a:srgbClr val="12B198"/>
                 </a:solidFill>
@@ -11229,7 +11229,7 @@
               <a:buNone/>
             </a:pPr>
             <a:r>
-              <a:rPr lang="en-US" sz="1350" dirty="0">
+              <a:rPr lang="en-US" sz="1400" dirty="0">
                 <a:solidFill>
                   <a:srgbClr val="1B2733"/>
                 </a:solidFill>
@@ -11275,7 +11275,7 @@
               <a:buNone/>
             </a:pPr>
             <a:r>
-              <a:rPr lang="en-US" sz="1350" dirty="0">
+              <a:rPr lang="en-US" sz="1400" dirty="0">
                 <a:solidFill>
                   <a:srgbClr val="1B2733"/>
                 </a:solidFill>
@@ -11321,7 +11321,7 @@
               <a:buNone/>
             </a:pPr>
             <a:r>
-              <a:rPr lang="en-US" sz="1350" dirty="0">
+              <a:rPr lang="en-US" sz="1400" dirty="0">
                 <a:solidFill>
                   <a:srgbClr val="1B2733"/>
                 </a:solidFill>
@@ -11367,7 +11367,7 @@
               <a:buNone/>
             </a:pPr>
             <a:r>
-              <a:rPr lang="en-US" sz="1350" dirty="0">
+              <a:rPr lang="en-US" sz="1400" dirty="0">
                 <a:solidFill>
                   <a:srgbClr val="1B2733"/>
                 </a:solidFill>
@@ -11859,7 +11859,7 @@
                 <a:ea typeface="Calibri" pitchFamily="34" charset="-122"/>
                 <a:cs typeface="Calibri" pitchFamily="34" charset="-120"/>
               </a:rPr>
-              <a:t>What You'll Learn　</a:t>
+              <a:t>What You'll Learn  </a:t>
             </a:r>
             <a:pPr indent="0" marL="0">
               <a:lnSpc>
@@ -11888,7 +11888,7 @@
               <a:buNone/>
             </a:pPr>
             <a:r>
-              <a:rPr lang="en-US" sz="1250" dirty="0">
+              <a:rPr lang="en-US" sz="1300" dirty="0">
                 <a:solidFill>
                   <a:srgbClr val="1B2733"/>
                 </a:solidFill>
@@ -12031,7 +12031,7 @@
               <a:buNone/>
             </a:pPr>
             <a:r>
-              <a:rPr lang="en-US" sz="1400" dirty="0">
+              <a:rPr lang="en-US" sz="1500" dirty="0">
                 <a:solidFill>
                   <a:srgbClr val="12B198"/>
                 </a:solidFill>
@@ -12099,7 +12099,7 @@
               <a:buNone/>
             </a:pPr>
             <a:r>
-              <a:rPr lang="en-US" sz="1350" dirty="0">
+              <a:rPr lang="en-US" sz="1400" dirty="0">
                 <a:solidFill>
                   <a:srgbClr val="1B2733"/>
                 </a:solidFill>
@@ -12145,7 +12145,7 @@
               <a:buNone/>
             </a:pPr>
             <a:r>
-              <a:rPr lang="en-US" sz="1350" dirty="0">
+              <a:rPr lang="en-US" sz="1400" dirty="0">
                 <a:solidFill>
                   <a:srgbClr val="1B2733"/>
                 </a:solidFill>
@@ -12191,7 +12191,7 @@
               <a:buNone/>
             </a:pPr>
             <a:r>
-              <a:rPr lang="en-US" sz="1350" dirty="0">
+              <a:rPr lang="en-US" sz="1400" dirty="0">
                 <a:solidFill>
                   <a:srgbClr val="1B2733"/>
                 </a:solidFill>
@@ -12237,7 +12237,7 @@
               <a:buNone/>
             </a:pPr>
             <a:r>
-              <a:rPr lang="en-US" sz="1350" dirty="0">
+              <a:rPr lang="en-US" sz="1400" dirty="0">
                 <a:solidFill>
                   <a:srgbClr val="1B2733"/>
                 </a:solidFill>
@@ -12380,7 +12380,7 @@
               <a:buNone/>
             </a:pPr>
             <a:r>
-              <a:rPr lang="en-US" sz="1400" dirty="0">
+              <a:rPr lang="en-US" sz="1500" dirty="0">
                 <a:solidFill>
                   <a:srgbClr val="12B198"/>
                 </a:solidFill>
@@ -12448,7 +12448,7 @@
               <a:buNone/>
             </a:pPr>
             <a:r>
-              <a:rPr lang="en-US" sz="1350" dirty="0">
+              <a:rPr lang="en-US" sz="1400" dirty="0">
                 <a:solidFill>
                   <a:srgbClr val="1B2733"/>
                 </a:solidFill>
@@ -12494,7 +12494,7 @@
               <a:buNone/>
             </a:pPr>
             <a:r>
-              <a:rPr lang="en-US" sz="1350" dirty="0">
+              <a:rPr lang="en-US" sz="1400" dirty="0">
                 <a:solidFill>
                   <a:srgbClr val="1B2733"/>
                 </a:solidFill>
@@ -12540,7 +12540,7 @@
               <a:buNone/>
             </a:pPr>
             <a:r>
-              <a:rPr lang="en-US" sz="1350" dirty="0">
+              <a:rPr lang="en-US" sz="1400" dirty="0">
                 <a:solidFill>
                   <a:srgbClr val="1B2733"/>
                 </a:solidFill>
@@ -12586,7 +12586,7 @@
               <a:buNone/>
             </a:pPr>
             <a:r>
-              <a:rPr lang="en-US" sz="1350" dirty="0">
+              <a:rPr lang="en-US" sz="1400" dirty="0">
                 <a:solidFill>
                   <a:srgbClr val="1B2733"/>
                 </a:solidFill>
@@ -13132,7 +13132,7 @@
               <a:buNone/>
             </a:pPr>
             <a:r>
-              <a:rPr lang="en-US" sz="1400" dirty="0">
+              <a:rPr lang="en-US" sz="1500" dirty="0">
                 <a:solidFill>
                   <a:srgbClr val="12B198"/>
                 </a:solidFill>
@@ -13200,7 +13200,7 @@
               <a:buNone/>
             </a:pPr>
             <a:r>
-              <a:rPr lang="en-US" sz="1350" dirty="0">
+              <a:rPr lang="en-US" sz="1400" dirty="0">
                 <a:solidFill>
                   <a:srgbClr val="1B2733"/>
                 </a:solidFill>
@@ -13246,7 +13246,7 @@
               <a:buNone/>
             </a:pPr>
             <a:r>
-              <a:rPr lang="en-US" sz="1350" dirty="0">
+              <a:rPr lang="en-US" sz="1400" dirty="0">
                 <a:solidFill>
                   <a:srgbClr val="1B2733"/>
                 </a:solidFill>
@@ -13292,7 +13292,7 @@
               <a:buNone/>
             </a:pPr>
             <a:r>
-              <a:rPr lang="en-US" sz="1350" dirty="0">
+              <a:rPr lang="en-US" sz="1400" dirty="0">
                 <a:solidFill>
                   <a:srgbClr val="1B2733"/>
                 </a:solidFill>
@@ -13338,7 +13338,7 @@
               <a:buNone/>
             </a:pPr>
             <a:r>
-              <a:rPr lang="en-US" sz="1350" dirty="0">
+              <a:rPr lang="en-US" sz="1400" dirty="0">
                 <a:solidFill>
                   <a:srgbClr val="1B2733"/>
                 </a:solidFill>
@@ -13481,7 +13481,7 @@
               <a:buNone/>
             </a:pPr>
             <a:r>
-              <a:rPr lang="en-US" sz="1400" dirty="0">
+              <a:rPr lang="en-US" sz="1500" dirty="0">
                 <a:solidFill>
                   <a:srgbClr val="12B198"/>
                 </a:solidFill>
@@ -13549,7 +13549,7 @@
               <a:buNone/>
             </a:pPr>
             <a:r>
-              <a:rPr lang="en-US" sz="1350" dirty="0">
+              <a:rPr lang="en-US" sz="1400" dirty="0">
                 <a:solidFill>
                   <a:srgbClr val="1B2733"/>
                 </a:solidFill>
@@ -13595,7 +13595,7 @@
               <a:buNone/>
             </a:pPr>
             <a:r>
-              <a:rPr lang="en-US" sz="1350" dirty="0">
+              <a:rPr lang="en-US" sz="1400" dirty="0">
                 <a:solidFill>
                   <a:srgbClr val="1B2733"/>
                 </a:solidFill>
@@ -13641,7 +13641,7 @@
               <a:buNone/>
             </a:pPr>
             <a:r>
-              <a:rPr lang="en-US" sz="1350" dirty="0">
+              <a:rPr lang="en-US" sz="1400" dirty="0">
                 <a:solidFill>
                   <a:srgbClr val="1B2733"/>
                 </a:solidFill>
@@ -13687,7 +13687,7 @@
               <a:buNone/>
             </a:pPr>
             <a:r>
-              <a:rPr lang="en-US" sz="1350" dirty="0">
+              <a:rPr lang="en-US" sz="1400" dirty="0">
                 <a:solidFill>
                   <a:srgbClr val="1B2733"/>
                 </a:solidFill>
@@ -14179,7 +14179,7 @@
                 <a:ea typeface="Calibri" pitchFamily="34" charset="-122"/>
                 <a:cs typeface="Calibri" pitchFamily="34" charset="-120"/>
               </a:rPr>
-              <a:t>What You'll Learn　</a:t>
+              <a:t>What You'll Learn  </a:t>
             </a:r>
             <a:pPr indent="0" marL="0">
               <a:lnSpc>
@@ -14208,7 +14208,7 @@
               <a:buNone/>
             </a:pPr>
             <a:r>
-              <a:rPr lang="en-US" sz="1250" dirty="0">
+              <a:rPr lang="en-US" sz="1300" dirty="0">
                 <a:solidFill>
                   <a:srgbClr val="1B2733"/>
                 </a:solidFill>
@@ -14351,7 +14351,7 @@
               <a:buNone/>
             </a:pPr>
             <a:r>
-              <a:rPr lang="en-US" sz="1400" dirty="0">
+              <a:rPr lang="en-US" sz="1500" dirty="0">
                 <a:solidFill>
                   <a:srgbClr val="12B198"/>
                 </a:solidFill>
@@ -14419,7 +14419,7 @@
               <a:buNone/>
             </a:pPr>
             <a:r>
-              <a:rPr lang="en-US" sz="1350" dirty="0">
+              <a:rPr lang="en-US" sz="1400" dirty="0">
                 <a:solidFill>
                   <a:srgbClr val="1B2733"/>
                 </a:solidFill>
@@ -14465,7 +14465,7 @@
               <a:buNone/>
             </a:pPr>
             <a:r>
-              <a:rPr lang="en-US" sz="1350" dirty="0">
+              <a:rPr lang="en-US" sz="1400" dirty="0">
                 <a:solidFill>
                   <a:srgbClr val="1B2733"/>
                 </a:solidFill>
@@ -14511,7 +14511,7 @@
               <a:buNone/>
             </a:pPr>
             <a:r>
-              <a:rPr lang="en-US" sz="1350" dirty="0">
+              <a:rPr lang="en-US" sz="1400" dirty="0">
                 <a:solidFill>
                   <a:srgbClr val="1B2733"/>
                 </a:solidFill>
@@ -14557,7 +14557,7 @@
               <a:buNone/>
             </a:pPr>
             <a:r>
-              <a:rPr lang="en-US" sz="1350" dirty="0">
+              <a:rPr lang="en-US" sz="1400" dirty="0">
                 <a:solidFill>
                   <a:srgbClr val="1B2733"/>
                 </a:solidFill>
@@ -14700,7 +14700,7 @@
               <a:buNone/>
             </a:pPr>
             <a:r>
-              <a:rPr lang="en-US" sz="1400" dirty="0">
+              <a:rPr lang="en-US" sz="1500" dirty="0">
                 <a:solidFill>
                   <a:srgbClr val="12B198"/>
                 </a:solidFill>
@@ -14768,7 +14768,7 @@
               <a:buNone/>
             </a:pPr>
             <a:r>
-              <a:rPr lang="en-US" sz="1350" dirty="0">
+              <a:rPr lang="en-US" sz="1400" dirty="0">
                 <a:solidFill>
                   <a:srgbClr val="1B2733"/>
                 </a:solidFill>
@@ -14814,7 +14814,7 @@
               <a:buNone/>
             </a:pPr>
             <a:r>
-              <a:rPr lang="en-US" sz="1350" dirty="0">
+              <a:rPr lang="en-US" sz="1400" dirty="0">
                 <a:solidFill>
                   <a:srgbClr val="1B2733"/>
                 </a:solidFill>
@@ -14860,7 +14860,7 @@
               <a:buNone/>
             </a:pPr>
             <a:r>
-              <a:rPr lang="en-US" sz="1350" dirty="0">
+              <a:rPr lang="en-US" sz="1400" dirty="0">
                 <a:solidFill>
                   <a:srgbClr val="1B2733"/>
                 </a:solidFill>
@@ -14906,7 +14906,7 @@
               <a:buNone/>
             </a:pPr>
             <a:r>
-              <a:rPr lang="en-US" sz="1350" dirty="0">
+              <a:rPr lang="en-US" sz="1400" dirty="0">
                 <a:solidFill>
                   <a:srgbClr val="1B2733"/>
                 </a:solidFill>
@@ -15452,7 +15452,7 @@
               <a:buNone/>
             </a:pPr>
             <a:r>
-              <a:rPr lang="en-US" sz="1400" dirty="0">
+              <a:rPr lang="en-US" sz="1500" dirty="0">
                 <a:solidFill>
                   <a:srgbClr val="12B198"/>
                 </a:solidFill>
@@ -15520,7 +15520,7 @@
               <a:buNone/>
             </a:pPr>
             <a:r>
-              <a:rPr lang="en-US" sz="1350" dirty="0">
+              <a:rPr lang="en-US" sz="1400" dirty="0">
                 <a:solidFill>
                   <a:srgbClr val="1B2733"/>
                 </a:solidFill>
@@ -15566,7 +15566,7 @@
               <a:buNone/>
             </a:pPr>
             <a:r>
-              <a:rPr lang="en-US" sz="1350" dirty="0">
+              <a:rPr lang="en-US" sz="1400" dirty="0">
                 <a:solidFill>
                   <a:srgbClr val="1B2733"/>
                 </a:solidFill>
@@ -15612,7 +15612,7 @@
               <a:buNone/>
             </a:pPr>
             <a:r>
-              <a:rPr lang="en-US" sz="1350" dirty="0">
+              <a:rPr lang="en-US" sz="1400" dirty="0">
                 <a:solidFill>
                   <a:srgbClr val="1B2733"/>
                 </a:solidFill>
@@ -15658,7 +15658,7 @@
               <a:buNone/>
             </a:pPr>
             <a:r>
-              <a:rPr lang="en-US" sz="1350" dirty="0">
+              <a:rPr lang="en-US" sz="1400" dirty="0">
                 <a:solidFill>
                   <a:srgbClr val="1B2733"/>
                 </a:solidFill>
@@ -15801,7 +15801,7 @@
               <a:buNone/>
             </a:pPr>
             <a:r>
-              <a:rPr lang="en-US" sz="1400" dirty="0">
+              <a:rPr lang="en-US" sz="1500" dirty="0">
                 <a:solidFill>
                   <a:srgbClr val="12B198"/>
                 </a:solidFill>
@@ -15869,7 +15869,7 @@
               <a:buNone/>
             </a:pPr>
             <a:r>
-              <a:rPr lang="en-US" sz="1350" dirty="0">
+              <a:rPr lang="en-US" sz="1400" dirty="0">
                 <a:solidFill>
                   <a:srgbClr val="1B2733"/>
                 </a:solidFill>
@@ -15915,7 +15915,7 @@
               <a:buNone/>
             </a:pPr>
             <a:r>
-              <a:rPr lang="en-US" sz="1350" dirty="0">
+              <a:rPr lang="en-US" sz="1400" dirty="0">
                 <a:solidFill>
                   <a:srgbClr val="1B2733"/>
                 </a:solidFill>
@@ -15961,7 +15961,7 @@
               <a:buNone/>
             </a:pPr>
             <a:r>
-              <a:rPr lang="en-US" sz="1350" dirty="0">
+              <a:rPr lang="en-US" sz="1400" dirty="0">
                 <a:solidFill>
                   <a:srgbClr val="1B2733"/>
                 </a:solidFill>
@@ -16007,7 +16007,7 @@
               <a:buNone/>
             </a:pPr>
             <a:r>
-              <a:rPr lang="en-US" sz="1350" dirty="0">
+              <a:rPr lang="en-US" sz="1400" dirty="0">
                 <a:solidFill>
                   <a:srgbClr val="1B2733"/>
                 </a:solidFill>
